--- a/output/wordlabs-repair-3day.pptx
+++ b/output/wordlabs-repair-3day.pptx
@@ -4240,7 +4240,7 @@
                 <a:ea typeface="Calibri" pitchFamily="34" charset="-122"/>
                 <a:cs typeface="Calibri" pitchFamily="34" charset="-120"/>
               </a:rPr>
-              <a:t>"fix or make good again"</a:t>
+              <a:t>"fix or restore something broken"</a:t>
             </a:r>
             <a:endParaRPr lang="en-US" sz="2200" dirty="0"/>
           </a:p>
@@ -5288,7 +5288,7 @@
                 <a:ea typeface="Calibri" pitchFamily="34" charset="-122"/>
                 <a:cs typeface="Calibri" pitchFamily="34" charset="-120"/>
               </a:rPr>
-              <a:t>Word Labs  •  wordlabs.app  •  Root: 'repair' = fix or make good again</a:t>
+              <a:t>Word Labs  •  wordlabs.app  •  Root: 'repair' = fix or restore something broken</a:t>
             </a:r>
             <a:endParaRPr lang="en-US" sz="800" dirty="0"/>
           </a:p>
@@ -5928,7 +5928,7 @@
                 <a:ea typeface="Calibri" pitchFamily="34" charset="-122"/>
                 <a:cs typeface="Calibri" pitchFamily="34" charset="-120"/>
               </a:rPr>
-              <a:t>Word Labs  •  wordlabs.app  •  Root: 'repair' = fix or make good again</a:t>
+              <a:t>Word Labs  •  wordlabs.app  •  Root: 'repair' = fix or restore something broken</a:t>
             </a:r>
             <a:endParaRPr lang="en-US" sz="800" dirty="0"/>
           </a:p>
@@ -6071,7 +6071,7 @@
                 <a:ea typeface="Calibri" pitchFamily="34" charset="-122"/>
                 <a:cs typeface="Calibri" pitchFamily="34" charset="-120"/>
               </a:rPr>
-              <a:t> worked carefully, </a:t>
+              <a:t> worked carefully on the broken chair, and soon it was fully </a:t>
             </a:r>
             <a:pPr algn="l" indent="0" marL="0">
               <a:buNone/>
@@ -6088,7 +6088,7 @@
                 <a:ea typeface="Calibri" pitchFamily="34" charset="-122"/>
                 <a:cs typeface="Calibri" pitchFamily="34" charset="-120"/>
               </a:rPr>
-              <a:t>repairing</a:t>
+              <a:t>repaired</a:t>
             </a:r>
             <a:pPr algn="l" indent="0" marL="0">
               <a:buNone/>
@@ -6102,7 +6102,7 @@
                 <a:ea typeface="Calibri" pitchFamily="34" charset="-122"/>
                 <a:cs typeface="Calibri" pitchFamily="34" charset="-120"/>
               </a:rPr>
-              <a:t> the old clock so it would tick again.</a:t>
+              <a:t>.</a:t>
             </a:r>
             <a:endParaRPr lang="en-US" sz="1800" dirty="0"/>
           </a:p>
@@ -6385,7 +6385,7 @@
                 <a:ea typeface="Trebuchet MS" pitchFamily="34" charset="-122"/>
                 <a:cs typeface="Trebuchet MS" pitchFamily="34" charset="-120"/>
               </a:rPr>
-              <a:t>repairing</a:t>
+              <a:t>repaired</a:t>
             </a:r>
             <a:endParaRPr lang="en-US" sz="1400" dirty="0"/>
           </a:p>
@@ -6716,7 +6716,7 @@
                 <a:ea typeface="Calibri" pitchFamily="34" charset="-122"/>
                 <a:cs typeface="Calibri" pitchFamily="34" charset="-120"/>
               </a:rPr>
-              <a:t>Word Labs  •  wordlabs.app  •  Root: 'repair' = fix or make good again</a:t>
+              <a:t>Word Labs  •  wordlabs.app  •  Root: 'repair' = fix or restore something broken</a:t>
             </a:r>
             <a:endParaRPr lang="en-US" sz="800" dirty="0"/>
           </a:p>
@@ -7543,7 +7543,7 @@
                 <a:ea typeface="Calibri" pitchFamily="34" charset="-122"/>
                 <a:cs typeface="Calibri" pitchFamily="34" charset="-120"/>
               </a:rPr>
-              <a:t>Word Labs  •  wordlabs.app  •  Root: 'repair' = fix or make good again</a:t>
+              <a:t>Word Labs  •  wordlabs.app  •  Root: 'repair' = fix or restore something broken</a:t>
             </a:r>
             <a:endParaRPr lang="en-US" sz="800" dirty="0"/>
           </a:p>
@@ -7860,7 +7860,7 @@
                 <a:ea typeface="Calibri" pitchFamily="34" charset="-122"/>
                 <a:cs typeface="Calibri" pitchFamily="34" charset="-120"/>
               </a:rPr>
-              <a:t>to fix or restore</a:t>
+              <a:t>fix or restore</a:t>
             </a:r>
             <a:endParaRPr lang="en-US" sz="850" dirty="0"/>
           </a:p>
@@ -8528,7 +8528,7 @@
                 <a:ea typeface="Calibri" pitchFamily="34" charset="-122"/>
                 <a:cs typeface="Calibri" pitchFamily="34" charset="-120"/>
               </a:rPr>
-              <a:t>Word Labs  •  wordlabs.app  •  Root: 'repair' = fix or make good again</a:t>
+              <a:t>Word Labs  •  wordlabs.app  •  Root: 'repair' = fix or restore something broken</a:t>
             </a:r>
             <a:endParaRPr lang="en-US" sz="800" dirty="0"/>
           </a:p>
@@ -8845,7 +8845,7 @@
                 <a:ea typeface="Calibri" pitchFamily="34" charset="-122"/>
                 <a:cs typeface="Calibri" pitchFamily="34" charset="-120"/>
               </a:rPr>
-              <a:t>to fix or restore</a:t>
+              <a:t>fix or restore</a:t>
             </a:r>
             <a:endParaRPr lang="en-US" sz="850" dirty="0"/>
           </a:p>
@@ -9750,7 +9750,7 @@
                 <a:ea typeface="Calibri" pitchFamily="34" charset="-122"/>
                 <a:cs typeface="Calibri" pitchFamily="34" charset="-120"/>
               </a:rPr>
-              <a:t>Word Labs  •  wordlabs.app  •  Root: 'repair' = fix or make good again</a:t>
+              <a:t>Word Labs  •  wordlabs.app  •  Root: 'repair' = fix or restore something broken</a:t>
             </a:r>
             <a:endParaRPr lang="en-US" sz="800" dirty="0"/>
           </a:p>
@@ -10067,7 +10067,7 @@
                 <a:ea typeface="Calibri" pitchFamily="34" charset="-122"/>
                 <a:cs typeface="Calibri" pitchFamily="34" charset="-120"/>
               </a:rPr>
-              <a:t>to fix or restore</a:t>
+              <a:t>fix or restore</a:t>
             </a:r>
             <a:endParaRPr lang="en-US" sz="850" dirty="0"/>
           </a:p>
@@ -11263,7 +11263,7 @@
                 <a:ea typeface="Calibri" pitchFamily="34" charset="-122"/>
                 <a:cs typeface="Calibri" pitchFamily="34" charset="-120"/>
               </a:rPr>
-              <a:t>Word Labs  •  wordlabs.app  •  Root: 'repair' = fix or make good again</a:t>
+              <a:t>Word Labs  •  wordlabs.app  •  Root: 'repair' = fix or restore something broken</a:t>
             </a:r>
             <a:endParaRPr lang="en-US" sz="800" dirty="0"/>
           </a:p>
@@ -11402,7 +11402,7 @@
                 <a:ea typeface="Trebuchet MS" pitchFamily="34" charset="-122"/>
                 <a:cs typeface="Trebuchet MS" pitchFamily="34" charset="-120"/>
               </a:rPr>
-              <a:t>repairing</a:t>
+              <a:t>repaired</a:t>
             </a:r>
             <a:endParaRPr lang="en-US" sz="2800" dirty="0"/>
           </a:p>
@@ -12090,7 +12090,7 @@
                 <a:ea typeface="Calibri" pitchFamily="34" charset="-122"/>
                 <a:cs typeface="Calibri" pitchFamily="34" charset="-120"/>
               </a:rPr>
-              <a:t>Word Labs  •  wordlabs.app  •  Root: 'repair' = fix or make good again</a:t>
+              <a:t>Word Labs  •  wordlabs.app  •  Root: 'repair' = fix or restore something broken</a:t>
             </a:r>
             <a:endParaRPr lang="en-US" sz="800" dirty="0"/>
           </a:p>
@@ -12229,7 +12229,7 @@
                 <a:ea typeface="Trebuchet MS" pitchFamily="34" charset="-122"/>
                 <a:cs typeface="Trebuchet MS" pitchFamily="34" charset="-120"/>
               </a:rPr>
-              <a:t>repairing</a:t>
+              <a:t>repaired</a:t>
             </a:r>
             <a:endParaRPr lang="en-US" sz="2800" dirty="0"/>
           </a:p>
@@ -12407,7 +12407,7 @@
                 <a:ea typeface="Calibri" pitchFamily="34" charset="-122"/>
                 <a:cs typeface="Calibri" pitchFamily="34" charset="-120"/>
               </a:rPr>
-              <a:t>to fix or restore</a:t>
+              <a:t>fix or restore</a:t>
             </a:r>
             <a:endParaRPr lang="en-US" sz="850" dirty="0"/>
           </a:p>
@@ -12480,7 +12480,7 @@
                 <a:ea typeface="Trebuchet MS" pitchFamily="34" charset="-122"/>
                 <a:cs typeface="Trebuchet MS" pitchFamily="34" charset="-120"/>
               </a:rPr>
-              <a:t>ing</a:t>
+              <a:t>ed</a:t>
             </a:r>
             <a:endParaRPr lang="en-US" sz="1300" dirty="0"/>
           </a:p>
@@ -12519,7 +12519,7 @@
                 <a:ea typeface="Calibri" pitchFamily="34" charset="-122"/>
                 <a:cs typeface="Calibri" pitchFamily="34" charset="-120"/>
               </a:rPr>
-              <a:t>happening right now</a:t>
+              <a:t>in the past</a:t>
             </a:r>
             <a:endParaRPr lang="en-US" sz="850" dirty="0"/>
           </a:p>
@@ -13075,7 +13075,7 @@
                 <a:ea typeface="Calibri" pitchFamily="34" charset="-122"/>
                 <a:cs typeface="Calibri" pitchFamily="34" charset="-120"/>
               </a:rPr>
-              <a:t>Word Labs  •  wordlabs.app  •  Root: 'repair' = fix or make good again</a:t>
+              <a:t>Word Labs  •  wordlabs.app  •  Root: 'repair' = fix or restore something broken</a:t>
             </a:r>
             <a:endParaRPr lang="en-US" sz="800" dirty="0"/>
           </a:p>
@@ -13214,7 +13214,7 @@
                 <a:ea typeface="Trebuchet MS" pitchFamily="34" charset="-122"/>
                 <a:cs typeface="Trebuchet MS" pitchFamily="34" charset="-120"/>
               </a:rPr>
-              <a:t>repairing</a:t>
+              <a:t>repaired</a:t>
             </a:r>
             <a:endParaRPr lang="en-US" sz="2800" dirty="0"/>
           </a:p>
@@ -13392,7 +13392,7 @@
                 <a:ea typeface="Calibri" pitchFamily="34" charset="-122"/>
                 <a:cs typeface="Calibri" pitchFamily="34" charset="-120"/>
               </a:rPr>
-              <a:t>to fix or restore</a:t>
+              <a:t>fix or restore</a:t>
             </a:r>
             <a:endParaRPr lang="en-US" sz="850" dirty="0"/>
           </a:p>
@@ -13465,7 +13465,7 @@
                 <a:ea typeface="Trebuchet MS" pitchFamily="34" charset="-122"/>
                 <a:cs typeface="Trebuchet MS" pitchFamily="34" charset="-120"/>
               </a:rPr>
-              <a:t>ing</a:t>
+              <a:t>ed</a:t>
             </a:r>
             <a:endParaRPr lang="en-US" sz="1300" dirty="0"/>
           </a:p>
@@ -13504,7 +13504,7 @@
                 <a:ea typeface="Calibri" pitchFamily="34" charset="-122"/>
                 <a:cs typeface="Calibri" pitchFamily="34" charset="-120"/>
               </a:rPr>
-              <a:t>happening right now</a:t>
+              <a:t>in the past</a:t>
             </a:r>
             <a:endParaRPr lang="en-US" sz="850" dirty="0"/>
           </a:p>
@@ -13611,7 +13611,7 @@
         </p:nvSpPr>
         <p:spPr>
           <a:xfrm>
-            <a:off x="2313432" y="3364992"/>
+            <a:off x="2999232" y="3364992"/>
             <a:ext cx="1645920" cy="475488"/>
           </a:xfrm>
           <a:prstGeom prst="rect">
@@ -13638,7 +13638,7 @@
         </p:nvSpPr>
         <p:spPr>
           <a:xfrm>
-            <a:off x="2313432" y="3364992"/>
+            <a:off x="2999232" y="3364992"/>
             <a:ext cx="1645920" cy="475488"/>
           </a:xfrm>
           <a:prstGeom prst="rect">
@@ -13677,8 +13677,8 @@
         </p:nvSpPr>
         <p:spPr>
           <a:xfrm>
-            <a:off x="3959352" y="3364992"/>
-            <a:ext cx="411480" cy="475488"/>
+            <a:off x="4645152" y="3364992"/>
+            <a:ext cx="1097280" cy="475488"/>
           </a:xfrm>
           <a:prstGeom prst="rect">
             <a:avLst/>
@@ -13716,7 +13716,7 @@
         </p:nvSpPr>
         <p:spPr>
           <a:xfrm>
-            <a:off x="4370832" y="3364992"/>
+            <a:off x="5742432" y="3364992"/>
             <a:ext cx="1645920" cy="475488"/>
           </a:xfrm>
           <a:prstGeom prst="rect">
@@ -13743,7 +13743,7 @@
         </p:nvSpPr>
         <p:spPr>
           <a:xfrm>
-            <a:off x="4370832" y="3364992"/>
+            <a:off x="5742432" y="3364992"/>
             <a:ext cx="1645920" cy="475488"/>
           </a:xfrm>
           <a:prstGeom prst="rect">
@@ -13768,7 +13768,7 @@
                 <a:ea typeface="Trebuchet MS" pitchFamily="34" charset="-122"/>
                 <a:cs typeface="Trebuchet MS" pitchFamily="34" charset="-120"/>
               </a:rPr>
-              <a:t>pair</a:t>
+              <a:t>paired</a:t>
             </a:r>
             <a:endParaRPr lang="en-US" sz="1400" dirty="0"/>
           </a:p>
@@ -13776,119 +13776,80 @@
       </p:sp>
       <p:sp>
         <p:nvSpPr>
-          <p:cNvPr id="30" name="Text 28"/>
-          <p:cNvSpPr/>
-          <p:nvPr/>
-        </p:nvSpPr>
-        <p:spPr>
-          <a:xfrm>
-            <a:off x="6016752" y="3364992"/>
-            <a:ext cx="411480" cy="475488"/>
-          </a:xfrm>
-          <a:prstGeom prst="rect">
-            <a:avLst/>
-          </a:prstGeom>
-          <a:noFill/>
-          <a:ln/>
-        </p:spPr>
-        <p:txBody>
-          <a:bodyPr wrap="square" lIns="0" tIns="0" rIns="0" bIns="0" rtlCol="0" anchor="ctr"/>
-          <a:lstStyle/>
-          <a:p>
-            <a:pPr algn="ctr" indent="0" marL="0">
-              <a:buNone/>
-            </a:pPr>
-            <a:r>
-              <a:rPr lang="en-US" sz="1600" b="1" dirty="0">
-                <a:solidFill>
-                  <a:srgbClr val="0D9488"/>
+          <p:cNvPr id="30" name="Shape 28"/>
+          <p:cNvSpPr/>
+          <p:nvPr/>
+        </p:nvSpPr>
+        <p:spPr>
+          <a:xfrm>
+            <a:off x="365760" y="4096512"/>
+            <a:ext cx="1371600" cy="804672"/>
+          </a:xfrm>
+          <a:prstGeom prst="rect">
+            <a:avLst>
+              <a:gd name="adj" fmla="val 6818"/>
+            </a:avLst>
+          </a:prstGeom>
+          <a:solidFill>
+            <a:srgbClr val="E2E8F0"/>
+          </a:solidFill>
+          <a:ln w="12700">
+            <a:solidFill>
+              <a:srgbClr val="E2E8F0"/>
+            </a:solidFill>
+            <a:prstDash val="solid"/>
+          </a:ln>
+        </p:spPr>
+      </p:sp>
+      <p:sp>
+        <p:nvSpPr>
+          <p:cNvPr id="31" name="Text 29"/>
+          <p:cNvSpPr/>
+          <p:nvPr/>
+        </p:nvSpPr>
+        <p:spPr>
+          <a:xfrm>
+            <a:off x="365760" y="4096512"/>
+            <a:ext cx="1371600" cy="804672"/>
+          </a:xfrm>
+          <a:prstGeom prst="rect">
+            <a:avLst/>
+          </a:prstGeom>
+          <a:noFill/>
+          <a:ln/>
+        </p:spPr>
+        <p:txBody>
+          <a:bodyPr wrap="square" lIns="0" tIns="0" rIns="0" bIns="0" rtlCol="0" anchor="ctr"/>
+          <a:lstStyle/>
+          <a:p>
+            <a:pPr algn="ctr" indent="0" marL="0">
+              <a:buNone/>
+            </a:pPr>
+            <a:r>
+              <a:rPr lang="en-US" sz="1100" b="1" dirty="0">
+                <a:solidFill>
+                  <a:srgbClr val="475569"/>
                 </a:solidFill>
                 <a:latin typeface="Trebuchet MS" pitchFamily="34" charset="0"/>
                 <a:ea typeface="Trebuchet MS" pitchFamily="34" charset="-122"/>
                 <a:cs typeface="Trebuchet MS" pitchFamily="34" charset="-120"/>
               </a:rPr>
-              <a:t>·</a:t>
-            </a:r>
-            <a:endParaRPr lang="en-US" sz="1600" dirty="0"/>
-          </a:p>
-        </p:txBody>
-      </p:sp>
-      <p:sp>
-        <p:nvSpPr>
-          <p:cNvPr id="31" name="Shape 29"/>
-          <p:cNvSpPr/>
-          <p:nvPr/>
-        </p:nvSpPr>
-        <p:spPr>
-          <a:xfrm>
-            <a:off x="6428232" y="3364992"/>
-            <a:ext cx="1645920" cy="475488"/>
-          </a:xfrm>
-          <a:prstGeom prst="rect">
-            <a:avLst>
-              <a:gd name="adj" fmla="val 9615"/>
-            </a:avLst>
-          </a:prstGeom>
-          <a:solidFill>
-            <a:srgbClr val="FFFFFF"/>
-          </a:solidFill>
-          <a:ln w="12700">
-            <a:solidFill>
-              <a:srgbClr val="0D9488"/>
-            </a:solidFill>
-            <a:prstDash val="solid"/>
-          </a:ln>
-        </p:spPr>
-      </p:sp>
-      <p:sp>
-        <p:nvSpPr>
-          <p:cNvPr id="32" name="Text 30"/>
-          <p:cNvSpPr/>
-          <p:nvPr/>
-        </p:nvSpPr>
-        <p:spPr>
-          <a:xfrm>
-            <a:off x="6428232" y="3364992"/>
-            <a:ext cx="1645920" cy="475488"/>
-          </a:xfrm>
-          <a:prstGeom prst="rect">
-            <a:avLst/>
-          </a:prstGeom>
-          <a:noFill/>
-          <a:ln/>
-        </p:spPr>
-        <p:txBody>
-          <a:bodyPr wrap="square" lIns="0" tIns="0" rIns="0" bIns="0" rtlCol="0" anchor="ctr"/>
-          <a:lstStyle/>
-          <a:p>
-            <a:pPr algn="ctr" indent="0" marL="0">
-              <a:buNone/>
-            </a:pPr>
-            <a:r>
-              <a:rPr lang="en-US" sz="1400" b="1" dirty="0">
-                <a:solidFill>
-                  <a:srgbClr val="0D9488"/>
-                </a:solidFill>
-                <a:latin typeface="Trebuchet MS" pitchFamily="34" charset="0"/>
-                <a:ea typeface="Trebuchet MS" pitchFamily="34" charset="-122"/>
-                <a:cs typeface="Trebuchet MS" pitchFamily="34" charset="-120"/>
-              </a:rPr>
-              <a:t>ing</a:t>
-            </a:r>
-            <a:endParaRPr lang="en-US" sz="1400" dirty="0"/>
-          </a:p>
-        </p:txBody>
-      </p:sp>
-      <p:sp>
-        <p:nvSpPr>
-          <p:cNvPr id="33" name="Shape 31"/>
-          <p:cNvSpPr/>
-          <p:nvPr/>
-        </p:nvSpPr>
-        <p:spPr>
-          <a:xfrm>
-            <a:off x="365760" y="4096512"/>
-            <a:ext cx="1371600" cy="804672"/>
+              <a:t>Phonemes</a:t>
+            </a:r>
+            <a:endParaRPr lang="en-US" sz="1100" dirty="0"/>
+          </a:p>
+        </p:txBody>
+      </p:sp>
+      <p:sp>
+        <p:nvSpPr>
+          <p:cNvPr id="32" name="Shape 30"/>
+          <p:cNvSpPr/>
+          <p:nvPr/>
+        </p:nvSpPr>
+        <p:spPr>
+          <a:xfrm>
+            <a:off x="1874520" y="4096512"/>
+            <a:ext cx="6903720" cy="804672"/>
           </a:xfrm>
           <a:prstGeom prst="rect">
             <a:avLst>
@@ -13896,85 +13857,19 @@
             </a:avLst>
           </a:prstGeom>
           <a:solidFill>
-            <a:srgbClr val="E2E8F0"/>
+            <a:srgbClr val="F8FAFC"/>
           </a:solidFill>
           <a:ln w="12700">
             <a:solidFill>
               <a:srgbClr val="E2E8F0"/>
             </a:solidFill>
-            <a:prstDash val="solid"/>
-          </a:ln>
-        </p:spPr>
-      </p:sp>
-      <p:sp>
-        <p:nvSpPr>
-          <p:cNvPr id="34" name="Text 32"/>
-          <p:cNvSpPr/>
-          <p:nvPr/>
-        </p:nvSpPr>
-        <p:spPr>
-          <a:xfrm>
-            <a:off x="365760" y="4096512"/>
-            <a:ext cx="1371600" cy="804672"/>
-          </a:xfrm>
-          <a:prstGeom prst="rect">
-            <a:avLst/>
-          </a:prstGeom>
-          <a:noFill/>
-          <a:ln/>
-        </p:spPr>
-        <p:txBody>
-          <a:bodyPr wrap="square" lIns="0" tIns="0" rIns="0" bIns="0" rtlCol="0" anchor="ctr"/>
-          <a:lstStyle/>
-          <a:p>
-            <a:pPr algn="ctr" indent="0" marL="0">
-              <a:buNone/>
-            </a:pPr>
-            <a:r>
-              <a:rPr lang="en-US" sz="1100" b="1" dirty="0">
-                <a:solidFill>
-                  <a:srgbClr val="475569"/>
-                </a:solidFill>
-                <a:latin typeface="Trebuchet MS" pitchFamily="34" charset="0"/>
-                <a:ea typeface="Trebuchet MS" pitchFamily="34" charset="-122"/>
-                <a:cs typeface="Trebuchet MS" pitchFamily="34" charset="-120"/>
-              </a:rPr>
-              <a:t>Phonemes</a:t>
-            </a:r>
-            <a:endParaRPr lang="en-US" sz="1100" dirty="0"/>
-          </a:p>
-        </p:txBody>
-      </p:sp>
-      <p:sp>
-        <p:nvSpPr>
-          <p:cNvPr id="35" name="Shape 33"/>
-          <p:cNvSpPr/>
-          <p:nvPr/>
-        </p:nvSpPr>
-        <p:spPr>
-          <a:xfrm>
-            <a:off x="1874520" y="4096512"/>
-            <a:ext cx="6903720" cy="804672"/>
-          </a:xfrm>
-          <a:prstGeom prst="rect">
-            <a:avLst>
-              <a:gd name="adj" fmla="val 6818"/>
-            </a:avLst>
-          </a:prstGeom>
-          <a:solidFill>
-            <a:srgbClr val="F8FAFC"/>
-          </a:solidFill>
-          <a:ln w="12700">
-            <a:solidFill>
-              <a:srgbClr val="E2E8F0"/>
-            </a:solidFill>
             <a:prstDash val="dash"/>
           </a:ln>
         </p:spPr>
       </p:sp>
       <p:sp>
         <p:nvSpPr>
-          <p:cNvPr id="36" name="Text 34"/>
+          <p:cNvPr id="33" name="Text 31"/>
           <p:cNvSpPr/>
           <p:nvPr/>
         </p:nvSpPr>
@@ -14206,7 +14101,7 @@
                 <a:ea typeface="Calibri" pitchFamily="34" charset="-122"/>
                 <a:cs typeface="Calibri" pitchFamily="34" charset="-120"/>
               </a:rPr>
-              <a:t>Root 'repair' — fix or make good again</a:t>
+              <a:t>Root 'repair' — fix or restore something broken</a:t>
             </a:r>
             <a:endParaRPr lang="en-US" sz="1600" dirty="0"/>
           </a:p>
@@ -14562,7 +14457,7 @@
                 <a:ea typeface="Calibri" pitchFamily="34" charset="-122"/>
                 <a:cs typeface="Calibri" pitchFamily="34" charset="-120"/>
               </a:rPr>
-              <a:t>Word Labs  •  wordlabs.app  •  Root: 'repair' = fix or make good again</a:t>
+              <a:t>Word Labs  •  wordlabs.app  •  Root: 'repair' = fix or restore something broken</a:t>
             </a:r>
             <a:endParaRPr lang="en-US" sz="800" dirty="0"/>
           </a:p>
@@ -14701,7 +14596,7 @@
                 <a:ea typeface="Trebuchet MS" pitchFamily="34" charset="-122"/>
                 <a:cs typeface="Trebuchet MS" pitchFamily="34" charset="-120"/>
               </a:rPr>
-              <a:t>repairing</a:t>
+              <a:t>repaired</a:t>
             </a:r>
             <a:endParaRPr lang="en-US" sz="2800" dirty="0"/>
           </a:p>
@@ -14879,7 +14774,7 @@
                 <a:ea typeface="Calibri" pitchFamily="34" charset="-122"/>
                 <a:cs typeface="Calibri" pitchFamily="34" charset="-120"/>
               </a:rPr>
-              <a:t>to fix or restore</a:t>
+              <a:t>fix or restore</a:t>
             </a:r>
             <a:endParaRPr lang="en-US" sz="850" dirty="0"/>
           </a:p>
@@ -14952,7 +14847,7 @@
                 <a:ea typeface="Trebuchet MS" pitchFamily="34" charset="-122"/>
                 <a:cs typeface="Trebuchet MS" pitchFamily="34" charset="-120"/>
               </a:rPr>
-              <a:t>ing</a:t>
+              <a:t>ed</a:t>
             </a:r>
             <a:endParaRPr lang="en-US" sz="1300" dirty="0"/>
           </a:p>
@@ -14991,7 +14886,7 @@
                 <a:ea typeface="Calibri" pitchFamily="34" charset="-122"/>
                 <a:cs typeface="Calibri" pitchFamily="34" charset="-120"/>
               </a:rPr>
-              <a:t>happening right now</a:t>
+              <a:t>in the past</a:t>
             </a:r>
             <a:endParaRPr lang="en-US" sz="850" dirty="0"/>
           </a:p>
@@ -15098,7 +14993,7 @@
         </p:nvSpPr>
         <p:spPr>
           <a:xfrm>
-            <a:off x="2313432" y="3364992"/>
+            <a:off x="2999232" y="3364992"/>
             <a:ext cx="1645920" cy="475488"/>
           </a:xfrm>
           <a:prstGeom prst="rect">
@@ -15125,7 +15020,7 @@
         </p:nvSpPr>
         <p:spPr>
           <a:xfrm>
-            <a:off x="2313432" y="3364992"/>
+            <a:off x="2999232" y="3364992"/>
             <a:ext cx="1645920" cy="475488"/>
           </a:xfrm>
           <a:prstGeom prst="rect">
@@ -15164,8 +15059,8 @@
         </p:nvSpPr>
         <p:spPr>
           <a:xfrm>
-            <a:off x="3959352" y="3364992"/>
-            <a:ext cx="411480" cy="475488"/>
+            <a:off x="4645152" y="3364992"/>
+            <a:ext cx="1097280" cy="475488"/>
           </a:xfrm>
           <a:prstGeom prst="rect">
             <a:avLst/>
@@ -15203,7 +15098,7 @@
         </p:nvSpPr>
         <p:spPr>
           <a:xfrm>
-            <a:off x="4370832" y="3364992"/>
+            <a:off x="5742432" y="3364992"/>
             <a:ext cx="1645920" cy="475488"/>
           </a:xfrm>
           <a:prstGeom prst="rect">
@@ -15230,7 +15125,7 @@
         </p:nvSpPr>
         <p:spPr>
           <a:xfrm>
-            <a:off x="4370832" y="3364992"/>
+            <a:off x="5742432" y="3364992"/>
             <a:ext cx="1645920" cy="475488"/>
           </a:xfrm>
           <a:prstGeom prst="rect">
@@ -15255,7 +15150,7 @@
                 <a:ea typeface="Trebuchet MS" pitchFamily="34" charset="-122"/>
                 <a:cs typeface="Trebuchet MS" pitchFamily="34" charset="-120"/>
               </a:rPr>
-              <a:t>pair</a:t>
+              <a:t>paired</a:t>
             </a:r>
             <a:endParaRPr lang="en-US" sz="1400" dirty="0"/>
           </a:p>
@@ -15263,211 +15158,238 @@
       </p:sp>
       <p:sp>
         <p:nvSpPr>
-          <p:cNvPr id="30" name="Text 28"/>
-          <p:cNvSpPr/>
-          <p:nvPr/>
-        </p:nvSpPr>
-        <p:spPr>
-          <a:xfrm>
-            <a:off x="6016752" y="3364992"/>
-            <a:ext cx="411480" cy="475488"/>
-          </a:xfrm>
-          <a:prstGeom prst="rect">
-            <a:avLst/>
-          </a:prstGeom>
-          <a:noFill/>
-          <a:ln/>
-        </p:spPr>
-        <p:txBody>
-          <a:bodyPr wrap="square" lIns="0" tIns="0" rIns="0" bIns="0" rtlCol="0" anchor="ctr"/>
-          <a:lstStyle/>
-          <a:p>
-            <a:pPr algn="ctr" indent="0" marL="0">
-              <a:buNone/>
-            </a:pPr>
-            <a:r>
-              <a:rPr lang="en-US" sz="1600" b="1" dirty="0">
-                <a:solidFill>
-                  <a:srgbClr val="0D9488"/>
+          <p:cNvPr id="30" name="Shape 28"/>
+          <p:cNvSpPr/>
+          <p:nvPr/>
+        </p:nvSpPr>
+        <p:spPr>
+          <a:xfrm>
+            <a:off x="365760" y="4096512"/>
+            <a:ext cx="1371600" cy="804672"/>
+          </a:xfrm>
+          <a:prstGeom prst="rect">
+            <a:avLst>
+              <a:gd name="adj" fmla="val 6818"/>
+            </a:avLst>
+          </a:prstGeom>
+          <a:solidFill>
+            <a:srgbClr val="E2E8F0"/>
+          </a:solidFill>
+          <a:ln w="12700">
+            <a:solidFill>
+              <a:srgbClr val="E2E8F0"/>
+            </a:solidFill>
+            <a:prstDash val="solid"/>
+          </a:ln>
+        </p:spPr>
+      </p:sp>
+      <p:sp>
+        <p:nvSpPr>
+          <p:cNvPr id="31" name="Text 29"/>
+          <p:cNvSpPr/>
+          <p:nvPr/>
+        </p:nvSpPr>
+        <p:spPr>
+          <a:xfrm>
+            <a:off x="365760" y="4096512"/>
+            <a:ext cx="1371600" cy="804672"/>
+          </a:xfrm>
+          <a:prstGeom prst="rect">
+            <a:avLst/>
+          </a:prstGeom>
+          <a:noFill/>
+          <a:ln/>
+        </p:spPr>
+        <p:txBody>
+          <a:bodyPr wrap="square" lIns="0" tIns="0" rIns="0" bIns="0" rtlCol="0" anchor="ctr"/>
+          <a:lstStyle/>
+          <a:p>
+            <a:pPr algn="ctr" indent="0" marL="0">
+              <a:buNone/>
+            </a:pPr>
+            <a:r>
+              <a:rPr lang="en-US" sz="1100" b="1" dirty="0">
+                <a:solidFill>
+                  <a:srgbClr val="475569"/>
                 </a:solidFill>
                 <a:latin typeface="Trebuchet MS" pitchFamily="34" charset="0"/>
                 <a:ea typeface="Trebuchet MS" pitchFamily="34" charset="-122"/>
                 <a:cs typeface="Trebuchet MS" pitchFamily="34" charset="-120"/>
               </a:rPr>
-              <a:t>·</a:t>
-            </a:r>
-            <a:endParaRPr lang="en-US" sz="1600" dirty="0"/>
-          </a:p>
-        </p:txBody>
-      </p:sp>
-      <p:sp>
-        <p:nvSpPr>
-          <p:cNvPr id="31" name="Shape 29"/>
-          <p:cNvSpPr/>
-          <p:nvPr/>
-        </p:nvSpPr>
-        <p:spPr>
-          <a:xfrm>
-            <a:off x="6428232" y="3364992"/>
-            <a:ext cx="1645920" cy="475488"/>
+              <a:t>Phonemes</a:t>
+            </a:r>
+            <a:endParaRPr lang="en-US" sz="1100" dirty="0"/>
+          </a:p>
+        </p:txBody>
+      </p:sp>
+      <p:sp>
+        <p:nvSpPr>
+          <p:cNvPr id="32" name="Shape 30"/>
+          <p:cNvSpPr/>
+          <p:nvPr/>
+        </p:nvSpPr>
+        <p:spPr>
+          <a:xfrm>
+            <a:off x="1874520" y="4096512"/>
+            <a:ext cx="6903720" cy="658368"/>
           </a:xfrm>
           <a:prstGeom prst="rect">
             <a:avLst>
-              <a:gd name="adj" fmla="val 9615"/>
+              <a:gd name="adj" fmla="val 8333"/>
             </a:avLst>
           </a:prstGeom>
           <a:solidFill>
+            <a:srgbClr val="FCE7F3"/>
+          </a:solidFill>
+          <a:ln w="12700">
+            <a:solidFill>
+              <a:srgbClr val="DB2777"/>
+            </a:solidFill>
+            <a:prstDash val="solid"/>
+          </a:ln>
+        </p:spPr>
+      </p:sp>
+      <p:sp>
+        <p:nvSpPr>
+          <p:cNvPr id="33" name="Shape 31"/>
+          <p:cNvSpPr/>
+          <p:nvPr/>
+        </p:nvSpPr>
+        <p:spPr>
+          <a:xfrm>
+            <a:off x="2427732" y="4169664"/>
+            <a:ext cx="685800" cy="475488"/>
+          </a:xfrm>
+          <a:prstGeom prst="rect">
+            <a:avLst>
+              <a:gd name="adj" fmla="val 7692"/>
+            </a:avLst>
+          </a:prstGeom>
+          <a:solidFill>
             <a:srgbClr val="FFFFFF"/>
           </a:solidFill>
           <a:ln w="12700">
             <a:solidFill>
-              <a:srgbClr val="0D9488"/>
-            </a:solidFill>
-            <a:prstDash val="solid"/>
-          </a:ln>
-        </p:spPr>
-      </p:sp>
-      <p:sp>
-        <p:nvSpPr>
-          <p:cNvPr id="32" name="Text 30"/>
-          <p:cNvSpPr/>
-          <p:nvPr/>
-        </p:nvSpPr>
-        <p:spPr>
-          <a:xfrm>
-            <a:off x="6428232" y="3364992"/>
-            <a:ext cx="1645920" cy="475488"/>
-          </a:xfrm>
-          <a:prstGeom prst="rect">
-            <a:avLst/>
-          </a:prstGeom>
-          <a:noFill/>
-          <a:ln/>
-        </p:spPr>
-        <p:txBody>
-          <a:bodyPr wrap="square" lIns="0" tIns="0" rIns="0" bIns="0" rtlCol="0" anchor="ctr"/>
-          <a:lstStyle/>
-          <a:p>
-            <a:pPr algn="ctr" indent="0" marL="0">
-              <a:buNone/>
-            </a:pPr>
-            <a:r>
-              <a:rPr lang="en-US" sz="1400" b="1" dirty="0">
-                <a:solidFill>
-                  <a:srgbClr val="0D9488"/>
+              <a:srgbClr val="DB2777"/>
+            </a:solidFill>
+            <a:prstDash val="solid"/>
+          </a:ln>
+        </p:spPr>
+      </p:sp>
+      <p:sp>
+        <p:nvSpPr>
+          <p:cNvPr id="34" name="Text 32"/>
+          <p:cNvSpPr/>
+          <p:nvPr/>
+        </p:nvSpPr>
+        <p:spPr>
+          <a:xfrm>
+            <a:off x="2427732" y="4169664"/>
+            <a:ext cx="685800" cy="475488"/>
+          </a:xfrm>
+          <a:prstGeom prst="rect">
+            <a:avLst/>
+          </a:prstGeom>
+          <a:noFill/>
+          <a:ln/>
+        </p:spPr>
+        <p:txBody>
+          <a:bodyPr wrap="square" lIns="0" tIns="0" rIns="0" bIns="0" rtlCol="0" anchor="ctr"/>
+          <a:lstStyle/>
+          <a:p>
+            <a:pPr algn="ctr" indent="0" marL="0">
+              <a:buNone/>
+            </a:pPr>
+            <a:r>
+              <a:rPr lang="en-US" sz="900" b="1" dirty="0">
+                <a:solidFill>
+                  <a:srgbClr val="9D174D"/>
                 </a:solidFill>
                 <a:latin typeface="Trebuchet MS" pitchFamily="34" charset="0"/>
                 <a:ea typeface="Trebuchet MS" pitchFamily="34" charset="-122"/>
                 <a:cs typeface="Trebuchet MS" pitchFamily="34" charset="-120"/>
               </a:rPr>
-              <a:t>ing</a:t>
-            </a:r>
-            <a:endParaRPr lang="en-US" sz="1400" dirty="0"/>
-          </a:p>
-        </p:txBody>
-      </p:sp>
-      <p:sp>
-        <p:nvSpPr>
-          <p:cNvPr id="33" name="Shape 31"/>
-          <p:cNvSpPr/>
-          <p:nvPr/>
-        </p:nvSpPr>
-        <p:spPr>
-          <a:xfrm>
-            <a:off x="365760" y="4096512"/>
-            <a:ext cx="1371600" cy="804672"/>
+              <a:t>r</a:t>
+            </a:r>
+            <a:endParaRPr lang="en-US" sz="900" dirty="0"/>
+          </a:p>
+        </p:txBody>
+      </p:sp>
+      <p:sp>
+        <p:nvSpPr>
+          <p:cNvPr id="35" name="Shape 33"/>
+          <p:cNvSpPr/>
+          <p:nvPr/>
+        </p:nvSpPr>
+        <p:spPr>
+          <a:xfrm>
+            <a:off x="3639312" y="4169664"/>
+            <a:ext cx="685800" cy="475488"/>
           </a:xfrm>
           <a:prstGeom prst="rect">
             <a:avLst>
-              <a:gd name="adj" fmla="val 6818"/>
+              <a:gd name="adj" fmla="val 7692"/>
             </a:avLst>
           </a:prstGeom>
           <a:solidFill>
-            <a:srgbClr val="E2E8F0"/>
-          </a:solidFill>
-          <a:ln w="12700">
-            <a:solidFill>
-              <a:srgbClr val="E2E8F0"/>
-            </a:solidFill>
-            <a:prstDash val="solid"/>
-          </a:ln>
-        </p:spPr>
-      </p:sp>
-      <p:sp>
-        <p:nvSpPr>
-          <p:cNvPr id="34" name="Text 32"/>
-          <p:cNvSpPr/>
-          <p:nvPr/>
-        </p:nvSpPr>
-        <p:spPr>
-          <a:xfrm>
-            <a:off x="365760" y="4096512"/>
-            <a:ext cx="1371600" cy="804672"/>
-          </a:xfrm>
-          <a:prstGeom prst="rect">
-            <a:avLst/>
-          </a:prstGeom>
-          <a:noFill/>
-          <a:ln/>
-        </p:spPr>
-        <p:txBody>
-          <a:bodyPr wrap="square" lIns="0" tIns="0" rIns="0" bIns="0" rtlCol="0" anchor="ctr"/>
-          <a:lstStyle/>
-          <a:p>
-            <a:pPr algn="ctr" indent="0" marL="0">
-              <a:buNone/>
-            </a:pPr>
-            <a:r>
-              <a:rPr lang="en-US" sz="1100" b="1" dirty="0">
-                <a:solidFill>
-                  <a:srgbClr val="475569"/>
+            <a:srgbClr val="FFFFFF"/>
+          </a:solidFill>
+          <a:ln w="12700">
+            <a:solidFill>
+              <a:srgbClr val="DB2777"/>
+            </a:solidFill>
+            <a:prstDash val="solid"/>
+          </a:ln>
+        </p:spPr>
+      </p:sp>
+      <p:sp>
+        <p:nvSpPr>
+          <p:cNvPr id="36" name="Text 34"/>
+          <p:cNvSpPr/>
+          <p:nvPr/>
+        </p:nvSpPr>
+        <p:spPr>
+          <a:xfrm>
+            <a:off x="3639312" y="4169664"/>
+            <a:ext cx="685800" cy="475488"/>
+          </a:xfrm>
+          <a:prstGeom prst="rect">
+            <a:avLst/>
+          </a:prstGeom>
+          <a:noFill/>
+          <a:ln/>
+        </p:spPr>
+        <p:txBody>
+          <a:bodyPr wrap="square" lIns="0" tIns="0" rIns="0" bIns="0" rtlCol="0" anchor="ctr"/>
+          <a:lstStyle/>
+          <a:p>
+            <a:pPr algn="ctr" indent="0" marL="0">
+              <a:buNone/>
+            </a:pPr>
+            <a:r>
+              <a:rPr lang="en-US" sz="900" b="1" dirty="0">
+                <a:solidFill>
+                  <a:srgbClr val="9D174D"/>
                 </a:solidFill>
                 <a:latin typeface="Trebuchet MS" pitchFamily="34" charset="0"/>
                 <a:ea typeface="Trebuchet MS" pitchFamily="34" charset="-122"/>
                 <a:cs typeface="Trebuchet MS" pitchFamily="34" charset="-120"/>
               </a:rPr>
-              <a:t>Phonemes</a:t>
-            </a:r>
-            <a:endParaRPr lang="en-US" sz="1100" dirty="0"/>
-          </a:p>
-        </p:txBody>
-      </p:sp>
-      <p:sp>
-        <p:nvSpPr>
-          <p:cNvPr id="35" name="Shape 33"/>
-          <p:cNvSpPr/>
-          <p:nvPr/>
-        </p:nvSpPr>
-        <p:spPr>
-          <a:xfrm>
-            <a:off x="1874520" y="4096512"/>
-            <a:ext cx="6903720" cy="658368"/>
-          </a:xfrm>
-          <a:prstGeom prst="rect">
-            <a:avLst>
-              <a:gd name="adj" fmla="val 8333"/>
-            </a:avLst>
-          </a:prstGeom>
-          <a:solidFill>
-            <a:srgbClr val="FCE7F3"/>
-          </a:solidFill>
-          <a:ln w="12700">
-            <a:solidFill>
-              <a:srgbClr val="DB2777"/>
-            </a:solidFill>
-            <a:prstDash val="solid"/>
-          </a:ln>
-        </p:spPr>
-      </p:sp>
-      <p:sp>
-        <p:nvSpPr>
-          <p:cNvPr id="36" name="Shape 34"/>
-          <p:cNvSpPr/>
-          <p:nvPr/>
-        </p:nvSpPr>
-        <p:spPr>
-          <a:xfrm>
-            <a:off x="2427732" y="4169664"/>
+              <a:t>e</a:t>
+            </a:r>
+            <a:endParaRPr lang="en-US" sz="900" dirty="0"/>
+          </a:p>
+        </p:txBody>
+      </p:sp>
+      <p:sp>
+        <p:nvSpPr>
+          <p:cNvPr id="37" name="Shape 35"/>
+          <p:cNvSpPr/>
+          <p:nvPr/>
+        </p:nvSpPr>
+        <p:spPr>
+          <a:xfrm>
+            <a:off x="4850892" y="4169664"/>
             <a:ext cx="685800" cy="475488"/>
           </a:xfrm>
           <a:prstGeom prst="rect">
@@ -15488,13 +15410,13 @@
       </p:sp>
       <p:sp>
         <p:nvSpPr>
-          <p:cNvPr id="37" name="Text 35"/>
-          <p:cNvSpPr/>
-          <p:nvPr/>
-        </p:nvSpPr>
-        <p:spPr>
-          <a:xfrm>
-            <a:off x="2427732" y="4169664"/>
+          <p:cNvPr id="38" name="Text 36"/>
+          <p:cNvSpPr/>
+          <p:nvPr/>
+        </p:nvSpPr>
+        <p:spPr>
+          <a:xfrm>
+            <a:off x="4850892" y="4169664"/>
             <a:ext cx="685800" cy="475488"/>
           </a:xfrm>
           <a:prstGeom prst="rect">
@@ -15519,7 +15441,7 @@
                 <a:ea typeface="Trebuchet MS" pitchFamily="34" charset="-122"/>
                 <a:cs typeface="Trebuchet MS" pitchFamily="34" charset="-120"/>
               </a:rPr>
-              <a:t>r</a:t>
+              <a:t>p</a:t>
             </a:r>
             <a:endParaRPr lang="en-US" sz="900" dirty="0"/>
           </a:p>
@@ -15527,13 +15449,13 @@
       </p:sp>
       <p:sp>
         <p:nvSpPr>
-          <p:cNvPr id="38" name="Shape 36"/>
-          <p:cNvSpPr/>
-          <p:nvPr/>
-        </p:nvSpPr>
-        <p:spPr>
-          <a:xfrm>
-            <a:off x="3639312" y="4169664"/>
+          <p:cNvPr id="39" name="Shape 37"/>
+          <p:cNvSpPr/>
+          <p:nvPr/>
+        </p:nvSpPr>
+        <p:spPr>
+          <a:xfrm>
+            <a:off x="6062472" y="4169664"/>
             <a:ext cx="685800" cy="475488"/>
           </a:xfrm>
           <a:prstGeom prst="rect">
@@ -15554,13 +15476,13 @@
       </p:sp>
       <p:sp>
         <p:nvSpPr>
-          <p:cNvPr id="39" name="Text 37"/>
-          <p:cNvSpPr/>
-          <p:nvPr/>
-        </p:nvSpPr>
-        <p:spPr>
-          <a:xfrm>
-            <a:off x="3639312" y="4169664"/>
+          <p:cNvPr id="40" name="Text 38"/>
+          <p:cNvSpPr/>
+          <p:nvPr/>
+        </p:nvSpPr>
+        <p:spPr>
+          <a:xfrm>
+            <a:off x="6062472" y="4169664"/>
             <a:ext cx="685800" cy="475488"/>
           </a:xfrm>
           <a:prstGeom prst="rect">
@@ -15585,7 +15507,7 @@
                 <a:ea typeface="Trebuchet MS" pitchFamily="34" charset="-122"/>
                 <a:cs typeface="Trebuchet MS" pitchFamily="34" charset="-120"/>
               </a:rPr>
-              <a:t>e</a:t>
+              <a:t>air</a:t>
             </a:r>
             <a:endParaRPr lang="en-US" sz="900" dirty="0"/>
           </a:p>
@@ -15593,13 +15515,13 @@
       </p:sp>
       <p:sp>
         <p:nvSpPr>
-          <p:cNvPr id="40" name="Shape 38"/>
-          <p:cNvSpPr/>
-          <p:nvPr/>
-        </p:nvSpPr>
-        <p:spPr>
-          <a:xfrm>
-            <a:off x="4850892" y="4169664"/>
+          <p:cNvPr id="41" name="Shape 39"/>
+          <p:cNvSpPr/>
+          <p:nvPr/>
+        </p:nvSpPr>
+        <p:spPr>
+          <a:xfrm>
+            <a:off x="7274052" y="4169664"/>
             <a:ext cx="685800" cy="475488"/>
           </a:xfrm>
           <a:prstGeom prst="rect">
@@ -15620,13 +15542,13 @@
       </p:sp>
       <p:sp>
         <p:nvSpPr>
-          <p:cNvPr id="41" name="Text 39"/>
-          <p:cNvSpPr/>
-          <p:nvPr/>
-        </p:nvSpPr>
-        <p:spPr>
-          <a:xfrm>
-            <a:off x="4850892" y="4169664"/>
+          <p:cNvPr id="42" name="Text 40"/>
+          <p:cNvSpPr/>
+          <p:nvPr/>
+        </p:nvSpPr>
+        <p:spPr>
+          <a:xfrm>
+            <a:off x="7274052" y="4169664"/>
             <a:ext cx="685800" cy="475488"/>
           </a:xfrm>
           <a:prstGeom prst="rect">
@@ -15651,139 +15573,7 @@
                 <a:ea typeface="Trebuchet MS" pitchFamily="34" charset="-122"/>
                 <a:cs typeface="Trebuchet MS" pitchFamily="34" charset="-120"/>
               </a:rPr>
-              <a:t>p</a:t>
-            </a:r>
-            <a:endParaRPr lang="en-US" sz="900" dirty="0"/>
-          </a:p>
-        </p:txBody>
-      </p:sp>
-      <p:sp>
-        <p:nvSpPr>
-          <p:cNvPr id="42" name="Shape 40"/>
-          <p:cNvSpPr/>
-          <p:nvPr/>
-        </p:nvSpPr>
-        <p:spPr>
-          <a:xfrm>
-            <a:off x="6062472" y="4169664"/>
-            <a:ext cx="685800" cy="475488"/>
-          </a:xfrm>
-          <a:prstGeom prst="rect">
-            <a:avLst>
-              <a:gd name="adj" fmla="val 7692"/>
-            </a:avLst>
-          </a:prstGeom>
-          <a:solidFill>
-            <a:srgbClr val="FFFFFF"/>
-          </a:solidFill>
-          <a:ln w="12700">
-            <a:solidFill>
-              <a:srgbClr val="DB2777"/>
-            </a:solidFill>
-            <a:prstDash val="solid"/>
-          </a:ln>
-        </p:spPr>
-      </p:sp>
-      <p:sp>
-        <p:nvSpPr>
-          <p:cNvPr id="43" name="Text 41"/>
-          <p:cNvSpPr/>
-          <p:nvPr/>
-        </p:nvSpPr>
-        <p:spPr>
-          <a:xfrm>
-            <a:off x="6062472" y="4169664"/>
-            <a:ext cx="685800" cy="475488"/>
-          </a:xfrm>
-          <a:prstGeom prst="rect">
-            <a:avLst/>
-          </a:prstGeom>
-          <a:noFill/>
-          <a:ln/>
-        </p:spPr>
-        <p:txBody>
-          <a:bodyPr wrap="square" lIns="0" tIns="0" rIns="0" bIns="0" rtlCol="0" anchor="ctr"/>
-          <a:lstStyle/>
-          <a:p>
-            <a:pPr algn="ctr" indent="0" marL="0">
-              <a:buNone/>
-            </a:pPr>
-            <a:r>
-              <a:rPr lang="en-US" sz="900" b="1" dirty="0">
-                <a:solidFill>
-                  <a:srgbClr val="9D174D"/>
-                </a:solidFill>
-                <a:latin typeface="Trebuchet MS" pitchFamily="34" charset="0"/>
-                <a:ea typeface="Trebuchet MS" pitchFamily="34" charset="-122"/>
-                <a:cs typeface="Trebuchet MS" pitchFamily="34" charset="-120"/>
-              </a:rPr>
-              <a:t>air</a:t>
-            </a:r>
-            <a:endParaRPr lang="en-US" sz="900" dirty="0"/>
-          </a:p>
-        </p:txBody>
-      </p:sp>
-      <p:sp>
-        <p:nvSpPr>
-          <p:cNvPr id="44" name="Shape 42"/>
-          <p:cNvSpPr/>
-          <p:nvPr/>
-        </p:nvSpPr>
-        <p:spPr>
-          <a:xfrm>
-            <a:off x="7274052" y="4169664"/>
-            <a:ext cx="685800" cy="475488"/>
-          </a:xfrm>
-          <a:prstGeom prst="rect">
-            <a:avLst>
-              <a:gd name="adj" fmla="val 7692"/>
-            </a:avLst>
-          </a:prstGeom>
-          <a:solidFill>
-            <a:srgbClr val="FFFFFF"/>
-          </a:solidFill>
-          <a:ln w="12700">
-            <a:solidFill>
-              <a:srgbClr val="DB2777"/>
-            </a:solidFill>
-            <a:prstDash val="solid"/>
-          </a:ln>
-        </p:spPr>
-      </p:sp>
-      <p:sp>
-        <p:nvSpPr>
-          <p:cNvPr id="45" name="Text 43"/>
-          <p:cNvSpPr/>
-          <p:nvPr/>
-        </p:nvSpPr>
-        <p:spPr>
-          <a:xfrm>
-            <a:off x="7274052" y="4169664"/>
-            <a:ext cx="685800" cy="475488"/>
-          </a:xfrm>
-          <a:prstGeom prst="rect">
-            <a:avLst/>
-          </a:prstGeom>
-          <a:noFill/>
-          <a:ln/>
-        </p:spPr>
-        <p:txBody>
-          <a:bodyPr wrap="square" lIns="0" tIns="0" rIns="0" bIns="0" rtlCol="0" anchor="ctr"/>
-          <a:lstStyle/>
-          <a:p>
-            <a:pPr algn="ctr" indent="0" marL="0">
-              <a:buNone/>
-            </a:pPr>
-            <a:r>
-              <a:rPr lang="en-US" sz="900" b="1" dirty="0">
-                <a:solidFill>
-                  <a:srgbClr val="9D174D"/>
-                </a:solidFill>
-                <a:latin typeface="Trebuchet MS" pitchFamily="34" charset="0"/>
-                <a:ea typeface="Trebuchet MS" pitchFamily="34" charset="-122"/>
-                <a:cs typeface="Trebuchet MS" pitchFamily="34" charset="-120"/>
-              </a:rPr>
-              <a:t>ing</a:t>
+              <a:t>ed</a:t>
             </a:r>
             <a:endParaRPr lang="en-US" sz="900" dirty="0"/>
           </a:p>
@@ -16357,7 +16147,7 @@
                 <a:ea typeface="Calibri" pitchFamily="34" charset="-122"/>
                 <a:cs typeface="Calibri" pitchFamily="34" charset="-120"/>
               </a:rPr>
-              <a:t>Word Labs  •  wordlabs.app  •  Root: 'repair' = fix or make good again</a:t>
+              <a:t>Word Labs  •  wordlabs.app  •  Root: 'repair' = fix or restore something broken</a:t>
             </a:r>
             <a:endParaRPr lang="en-US" sz="800" dirty="0"/>
           </a:p>
@@ -16997,7 +16787,7 @@
                 <a:ea typeface="Calibri" pitchFamily="34" charset="-122"/>
                 <a:cs typeface="Calibri" pitchFamily="34" charset="-120"/>
               </a:rPr>
-              <a:t>Word Labs  •  wordlabs.app  •  Root: 'repair' = fix or make good again</a:t>
+              <a:t>Word Labs  •  wordlabs.app  •  Root: 'repair' = fix or restore something broken</a:t>
             </a:r>
             <a:endParaRPr lang="en-US" sz="800" dirty="0"/>
           </a:p>
@@ -17126,7 +16916,7 @@
                 <a:ea typeface="Calibri" pitchFamily="34" charset="-122"/>
                 <a:cs typeface="Calibri" pitchFamily="34" charset="-120"/>
               </a:rPr>
-              <a:t>repaired</a:t>
+              <a:t>repairing</a:t>
             </a:r>
             <a:pPr algn="l" indent="0" marL="0">
               <a:buNone/>
@@ -17140,7 +16930,7 @@
                 <a:ea typeface="Calibri" pitchFamily="34" charset="-122"/>
                 <a:cs typeface="Calibri" pitchFamily="34" charset="-120"/>
               </a:rPr>
-              <a:t> bridge was </a:t>
+              <a:t> of the roof was difficult; however, the damage was </a:t>
             </a:r>
             <a:pPr algn="l" indent="0" marL="0">
               <a:buNone/>
@@ -17171,7 +16961,7 @@
                 <a:ea typeface="Calibri" pitchFamily="34" charset="-122"/>
                 <a:cs typeface="Calibri" pitchFamily="34" charset="-120"/>
               </a:rPr>
-              <a:t> after the flood, but sadly the </a:t>
+              <a:t>, and all </a:t>
             </a:r>
             <a:pPr algn="l" indent="0" marL="0">
               <a:buNone/>
@@ -17188,7 +16978,7 @@
                 <a:ea typeface="Calibri" pitchFamily="34" charset="-122"/>
                 <a:cs typeface="Calibri" pitchFamily="34" charset="-120"/>
               </a:rPr>
-              <a:t>irreparable</a:t>
+              <a:t>repairs</a:t>
             </a:r>
             <a:pPr algn="l" indent="0" marL="0">
               <a:buNone/>
@@ -17202,7 +16992,7 @@
                 <a:ea typeface="Calibri" pitchFamily="34" charset="-122"/>
                 <a:cs typeface="Calibri" pitchFamily="34" charset="-120"/>
               </a:rPr>
-              <a:t> damage to the old mill meant it was lost forever.</a:t>
+              <a:t> were finished by Friday.</a:t>
             </a:r>
             <a:endParaRPr lang="en-US" sz="1800" dirty="0"/>
           </a:p>
@@ -17357,7 +17147,7 @@
                 <a:ea typeface="Trebuchet MS" pitchFamily="34" charset="-122"/>
                 <a:cs typeface="Trebuchet MS" pitchFamily="34" charset="-120"/>
               </a:rPr>
-              <a:t>repaired</a:t>
+              <a:t>repairing</a:t>
             </a:r>
             <a:endParaRPr lang="en-US" sz="1400" dirty="0"/>
           </a:p>
@@ -17613,7 +17403,7 @@
                 <a:ea typeface="Trebuchet MS" pitchFamily="34" charset="-122"/>
                 <a:cs typeface="Trebuchet MS" pitchFamily="34" charset="-120"/>
               </a:rPr>
-              <a:t>irreparable</a:t>
+              <a:t>repairs</a:t>
             </a:r>
             <a:endParaRPr lang="en-US" sz="1400" dirty="0"/>
           </a:p>
@@ -17944,7 +17734,7 @@
                 <a:ea typeface="Calibri" pitchFamily="34" charset="-122"/>
                 <a:cs typeface="Calibri" pitchFamily="34" charset="-120"/>
               </a:rPr>
-              <a:t>Word Labs  •  wordlabs.app  •  Root: 'repair' = fix or make good again</a:t>
+              <a:t>Word Labs  •  wordlabs.app  •  Root: 'repair' = fix or restore something broken</a:t>
             </a:r>
             <a:endParaRPr lang="en-US" sz="800" dirty="0"/>
           </a:p>
@@ -18083,7 +17873,7 @@
                 <a:ea typeface="Trebuchet MS" pitchFamily="34" charset="-122"/>
                 <a:cs typeface="Trebuchet MS" pitchFamily="34" charset="-120"/>
               </a:rPr>
-              <a:t>repaired</a:t>
+              <a:t>repairing</a:t>
             </a:r>
             <a:endParaRPr lang="en-US" sz="2800" dirty="0"/>
           </a:p>
@@ -18771,7 +18561,7 @@
                 <a:ea typeface="Calibri" pitchFamily="34" charset="-122"/>
                 <a:cs typeface="Calibri" pitchFamily="34" charset="-120"/>
               </a:rPr>
-              <a:t>Word Labs  •  wordlabs.app  •  Root: 'repair' = fix or make good again</a:t>
+              <a:t>Word Labs  •  wordlabs.app  •  Root: 'repair' = fix or restore something broken</a:t>
             </a:r>
             <a:endParaRPr lang="en-US" sz="800" dirty="0"/>
           </a:p>
@@ -18910,7 +18700,7 @@
                 <a:ea typeface="Trebuchet MS" pitchFamily="34" charset="-122"/>
                 <a:cs typeface="Trebuchet MS" pitchFamily="34" charset="-120"/>
               </a:rPr>
-              <a:t>repaired</a:t>
+              <a:t>repairing</a:t>
             </a:r>
             <a:endParaRPr lang="en-US" sz="2800" dirty="0"/>
           </a:p>
@@ -19088,7 +18878,7 @@
                 <a:ea typeface="Calibri" pitchFamily="34" charset="-122"/>
                 <a:cs typeface="Calibri" pitchFamily="34" charset="-120"/>
               </a:rPr>
-              <a:t>to fix or restore</a:t>
+              <a:t>fix or restore</a:t>
             </a:r>
             <a:endParaRPr lang="en-US" sz="850" dirty="0"/>
           </a:p>
@@ -19161,7 +18951,7 @@
                 <a:ea typeface="Trebuchet MS" pitchFamily="34" charset="-122"/>
                 <a:cs typeface="Trebuchet MS" pitchFamily="34" charset="-120"/>
               </a:rPr>
-              <a:t>ed</a:t>
+              <a:t>ing</a:t>
             </a:r>
             <a:endParaRPr lang="en-US" sz="1300" dirty="0"/>
           </a:p>
@@ -19200,7 +18990,7 @@
                 <a:ea typeface="Calibri" pitchFamily="34" charset="-122"/>
                 <a:cs typeface="Calibri" pitchFamily="34" charset="-120"/>
               </a:rPr>
-              <a:t>already happened in the past</a:t>
+              <a:t>action happening now</a:t>
             </a:r>
             <a:endParaRPr lang="en-US" sz="850" dirty="0"/>
           </a:p>
@@ -19756,7 +19546,7 @@
                 <a:ea typeface="Calibri" pitchFamily="34" charset="-122"/>
                 <a:cs typeface="Calibri" pitchFamily="34" charset="-120"/>
               </a:rPr>
-              <a:t>Word Labs  •  wordlabs.app  •  Root: 'repair' = fix or make good again</a:t>
+              <a:t>Word Labs  •  wordlabs.app  •  Root: 'repair' = fix or restore something broken</a:t>
             </a:r>
             <a:endParaRPr lang="en-US" sz="800" dirty="0"/>
           </a:p>
@@ -19895,7 +19685,7 @@
                 <a:ea typeface="Trebuchet MS" pitchFamily="34" charset="-122"/>
                 <a:cs typeface="Trebuchet MS" pitchFamily="34" charset="-120"/>
               </a:rPr>
-              <a:t>repaired</a:t>
+              <a:t>repairing</a:t>
             </a:r>
             <a:endParaRPr lang="en-US" sz="2800" dirty="0"/>
           </a:p>
@@ -20073,7 +19863,7 @@
                 <a:ea typeface="Calibri" pitchFamily="34" charset="-122"/>
                 <a:cs typeface="Calibri" pitchFamily="34" charset="-120"/>
               </a:rPr>
-              <a:t>to fix or restore</a:t>
+              <a:t>fix or restore</a:t>
             </a:r>
             <a:endParaRPr lang="en-US" sz="850" dirty="0"/>
           </a:p>
@@ -20146,7 +19936,7 @@
                 <a:ea typeface="Trebuchet MS" pitchFamily="34" charset="-122"/>
                 <a:cs typeface="Trebuchet MS" pitchFamily="34" charset="-120"/>
               </a:rPr>
-              <a:t>ed</a:t>
+              <a:t>ing</a:t>
             </a:r>
             <a:endParaRPr lang="en-US" sz="1300" dirty="0"/>
           </a:p>
@@ -20185,7 +19975,7 @@
                 <a:ea typeface="Calibri" pitchFamily="34" charset="-122"/>
                 <a:cs typeface="Calibri" pitchFamily="34" charset="-120"/>
               </a:rPr>
-              <a:t>already happened in the past</a:t>
+              <a:t>action happening now</a:t>
             </a:r>
             <a:endParaRPr lang="en-US" sz="850" dirty="0"/>
           </a:p>
@@ -20292,7 +20082,7 @@
         </p:nvSpPr>
         <p:spPr>
           <a:xfrm>
-            <a:off x="2999232" y="3364992"/>
+            <a:off x="2313432" y="3364992"/>
             <a:ext cx="1645920" cy="475488"/>
           </a:xfrm>
           <a:prstGeom prst="rect">
@@ -20319,7 +20109,7 @@
         </p:nvSpPr>
         <p:spPr>
           <a:xfrm>
-            <a:off x="2999232" y="3364992"/>
+            <a:off x="2313432" y="3364992"/>
             <a:ext cx="1645920" cy="475488"/>
           </a:xfrm>
           <a:prstGeom prst="rect">
@@ -20358,8 +20148,8 @@
         </p:nvSpPr>
         <p:spPr>
           <a:xfrm>
-            <a:off x="4645152" y="3364992"/>
-            <a:ext cx="1097280" cy="475488"/>
+            <a:off x="3959352" y="3364992"/>
+            <a:ext cx="411480" cy="475488"/>
           </a:xfrm>
           <a:prstGeom prst="rect">
             <a:avLst/>
@@ -20397,7 +20187,7 @@
         </p:nvSpPr>
         <p:spPr>
           <a:xfrm>
-            <a:off x="5742432" y="3364992"/>
+            <a:off x="4370832" y="3364992"/>
             <a:ext cx="1645920" cy="475488"/>
           </a:xfrm>
           <a:prstGeom prst="rect">
@@ -20424,7 +20214,7 @@
         </p:nvSpPr>
         <p:spPr>
           <a:xfrm>
-            <a:off x="5742432" y="3364992"/>
+            <a:off x="4370832" y="3364992"/>
             <a:ext cx="1645920" cy="475488"/>
           </a:xfrm>
           <a:prstGeom prst="rect">
@@ -20449,7 +20239,7 @@
                 <a:ea typeface="Trebuchet MS" pitchFamily="34" charset="-122"/>
                 <a:cs typeface="Trebuchet MS" pitchFamily="34" charset="-120"/>
               </a:rPr>
-              <a:t>paired</a:t>
+              <a:t>pair</a:t>
             </a:r>
             <a:endParaRPr lang="en-US" sz="1400" dirty="0"/>
           </a:p>
@@ -20457,7 +20247,112 @@
       </p:sp>
       <p:sp>
         <p:nvSpPr>
-          <p:cNvPr id="30" name="Shape 28"/>
+          <p:cNvPr id="30" name="Text 28"/>
+          <p:cNvSpPr/>
+          <p:nvPr/>
+        </p:nvSpPr>
+        <p:spPr>
+          <a:xfrm>
+            <a:off x="6016752" y="3364992"/>
+            <a:ext cx="411480" cy="475488"/>
+          </a:xfrm>
+          <a:prstGeom prst="rect">
+            <a:avLst/>
+          </a:prstGeom>
+          <a:noFill/>
+          <a:ln/>
+        </p:spPr>
+        <p:txBody>
+          <a:bodyPr wrap="square" lIns="0" tIns="0" rIns="0" bIns="0" rtlCol="0" anchor="ctr"/>
+          <a:lstStyle/>
+          <a:p>
+            <a:pPr algn="ctr" indent="0" marL="0">
+              <a:buNone/>
+            </a:pPr>
+            <a:r>
+              <a:rPr lang="en-US" sz="1600" b="1" dirty="0">
+                <a:solidFill>
+                  <a:srgbClr val="0D9488"/>
+                </a:solidFill>
+                <a:latin typeface="Trebuchet MS" pitchFamily="34" charset="0"/>
+                <a:ea typeface="Trebuchet MS" pitchFamily="34" charset="-122"/>
+                <a:cs typeface="Trebuchet MS" pitchFamily="34" charset="-120"/>
+              </a:rPr>
+              <a:t>·</a:t>
+            </a:r>
+            <a:endParaRPr lang="en-US" sz="1600" dirty="0"/>
+          </a:p>
+        </p:txBody>
+      </p:sp>
+      <p:sp>
+        <p:nvSpPr>
+          <p:cNvPr id="31" name="Shape 29"/>
+          <p:cNvSpPr/>
+          <p:nvPr/>
+        </p:nvSpPr>
+        <p:spPr>
+          <a:xfrm>
+            <a:off x="6428232" y="3364992"/>
+            <a:ext cx="1645920" cy="475488"/>
+          </a:xfrm>
+          <a:prstGeom prst="rect">
+            <a:avLst>
+              <a:gd name="adj" fmla="val 9615"/>
+            </a:avLst>
+          </a:prstGeom>
+          <a:solidFill>
+            <a:srgbClr val="FFFFFF"/>
+          </a:solidFill>
+          <a:ln w="12700">
+            <a:solidFill>
+              <a:srgbClr val="0D9488"/>
+            </a:solidFill>
+            <a:prstDash val="solid"/>
+          </a:ln>
+        </p:spPr>
+      </p:sp>
+      <p:sp>
+        <p:nvSpPr>
+          <p:cNvPr id="32" name="Text 30"/>
+          <p:cNvSpPr/>
+          <p:nvPr/>
+        </p:nvSpPr>
+        <p:spPr>
+          <a:xfrm>
+            <a:off x="6428232" y="3364992"/>
+            <a:ext cx="1645920" cy="475488"/>
+          </a:xfrm>
+          <a:prstGeom prst="rect">
+            <a:avLst/>
+          </a:prstGeom>
+          <a:noFill/>
+          <a:ln/>
+        </p:spPr>
+        <p:txBody>
+          <a:bodyPr wrap="square" lIns="0" tIns="0" rIns="0" bIns="0" rtlCol="0" anchor="ctr"/>
+          <a:lstStyle/>
+          <a:p>
+            <a:pPr algn="ctr" indent="0" marL="0">
+              <a:buNone/>
+            </a:pPr>
+            <a:r>
+              <a:rPr lang="en-US" sz="1400" b="1" dirty="0">
+                <a:solidFill>
+                  <a:srgbClr val="0D9488"/>
+                </a:solidFill>
+                <a:latin typeface="Trebuchet MS" pitchFamily="34" charset="0"/>
+                <a:ea typeface="Trebuchet MS" pitchFamily="34" charset="-122"/>
+                <a:cs typeface="Trebuchet MS" pitchFamily="34" charset="-120"/>
+              </a:rPr>
+              <a:t>ing</a:t>
+            </a:r>
+            <a:endParaRPr lang="en-US" sz="1400" dirty="0"/>
+          </a:p>
+        </p:txBody>
+      </p:sp>
+      <p:sp>
+        <p:nvSpPr>
+          <p:cNvPr id="33" name="Shape 31"/>
           <p:cNvSpPr/>
           <p:nvPr/>
         </p:nvSpPr>
@@ -20484,7 +20379,7 @@
       </p:sp>
       <p:sp>
         <p:nvSpPr>
-          <p:cNvPr id="31" name="Text 29"/>
+          <p:cNvPr id="34" name="Text 32"/>
           <p:cNvSpPr/>
           <p:nvPr/>
         </p:nvSpPr>
@@ -20523,7 +20418,7 @@
       </p:sp>
       <p:sp>
         <p:nvSpPr>
-          <p:cNvPr id="32" name="Shape 30"/>
+          <p:cNvPr id="35" name="Shape 33"/>
           <p:cNvSpPr/>
           <p:nvPr/>
         </p:nvSpPr>
@@ -20550,7 +20445,7 @@
       </p:sp>
       <p:sp>
         <p:nvSpPr>
-          <p:cNvPr id="33" name="Text 31"/>
+          <p:cNvPr id="36" name="Text 34"/>
           <p:cNvSpPr/>
           <p:nvPr/>
         </p:nvSpPr>
@@ -20873,7 +20768,7 @@
                 <a:ea typeface="Calibri" pitchFamily="34" charset="-122"/>
                 <a:cs typeface="Calibri" pitchFamily="34" charset="-120"/>
               </a:rPr>
-              <a:t>Word Labs  •  wordlabs.app  •  Root: 'repair' = fix or make good again</a:t>
+              <a:t>Word Labs  •  wordlabs.app  •  Root: 'repair' = fix or restore something broken</a:t>
             </a:r>
             <a:endParaRPr lang="en-US" sz="800" dirty="0"/>
           </a:p>
@@ -21012,7 +20907,7 @@
                 <a:ea typeface="Trebuchet MS" pitchFamily="34" charset="-122"/>
                 <a:cs typeface="Trebuchet MS" pitchFamily="34" charset="-120"/>
               </a:rPr>
-              <a:t>repaired</a:t>
+              <a:t>repairing</a:t>
             </a:r>
             <a:endParaRPr lang="en-US" sz="2800" dirty="0"/>
           </a:p>
@@ -21190,7 +21085,7 @@
                 <a:ea typeface="Calibri" pitchFamily="34" charset="-122"/>
                 <a:cs typeface="Calibri" pitchFamily="34" charset="-120"/>
               </a:rPr>
-              <a:t>to fix or restore</a:t>
+              <a:t>fix or restore</a:t>
             </a:r>
             <a:endParaRPr lang="en-US" sz="850" dirty="0"/>
           </a:p>
@@ -21263,7 +21158,7 @@
                 <a:ea typeface="Trebuchet MS" pitchFamily="34" charset="-122"/>
                 <a:cs typeface="Trebuchet MS" pitchFamily="34" charset="-120"/>
               </a:rPr>
-              <a:t>ed</a:t>
+              <a:t>ing</a:t>
             </a:r>
             <a:endParaRPr lang="en-US" sz="1300" dirty="0"/>
           </a:p>
@@ -21302,7 +21197,7 @@
                 <a:ea typeface="Calibri" pitchFamily="34" charset="-122"/>
                 <a:cs typeface="Calibri" pitchFamily="34" charset="-120"/>
               </a:rPr>
-              <a:t>already happened in the past</a:t>
+              <a:t>action happening now</a:t>
             </a:r>
             <a:endParaRPr lang="en-US" sz="850" dirty="0"/>
           </a:p>
@@ -21409,7 +21304,7 @@
         </p:nvSpPr>
         <p:spPr>
           <a:xfrm>
-            <a:off x="2999232" y="3364992"/>
+            <a:off x="2313432" y="3364992"/>
             <a:ext cx="1645920" cy="475488"/>
           </a:xfrm>
           <a:prstGeom prst="rect">
@@ -21436,7 +21331,7 @@
         </p:nvSpPr>
         <p:spPr>
           <a:xfrm>
-            <a:off x="2999232" y="3364992"/>
+            <a:off x="2313432" y="3364992"/>
             <a:ext cx="1645920" cy="475488"/>
           </a:xfrm>
           <a:prstGeom prst="rect">
@@ -21475,8 +21370,8 @@
         </p:nvSpPr>
         <p:spPr>
           <a:xfrm>
-            <a:off x="4645152" y="3364992"/>
-            <a:ext cx="1097280" cy="475488"/>
+            <a:off x="3959352" y="3364992"/>
+            <a:ext cx="411480" cy="475488"/>
           </a:xfrm>
           <a:prstGeom prst="rect">
             <a:avLst/>
@@ -21514,7 +21409,7 @@
         </p:nvSpPr>
         <p:spPr>
           <a:xfrm>
-            <a:off x="5742432" y="3364992"/>
+            <a:off x="4370832" y="3364992"/>
             <a:ext cx="1645920" cy="475488"/>
           </a:xfrm>
           <a:prstGeom prst="rect">
@@ -21541,7 +21436,7 @@
         </p:nvSpPr>
         <p:spPr>
           <a:xfrm>
-            <a:off x="5742432" y="3364992"/>
+            <a:off x="4370832" y="3364992"/>
             <a:ext cx="1645920" cy="475488"/>
           </a:xfrm>
           <a:prstGeom prst="rect">
@@ -21566,7 +21461,7 @@
                 <a:ea typeface="Trebuchet MS" pitchFamily="34" charset="-122"/>
                 <a:cs typeface="Trebuchet MS" pitchFamily="34" charset="-120"/>
               </a:rPr>
-              <a:t>paired</a:t>
+              <a:t>pair</a:t>
             </a:r>
             <a:endParaRPr lang="en-US" sz="1400" dirty="0"/>
           </a:p>
@@ -21574,7 +21469,112 @@
       </p:sp>
       <p:sp>
         <p:nvSpPr>
-          <p:cNvPr id="30" name="Shape 28"/>
+          <p:cNvPr id="30" name="Text 28"/>
+          <p:cNvSpPr/>
+          <p:nvPr/>
+        </p:nvSpPr>
+        <p:spPr>
+          <a:xfrm>
+            <a:off x="6016752" y="3364992"/>
+            <a:ext cx="411480" cy="475488"/>
+          </a:xfrm>
+          <a:prstGeom prst="rect">
+            <a:avLst/>
+          </a:prstGeom>
+          <a:noFill/>
+          <a:ln/>
+        </p:spPr>
+        <p:txBody>
+          <a:bodyPr wrap="square" lIns="0" tIns="0" rIns="0" bIns="0" rtlCol="0" anchor="ctr"/>
+          <a:lstStyle/>
+          <a:p>
+            <a:pPr algn="ctr" indent="0" marL="0">
+              <a:buNone/>
+            </a:pPr>
+            <a:r>
+              <a:rPr lang="en-US" sz="1600" b="1" dirty="0">
+                <a:solidFill>
+                  <a:srgbClr val="0D9488"/>
+                </a:solidFill>
+                <a:latin typeface="Trebuchet MS" pitchFamily="34" charset="0"/>
+                <a:ea typeface="Trebuchet MS" pitchFamily="34" charset="-122"/>
+                <a:cs typeface="Trebuchet MS" pitchFamily="34" charset="-120"/>
+              </a:rPr>
+              <a:t>·</a:t>
+            </a:r>
+            <a:endParaRPr lang="en-US" sz="1600" dirty="0"/>
+          </a:p>
+        </p:txBody>
+      </p:sp>
+      <p:sp>
+        <p:nvSpPr>
+          <p:cNvPr id="31" name="Shape 29"/>
+          <p:cNvSpPr/>
+          <p:nvPr/>
+        </p:nvSpPr>
+        <p:spPr>
+          <a:xfrm>
+            <a:off x="6428232" y="3364992"/>
+            <a:ext cx="1645920" cy="475488"/>
+          </a:xfrm>
+          <a:prstGeom prst="rect">
+            <a:avLst>
+              <a:gd name="adj" fmla="val 9615"/>
+            </a:avLst>
+          </a:prstGeom>
+          <a:solidFill>
+            <a:srgbClr val="FFFFFF"/>
+          </a:solidFill>
+          <a:ln w="12700">
+            <a:solidFill>
+              <a:srgbClr val="0D9488"/>
+            </a:solidFill>
+            <a:prstDash val="solid"/>
+          </a:ln>
+        </p:spPr>
+      </p:sp>
+      <p:sp>
+        <p:nvSpPr>
+          <p:cNvPr id="32" name="Text 30"/>
+          <p:cNvSpPr/>
+          <p:nvPr/>
+        </p:nvSpPr>
+        <p:spPr>
+          <a:xfrm>
+            <a:off x="6428232" y="3364992"/>
+            <a:ext cx="1645920" cy="475488"/>
+          </a:xfrm>
+          <a:prstGeom prst="rect">
+            <a:avLst/>
+          </a:prstGeom>
+          <a:noFill/>
+          <a:ln/>
+        </p:spPr>
+        <p:txBody>
+          <a:bodyPr wrap="square" lIns="0" tIns="0" rIns="0" bIns="0" rtlCol="0" anchor="ctr"/>
+          <a:lstStyle/>
+          <a:p>
+            <a:pPr algn="ctr" indent="0" marL="0">
+              <a:buNone/>
+            </a:pPr>
+            <a:r>
+              <a:rPr lang="en-US" sz="1400" b="1" dirty="0">
+                <a:solidFill>
+                  <a:srgbClr val="0D9488"/>
+                </a:solidFill>
+                <a:latin typeface="Trebuchet MS" pitchFamily="34" charset="0"/>
+                <a:ea typeface="Trebuchet MS" pitchFamily="34" charset="-122"/>
+                <a:cs typeface="Trebuchet MS" pitchFamily="34" charset="-120"/>
+              </a:rPr>
+              <a:t>ing</a:t>
+            </a:r>
+            <a:endParaRPr lang="en-US" sz="1400" dirty="0"/>
+          </a:p>
+        </p:txBody>
+      </p:sp>
+      <p:sp>
+        <p:nvSpPr>
+          <p:cNvPr id="33" name="Shape 31"/>
           <p:cNvSpPr/>
           <p:nvPr/>
         </p:nvSpPr>
@@ -21601,7 +21601,7 @@
       </p:sp>
       <p:sp>
         <p:nvSpPr>
-          <p:cNvPr id="31" name="Text 29"/>
+          <p:cNvPr id="34" name="Text 32"/>
           <p:cNvSpPr/>
           <p:nvPr/>
         </p:nvSpPr>
@@ -21640,7 +21640,7 @@
       </p:sp>
       <p:sp>
         <p:nvSpPr>
-          <p:cNvPr id="32" name="Shape 30"/>
+          <p:cNvPr id="35" name="Shape 33"/>
           <p:cNvSpPr/>
           <p:nvPr/>
         </p:nvSpPr>
@@ -21667,13 +21667,13 @@
       </p:sp>
       <p:sp>
         <p:nvSpPr>
-          <p:cNvPr id="33" name="Shape 31"/>
-          <p:cNvSpPr/>
-          <p:nvPr/>
-        </p:nvSpPr>
-        <p:spPr>
-          <a:xfrm>
-            <a:off x="2427732" y="4169664"/>
+          <p:cNvPr id="36" name="Shape 34"/>
+          <p:cNvSpPr/>
+          <p:nvPr/>
+        </p:nvSpPr>
+        <p:spPr>
+          <a:xfrm>
+            <a:off x="2254649" y="4169664"/>
             <a:ext cx="685800" cy="475488"/>
           </a:xfrm>
           <a:prstGeom prst="rect">
@@ -21694,13 +21694,13 @@
       </p:sp>
       <p:sp>
         <p:nvSpPr>
-          <p:cNvPr id="34" name="Text 32"/>
-          <p:cNvSpPr/>
-          <p:nvPr/>
-        </p:nvSpPr>
-        <p:spPr>
-          <a:xfrm>
-            <a:off x="2427732" y="4169664"/>
+          <p:cNvPr id="37" name="Text 35"/>
+          <p:cNvSpPr/>
+          <p:nvPr/>
+        </p:nvSpPr>
+        <p:spPr>
+          <a:xfrm>
+            <a:off x="2254649" y="4169664"/>
             <a:ext cx="685800" cy="475488"/>
           </a:xfrm>
           <a:prstGeom prst="rect">
@@ -21733,13 +21733,13 @@
       </p:sp>
       <p:sp>
         <p:nvSpPr>
-          <p:cNvPr id="35" name="Shape 33"/>
-          <p:cNvSpPr/>
-          <p:nvPr/>
-        </p:nvSpPr>
-        <p:spPr>
-          <a:xfrm>
-            <a:off x="3639312" y="4169664"/>
+          <p:cNvPr id="38" name="Shape 36"/>
+          <p:cNvSpPr/>
+          <p:nvPr/>
+        </p:nvSpPr>
+        <p:spPr>
+          <a:xfrm>
+            <a:off x="3293146" y="4169664"/>
             <a:ext cx="685800" cy="475488"/>
           </a:xfrm>
           <a:prstGeom prst="rect">
@@ -21760,13 +21760,13 @@
       </p:sp>
       <p:sp>
         <p:nvSpPr>
-          <p:cNvPr id="36" name="Text 34"/>
-          <p:cNvSpPr/>
-          <p:nvPr/>
-        </p:nvSpPr>
-        <p:spPr>
-          <a:xfrm>
-            <a:off x="3639312" y="4169664"/>
+          <p:cNvPr id="39" name="Text 37"/>
+          <p:cNvSpPr/>
+          <p:nvPr/>
+        </p:nvSpPr>
+        <p:spPr>
+          <a:xfrm>
+            <a:off x="3293146" y="4169664"/>
             <a:ext cx="685800" cy="475488"/>
           </a:xfrm>
           <a:prstGeom prst="rect">
@@ -21799,13 +21799,13 @@
       </p:sp>
       <p:sp>
         <p:nvSpPr>
-          <p:cNvPr id="37" name="Shape 35"/>
-          <p:cNvSpPr/>
-          <p:nvPr/>
-        </p:nvSpPr>
-        <p:spPr>
-          <a:xfrm>
-            <a:off x="4850892" y="4169664"/>
+          <p:cNvPr id="40" name="Shape 38"/>
+          <p:cNvSpPr/>
+          <p:nvPr/>
+        </p:nvSpPr>
+        <p:spPr>
+          <a:xfrm>
+            <a:off x="4331643" y="4169664"/>
             <a:ext cx="685800" cy="475488"/>
           </a:xfrm>
           <a:prstGeom prst="rect">
@@ -21826,13 +21826,13 @@
       </p:sp>
       <p:sp>
         <p:nvSpPr>
-          <p:cNvPr id="38" name="Text 36"/>
-          <p:cNvSpPr/>
-          <p:nvPr/>
-        </p:nvSpPr>
-        <p:spPr>
-          <a:xfrm>
-            <a:off x="4850892" y="4169664"/>
+          <p:cNvPr id="41" name="Text 39"/>
+          <p:cNvSpPr/>
+          <p:nvPr/>
+        </p:nvSpPr>
+        <p:spPr>
+          <a:xfrm>
+            <a:off x="4331643" y="4169664"/>
             <a:ext cx="685800" cy="475488"/>
           </a:xfrm>
           <a:prstGeom prst="rect">
@@ -21865,13 +21865,13 @@
       </p:sp>
       <p:sp>
         <p:nvSpPr>
-          <p:cNvPr id="39" name="Shape 37"/>
-          <p:cNvSpPr/>
-          <p:nvPr/>
-        </p:nvSpPr>
-        <p:spPr>
-          <a:xfrm>
-            <a:off x="6062472" y="4169664"/>
+          <p:cNvPr id="42" name="Shape 40"/>
+          <p:cNvSpPr/>
+          <p:nvPr/>
+        </p:nvSpPr>
+        <p:spPr>
+          <a:xfrm>
+            <a:off x="5370141" y="4169664"/>
             <a:ext cx="685800" cy="475488"/>
           </a:xfrm>
           <a:prstGeom prst="rect">
@@ -21892,13 +21892,13 @@
       </p:sp>
       <p:sp>
         <p:nvSpPr>
-          <p:cNvPr id="40" name="Text 38"/>
-          <p:cNvSpPr/>
-          <p:nvPr/>
-        </p:nvSpPr>
-        <p:spPr>
-          <a:xfrm>
-            <a:off x="6062472" y="4169664"/>
+          <p:cNvPr id="43" name="Text 41"/>
+          <p:cNvSpPr/>
+          <p:nvPr/>
+        </p:nvSpPr>
+        <p:spPr>
+          <a:xfrm>
+            <a:off x="5370141" y="4169664"/>
             <a:ext cx="685800" cy="475488"/>
           </a:xfrm>
           <a:prstGeom prst="rect">
@@ -21931,13 +21931,13 @@
       </p:sp>
       <p:sp>
         <p:nvSpPr>
-          <p:cNvPr id="41" name="Shape 39"/>
-          <p:cNvSpPr/>
-          <p:nvPr/>
-        </p:nvSpPr>
-        <p:spPr>
-          <a:xfrm>
-            <a:off x="7274052" y="4169664"/>
+          <p:cNvPr id="44" name="Shape 42"/>
+          <p:cNvSpPr/>
+          <p:nvPr/>
+        </p:nvSpPr>
+        <p:spPr>
+          <a:xfrm>
+            <a:off x="6408638" y="4169664"/>
             <a:ext cx="685800" cy="475488"/>
           </a:xfrm>
           <a:prstGeom prst="rect">
@@ -21958,13 +21958,13 @@
       </p:sp>
       <p:sp>
         <p:nvSpPr>
-          <p:cNvPr id="42" name="Text 40"/>
-          <p:cNvSpPr/>
-          <p:nvPr/>
-        </p:nvSpPr>
-        <p:spPr>
-          <a:xfrm>
-            <a:off x="7274052" y="4169664"/>
+          <p:cNvPr id="45" name="Text 43"/>
+          <p:cNvSpPr/>
+          <p:nvPr/>
+        </p:nvSpPr>
+        <p:spPr>
+          <a:xfrm>
+            <a:off x="6408638" y="4169664"/>
             <a:ext cx="685800" cy="475488"/>
           </a:xfrm>
           <a:prstGeom prst="rect">
@@ -21989,7 +21989,73 @@
                 <a:ea typeface="Trebuchet MS" pitchFamily="34" charset="-122"/>
                 <a:cs typeface="Trebuchet MS" pitchFamily="34" charset="-120"/>
               </a:rPr>
-              <a:t>ed</a:t>
+              <a:t>i</a:t>
+            </a:r>
+            <a:endParaRPr lang="en-US" sz="900" dirty="0"/>
+          </a:p>
+        </p:txBody>
+      </p:sp>
+      <p:sp>
+        <p:nvSpPr>
+          <p:cNvPr id="46" name="Shape 44"/>
+          <p:cNvSpPr/>
+          <p:nvPr/>
+        </p:nvSpPr>
+        <p:spPr>
+          <a:xfrm>
+            <a:off x="7447135" y="4169664"/>
+            <a:ext cx="685800" cy="475488"/>
+          </a:xfrm>
+          <a:prstGeom prst="rect">
+            <a:avLst>
+              <a:gd name="adj" fmla="val 7692"/>
+            </a:avLst>
+          </a:prstGeom>
+          <a:solidFill>
+            <a:srgbClr val="FFFFFF"/>
+          </a:solidFill>
+          <a:ln w="12700">
+            <a:solidFill>
+              <a:srgbClr val="DB2777"/>
+            </a:solidFill>
+            <a:prstDash val="solid"/>
+          </a:ln>
+        </p:spPr>
+      </p:sp>
+      <p:sp>
+        <p:nvSpPr>
+          <p:cNvPr id="47" name="Text 45"/>
+          <p:cNvSpPr/>
+          <p:nvPr/>
+        </p:nvSpPr>
+        <p:spPr>
+          <a:xfrm>
+            <a:off x="7447135" y="4169664"/>
+            <a:ext cx="685800" cy="475488"/>
+          </a:xfrm>
+          <a:prstGeom prst="rect">
+            <a:avLst/>
+          </a:prstGeom>
+          <a:noFill/>
+          <a:ln/>
+        </p:spPr>
+        <p:txBody>
+          <a:bodyPr wrap="square" lIns="0" tIns="0" rIns="0" bIns="0" rtlCol="0" anchor="ctr"/>
+          <a:lstStyle/>
+          <a:p>
+            <a:pPr algn="ctr" indent="0" marL="0">
+              <a:buNone/>
+            </a:pPr>
+            <a:r>
+              <a:rPr lang="en-US" sz="900" b="1" dirty="0">
+                <a:solidFill>
+                  <a:srgbClr val="9D174D"/>
+                </a:solidFill>
+                <a:latin typeface="Trebuchet MS" pitchFamily="34" charset="0"/>
+                <a:ea typeface="Trebuchet MS" pitchFamily="34" charset="-122"/>
+                <a:cs typeface="Trebuchet MS" pitchFamily="34" charset="-120"/>
+              </a:rPr>
+              <a:t>ng</a:t>
             </a:r>
             <a:endParaRPr lang="en-US" sz="900" dirty="0"/>
           </a:p>
@@ -22281,7 +22347,7 @@
                 <a:ea typeface="Calibri" pitchFamily="34" charset="-122"/>
                 <a:cs typeface="Calibri" pitchFamily="34" charset="-120"/>
               </a:rPr>
-              <a:t>Word Labs  •  wordlabs.app  •  Root: 'repair' = fix or make good again</a:t>
+              <a:t>Word Labs  •  wordlabs.app  •  Root: 'repair' = fix or restore something broken</a:t>
             </a:r>
             <a:endParaRPr lang="en-US" sz="800" dirty="0"/>
           </a:p>
@@ -23108,7 +23174,7 @@
                 <a:ea typeface="Calibri" pitchFamily="34" charset="-122"/>
                 <a:cs typeface="Calibri" pitchFamily="34" charset="-120"/>
               </a:rPr>
-              <a:t>Word Labs  •  wordlabs.app  •  Root: 'repair' = fix or make good again</a:t>
+              <a:t>Word Labs  •  wordlabs.app  •  Root: 'repair' = fix or restore something broken</a:t>
             </a:r>
             <a:endParaRPr lang="en-US" sz="800" dirty="0"/>
           </a:p>
@@ -23425,7 +23491,7 @@
                 <a:ea typeface="Calibri" pitchFamily="34" charset="-122"/>
                 <a:cs typeface="Calibri" pitchFamily="34" charset="-120"/>
               </a:rPr>
-              <a:t>to fix or restore</a:t>
+              <a:t>fix or restore</a:t>
             </a:r>
             <a:endParaRPr lang="en-US" sz="850" dirty="0"/>
           </a:p>
@@ -24093,7 +24159,7 @@
                 <a:ea typeface="Calibri" pitchFamily="34" charset="-122"/>
                 <a:cs typeface="Calibri" pitchFamily="34" charset="-120"/>
               </a:rPr>
-              <a:t>Word Labs  •  wordlabs.app  •  Root: 'repair' = fix or make good again</a:t>
+              <a:t>Word Labs  •  wordlabs.app  •  Root: 'repair' = fix or restore something broken</a:t>
             </a:r>
             <a:endParaRPr lang="en-US" sz="800" dirty="0"/>
           </a:p>
@@ -24166,7 +24232,7 @@
                 <a:ea typeface="Trebuchet MS" pitchFamily="34" charset="-122"/>
                 <a:cs typeface="Trebuchet MS" pitchFamily="34" charset="-120"/>
               </a:rPr>
-              <a:t>We are learning that the root 'repair' means 'fix or make good again'.</a:t>
+              <a:t>We are learning that the root 'repair' means 'fix or restore something broken'.</a:t>
             </a:r>
             <a:endParaRPr lang="en-US" sz="2000" dirty="0"/>
           </a:p>
@@ -24812,7 +24878,7 @@
                 <a:ea typeface="Calibri" pitchFamily="34" charset="-122"/>
                 <a:cs typeface="Calibri" pitchFamily="34" charset="-120"/>
               </a:rPr>
-              <a:t>Word Labs  •  wordlabs.app  •  Root: 'repair' = fix or make good again</a:t>
+              <a:t>Word Labs  •  wordlabs.app  •  Root: 'repair' = fix or restore something broken</a:t>
             </a:r>
             <a:endParaRPr lang="en-US" sz="800" dirty="0"/>
           </a:p>
@@ -25129,7 +25195,7 @@
                 <a:ea typeface="Calibri" pitchFamily="34" charset="-122"/>
                 <a:cs typeface="Calibri" pitchFamily="34" charset="-120"/>
               </a:rPr>
-              <a:t>to fix or restore</a:t>
+              <a:t>fix or restore</a:t>
             </a:r>
             <a:endParaRPr lang="en-US" sz="850" dirty="0"/>
           </a:p>
@@ -26139,7 +26205,7 @@
                 <a:ea typeface="Calibri" pitchFamily="34" charset="-122"/>
                 <a:cs typeface="Calibri" pitchFamily="34" charset="-120"/>
               </a:rPr>
-              <a:t>Word Labs  •  wordlabs.app  •  Root: 'repair' = fix or make good again</a:t>
+              <a:t>Word Labs  •  wordlabs.app  •  Root: 'repair' = fix or restore something broken</a:t>
             </a:r>
             <a:endParaRPr lang="en-US" sz="800" dirty="0"/>
           </a:p>
@@ -26456,7 +26522,7 @@
                 <a:ea typeface="Calibri" pitchFamily="34" charset="-122"/>
                 <a:cs typeface="Calibri" pitchFamily="34" charset="-120"/>
               </a:rPr>
-              <a:t>to fix or restore</a:t>
+              <a:t>fix or restore</a:t>
             </a:r>
             <a:endParaRPr lang="en-US" sz="850" dirty="0"/>
           </a:p>
@@ -27889,7 +27955,7 @@
                 <a:ea typeface="Calibri" pitchFamily="34" charset="-122"/>
                 <a:cs typeface="Calibri" pitchFamily="34" charset="-120"/>
               </a:rPr>
-              <a:t>Word Labs  •  wordlabs.app  •  Root: 'repair' = fix or make good again</a:t>
+              <a:t>Word Labs  •  wordlabs.app  •  Root: 'repair' = fix or restore something broken</a:t>
             </a:r>
             <a:endParaRPr lang="en-US" sz="800" dirty="0"/>
           </a:p>
@@ -28028,7 +28094,7 @@
                 <a:ea typeface="Trebuchet MS" pitchFamily="34" charset="-122"/>
                 <a:cs typeface="Trebuchet MS" pitchFamily="34" charset="-120"/>
               </a:rPr>
-              <a:t>irreparable</a:t>
+              <a:t>repairs</a:t>
             </a:r>
             <a:endParaRPr lang="en-US" sz="2800" dirty="0"/>
           </a:p>
@@ -28716,7 +28782,7 @@
                 <a:ea typeface="Calibri" pitchFamily="34" charset="-122"/>
                 <a:cs typeface="Calibri" pitchFamily="34" charset="-120"/>
               </a:rPr>
-              <a:t>Word Labs  •  wordlabs.app  •  Root: 'repair' = fix or make good again</a:t>
+              <a:t>Word Labs  •  wordlabs.app  •  Root: 'repair' = fix or restore something broken</a:t>
             </a:r>
             <a:endParaRPr lang="en-US" sz="800" dirty="0"/>
           </a:p>
@@ -28855,7 +28921,7 @@
                 <a:ea typeface="Trebuchet MS" pitchFamily="34" charset="-122"/>
                 <a:cs typeface="Trebuchet MS" pitchFamily="34" charset="-120"/>
               </a:rPr>
-              <a:t>irreparable</a:t>
+              <a:t>repairs</a:t>
             </a:r>
             <a:endParaRPr lang="en-US" sz="2800" dirty="0"/>
           </a:p>
@@ -28935,7 +29001,7 @@
         </p:nvSpPr>
         <p:spPr>
           <a:xfrm>
-            <a:off x="2221992" y="2258568"/>
+            <a:off x="2938272" y="2258568"/>
             <a:ext cx="1828800" cy="292608"/>
           </a:xfrm>
           <a:prstGeom prst="rect">
@@ -28944,11 +29010,11 @@
             </a:avLst>
           </a:prstGeom>
           <a:solidFill>
-            <a:srgbClr val="DDD6FE"/>
+            <a:srgbClr val="CCFBF1"/>
           </a:solidFill>
           <a:ln w="19050">
             <a:solidFill>
-              <a:srgbClr val="7C3AED"/>
+              <a:srgbClr val="0D9488"/>
             </a:solidFill>
             <a:prstDash val="solid"/>
           </a:ln>
@@ -28969,7 +29035,7 @@
         </p:nvSpPr>
         <p:spPr>
           <a:xfrm>
-            <a:off x="2221992" y="2258568"/>
+            <a:off x="2938272" y="2258568"/>
             <a:ext cx="1828800" cy="292608"/>
           </a:xfrm>
           <a:prstGeom prst="rect">
@@ -28988,13 +29054,13 @@
             <a:r>
               <a:rPr lang="en-US" sz="1300" b="1" dirty="0">
                 <a:solidFill>
-                  <a:srgbClr val="4C1D95"/>
+                  <a:srgbClr val="0F766E"/>
                 </a:solidFill>
                 <a:latin typeface="Trebuchet MS" pitchFamily="34" charset="0"/>
                 <a:ea typeface="Trebuchet MS" pitchFamily="34" charset="-122"/>
                 <a:cs typeface="Trebuchet MS" pitchFamily="34" charset="-120"/>
               </a:rPr>
-              <a:t>ir</a:t>
+              <a:t>repair</a:t>
             </a:r>
             <a:endParaRPr lang="en-US" sz="1300" dirty="0"/>
           </a:p>
@@ -29008,7 +29074,7 @@
         </p:nvSpPr>
         <p:spPr>
           <a:xfrm>
-            <a:off x="2221992" y="2569464"/>
+            <a:off x="2938272" y="2569464"/>
             <a:ext cx="1828800" cy="201168"/>
           </a:xfrm>
           <a:prstGeom prst="rect">
@@ -29033,7 +29099,7 @@
                 <a:ea typeface="Calibri" pitchFamily="34" charset="-122"/>
                 <a:cs typeface="Calibri" pitchFamily="34" charset="-120"/>
               </a:rPr>
-              <a:t>not</a:t>
+              <a:t>fix or restore</a:t>
             </a:r>
             <a:endParaRPr lang="en-US" sz="850" dirty="0"/>
           </a:p>
@@ -29041,52 +29107,13 @@
       </p:sp>
       <p:sp>
         <p:nvSpPr>
-          <p:cNvPr id="19" name="Text 17"/>
-          <p:cNvSpPr/>
-          <p:nvPr/>
-        </p:nvSpPr>
-        <p:spPr>
-          <a:xfrm>
-            <a:off x="2221992" y="2752344"/>
-            <a:ext cx="1828800" cy="182880"/>
-          </a:xfrm>
-          <a:prstGeom prst="rect">
-            <a:avLst/>
-          </a:prstGeom>
-          <a:noFill/>
-          <a:ln/>
-        </p:spPr>
-        <p:txBody>
-          <a:bodyPr wrap="square" lIns="0" tIns="0" rIns="0" bIns="0" rtlCol="0" anchor="t"/>
-          <a:lstStyle/>
-          <a:p>
-            <a:pPr algn="ctr" indent="0" marL="0">
-              <a:buNone/>
-            </a:pPr>
-            <a:r>
-              <a:rPr lang="en-US" sz="700" i="1" dirty="0">
-                <a:solidFill>
-                  <a:srgbClr val="94A3B8"/>
-                </a:solidFill>
-                <a:latin typeface="Calibri" pitchFamily="34" charset="0"/>
-                <a:ea typeface="Calibri" pitchFamily="34" charset="-122"/>
-                <a:cs typeface="Calibri" pitchFamily="34" charset="-120"/>
-              </a:rPr>
-              <a:t>in → ir before 'r'</a:t>
-            </a:r>
-            <a:endParaRPr lang="en-US" sz="700" dirty="0"/>
-          </a:p>
-        </p:txBody>
-      </p:sp>
-      <p:sp>
-        <p:nvSpPr>
-          <p:cNvPr id="20" name="Shape 18"/>
-          <p:cNvSpPr/>
-          <p:nvPr/>
-        </p:nvSpPr>
-        <p:spPr>
-          <a:xfrm>
-            <a:off x="4370832" y="2258568"/>
+          <p:cNvPr id="19" name="Shape 17"/>
+          <p:cNvSpPr/>
+          <p:nvPr/>
+        </p:nvSpPr>
+        <p:spPr>
+          <a:xfrm>
+            <a:off x="5803392" y="2258568"/>
             <a:ext cx="1828800" cy="292608"/>
           </a:xfrm>
           <a:prstGeom prst="rect">
@@ -29095,11 +29122,11 @@
             </a:avLst>
           </a:prstGeom>
           <a:solidFill>
-            <a:srgbClr val="CCFBF1"/>
+            <a:srgbClr val="FCE7F3"/>
           </a:solidFill>
           <a:ln w="19050">
             <a:solidFill>
-              <a:srgbClr val="0D9488"/>
+              <a:srgbClr val="DB2777"/>
             </a:solidFill>
             <a:prstDash val="solid"/>
           </a:ln>
@@ -29114,13 +29141,13 @@
       </p:sp>
       <p:sp>
         <p:nvSpPr>
-          <p:cNvPr id="21" name="Text 19"/>
-          <p:cNvSpPr/>
-          <p:nvPr/>
-        </p:nvSpPr>
-        <p:spPr>
-          <a:xfrm>
-            <a:off x="4370832" y="2258568"/>
+          <p:cNvPr id="20" name="Text 18"/>
+          <p:cNvSpPr/>
+          <p:nvPr/>
+        </p:nvSpPr>
+        <p:spPr>
+          <a:xfrm>
+            <a:off x="5803392" y="2258568"/>
             <a:ext cx="1828800" cy="292608"/>
           </a:xfrm>
           <a:prstGeom prst="rect">
@@ -29139,13 +29166,13 @@
             <a:r>
               <a:rPr lang="en-US" sz="1300" b="1" dirty="0">
                 <a:solidFill>
-                  <a:srgbClr val="0F766E"/>
+                  <a:srgbClr val="9D174D"/>
                 </a:solidFill>
                 <a:latin typeface="Trebuchet MS" pitchFamily="34" charset="0"/>
                 <a:ea typeface="Trebuchet MS" pitchFamily="34" charset="-122"/>
                 <a:cs typeface="Trebuchet MS" pitchFamily="34" charset="-120"/>
               </a:rPr>
-              <a:t>repair</a:t>
+              <a:t>s</a:t>
             </a:r>
             <a:endParaRPr lang="en-US" sz="1300" dirty="0"/>
           </a:p>
@@ -29153,13 +29180,13 @@
       </p:sp>
       <p:sp>
         <p:nvSpPr>
-          <p:cNvPr id="22" name="Text 20"/>
-          <p:cNvSpPr/>
-          <p:nvPr/>
-        </p:nvSpPr>
-        <p:spPr>
-          <a:xfrm>
-            <a:off x="4370832" y="2569464"/>
+          <p:cNvPr id="21" name="Text 19"/>
+          <p:cNvSpPr/>
+          <p:nvPr/>
+        </p:nvSpPr>
+        <p:spPr>
+          <a:xfrm>
+            <a:off x="5803392" y="2569464"/>
             <a:ext cx="1828800" cy="201168"/>
           </a:xfrm>
           <a:prstGeom prst="rect">
@@ -29184,7 +29211,7 @@
                 <a:ea typeface="Calibri" pitchFamily="34" charset="-122"/>
                 <a:cs typeface="Calibri" pitchFamily="34" charset="-120"/>
               </a:rPr>
-              <a:t>to fix or restore</a:t>
+              <a:t>more than one, or ongoing work</a:t>
             </a:r>
             <a:endParaRPr lang="en-US" sz="850" dirty="0"/>
           </a:p>
@@ -29192,76 +29219,96 @@
       </p:sp>
       <p:sp>
         <p:nvSpPr>
-          <p:cNvPr id="23" name="Shape 21"/>
-          <p:cNvSpPr/>
-          <p:nvPr/>
-        </p:nvSpPr>
-        <p:spPr>
-          <a:xfrm>
-            <a:off x="6519672" y="2258568"/>
-            <a:ext cx="1828800" cy="292608"/>
+          <p:cNvPr id="22" name="Shape 20"/>
+          <p:cNvSpPr/>
+          <p:nvPr/>
+        </p:nvSpPr>
+        <p:spPr>
+          <a:xfrm>
+            <a:off x="365760" y="3273552"/>
+            <a:ext cx="1371600" cy="658368"/>
           </a:xfrm>
           <a:prstGeom prst="rect">
             <a:avLst>
-              <a:gd name="adj" fmla="val 25000"/>
+              <a:gd name="adj" fmla="val 8333"/>
             </a:avLst>
           </a:prstGeom>
           <a:solidFill>
-            <a:srgbClr val="FCE7F3"/>
-          </a:solidFill>
-          <a:ln w="19050">
-            <a:solidFill>
-              <a:srgbClr val="DB2777"/>
-            </a:solidFill>
-            <a:prstDash val="solid"/>
-          </a:ln>
-          <a:effectLst>
-            <a:outerShdw sx="100000" sy="100000" kx="0" ky="0" algn="bl" rotWithShape="0" blurRad="101600" dist="38100" dir="8100000">
-              <a:srgbClr val="000000">
-                <a:alpha val="12000"/>
-              </a:srgbClr>
-            </a:outerShdw>
-          </a:effectLst>
-        </p:spPr>
-      </p:sp>
-      <p:sp>
-        <p:nvSpPr>
-          <p:cNvPr id="24" name="Text 22"/>
-          <p:cNvSpPr/>
-          <p:nvPr/>
-        </p:nvSpPr>
-        <p:spPr>
-          <a:xfrm>
-            <a:off x="6519672" y="2258568"/>
-            <a:ext cx="1828800" cy="292608"/>
-          </a:xfrm>
-          <a:prstGeom prst="rect">
-            <a:avLst/>
-          </a:prstGeom>
-          <a:noFill/>
-          <a:ln/>
-        </p:spPr>
-        <p:txBody>
-          <a:bodyPr wrap="square" lIns="0" tIns="0" rIns="0" bIns="0" rtlCol="0" anchor="ctr"/>
-          <a:lstStyle/>
-          <a:p>
-            <a:pPr algn="ctr" indent="0" marL="0">
-              <a:buNone/>
-            </a:pPr>
-            <a:r>
-              <a:rPr lang="en-US" sz="1300" b="1" dirty="0">
-                <a:solidFill>
-                  <a:srgbClr val="9D174D"/>
+            <a:srgbClr val="E2E8F0"/>
+          </a:solidFill>
+          <a:ln w="12700">
+            <a:solidFill>
+              <a:srgbClr val="E2E8F0"/>
+            </a:solidFill>
+            <a:prstDash val="solid"/>
+          </a:ln>
+        </p:spPr>
+      </p:sp>
+      <p:sp>
+        <p:nvSpPr>
+          <p:cNvPr id="23" name="Text 21"/>
+          <p:cNvSpPr/>
+          <p:nvPr/>
+        </p:nvSpPr>
+        <p:spPr>
+          <a:xfrm>
+            <a:off x="365760" y="3273552"/>
+            <a:ext cx="1371600" cy="658368"/>
+          </a:xfrm>
+          <a:prstGeom prst="rect">
+            <a:avLst/>
+          </a:prstGeom>
+          <a:noFill/>
+          <a:ln/>
+        </p:spPr>
+        <p:txBody>
+          <a:bodyPr wrap="square" lIns="0" tIns="0" rIns="0" bIns="0" rtlCol="0" anchor="ctr"/>
+          <a:lstStyle/>
+          <a:p>
+            <a:pPr algn="ctr" indent="0" marL="0">
+              <a:buNone/>
+            </a:pPr>
+            <a:r>
+              <a:rPr lang="en-US" sz="1100" b="1" dirty="0">
+                <a:solidFill>
+                  <a:srgbClr val="475569"/>
                 </a:solidFill>
                 <a:latin typeface="Trebuchet MS" pitchFamily="34" charset="0"/>
                 <a:ea typeface="Trebuchet MS" pitchFamily="34" charset="-122"/>
                 <a:cs typeface="Trebuchet MS" pitchFamily="34" charset="-120"/>
               </a:rPr>
-              <a:t>able</a:t>
-            </a:r>
-            <a:endParaRPr lang="en-US" sz="1300" dirty="0"/>
-          </a:p>
-        </p:txBody>
+              <a:t>Syllables</a:t>
+            </a:r>
+            <a:endParaRPr lang="en-US" sz="1100" dirty="0"/>
+          </a:p>
+        </p:txBody>
+      </p:sp>
+      <p:sp>
+        <p:nvSpPr>
+          <p:cNvPr id="24" name="Shape 22"/>
+          <p:cNvSpPr/>
+          <p:nvPr/>
+        </p:nvSpPr>
+        <p:spPr>
+          <a:xfrm>
+            <a:off x="1874520" y="3273552"/>
+            <a:ext cx="6903720" cy="658368"/>
+          </a:xfrm>
+          <a:prstGeom prst="rect">
+            <a:avLst>
+              <a:gd name="adj" fmla="val 8333"/>
+            </a:avLst>
+          </a:prstGeom>
+          <a:solidFill>
+            <a:srgbClr val="F8FAFC"/>
+          </a:solidFill>
+          <a:ln w="12700">
+            <a:solidFill>
+              <a:srgbClr val="E2E8F0"/>
+            </a:solidFill>
+            <a:prstDash val="dash"/>
+          </a:ln>
+        </p:spPr>
       </p:sp>
       <p:sp>
         <p:nvSpPr>
@@ -29271,34 +29318,34 @@
         </p:nvSpPr>
         <p:spPr>
           <a:xfrm>
-            <a:off x="6519672" y="2569464"/>
-            <a:ext cx="1828800" cy="201168"/>
-          </a:xfrm>
-          <a:prstGeom prst="rect">
-            <a:avLst/>
-          </a:prstGeom>
-          <a:noFill/>
-          <a:ln/>
-        </p:spPr>
-        <p:txBody>
-          <a:bodyPr wrap="square" lIns="0" tIns="0" rIns="0" bIns="0" rtlCol="0" anchor="t"/>
-          <a:lstStyle/>
-          <a:p>
-            <a:pPr algn="ctr" indent="0" marL="0">
-              <a:buNone/>
-            </a:pPr>
-            <a:r>
-              <a:rPr lang="en-US" sz="850" dirty="0">
-                <a:solidFill>
-                  <a:srgbClr val="475569"/>
+            <a:off x="1874520" y="3273552"/>
+            <a:ext cx="6903720" cy="658368"/>
+          </a:xfrm>
+          <a:prstGeom prst="rect">
+            <a:avLst/>
+          </a:prstGeom>
+          <a:noFill/>
+          <a:ln/>
+        </p:spPr>
+        <p:txBody>
+          <a:bodyPr wrap="square" rtlCol="0" anchor="ctr"/>
+          <a:lstStyle/>
+          <a:p>
+            <a:pPr algn="ctr" indent="0" marL="0">
+              <a:buNone/>
+            </a:pPr>
+            <a:r>
+              <a:rPr lang="en-US" sz="1100" i="1" dirty="0">
+                <a:solidFill>
+                  <a:srgbClr val="CBD5E1"/>
                 </a:solidFill>
                 <a:latin typeface="Calibri" pitchFamily="34" charset="0"/>
                 <a:ea typeface="Calibri" pitchFamily="34" charset="-122"/>
                 <a:cs typeface="Calibri" pitchFamily="34" charset="-120"/>
               </a:rPr>
-              <a:t>able to be done</a:t>
-            </a:r>
-            <a:endParaRPr lang="en-US" sz="850" dirty="0"/>
+              <a:t>Write here...</a:t>
+            </a:r>
+            <a:endParaRPr lang="en-US" sz="1100" dirty="0"/>
           </a:p>
         </p:txBody>
       </p:sp>
@@ -29310,12 +29357,12 @@
         </p:nvSpPr>
         <p:spPr>
           <a:xfrm>
-            <a:off x="365760" y="3273552"/>
-            <a:ext cx="1371600" cy="658368"/>
+            <a:off x="365760" y="4096512"/>
+            <a:ext cx="1371600" cy="804672"/>
           </a:xfrm>
           <a:prstGeom prst="rect">
             <a:avLst>
-              <a:gd name="adj" fmla="val 8333"/>
+              <a:gd name="adj" fmla="val 6818"/>
             </a:avLst>
           </a:prstGeom>
           <a:solidFill>
@@ -29337,8 +29384,8 @@
         </p:nvSpPr>
         <p:spPr>
           <a:xfrm>
-            <a:off x="365760" y="3273552"/>
-            <a:ext cx="1371600" cy="658368"/>
+            <a:off x="365760" y="4096512"/>
+            <a:ext cx="1371600" cy="804672"/>
           </a:xfrm>
           <a:prstGeom prst="rect">
             <a:avLst/>
@@ -29362,7 +29409,7 @@
                 <a:ea typeface="Trebuchet MS" pitchFamily="34" charset="-122"/>
                 <a:cs typeface="Trebuchet MS" pitchFamily="34" charset="-120"/>
               </a:rPr>
-              <a:t>Syllables</a:t>
+              <a:t>Phonemes</a:t>
             </a:r>
             <a:endParaRPr lang="en-US" sz="1100" dirty="0"/>
           </a:p>
@@ -29376,74 +29423,8 @@
         </p:nvSpPr>
         <p:spPr>
           <a:xfrm>
-            <a:off x="1874520" y="3273552"/>
-            <a:ext cx="6903720" cy="658368"/>
-          </a:xfrm>
-          <a:prstGeom prst="rect">
-            <a:avLst>
-              <a:gd name="adj" fmla="val 8333"/>
-            </a:avLst>
-          </a:prstGeom>
-          <a:solidFill>
-            <a:srgbClr val="F8FAFC"/>
-          </a:solidFill>
-          <a:ln w="12700">
-            <a:solidFill>
-              <a:srgbClr val="E2E8F0"/>
-            </a:solidFill>
-            <a:prstDash val="dash"/>
-          </a:ln>
-        </p:spPr>
-      </p:sp>
-      <p:sp>
-        <p:nvSpPr>
-          <p:cNvPr id="29" name="Text 27"/>
-          <p:cNvSpPr/>
-          <p:nvPr/>
-        </p:nvSpPr>
-        <p:spPr>
-          <a:xfrm>
-            <a:off x="1874520" y="3273552"/>
-            <a:ext cx="6903720" cy="658368"/>
-          </a:xfrm>
-          <a:prstGeom prst="rect">
-            <a:avLst/>
-          </a:prstGeom>
-          <a:noFill/>
-          <a:ln/>
-        </p:spPr>
-        <p:txBody>
-          <a:bodyPr wrap="square" rtlCol="0" anchor="ctr"/>
-          <a:lstStyle/>
-          <a:p>
-            <a:pPr algn="ctr" indent="0" marL="0">
-              <a:buNone/>
-            </a:pPr>
-            <a:r>
-              <a:rPr lang="en-US" sz="1100" i="1" dirty="0">
-                <a:solidFill>
-                  <a:srgbClr val="CBD5E1"/>
-                </a:solidFill>
-                <a:latin typeface="Calibri" pitchFamily="34" charset="0"/>
-                <a:ea typeface="Calibri" pitchFamily="34" charset="-122"/>
-                <a:cs typeface="Calibri" pitchFamily="34" charset="-120"/>
-              </a:rPr>
-              <a:t>Write here...</a:t>
-            </a:r>
-            <a:endParaRPr lang="en-US" sz="1100" dirty="0"/>
-          </a:p>
-        </p:txBody>
-      </p:sp>
-      <p:sp>
-        <p:nvSpPr>
-          <p:cNvPr id="30" name="Shape 28"/>
-          <p:cNvSpPr/>
-          <p:nvPr/>
-        </p:nvSpPr>
-        <p:spPr>
-          <a:xfrm>
-            <a:off x="365760" y="4096512"/>
-            <a:ext cx="1371600" cy="804672"/>
+            <a:off x="1874520" y="4096512"/>
+            <a:ext cx="6903720" cy="804672"/>
           </a:xfrm>
           <a:prstGeom prst="rect">
             <a:avLst>
@@ -29451,85 +29432,19 @@
             </a:avLst>
           </a:prstGeom>
           <a:solidFill>
-            <a:srgbClr val="E2E8F0"/>
+            <a:srgbClr val="F8FAFC"/>
           </a:solidFill>
           <a:ln w="12700">
             <a:solidFill>
               <a:srgbClr val="E2E8F0"/>
             </a:solidFill>
-            <a:prstDash val="solid"/>
-          </a:ln>
-        </p:spPr>
-      </p:sp>
-      <p:sp>
-        <p:nvSpPr>
-          <p:cNvPr id="31" name="Text 29"/>
-          <p:cNvSpPr/>
-          <p:nvPr/>
-        </p:nvSpPr>
-        <p:spPr>
-          <a:xfrm>
-            <a:off x="365760" y="4096512"/>
-            <a:ext cx="1371600" cy="804672"/>
-          </a:xfrm>
-          <a:prstGeom prst="rect">
-            <a:avLst/>
-          </a:prstGeom>
-          <a:noFill/>
-          <a:ln/>
-        </p:spPr>
-        <p:txBody>
-          <a:bodyPr wrap="square" lIns="0" tIns="0" rIns="0" bIns="0" rtlCol="0" anchor="ctr"/>
-          <a:lstStyle/>
-          <a:p>
-            <a:pPr algn="ctr" indent="0" marL="0">
-              <a:buNone/>
-            </a:pPr>
-            <a:r>
-              <a:rPr lang="en-US" sz="1100" b="1" dirty="0">
-                <a:solidFill>
-                  <a:srgbClr val="475569"/>
-                </a:solidFill>
-                <a:latin typeface="Trebuchet MS" pitchFamily="34" charset="0"/>
-                <a:ea typeface="Trebuchet MS" pitchFamily="34" charset="-122"/>
-                <a:cs typeface="Trebuchet MS" pitchFamily="34" charset="-120"/>
-              </a:rPr>
-              <a:t>Phonemes</a:t>
-            </a:r>
-            <a:endParaRPr lang="en-US" sz="1100" dirty="0"/>
-          </a:p>
-        </p:txBody>
-      </p:sp>
-      <p:sp>
-        <p:nvSpPr>
-          <p:cNvPr id="32" name="Shape 30"/>
-          <p:cNvSpPr/>
-          <p:nvPr/>
-        </p:nvSpPr>
-        <p:spPr>
-          <a:xfrm>
-            <a:off x="1874520" y="4096512"/>
-            <a:ext cx="6903720" cy="804672"/>
-          </a:xfrm>
-          <a:prstGeom prst="rect">
-            <a:avLst>
-              <a:gd name="adj" fmla="val 6818"/>
-            </a:avLst>
-          </a:prstGeom>
-          <a:solidFill>
-            <a:srgbClr val="F8FAFC"/>
-          </a:solidFill>
-          <a:ln w="12700">
-            <a:solidFill>
-              <a:srgbClr val="E2E8F0"/>
-            </a:solidFill>
             <a:prstDash val="dash"/>
           </a:ln>
         </p:spPr>
       </p:sp>
       <p:sp>
         <p:nvSpPr>
-          <p:cNvPr id="33" name="Text 31"/>
+          <p:cNvPr id="29" name="Text 27"/>
           <p:cNvSpPr/>
           <p:nvPr/>
         </p:nvSpPr>
@@ -29852,7 +29767,7 @@
                 <a:ea typeface="Calibri" pitchFamily="34" charset="-122"/>
                 <a:cs typeface="Calibri" pitchFamily="34" charset="-120"/>
               </a:rPr>
-              <a:t>Word Labs  •  wordlabs.app  •  Root: 'repair' = fix or make good again</a:t>
+              <a:t>Word Labs  •  wordlabs.app  •  Root: 'repair' = fix or restore something broken</a:t>
             </a:r>
             <a:endParaRPr lang="en-US" sz="800" dirty="0"/>
           </a:p>
@@ -29991,7 +29906,7 @@
                 <a:ea typeface="Trebuchet MS" pitchFamily="34" charset="-122"/>
                 <a:cs typeface="Trebuchet MS" pitchFamily="34" charset="-120"/>
               </a:rPr>
-              <a:t>irreparable</a:t>
+              <a:t>repairs</a:t>
             </a:r>
             <a:endParaRPr lang="en-US" sz="2800" dirty="0"/>
           </a:p>
@@ -30071,7 +29986,7 @@
         </p:nvSpPr>
         <p:spPr>
           <a:xfrm>
-            <a:off x="2221992" y="2258568"/>
+            <a:off x="2938272" y="2258568"/>
             <a:ext cx="1828800" cy="292608"/>
           </a:xfrm>
           <a:prstGeom prst="rect">
@@ -30080,11 +29995,11 @@
             </a:avLst>
           </a:prstGeom>
           <a:solidFill>
-            <a:srgbClr val="DDD6FE"/>
+            <a:srgbClr val="CCFBF1"/>
           </a:solidFill>
           <a:ln w="19050">
             <a:solidFill>
-              <a:srgbClr val="7C3AED"/>
+              <a:srgbClr val="0D9488"/>
             </a:solidFill>
             <a:prstDash val="solid"/>
           </a:ln>
@@ -30105,7 +30020,7 @@
         </p:nvSpPr>
         <p:spPr>
           <a:xfrm>
-            <a:off x="2221992" y="2258568"/>
+            <a:off x="2938272" y="2258568"/>
             <a:ext cx="1828800" cy="292608"/>
           </a:xfrm>
           <a:prstGeom prst="rect">
@@ -30124,13 +30039,13 @@
             <a:r>
               <a:rPr lang="en-US" sz="1300" b="1" dirty="0">
                 <a:solidFill>
-                  <a:srgbClr val="4C1D95"/>
+                  <a:srgbClr val="0F766E"/>
                 </a:solidFill>
                 <a:latin typeface="Trebuchet MS" pitchFamily="34" charset="0"/>
                 <a:ea typeface="Trebuchet MS" pitchFamily="34" charset="-122"/>
                 <a:cs typeface="Trebuchet MS" pitchFamily="34" charset="-120"/>
               </a:rPr>
-              <a:t>ir</a:t>
+              <a:t>repair</a:t>
             </a:r>
             <a:endParaRPr lang="en-US" sz="1300" dirty="0"/>
           </a:p>
@@ -30144,7 +30059,7 @@
         </p:nvSpPr>
         <p:spPr>
           <a:xfrm>
-            <a:off x="2221992" y="2569464"/>
+            <a:off x="2938272" y="2569464"/>
             <a:ext cx="1828800" cy="201168"/>
           </a:xfrm>
           <a:prstGeom prst="rect">
@@ -30169,7 +30084,7 @@
                 <a:ea typeface="Calibri" pitchFamily="34" charset="-122"/>
                 <a:cs typeface="Calibri" pitchFamily="34" charset="-120"/>
               </a:rPr>
-              <a:t>not</a:t>
+              <a:t>fix or restore</a:t>
             </a:r>
             <a:endParaRPr lang="en-US" sz="850" dirty="0"/>
           </a:p>
@@ -30177,52 +30092,13 @@
       </p:sp>
       <p:sp>
         <p:nvSpPr>
-          <p:cNvPr id="19" name="Text 17"/>
-          <p:cNvSpPr/>
-          <p:nvPr/>
-        </p:nvSpPr>
-        <p:spPr>
-          <a:xfrm>
-            <a:off x="2221992" y="2752344"/>
-            <a:ext cx="1828800" cy="182880"/>
-          </a:xfrm>
-          <a:prstGeom prst="rect">
-            <a:avLst/>
-          </a:prstGeom>
-          <a:noFill/>
-          <a:ln/>
-        </p:spPr>
-        <p:txBody>
-          <a:bodyPr wrap="square" lIns="0" tIns="0" rIns="0" bIns="0" rtlCol="0" anchor="t"/>
-          <a:lstStyle/>
-          <a:p>
-            <a:pPr algn="ctr" indent="0" marL="0">
-              <a:buNone/>
-            </a:pPr>
-            <a:r>
-              <a:rPr lang="en-US" sz="700" i="1" dirty="0">
-                <a:solidFill>
-                  <a:srgbClr val="94A3B8"/>
-                </a:solidFill>
-                <a:latin typeface="Calibri" pitchFamily="34" charset="0"/>
-                <a:ea typeface="Calibri" pitchFamily="34" charset="-122"/>
-                <a:cs typeface="Calibri" pitchFamily="34" charset="-120"/>
-              </a:rPr>
-              <a:t>in → ir before 'r'</a:t>
-            </a:r>
-            <a:endParaRPr lang="en-US" sz="700" dirty="0"/>
-          </a:p>
-        </p:txBody>
-      </p:sp>
-      <p:sp>
-        <p:nvSpPr>
-          <p:cNvPr id="20" name="Shape 18"/>
-          <p:cNvSpPr/>
-          <p:nvPr/>
-        </p:nvSpPr>
-        <p:spPr>
-          <a:xfrm>
-            <a:off x="4370832" y="2258568"/>
+          <p:cNvPr id="19" name="Shape 17"/>
+          <p:cNvSpPr/>
+          <p:nvPr/>
+        </p:nvSpPr>
+        <p:spPr>
+          <a:xfrm>
+            <a:off x="5803392" y="2258568"/>
             <a:ext cx="1828800" cy="292608"/>
           </a:xfrm>
           <a:prstGeom prst="rect">
@@ -30231,11 +30107,11 @@
             </a:avLst>
           </a:prstGeom>
           <a:solidFill>
-            <a:srgbClr val="CCFBF1"/>
+            <a:srgbClr val="FCE7F3"/>
           </a:solidFill>
           <a:ln w="19050">
             <a:solidFill>
-              <a:srgbClr val="0D9488"/>
+              <a:srgbClr val="DB2777"/>
             </a:solidFill>
             <a:prstDash val="solid"/>
           </a:ln>
@@ -30250,13 +30126,13 @@
       </p:sp>
       <p:sp>
         <p:nvSpPr>
-          <p:cNvPr id="21" name="Text 19"/>
-          <p:cNvSpPr/>
-          <p:nvPr/>
-        </p:nvSpPr>
-        <p:spPr>
-          <a:xfrm>
-            <a:off x="4370832" y="2258568"/>
+          <p:cNvPr id="20" name="Text 18"/>
+          <p:cNvSpPr/>
+          <p:nvPr/>
+        </p:nvSpPr>
+        <p:spPr>
+          <a:xfrm>
+            <a:off x="5803392" y="2258568"/>
             <a:ext cx="1828800" cy="292608"/>
           </a:xfrm>
           <a:prstGeom prst="rect">
@@ -30275,13 +30151,13 @@
             <a:r>
               <a:rPr lang="en-US" sz="1300" b="1" dirty="0">
                 <a:solidFill>
-                  <a:srgbClr val="0F766E"/>
+                  <a:srgbClr val="9D174D"/>
                 </a:solidFill>
                 <a:latin typeface="Trebuchet MS" pitchFamily="34" charset="0"/>
                 <a:ea typeface="Trebuchet MS" pitchFamily="34" charset="-122"/>
                 <a:cs typeface="Trebuchet MS" pitchFamily="34" charset="-120"/>
               </a:rPr>
-              <a:t>repair</a:t>
+              <a:t>s</a:t>
             </a:r>
             <a:endParaRPr lang="en-US" sz="1300" dirty="0"/>
           </a:p>
@@ -30289,13 +30165,13 @@
       </p:sp>
       <p:sp>
         <p:nvSpPr>
-          <p:cNvPr id="22" name="Text 20"/>
-          <p:cNvSpPr/>
-          <p:nvPr/>
-        </p:nvSpPr>
-        <p:spPr>
-          <a:xfrm>
-            <a:off x="4370832" y="2569464"/>
+          <p:cNvPr id="21" name="Text 19"/>
+          <p:cNvSpPr/>
+          <p:nvPr/>
+        </p:nvSpPr>
+        <p:spPr>
+          <a:xfrm>
+            <a:off x="5803392" y="2569464"/>
             <a:ext cx="1828800" cy="201168"/>
           </a:xfrm>
           <a:prstGeom prst="rect">
@@ -30320,7 +30196,7 @@
                 <a:ea typeface="Calibri" pitchFamily="34" charset="-122"/>
                 <a:cs typeface="Calibri" pitchFamily="34" charset="-120"/>
               </a:rPr>
-              <a:t>to fix or restore</a:t>
+              <a:t>more than one, or ongoing work</a:t>
             </a:r>
             <a:endParaRPr lang="en-US" sz="850" dirty="0"/>
           </a:p>
@@ -30328,126 +30204,80 @@
       </p:sp>
       <p:sp>
         <p:nvSpPr>
-          <p:cNvPr id="23" name="Shape 21"/>
-          <p:cNvSpPr/>
-          <p:nvPr/>
-        </p:nvSpPr>
-        <p:spPr>
-          <a:xfrm>
-            <a:off x="6519672" y="2258568"/>
-            <a:ext cx="1828800" cy="292608"/>
+          <p:cNvPr id="22" name="Shape 20"/>
+          <p:cNvSpPr/>
+          <p:nvPr/>
+        </p:nvSpPr>
+        <p:spPr>
+          <a:xfrm>
+            <a:off x="365760" y="3273552"/>
+            <a:ext cx="1371600" cy="658368"/>
           </a:xfrm>
           <a:prstGeom prst="rect">
             <a:avLst>
-              <a:gd name="adj" fmla="val 25000"/>
+              <a:gd name="adj" fmla="val 8333"/>
             </a:avLst>
           </a:prstGeom>
           <a:solidFill>
-            <a:srgbClr val="FCE7F3"/>
-          </a:solidFill>
-          <a:ln w="19050">
-            <a:solidFill>
-              <a:srgbClr val="DB2777"/>
-            </a:solidFill>
-            <a:prstDash val="solid"/>
-          </a:ln>
-          <a:effectLst>
-            <a:outerShdw sx="100000" sy="100000" kx="0" ky="0" algn="bl" rotWithShape="0" blurRad="101600" dist="38100" dir="8100000">
-              <a:srgbClr val="000000">
-                <a:alpha val="12000"/>
-              </a:srgbClr>
-            </a:outerShdw>
-          </a:effectLst>
-        </p:spPr>
-      </p:sp>
-      <p:sp>
-        <p:nvSpPr>
-          <p:cNvPr id="24" name="Text 22"/>
-          <p:cNvSpPr/>
-          <p:nvPr/>
-        </p:nvSpPr>
-        <p:spPr>
-          <a:xfrm>
-            <a:off x="6519672" y="2258568"/>
-            <a:ext cx="1828800" cy="292608"/>
-          </a:xfrm>
-          <a:prstGeom prst="rect">
-            <a:avLst/>
-          </a:prstGeom>
-          <a:noFill/>
-          <a:ln/>
-        </p:spPr>
-        <p:txBody>
-          <a:bodyPr wrap="square" lIns="0" tIns="0" rIns="0" bIns="0" rtlCol="0" anchor="ctr"/>
-          <a:lstStyle/>
-          <a:p>
-            <a:pPr algn="ctr" indent="0" marL="0">
-              <a:buNone/>
-            </a:pPr>
-            <a:r>
-              <a:rPr lang="en-US" sz="1300" b="1" dirty="0">
-                <a:solidFill>
-                  <a:srgbClr val="9D174D"/>
+            <a:srgbClr val="E2E8F0"/>
+          </a:solidFill>
+          <a:ln w="12700">
+            <a:solidFill>
+              <a:srgbClr val="E2E8F0"/>
+            </a:solidFill>
+            <a:prstDash val="solid"/>
+          </a:ln>
+        </p:spPr>
+      </p:sp>
+      <p:sp>
+        <p:nvSpPr>
+          <p:cNvPr id="23" name="Text 21"/>
+          <p:cNvSpPr/>
+          <p:nvPr/>
+        </p:nvSpPr>
+        <p:spPr>
+          <a:xfrm>
+            <a:off x="365760" y="3273552"/>
+            <a:ext cx="1371600" cy="658368"/>
+          </a:xfrm>
+          <a:prstGeom prst="rect">
+            <a:avLst/>
+          </a:prstGeom>
+          <a:noFill/>
+          <a:ln/>
+        </p:spPr>
+        <p:txBody>
+          <a:bodyPr wrap="square" lIns="0" tIns="0" rIns="0" bIns="0" rtlCol="0" anchor="ctr"/>
+          <a:lstStyle/>
+          <a:p>
+            <a:pPr algn="ctr" indent="0" marL="0">
+              <a:buNone/>
+            </a:pPr>
+            <a:r>
+              <a:rPr lang="en-US" sz="1100" b="1" dirty="0">
+                <a:solidFill>
+                  <a:srgbClr val="475569"/>
                 </a:solidFill>
                 <a:latin typeface="Trebuchet MS" pitchFamily="34" charset="0"/>
                 <a:ea typeface="Trebuchet MS" pitchFamily="34" charset="-122"/>
                 <a:cs typeface="Trebuchet MS" pitchFamily="34" charset="-120"/>
               </a:rPr>
-              <a:t>able</a:t>
-            </a:r>
-            <a:endParaRPr lang="en-US" sz="1300" dirty="0"/>
-          </a:p>
-        </p:txBody>
-      </p:sp>
-      <p:sp>
-        <p:nvSpPr>
-          <p:cNvPr id="25" name="Text 23"/>
-          <p:cNvSpPr/>
-          <p:nvPr/>
-        </p:nvSpPr>
-        <p:spPr>
-          <a:xfrm>
-            <a:off x="6519672" y="2569464"/>
-            <a:ext cx="1828800" cy="201168"/>
-          </a:xfrm>
-          <a:prstGeom prst="rect">
-            <a:avLst/>
-          </a:prstGeom>
-          <a:noFill/>
-          <a:ln/>
-        </p:spPr>
-        <p:txBody>
-          <a:bodyPr wrap="square" lIns="0" tIns="0" rIns="0" bIns="0" rtlCol="0" anchor="t"/>
-          <a:lstStyle/>
-          <a:p>
-            <a:pPr algn="ctr" indent="0" marL="0">
-              <a:buNone/>
-            </a:pPr>
-            <a:r>
-              <a:rPr lang="en-US" sz="850" dirty="0">
-                <a:solidFill>
-                  <a:srgbClr val="475569"/>
-                </a:solidFill>
-                <a:latin typeface="Calibri" pitchFamily="34" charset="0"/>
-                <a:ea typeface="Calibri" pitchFamily="34" charset="-122"/>
-                <a:cs typeface="Calibri" pitchFamily="34" charset="-120"/>
-              </a:rPr>
-              <a:t>able to be done</a:t>
-            </a:r>
-            <a:endParaRPr lang="en-US" sz="850" dirty="0"/>
-          </a:p>
-        </p:txBody>
-      </p:sp>
-      <p:sp>
-        <p:nvSpPr>
-          <p:cNvPr id="26" name="Shape 24"/>
-          <p:cNvSpPr/>
-          <p:nvPr/>
-        </p:nvSpPr>
-        <p:spPr>
-          <a:xfrm>
-            <a:off x="365760" y="3273552"/>
-            <a:ext cx="1371600" cy="658368"/>
+              <a:t>Syllables</a:t>
+            </a:r>
+            <a:endParaRPr lang="en-US" sz="1100" dirty="0"/>
+          </a:p>
+        </p:txBody>
+      </p:sp>
+      <p:sp>
+        <p:nvSpPr>
+          <p:cNvPr id="24" name="Shape 22"/>
+          <p:cNvSpPr/>
+          <p:nvPr/>
+        </p:nvSpPr>
+        <p:spPr>
+          <a:xfrm>
+            <a:off x="1874520" y="3273552"/>
+            <a:ext cx="6903720" cy="658368"/>
           </a:xfrm>
           <a:prstGeom prst="rect">
             <a:avLst>
@@ -30455,52 +30285,118 @@
             </a:avLst>
           </a:prstGeom>
           <a:solidFill>
-            <a:srgbClr val="E2E8F0"/>
-          </a:solidFill>
-          <a:ln w="12700">
-            <a:solidFill>
-              <a:srgbClr val="E2E8F0"/>
-            </a:solidFill>
-            <a:prstDash val="solid"/>
-          </a:ln>
-        </p:spPr>
-      </p:sp>
-      <p:sp>
-        <p:nvSpPr>
-          <p:cNvPr id="27" name="Text 25"/>
-          <p:cNvSpPr/>
-          <p:nvPr/>
-        </p:nvSpPr>
-        <p:spPr>
-          <a:xfrm>
-            <a:off x="365760" y="3273552"/>
-            <a:ext cx="1371600" cy="658368"/>
-          </a:xfrm>
-          <a:prstGeom prst="rect">
-            <a:avLst/>
-          </a:prstGeom>
-          <a:noFill/>
-          <a:ln/>
-        </p:spPr>
-        <p:txBody>
-          <a:bodyPr wrap="square" lIns="0" tIns="0" rIns="0" bIns="0" rtlCol="0" anchor="ctr"/>
-          <a:lstStyle/>
-          <a:p>
-            <a:pPr algn="ctr" indent="0" marL="0">
-              <a:buNone/>
-            </a:pPr>
-            <a:r>
-              <a:rPr lang="en-US" sz="1100" b="1" dirty="0">
-                <a:solidFill>
-                  <a:srgbClr val="475569"/>
+            <a:srgbClr val="CCFBF1"/>
+          </a:solidFill>
+          <a:ln w="12700">
+            <a:solidFill>
+              <a:srgbClr val="0D9488"/>
+            </a:solidFill>
+            <a:prstDash val="solid"/>
+          </a:ln>
+        </p:spPr>
+      </p:sp>
+      <p:sp>
+        <p:nvSpPr>
+          <p:cNvPr id="25" name="Shape 23"/>
+          <p:cNvSpPr/>
+          <p:nvPr/>
+        </p:nvSpPr>
+        <p:spPr>
+          <a:xfrm>
+            <a:off x="2999232" y="3364992"/>
+            <a:ext cx="1645920" cy="475488"/>
+          </a:xfrm>
+          <a:prstGeom prst="rect">
+            <a:avLst>
+              <a:gd name="adj" fmla="val 9615"/>
+            </a:avLst>
+          </a:prstGeom>
+          <a:solidFill>
+            <a:srgbClr val="FFFFFF"/>
+          </a:solidFill>
+          <a:ln w="12700">
+            <a:solidFill>
+              <a:srgbClr val="0D9488"/>
+            </a:solidFill>
+            <a:prstDash val="solid"/>
+          </a:ln>
+        </p:spPr>
+      </p:sp>
+      <p:sp>
+        <p:nvSpPr>
+          <p:cNvPr id="26" name="Text 24"/>
+          <p:cNvSpPr/>
+          <p:nvPr/>
+        </p:nvSpPr>
+        <p:spPr>
+          <a:xfrm>
+            <a:off x="2999232" y="3364992"/>
+            <a:ext cx="1645920" cy="475488"/>
+          </a:xfrm>
+          <a:prstGeom prst="rect">
+            <a:avLst/>
+          </a:prstGeom>
+          <a:noFill/>
+          <a:ln/>
+        </p:spPr>
+        <p:txBody>
+          <a:bodyPr wrap="square" lIns="0" tIns="0" rIns="0" bIns="0" rtlCol="0" anchor="ctr"/>
+          <a:lstStyle/>
+          <a:p>
+            <a:pPr algn="ctr" indent="0" marL="0">
+              <a:buNone/>
+            </a:pPr>
+            <a:r>
+              <a:rPr lang="en-US" sz="1400" b="1" dirty="0">
+                <a:solidFill>
+                  <a:srgbClr val="0D9488"/>
                 </a:solidFill>
                 <a:latin typeface="Trebuchet MS" pitchFamily="34" charset="0"/>
                 <a:ea typeface="Trebuchet MS" pitchFamily="34" charset="-122"/>
                 <a:cs typeface="Trebuchet MS" pitchFamily="34" charset="-120"/>
               </a:rPr>
-              <a:t>Syllables</a:t>
-            </a:r>
-            <a:endParaRPr lang="en-US" sz="1100" dirty="0"/>
+              <a:t>re</a:t>
+            </a:r>
+            <a:endParaRPr lang="en-US" sz="1400" dirty="0"/>
+          </a:p>
+        </p:txBody>
+      </p:sp>
+      <p:sp>
+        <p:nvSpPr>
+          <p:cNvPr id="27" name="Text 25"/>
+          <p:cNvSpPr/>
+          <p:nvPr/>
+        </p:nvSpPr>
+        <p:spPr>
+          <a:xfrm>
+            <a:off x="4645152" y="3364992"/>
+            <a:ext cx="1097280" cy="475488"/>
+          </a:xfrm>
+          <a:prstGeom prst="rect">
+            <a:avLst/>
+          </a:prstGeom>
+          <a:noFill/>
+          <a:ln/>
+        </p:spPr>
+        <p:txBody>
+          <a:bodyPr wrap="square" lIns="0" tIns="0" rIns="0" bIns="0" rtlCol="0" anchor="ctr"/>
+          <a:lstStyle/>
+          <a:p>
+            <a:pPr algn="ctr" indent="0" marL="0">
+              <a:buNone/>
+            </a:pPr>
+            <a:r>
+              <a:rPr lang="en-US" sz="1600" b="1" dirty="0">
+                <a:solidFill>
+                  <a:srgbClr val="0D9488"/>
+                </a:solidFill>
+                <a:latin typeface="Trebuchet MS" pitchFamily="34" charset="0"/>
+                <a:ea typeface="Trebuchet MS" pitchFamily="34" charset="-122"/>
+                <a:cs typeface="Trebuchet MS" pitchFamily="34" charset="-120"/>
+              </a:rPr>
+              <a:t>·</a:t>
+            </a:r>
+            <a:endParaRPr lang="en-US" sz="1600" dirty="0"/>
           </a:p>
         </p:txBody>
       </p:sp>
@@ -30512,35 +30408,8 @@
         </p:nvSpPr>
         <p:spPr>
           <a:xfrm>
-            <a:off x="1874520" y="3273552"/>
-            <a:ext cx="6903720" cy="658368"/>
-          </a:xfrm>
-          <a:prstGeom prst="rect">
-            <a:avLst>
-              <a:gd name="adj" fmla="val 8333"/>
-            </a:avLst>
-          </a:prstGeom>
-          <a:solidFill>
-            <a:srgbClr val="CCFBF1"/>
-          </a:solidFill>
-          <a:ln w="12700">
-            <a:solidFill>
-              <a:srgbClr val="0D9488"/>
-            </a:solidFill>
-            <a:prstDash val="solid"/>
-          </a:ln>
-        </p:spPr>
-      </p:sp>
-      <p:sp>
-        <p:nvSpPr>
-          <p:cNvPr id="29" name="Shape 27"/>
-          <p:cNvSpPr/>
-          <p:nvPr/>
-        </p:nvSpPr>
-        <p:spPr>
-          <a:xfrm>
-            <a:off x="1978152" y="3364992"/>
-            <a:ext cx="1225296" cy="475488"/>
+            <a:off x="5742432" y="3364992"/>
+            <a:ext cx="1645920" cy="475488"/>
           </a:xfrm>
           <a:prstGeom prst="rect">
             <a:avLst>
@@ -30560,14 +30429,14 @@
       </p:sp>
       <p:sp>
         <p:nvSpPr>
-          <p:cNvPr id="30" name="Text 28"/>
-          <p:cNvSpPr/>
-          <p:nvPr/>
-        </p:nvSpPr>
-        <p:spPr>
-          <a:xfrm>
-            <a:off x="1978152" y="3364992"/>
-            <a:ext cx="1225296" cy="475488"/>
+          <p:cNvPr id="29" name="Text 27"/>
+          <p:cNvSpPr/>
+          <p:nvPr/>
+        </p:nvSpPr>
+        <p:spPr>
+          <a:xfrm>
+            <a:off x="5742432" y="3364992"/>
+            <a:ext cx="1645920" cy="475488"/>
           </a:xfrm>
           <a:prstGeom prst="rect">
             <a:avLst/>
@@ -30591,7 +30460,7 @@
                 <a:ea typeface="Trebuchet MS" pitchFamily="34" charset="-122"/>
                 <a:cs typeface="Trebuchet MS" pitchFamily="34" charset="-120"/>
               </a:rPr>
-              <a:t>ir</a:t>
+              <a:t>pairs</a:t>
             </a:r>
             <a:endParaRPr lang="en-US" sz="1400" dirty="0"/>
           </a:p>
@@ -30599,40 +30468,67 @@
       </p:sp>
       <p:sp>
         <p:nvSpPr>
+          <p:cNvPr id="30" name="Shape 28"/>
+          <p:cNvSpPr/>
+          <p:nvPr/>
+        </p:nvSpPr>
+        <p:spPr>
+          <a:xfrm>
+            <a:off x="365760" y="4096512"/>
+            <a:ext cx="1371600" cy="804672"/>
+          </a:xfrm>
+          <a:prstGeom prst="rect">
+            <a:avLst>
+              <a:gd name="adj" fmla="val 6818"/>
+            </a:avLst>
+          </a:prstGeom>
+          <a:solidFill>
+            <a:srgbClr val="E2E8F0"/>
+          </a:solidFill>
+          <a:ln w="12700">
+            <a:solidFill>
+              <a:srgbClr val="E2E8F0"/>
+            </a:solidFill>
+            <a:prstDash val="solid"/>
+          </a:ln>
+        </p:spPr>
+      </p:sp>
+      <p:sp>
+        <p:nvSpPr>
           <p:cNvPr id="31" name="Text 29"/>
           <p:cNvSpPr/>
           <p:nvPr/>
         </p:nvSpPr>
         <p:spPr>
           <a:xfrm>
-            <a:off x="3203448" y="3364992"/>
-            <a:ext cx="76200" cy="475488"/>
-          </a:xfrm>
-          <a:prstGeom prst="rect">
-            <a:avLst/>
-          </a:prstGeom>
-          <a:noFill/>
-          <a:ln/>
-        </p:spPr>
-        <p:txBody>
-          <a:bodyPr wrap="square" lIns="0" tIns="0" rIns="0" bIns="0" rtlCol="0" anchor="ctr"/>
-          <a:lstStyle/>
-          <a:p>
-            <a:pPr algn="ctr" indent="0" marL="0">
-              <a:buNone/>
-            </a:pPr>
-            <a:r>
-              <a:rPr lang="en-US" sz="1600" b="1" dirty="0">
-                <a:solidFill>
-                  <a:srgbClr val="0D9488"/>
+            <a:off x="365760" y="4096512"/>
+            <a:ext cx="1371600" cy="804672"/>
+          </a:xfrm>
+          <a:prstGeom prst="rect">
+            <a:avLst/>
+          </a:prstGeom>
+          <a:noFill/>
+          <a:ln/>
+        </p:spPr>
+        <p:txBody>
+          <a:bodyPr wrap="square" lIns="0" tIns="0" rIns="0" bIns="0" rtlCol="0" anchor="ctr"/>
+          <a:lstStyle/>
+          <a:p>
+            <a:pPr algn="ctr" indent="0" marL="0">
+              <a:buNone/>
+            </a:pPr>
+            <a:r>
+              <a:rPr lang="en-US" sz="1100" b="1" dirty="0">
+                <a:solidFill>
+                  <a:srgbClr val="475569"/>
                 </a:solidFill>
                 <a:latin typeface="Trebuchet MS" pitchFamily="34" charset="0"/>
                 <a:ea typeface="Trebuchet MS" pitchFamily="34" charset="-122"/>
                 <a:cs typeface="Trebuchet MS" pitchFamily="34" charset="-120"/>
               </a:rPr>
-              <a:t>·</a:t>
-            </a:r>
-            <a:endParaRPr lang="en-US" sz="1600" dirty="0"/>
+              <a:t>Phonemes</a:t>
+            </a:r>
+            <a:endParaRPr lang="en-US" sz="1100" dirty="0"/>
           </a:p>
         </p:txBody>
       </p:sp>
@@ -30644,389 +30540,8 @@
         </p:nvSpPr>
         <p:spPr>
           <a:xfrm>
-            <a:off x="3279648" y="3364992"/>
-            <a:ext cx="1225296" cy="475488"/>
-          </a:xfrm>
-          <a:prstGeom prst="rect">
-            <a:avLst>
-              <a:gd name="adj" fmla="val 9615"/>
-            </a:avLst>
-          </a:prstGeom>
-          <a:solidFill>
-            <a:srgbClr val="FFFFFF"/>
-          </a:solidFill>
-          <a:ln w="12700">
-            <a:solidFill>
-              <a:srgbClr val="0D9488"/>
-            </a:solidFill>
-            <a:prstDash val="solid"/>
-          </a:ln>
-        </p:spPr>
-      </p:sp>
-      <p:sp>
-        <p:nvSpPr>
-          <p:cNvPr id="33" name="Text 31"/>
-          <p:cNvSpPr/>
-          <p:nvPr/>
-        </p:nvSpPr>
-        <p:spPr>
-          <a:xfrm>
-            <a:off x="3279648" y="3364992"/>
-            <a:ext cx="1225296" cy="475488"/>
-          </a:xfrm>
-          <a:prstGeom prst="rect">
-            <a:avLst/>
-          </a:prstGeom>
-          <a:noFill/>
-          <a:ln/>
-        </p:spPr>
-        <p:txBody>
-          <a:bodyPr wrap="square" lIns="0" tIns="0" rIns="0" bIns="0" rtlCol="0" anchor="ctr"/>
-          <a:lstStyle/>
-          <a:p>
-            <a:pPr algn="ctr" indent="0" marL="0">
-              <a:buNone/>
-            </a:pPr>
-            <a:r>
-              <a:rPr lang="en-US" sz="1400" b="1" dirty="0">
-                <a:solidFill>
-                  <a:srgbClr val="0D9488"/>
-                </a:solidFill>
-                <a:latin typeface="Trebuchet MS" pitchFamily="34" charset="0"/>
-                <a:ea typeface="Trebuchet MS" pitchFamily="34" charset="-122"/>
-                <a:cs typeface="Trebuchet MS" pitchFamily="34" charset="-120"/>
-              </a:rPr>
-              <a:t>rep</a:t>
-            </a:r>
-            <a:endParaRPr lang="en-US" sz="1400" dirty="0"/>
-          </a:p>
-        </p:txBody>
-      </p:sp>
-      <p:sp>
-        <p:nvSpPr>
-          <p:cNvPr id="34" name="Text 32"/>
-          <p:cNvSpPr/>
-          <p:nvPr/>
-        </p:nvSpPr>
-        <p:spPr>
-          <a:xfrm>
-            <a:off x="4504944" y="3364992"/>
-            <a:ext cx="76200" cy="475488"/>
-          </a:xfrm>
-          <a:prstGeom prst="rect">
-            <a:avLst/>
-          </a:prstGeom>
-          <a:noFill/>
-          <a:ln/>
-        </p:spPr>
-        <p:txBody>
-          <a:bodyPr wrap="square" lIns="0" tIns="0" rIns="0" bIns="0" rtlCol="0" anchor="ctr"/>
-          <a:lstStyle/>
-          <a:p>
-            <a:pPr algn="ctr" indent="0" marL="0">
-              <a:buNone/>
-            </a:pPr>
-            <a:r>
-              <a:rPr lang="en-US" sz="1600" b="1" dirty="0">
-                <a:solidFill>
-                  <a:srgbClr val="0D9488"/>
-                </a:solidFill>
-                <a:latin typeface="Trebuchet MS" pitchFamily="34" charset="0"/>
-                <a:ea typeface="Trebuchet MS" pitchFamily="34" charset="-122"/>
-                <a:cs typeface="Trebuchet MS" pitchFamily="34" charset="-120"/>
-              </a:rPr>
-              <a:t>·</a:t>
-            </a:r>
-            <a:endParaRPr lang="en-US" sz="1600" dirty="0"/>
-          </a:p>
-        </p:txBody>
-      </p:sp>
-      <p:sp>
-        <p:nvSpPr>
-          <p:cNvPr id="35" name="Shape 33"/>
-          <p:cNvSpPr/>
-          <p:nvPr/>
-        </p:nvSpPr>
-        <p:spPr>
-          <a:xfrm>
-            <a:off x="4581144" y="3364992"/>
-            <a:ext cx="1225296" cy="475488"/>
-          </a:xfrm>
-          <a:prstGeom prst="rect">
-            <a:avLst>
-              <a:gd name="adj" fmla="val 9615"/>
-            </a:avLst>
-          </a:prstGeom>
-          <a:solidFill>
-            <a:srgbClr val="FFFFFF"/>
-          </a:solidFill>
-          <a:ln w="12700">
-            <a:solidFill>
-              <a:srgbClr val="0D9488"/>
-            </a:solidFill>
-            <a:prstDash val="solid"/>
-          </a:ln>
-        </p:spPr>
-      </p:sp>
-      <p:sp>
-        <p:nvSpPr>
-          <p:cNvPr id="36" name="Text 34"/>
-          <p:cNvSpPr/>
-          <p:nvPr/>
-        </p:nvSpPr>
-        <p:spPr>
-          <a:xfrm>
-            <a:off x="4581144" y="3364992"/>
-            <a:ext cx="1225296" cy="475488"/>
-          </a:xfrm>
-          <a:prstGeom prst="rect">
-            <a:avLst/>
-          </a:prstGeom>
-          <a:noFill/>
-          <a:ln/>
-        </p:spPr>
-        <p:txBody>
-          <a:bodyPr wrap="square" lIns="0" tIns="0" rIns="0" bIns="0" rtlCol="0" anchor="ctr"/>
-          <a:lstStyle/>
-          <a:p>
-            <a:pPr algn="ctr" indent="0" marL="0">
-              <a:buNone/>
-            </a:pPr>
-            <a:r>
-              <a:rPr lang="en-US" sz="1400" b="1" dirty="0">
-                <a:solidFill>
-                  <a:srgbClr val="0D9488"/>
-                </a:solidFill>
-                <a:latin typeface="Trebuchet MS" pitchFamily="34" charset="0"/>
-                <a:ea typeface="Trebuchet MS" pitchFamily="34" charset="-122"/>
-                <a:cs typeface="Trebuchet MS" pitchFamily="34" charset="-120"/>
-              </a:rPr>
-              <a:t>ar</a:t>
-            </a:r>
-            <a:endParaRPr lang="en-US" sz="1400" dirty="0"/>
-          </a:p>
-        </p:txBody>
-      </p:sp>
-      <p:sp>
-        <p:nvSpPr>
-          <p:cNvPr id="37" name="Text 35"/>
-          <p:cNvSpPr/>
-          <p:nvPr/>
-        </p:nvSpPr>
-        <p:spPr>
-          <a:xfrm>
-            <a:off x="5806440" y="3364992"/>
-            <a:ext cx="76200" cy="475488"/>
-          </a:xfrm>
-          <a:prstGeom prst="rect">
-            <a:avLst/>
-          </a:prstGeom>
-          <a:noFill/>
-          <a:ln/>
-        </p:spPr>
-        <p:txBody>
-          <a:bodyPr wrap="square" lIns="0" tIns="0" rIns="0" bIns="0" rtlCol="0" anchor="ctr"/>
-          <a:lstStyle/>
-          <a:p>
-            <a:pPr algn="ctr" indent="0" marL="0">
-              <a:buNone/>
-            </a:pPr>
-            <a:r>
-              <a:rPr lang="en-US" sz="1600" b="1" dirty="0">
-                <a:solidFill>
-                  <a:srgbClr val="0D9488"/>
-                </a:solidFill>
-                <a:latin typeface="Trebuchet MS" pitchFamily="34" charset="0"/>
-                <a:ea typeface="Trebuchet MS" pitchFamily="34" charset="-122"/>
-                <a:cs typeface="Trebuchet MS" pitchFamily="34" charset="-120"/>
-              </a:rPr>
-              <a:t>·</a:t>
-            </a:r>
-            <a:endParaRPr lang="en-US" sz="1600" dirty="0"/>
-          </a:p>
-        </p:txBody>
-      </p:sp>
-      <p:sp>
-        <p:nvSpPr>
-          <p:cNvPr id="38" name="Shape 36"/>
-          <p:cNvSpPr/>
-          <p:nvPr/>
-        </p:nvSpPr>
-        <p:spPr>
-          <a:xfrm>
-            <a:off x="5882640" y="3364992"/>
-            <a:ext cx="1225296" cy="475488"/>
-          </a:xfrm>
-          <a:prstGeom prst="rect">
-            <a:avLst>
-              <a:gd name="adj" fmla="val 9615"/>
-            </a:avLst>
-          </a:prstGeom>
-          <a:solidFill>
-            <a:srgbClr val="FFFFFF"/>
-          </a:solidFill>
-          <a:ln w="12700">
-            <a:solidFill>
-              <a:srgbClr val="0D9488"/>
-            </a:solidFill>
-            <a:prstDash val="solid"/>
-          </a:ln>
-        </p:spPr>
-      </p:sp>
-      <p:sp>
-        <p:nvSpPr>
-          <p:cNvPr id="39" name="Text 37"/>
-          <p:cNvSpPr/>
-          <p:nvPr/>
-        </p:nvSpPr>
-        <p:spPr>
-          <a:xfrm>
-            <a:off x="5882640" y="3364992"/>
-            <a:ext cx="1225296" cy="475488"/>
-          </a:xfrm>
-          <a:prstGeom prst="rect">
-            <a:avLst/>
-          </a:prstGeom>
-          <a:noFill/>
-          <a:ln/>
-        </p:spPr>
-        <p:txBody>
-          <a:bodyPr wrap="square" lIns="0" tIns="0" rIns="0" bIns="0" rtlCol="0" anchor="ctr"/>
-          <a:lstStyle/>
-          <a:p>
-            <a:pPr algn="ctr" indent="0" marL="0">
-              <a:buNone/>
-            </a:pPr>
-            <a:r>
-              <a:rPr lang="en-US" sz="1400" b="1" dirty="0">
-                <a:solidFill>
-                  <a:srgbClr val="0D9488"/>
-                </a:solidFill>
-                <a:latin typeface="Trebuchet MS" pitchFamily="34" charset="0"/>
-                <a:ea typeface="Trebuchet MS" pitchFamily="34" charset="-122"/>
-                <a:cs typeface="Trebuchet MS" pitchFamily="34" charset="-120"/>
-              </a:rPr>
-              <a:t>a</a:t>
-            </a:r>
-            <a:endParaRPr lang="en-US" sz="1400" dirty="0"/>
-          </a:p>
-        </p:txBody>
-      </p:sp>
-      <p:sp>
-        <p:nvSpPr>
-          <p:cNvPr id="40" name="Text 38"/>
-          <p:cNvSpPr/>
-          <p:nvPr/>
-        </p:nvSpPr>
-        <p:spPr>
-          <a:xfrm>
-            <a:off x="7107936" y="3364992"/>
-            <a:ext cx="76200" cy="475488"/>
-          </a:xfrm>
-          <a:prstGeom prst="rect">
-            <a:avLst/>
-          </a:prstGeom>
-          <a:noFill/>
-          <a:ln/>
-        </p:spPr>
-        <p:txBody>
-          <a:bodyPr wrap="square" lIns="0" tIns="0" rIns="0" bIns="0" rtlCol="0" anchor="ctr"/>
-          <a:lstStyle/>
-          <a:p>
-            <a:pPr algn="ctr" indent="0" marL="0">
-              <a:buNone/>
-            </a:pPr>
-            <a:r>
-              <a:rPr lang="en-US" sz="1600" b="1" dirty="0">
-                <a:solidFill>
-                  <a:srgbClr val="0D9488"/>
-                </a:solidFill>
-                <a:latin typeface="Trebuchet MS" pitchFamily="34" charset="0"/>
-                <a:ea typeface="Trebuchet MS" pitchFamily="34" charset="-122"/>
-                <a:cs typeface="Trebuchet MS" pitchFamily="34" charset="-120"/>
-              </a:rPr>
-              <a:t>·</a:t>
-            </a:r>
-            <a:endParaRPr lang="en-US" sz="1600" dirty="0"/>
-          </a:p>
-        </p:txBody>
-      </p:sp>
-      <p:sp>
-        <p:nvSpPr>
-          <p:cNvPr id="41" name="Shape 39"/>
-          <p:cNvSpPr/>
-          <p:nvPr/>
-        </p:nvSpPr>
-        <p:spPr>
-          <a:xfrm>
-            <a:off x="7184136" y="3364992"/>
-            <a:ext cx="1225296" cy="475488"/>
-          </a:xfrm>
-          <a:prstGeom prst="rect">
-            <a:avLst>
-              <a:gd name="adj" fmla="val 9615"/>
-            </a:avLst>
-          </a:prstGeom>
-          <a:solidFill>
-            <a:srgbClr val="FFFFFF"/>
-          </a:solidFill>
-          <a:ln w="12700">
-            <a:solidFill>
-              <a:srgbClr val="0D9488"/>
-            </a:solidFill>
-            <a:prstDash val="solid"/>
-          </a:ln>
-        </p:spPr>
-      </p:sp>
-      <p:sp>
-        <p:nvSpPr>
-          <p:cNvPr id="42" name="Text 40"/>
-          <p:cNvSpPr/>
-          <p:nvPr/>
-        </p:nvSpPr>
-        <p:spPr>
-          <a:xfrm>
-            <a:off x="7184136" y="3364992"/>
-            <a:ext cx="1225296" cy="475488"/>
-          </a:xfrm>
-          <a:prstGeom prst="rect">
-            <a:avLst/>
-          </a:prstGeom>
-          <a:noFill/>
-          <a:ln/>
-        </p:spPr>
-        <p:txBody>
-          <a:bodyPr wrap="square" lIns="0" tIns="0" rIns="0" bIns="0" rtlCol="0" anchor="ctr"/>
-          <a:lstStyle/>
-          <a:p>
-            <a:pPr algn="ctr" indent="0" marL="0">
-              <a:buNone/>
-            </a:pPr>
-            <a:r>
-              <a:rPr lang="en-US" sz="1400" b="1" dirty="0">
-                <a:solidFill>
-                  <a:srgbClr val="0D9488"/>
-                </a:solidFill>
-                <a:latin typeface="Trebuchet MS" pitchFamily="34" charset="0"/>
-                <a:ea typeface="Trebuchet MS" pitchFamily="34" charset="-122"/>
-                <a:cs typeface="Trebuchet MS" pitchFamily="34" charset="-120"/>
-              </a:rPr>
-              <a:t>ble</a:t>
-            </a:r>
-            <a:endParaRPr lang="en-US" sz="1400" dirty="0"/>
-          </a:p>
-        </p:txBody>
-      </p:sp>
-      <p:sp>
-        <p:nvSpPr>
-          <p:cNvPr id="43" name="Shape 41"/>
-          <p:cNvSpPr/>
-          <p:nvPr/>
-        </p:nvSpPr>
-        <p:spPr>
-          <a:xfrm>
-            <a:off x="365760" y="4096512"/>
-            <a:ext cx="1371600" cy="804672"/>
+            <a:off x="1874520" y="4096512"/>
+            <a:ext cx="6903720" cy="804672"/>
           </a:xfrm>
           <a:prstGeom prst="rect">
             <a:avLst>
@@ -31034,85 +30549,19 @@
             </a:avLst>
           </a:prstGeom>
           <a:solidFill>
-            <a:srgbClr val="E2E8F0"/>
+            <a:srgbClr val="F8FAFC"/>
           </a:solidFill>
           <a:ln w="12700">
             <a:solidFill>
               <a:srgbClr val="E2E8F0"/>
             </a:solidFill>
-            <a:prstDash val="solid"/>
-          </a:ln>
-        </p:spPr>
-      </p:sp>
-      <p:sp>
-        <p:nvSpPr>
-          <p:cNvPr id="44" name="Text 42"/>
-          <p:cNvSpPr/>
-          <p:nvPr/>
-        </p:nvSpPr>
-        <p:spPr>
-          <a:xfrm>
-            <a:off x="365760" y="4096512"/>
-            <a:ext cx="1371600" cy="804672"/>
-          </a:xfrm>
-          <a:prstGeom prst="rect">
-            <a:avLst/>
-          </a:prstGeom>
-          <a:noFill/>
-          <a:ln/>
-        </p:spPr>
-        <p:txBody>
-          <a:bodyPr wrap="square" lIns="0" tIns="0" rIns="0" bIns="0" rtlCol="0" anchor="ctr"/>
-          <a:lstStyle/>
-          <a:p>
-            <a:pPr algn="ctr" indent="0" marL="0">
-              <a:buNone/>
-            </a:pPr>
-            <a:r>
-              <a:rPr lang="en-US" sz="1100" b="1" dirty="0">
-                <a:solidFill>
-                  <a:srgbClr val="475569"/>
-                </a:solidFill>
-                <a:latin typeface="Trebuchet MS" pitchFamily="34" charset="0"/>
-                <a:ea typeface="Trebuchet MS" pitchFamily="34" charset="-122"/>
-                <a:cs typeface="Trebuchet MS" pitchFamily="34" charset="-120"/>
-              </a:rPr>
-              <a:t>Phonemes</a:t>
-            </a:r>
-            <a:endParaRPr lang="en-US" sz="1100" dirty="0"/>
-          </a:p>
-        </p:txBody>
-      </p:sp>
-      <p:sp>
-        <p:nvSpPr>
-          <p:cNvPr id="45" name="Shape 43"/>
-          <p:cNvSpPr/>
-          <p:nvPr/>
-        </p:nvSpPr>
-        <p:spPr>
-          <a:xfrm>
-            <a:off x="1874520" y="4096512"/>
-            <a:ext cx="6903720" cy="804672"/>
-          </a:xfrm>
-          <a:prstGeom prst="rect">
-            <a:avLst>
-              <a:gd name="adj" fmla="val 6818"/>
-            </a:avLst>
-          </a:prstGeom>
-          <a:solidFill>
-            <a:srgbClr val="F8FAFC"/>
-          </a:solidFill>
-          <a:ln w="12700">
-            <a:solidFill>
-              <a:srgbClr val="E2E8F0"/>
-            </a:solidFill>
             <a:prstDash val="dash"/>
           </a:ln>
         </p:spPr>
       </p:sp>
       <p:sp>
         <p:nvSpPr>
-          <p:cNvPr id="46" name="Text 44"/>
+          <p:cNvPr id="33" name="Text 31"/>
           <p:cNvSpPr/>
           <p:nvPr/>
         </p:nvSpPr>
@@ -31435,7 +30884,7 @@
                 <a:ea typeface="Calibri" pitchFamily="34" charset="-122"/>
                 <a:cs typeface="Calibri" pitchFamily="34" charset="-120"/>
               </a:rPr>
-              <a:t>Word Labs  •  wordlabs.app  •  Root: 'repair' = fix or make good again</a:t>
+              <a:t>Word Labs  •  wordlabs.app  •  Root: 'repair' = fix or restore something broken</a:t>
             </a:r>
             <a:endParaRPr lang="en-US" sz="800" dirty="0"/>
           </a:p>
@@ -31574,7 +31023,7 @@
                 <a:ea typeface="Trebuchet MS" pitchFamily="34" charset="-122"/>
                 <a:cs typeface="Trebuchet MS" pitchFamily="34" charset="-120"/>
               </a:rPr>
-              <a:t>irreparable</a:t>
+              <a:t>repairs</a:t>
             </a:r>
             <a:endParaRPr lang="en-US" sz="2800" dirty="0"/>
           </a:p>
@@ -31654,7 +31103,7 @@
         </p:nvSpPr>
         <p:spPr>
           <a:xfrm>
-            <a:off x="2221992" y="2258568"/>
+            <a:off x="2938272" y="2258568"/>
             <a:ext cx="1828800" cy="292608"/>
           </a:xfrm>
           <a:prstGeom prst="rect">
@@ -31663,11 +31112,11 @@
             </a:avLst>
           </a:prstGeom>
           <a:solidFill>
-            <a:srgbClr val="DDD6FE"/>
+            <a:srgbClr val="CCFBF1"/>
           </a:solidFill>
           <a:ln w="19050">
             <a:solidFill>
-              <a:srgbClr val="7C3AED"/>
+              <a:srgbClr val="0D9488"/>
             </a:solidFill>
             <a:prstDash val="solid"/>
           </a:ln>
@@ -31688,7 +31137,7 @@
         </p:nvSpPr>
         <p:spPr>
           <a:xfrm>
-            <a:off x="2221992" y="2258568"/>
+            <a:off x="2938272" y="2258568"/>
             <a:ext cx="1828800" cy="292608"/>
           </a:xfrm>
           <a:prstGeom prst="rect">
@@ -31707,13 +31156,13 @@
             <a:r>
               <a:rPr lang="en-US" sz="1300" b="1" dirty="0">
                 <a:solidFill>
-                  <a:srgbClr val="4C1D95"/>
+                  <a:srgbClr val="0F766E"/>
                 </a:solidFill>
                 <a:latin typeface="Trebuchet MS" pitchFamily="34" charset="0"/>
                 <a:ea typeface="Trebuchet MS" pitchFamily="34" charset="-122"/>
                 <a:cs typeface="Trebuchet MS" pitchFamily="34" charset="-120"/>
               </a:rPr>
-              <a:t>ir</a:t>
+              <a:t>repair</a:t>
             </a:r>
             <a:endParaRPr lang="en-US" sz="1300" dirty="0"/>
           </a:p>
@@ -31727,7 +31176,7 @@
         </p:nvSpPr>
         <p:spPr>
           <a:xfrm>
-            <a:off x="2221992" y="2569464"/>
+            <a:off x="2938272" y="2569464"/>
             <a:ext cx="1828800" cy="201168"/>
           </a:xfrm>
           <a:prstGeom prst="rect">
@@ -31752,7 +31201,7 @@
                 <a:ea typeface="Calibri" pitchFamily="34" charset="-122"/>
                 <a:cs typeface="Calibri" pitchFamily="34" charset="-120"/>
               </a:rPr>
-              <a:t>not</a:t>
+              <a:t>fix or restore</a:t>
             </a:r>
             <a:endParaRPr lang="en-US" sz="850" dirty="0"/>
           </a:p>
@@ -31760,52 +31209,13 @@
       </p:sp>
       <p:sp>
         <p:nvSpPr>
-          <p:cNvPr id="19" name="Text 17"/>
-          <p:cNvSpPr/>
-          <p:nvPr/>
-        </p:nvSpPr>
-        <p:spPr>
-          <a:xfrm>
-            <a:off x="2221992" y="2752344"/>
-            <a:ext cx="1828800" cy="182880"/>
-          </a:xfrm>
-          <a:prstGeom prst="rect">
-            <a:avLst/>
-          </a:prstGeom>
-          <a:noFill/>
-          <a:ln/>
-        </p:spPr>
-        <p:txBody>
-          <a:bodyPr wrap="square" lIns="0" tIns="0" rIns="0" bIns="0" rtlCol="0" anchor="t"/>
-          <a:lstStyle/>
-          <a:p>
-            <a:pPr algn="ctr" indent="0" marL="0">
-              <a:buNone/>
-            </a:pPr>
-            <a:r>
-              <a:rPr lang="en-US" sz="700" i="1" dirty="0">
-                <a:solidFill>
-                  <a:srgbClr val="94A3B8"/>
-                </a:solidFill>
-                <a:latin typeface="Calibri" pitchFamily="34" charset="0"/>
-                <a:ea typeface="Calibri" pitchFamily="34" charset="-122"/>
-                <a:cs typeface="Calibri" pitchFamily="34" charset="-120"/>
-              </a:rPr>
-              <a:t>in → ir before 'r'</a:t>
-            </a:r>
-            <a:endParaRPr lang="en-US" sz="700" dirty="0"/>
-          </a:p>
-        </p:txBody>
-      </p:sp>
-      <p:sp>
-        <p:nvSpPr>
-          <p:cNvPr id="20" name="Shape 18"/>
-          <p:cNvSpPr/>
-          <p:nvPr/>
-        </p:nvSpPr>
-        <p:spPr>
-          <a:xfrm>
-            <a:off x="4370832" y="2258568"/>
+          <p:cNvPr id="19" name="Shape 17"/>
+          <p:cNvSpPr/>
+          <p:nvPr/>
+        </p:nvSpPr>
+        <p:spPr>
+          <a:xfrm>
+            <a:off x="5803392" y="2258568"/>
             <a:ext cx="1828800" cy="292608"/>
           </a:xfrm>
           <a:prstGeom prst="rect">
@@ -31814,11 +31224,11 @@
             </a:avLst>
           </a:prstGeom>
           <a:solidFill>
-            <a:srgbClr val="CCFBF1"/>
+            <a:srgbClr val="FCE7F3"/>
           </a:solidFill>
           <a:ln w="19050">
             <a:solidFill>
-              <a:srgbClr val="0D9488"/>
+              <a:srgbClr val="DB2777"/>
             </a:solidFill>
             <a:prstDash val="solid"/>
           </a:ln>
@@ -31833,13 +31243,13 @@
       </p:sp>
       <p:sp>
         <p:nvSpPr>
-          <p:cNvPr id="21" name="Text 19"/>
-          <p:cNvSpPr/>
-          <p:nvPr/>
-        </p:nvSpPr>
-        <p:spPr>
-          <a:xfrm>
-            <a:off x="4370832" y="2258568"/>
+          <p:cNvPr id="20" name="Text 18"/>
+          <p:cNvSpPr/>
+          <p:nvPr/>
+        </p:nvSpPr>
+        <p:spPr>
+          <a:xfrm>
+            <a:off x="5803392" y="2258568"/>
             <a:ext cx="1828800" cy="292608"/>
           </a:xfrm>
           <a:prstGeom prst="rect">
@@ -31858,13 +31268,13 @@
             <a:r>
               <a:rPr lang="en-US" sz="1300" b="1" dirty="0">
                 <a:solidFill>
-                  <a:srgbClr val="0F766E"/>
+                  <a:srgbClr val="9D174D"/>
                 </a:solidFill>
                 <a:latin typeface="Trebuchet MS" pitchFamily="34" charset="0"/>
                 <a:ea typeface="Trebuchet MS" pitchFamily="34" charset="-122"/>
                 <a:cs typeface="Trebuchet MS" pitchFamily="34" charset="-120"/>
               </a:rPr>
-              <a:t>repair</a:t>
+              <a:t>s</a:t>
             </a:r>
             <a:endParaRPr lang="en-US" sz="1300" dirty="0"/>
           </a:p>
@@ -31872,13 +31282,13 @@
       </p:sp>
       <p:sp>
         <p:nvSpPr>
-          <p:cNvPr id="22" name="Text 20"/>
-          <p:cNvSpPr/>
-          <p:nvPr/>
-        </p:nvSpPr>
-        <p:spPr>
-          <a:xfrm>
-            <a:off x="4370832" y="2569464"/>
+          <p:cNvPr id="21" name="Text 19"/>
+          <p:cNvSpPr/>
+          <p:nvPr/>
+        </p:nvSpPr>
+        <p:spPr>
+          <a:xfrm>
+            <a:off x="5803392" y="2569464"/>
             <a:ext cx="1828800" cy="201168"/>
           </a:xfrm>
           <a:prstGeom prst="rect">
@@ -31903,7 +31313,7 @@
                 <a:ea typeface="Calibri" pitchFamily="34" charset="-122"/>
                 <a:cs typeface="Calibri" pitchFamily="34" charset="-120"/>
               </a:rPr>
-              <a:t>to fix or restore</a:t>
+              <a:t>more than one, or ongoing work</a:t>
             </a:r>
             <a:endParaRPr lang="en-US" sz="850" dirty="0"/>
           </a:p>
@@ -31911,126 +31321,80 @@
       </p:sp>
       <p:sp>
         <p:nvSpPr>
-          <p:cNvPr id="23" name="Shape 21"/>
-          <p:cNvSpPr/>
-          <p:nvPr/>
-        </p:nvSpPr>
-        <p:spPr>
-          <a:xfrm>
-            <a:off x="6519672" y="2258568"/>
-            <a:ext cx="1828800" cy="292608"/>
+          <p:cNvPr id="22" name="Shape 20"/>
+          <p:cNvSpPr/>
+          <p:nvPr/>
+        </p:nvSpPr>
+        <p:spPr>
+          <a:xfrm>
+            <a:off x="365760" y="3273552"/>
+            <a:ext cx="1371600" cy="658368"/>
           </a:xfrm>
           <a:prstGeom prst="rect">
             <a:avLst>
-              <a:gd name="adj" fmla="val 25000"/>
+              <a:gd name="adj" fmla="val 8333"/>
             </a:avLst>
           </a:prstGeom>
           <a:solidFill>
-            <a:srgbClr val="FCE7F3"/>
-          </a:solidFill>
-          <a:ln w="19050">
-            <a:solidFill>
-              <a:srgbClr val="DB2777"/>
-            </a:solidFill>
-            <a:prstDash val="solid"/>
-          </a:ln>
-          <a:effectLst>
-            <a:outerShdw sx="100000" sy="100000" kx="0" ky="0" algn="bl" rotWithShape="0" blurRad="101600" dist="38100" dir="8100000">
-              <a:srgbClr val="000000">
-                <a:alpha val="12000"/>
-              </a:srgbClr>
-            </a:outerShdw>
-          </a:effectLst>
-        </p:spPr>
-      </p:sp>
-      <p:sp>
-        <p:nvSpPr>
-          <p:cNvPr id="24" name="Text 22"/>
-          <p:cNvSpPr/>
-          <p:nvPr/>
-        </p:nvSpPr>
-        <p:spPr>
-          <a:xfrm>
-            <a:off x="6519672" y="2258568"/>
-            <a:ext cx="1828800" cy="292608"/>
-          </a:xfrm>
-          <a:prstGeom prst="rect">
-            <a:avLst/>
-          </a:prstGeom>
-          <a:noFill/>
-          <a:ln/>
-        </p:spPr>
-        <p:txBody>
-          <a:bodyPr wrap="square" lIns="0" tIns="0" rIns="0" bIns="0" rtlCol="0" anchor="ctr"/>
-          <a:lstStyle/>
-          <a:p>
-            <a:pPr algn="ctr" indent="0" marL="0">
-              <a:buNone/>
-            </a:pPr>
-            <a:r>
-              <a:rPr lang="en-US" sz="1300" b="1" dirty="0">
-                <a:solidFill>
-                  <a:srgbClr val="9D174D"/>
+            <a:srgbClr val="E2E8F0"/>
+          </a:solidFill>
+          <a:ln w="12700">
+            <a:solidFill>
+              <a:srgbClr val="E2E8F0"/>
+            </a:solidFill>
+            <a:prstDash val="solid"/>
+          </a:ln>
+        </p:spPr>
+      </p:sp>
+      <p:sp>
+        <p:nvSpPr>
+          <p:cNvPr id="23" name="Text 21"/>
+          <p:cNvSpPr/>
+          <p:nvPr/>
+        </p:nvSpPr>
+        <p:spPr>
+          <a:xfrm>
+            <a:off x="365760" y="3273552"/>
+            <a:ext cx="1371600" cy="658368"/>
+          </a:xfrm>
+          <a:prstGeom prst="rect">
+            <a:avLst/>
+          </a:prstGeom>
+          <a:noFill/>
+          <a:ln/>
+        </p:spPr>
+        <p:txBody>
+          <a:bodyPr wrap="square" lIns="0" tIns="0" rIns="0" bIns="0" rtlCol="0" anchor="ctr"/>
+          <a:lstStyle/>
+          <a:p>
+            <a:pPr algn="ctr" indent="0" marL="0">
+              <a:buNone/>
+            </a:pPr>
+            <a:r>
+              <a:rPr lang="en-US" sz="1100" b="1" dirty="0">
+                <a:solidFill>
+                  <a:srgbClr val="475569"/>
                 </a:solidFill>
                 <a:latin typeface="Trebuchet MS" pitchFamily="34" charset="0"/>
                 <a:ea typeface="Trebuchet MS" pitchFamily="34" charset="-122"/>
                 <a:cs typeface="Trebuchet MS" pitchFamily="34" charset="-120"/>
               </a:rPr>
-              <a:t>able</a:t>
-            </a:r>
-            <a:endParaRPr lang="en-US" sz="1300" dirty="0"/>
-          </a:p>
-        </p:txBody>
-      </p:sp>
-      <p:sp>
-        <p:nvSpPr>
-          <p:cNvPr id="25" name="Text 23"/>
-          <p:cNvSpPr/>
-          <p:nvPr/>
-        </p:nvSpPr>
-        <p:spPr>
-          <a:xfrm>
-            <a:off x="6519672" y="2569464"/>
-            <a:ext cx="1828800" cy="201168"/>
-          </a:xfrm>
-          <a:prstGeom prst="rect">
-            <a:avLst/>
-          </a:prstGeom>
-          <a:noFill/>
-          <a:ln/>
-        </p:spPr>
-        <p:txBody>
-          <a:bodyPr wrap="square" lIns="0" tIns="0" rIns="0" bIns="0" rtlCol="0" anchor="t"/>
-          <a:lstStyle/>
-          <a:p>
-            <a:pPr algn="ctr" indent="0" marL="0">
-              <a:buNone/>
-            </a:pPr>
-            <a:r>
-              <a:rPr lang="en-US" sz="850" dirty="0">
-                <a:solidFill>
-                  <a:srgbClr val="475569"/>
-                </a:solidFill>
-                <a:latin typeface="Calibri" pitchFamily="34" charset="0"/>
-                <a:ea typeface="Calibri" pitchFamily="34" charset="-122"/>
-                <a:cs typeface="Calibri" pitchFamily="34" charset="-120"/>
-              </a:rPr>
-              <a:t>able to be done</a:t>
-            </a:r>
-            <a:endParaRPr lang="en-US" sz="850" dirty="0"/>
-          </a:p>
-        </p:txBody>
-      </p:sp>
-      <p:sp>
-        <p:nvSpPr>
-          <p:cNvPr id="26" name="Shape 24"/>
-          <p:cNvSpPr/>
-          <p:nvPr/>
-        </p:nvSpPr>
-        <p:spPr>
-          <a:xfrm>
-            <a:off x="365760" y="3273552"/>
-            <a:ext cx="1371600" cy="658368"/>
+              <a:t>Syllables</a:t>
+            </a:r>
+            <a:endParaRPr lang="en-US" sz="1100" dirty="0"/>
+          </a:p>
+        </p:txBody>
+      </p:sp>
+      <p:sp>
+        <p:nvSpPr>
+          <p:cNvPr id="24" name="Shape 22"/>
+          <p:cNvSpPr/>
+          <p:nvPr/>
+        </p:nvSpPr>
+        <p:spPr>
+          <a:xfrm>
+            <a:off x="1874520" y="3273552"/>
+            <a:ext cx="6903720" cy="658368"/>
           </a:xfrm>
           <a:prstGeom prst="rect">
             <a:avLst>
@@ -32038,50 +31402,248 @@
             </a:avLst>
           </a:prstGeom>
           <a:solidFill>
-            <a:srgbClr val="E2E8F0"/>
-          </a:solidFill>
-          <a:ln w="12700">
-            <a:solidFill>
-              <a:srgbClr val="E2E8F0"/>
-            </a:solidFill>
-            <a:prstDash val="solid"/>
-          </a:ln>
-        </p:spPr>
-      </p:sp>
-      <p:sp>
-        <p:nvSpPr>
-          <p:cNvPr id="27" name="Text 25"/>
-          <p:cNvSpPr/>
-          <p:nvPr/>
-        </p:nvSpPr>
-        <p:spPr>
-          <a:xfrm>
-            <a:off x="365760" y="3273552"/>
-            <a:ext cx="1371600" cy="658368"/>
-          </a:xfrm>
-          <a:prstGeom prst="rect">
-            <a:avLst/>
-          </a:prstGeom>
-          <a:noFill/>
-          <a:ln/>
-        </p:spPr>
-        <p:txBody>
-          <a:bodyPr wrap="square" lIns="0" tIns="0" rIns="0" bIns="0" rtlCol="0" anchor="ctr"/>
-          <a:lstStyle/>
-          <a:p>
-            <a:pPr algn="ctr" indent="0" marL="0">
-              <a:buNone/>
-            </a:pPr>
-            <a:r>
-              <a:rPr lang="en-US" sz="1100" b="1" dirty="0">
-                <a:solidFill>
-                  <a:srgbClr val="475569"/>
+            <a:srgbClr val="CCFBF1"/>
+          </a:solidFill>
+          <a:ln w="12700">
+            <a:solidFill>
+              <a:srgbClr val="0D9488"/>
+            </a:solidFill>
+            <a:prstDash val="solid"/>
+          </a:ln>
+        </p:spPr>
+      </p:sp>
+      <p:sp>
+        <p:nvSpPr>
+          <p:cNvPr id="25" name="Shape 23"/>
+          <p:cNvSpPr/>
+          <p:nvPr/>
+        </p:nvSpPr>
+        <p:spPr>
+          <a:xfrm>
+            <a:off x="2999232" y="3364992"/>
+            <a:ext cx="1645920" cy="475488"/>
+          </a:xfrm>
+          <a:prstGeom prst="rect">
+            <a:avLst>
+              <a:gd name="adj" fmla="val 9615"/>
+            </a:avLst>
+          </a:prstGeom>
+          <a:solidFill>
+            <a:srgbClr val="FFFFFF"/>
+          </a:solidFill>
+          <a:ln w="12700">
+            <a:solidFill>
+              <a:srgbClr val="0D9488"/>
+            </a:solidFill>
+            <a:prstDash val="solid"/>
+          </a:ln>
+        </p:spPr>
+      </p:sp>
+      <p:sp>
+        <p:nvSpPr>
+          <p:cNvPr id="26" name="Text 24"/>
+          <p:cNvSpPr/>
+          <p:nvPr/>
+        </p:nvSpPr>
+        <p:spPr>
+          <a:xfrm>
+            <a:off x="2999232" y="3364992"/>
+            <a:ext cx="1645920" cy="475488"/>
+          </a:xfrm>
+          <a:prstGeom prst="rect">
+            <a:avLst/>
+          </a:prstGeom>
+          <a:noFill/>
+          <a:ln/>
+        </p:spPr>
+        <p:txBody>
+          <a:bodyPr wrap="square" lIns="0" tIns="0" rIns="0" bIns="0" rtlCol="0" anchor="ctr"/>
+          <a:lstStyle/>
+          <a:p>
+            <a:pPr algn="ctr" indent="0" marL="0">
+              <a:buNone/>
+            </a:pPr>
+            <a:r>
+              <a:rPr lang="en-US" sz="1400" b="1" dirty="0">
+                <a:solidFill>
+                  <a:srgbClr val="0D9488"/>
                 </a:solidFill>
                 <a:latin typeface="Trebuchet MS" pitchFamily="34" charset="0"/>
                 <a:ea typeface="Trebuchet MS" pitchFamily="34" charset="-122"/>
                 <a:cs typeface="Trebuchet MS" pitchFamily="34" charset="-120"/>
               </a:rPr>
-              <a:t>Syllables</a:t>
+              <a:t>re</a:t>
+            </a:r>
+            <a:endParaRPr lang="en-US" sz="1400" dirty="0"/>
+          </a:p>
+        </p:txBody>
+      </p:sp>
+      <p:sp>
+        <p:nvSpPr>
+          <p:cNvPr id="27" name="Text 25"/>
+          <p:cNvSpPr/>
+          <p:nvPr/>
+        </p:nvSpPr>
+        <p:spPr>
+          <a:xfrm>
+            <a:off x="4645152" y="3364992"/>
+            <a:ext cx="1097280" cy="475488"/>
+          </a:xfrm>
+          <a:prstGeom prst="rect">
+            <a:avLst/>
+          </a:prstGeom>
+          <a:noFill/>
+          <a:ln/>
+        </p:spPr>
+        <p:txBody>
+          <a:bodyPr wrap="square" lIns="0" tIns="0" rIns="0" bIns="0" rtlCol="0" anchor="ctr"/>
+          <a:lstStyle/>
+          <a:p>
+            <a:pPr algn="ctr" indent="0" marL="0">
+              <a:buNone/>
+            </a:pPr>
+            <a:r>
+              <a:rPr lang="en-US" sz="1600" b="1" dirty="0">
+                <a:solidFill>
+                  <a:srgbClr val="0D9488"/>
+                </a:solidFill>
+                <a:latin typeface="Trebuchet MS" pitchFamily="34" charset="0"/>
+                <a:ea typeface="Trebuchet MS" pitchFamily="34" charset="-122"/>
+                <a:cs typeface="Trebuchet MS" pitchFamily="34" charset="-120"/>
+              </a:rPr>
+              <a:t>·</a:t>
+            </a:r>
+            <a:endParaRPr lang="en-US" sz="1600" dirty="0"/>
+          </a:p>
+        </p:txBody>
+      </p:sp>
+      <p:sp>
+        <p:nvSpPr>
+          <p:cNvPr id="28" name="Shape 26"/>
+          <p:cNvSpPr/>
+          <p:nvPr/>
+        </p:nvSpPr>
+        <p:spPr>
+          <a:xfrm>
+            <a:off x="5742432" y="3364992"/>
+            <a:ext cx="1645920" cy="475488"/>
+          </a:xfrm>
+          <a:prstGeom prst="rect">
+            <a:avLst>
+              <a:gd name="adj" fmla="val 9615"/>
+            </a:avLst>
+          </a:prstGeom>
+          <a:solidFill>
+            <a:srgbClr val="FFFFFF"/>
+          </a:solidFill>
+          <a:ln w="12700">
+            <a:solidFill>
+              <a:srgbClr val="0D9488"/>
+            </a:solidFill>
+            <a:prstDash val="solid"/>
+          </a:ln>
+        </p:spPr>
+      </p:sp>
+      <p:sp>
+        <p:nvSpPr>
+          <p:cNvPr id="29" name="Text 27"/>
+          <p:cNvSpPr/>
+          <p:nvPr/>
+        </p:nvSpPr>
+        <p:spPr>
+          <a:xfrm>
+            <a:off x="5742432" y="3364992"/>
+            <a:ext cx="1645920" cy="475488"/>
+          </a:xfrm>
+          <a:prstGeom prst="rect">
+            <a:avLst/>
+          </a:prstGeom>
+          <a:noFill/>
+          <a:ln/>
+        </p:spPr>
+        <p:txBody>
+          <a:bodyPr wrap="square" lIns="0" tIns="0" rIns="0" bIns="0" rtlCol="0" anchor="ctr"/>
+          <a:lstStyle/>
+          <a:p>
+            <a:pPr algn="ctr" indent="0" marL="0">
+              <a:buNone/>
+            </a:pPr>
+            <a:r>
+              <a:rPr lang="en-US" sz="1400" b="1" dirty="0">
+                <a:solidFill>
+                  <a:srgbClr val="0D9488"/>
+                </a:solidFill>
+                <a:latin typeface="Trebuchet MS" pitchFamily="34" charset="0"/>
+                <a:ea typeface="Trebuchet MS" pitchFamily="34" charset="-122"/>
+                <a:cs typeface="Trebuchet MS" pitchFamily="34" charset="-120"/>
+              </a:rPr>
+              <a:t>pairs</a:t>
+            </a:r>
+            <a:endParaRPr lang="en-US" sz="1400" dirty="0"/>
+          </a:p>
+        </p:txBody>
+      </p:sp>
+      <p:sp>
+        <p:nvSpPr>
+          <p:cNvPr id="30" name="Shape 28"/>
+          <p:cNvSpPr/>
+          <p:nvPr/>
+        </p:nvSpPr>
+        <p:spPr>
+          <a:xfrm>
+            <a:off x="365760" y="4096512"/>
+            <a:ext cx="1371600" cy="804672"/>
+          </a:xfrm>
+          <a:prstGeom prst="rect">
+            <a:avLst>
+              <a:gd name="adj" fmla="val 6818"/>
+            </a:avLst>
+          </a:prstGeom>
+          <a:solidFill>
+            <a:srgbClr val="E2E8F0"/>
+          </a:solidFill>
+          <a:ln w="12700">
+            <a:solidFill>
+              <a:srgbClr val="E2E8F0"/>
+            </a:solidFill>
+            <a:prstDash val="solid"/>
+          </a:ln>
+        </p:spPr>
+      </p:sp>
+      <p:sp>
+        <p:nvSpPr>
+          <p:cNvPr id="31" name="Text 29"/>
+          <p:cNvSpPr/>
+          <p:nvPr/>
+        </p:nvSpPr>
+        <p:spPr>
+          <a:xfrm>
+            <a:off x="365760" y="4096512"/>
+            <a:ext cx="1371600" cy="804672"/>
+          </a:xfrm>
+          <a:prstGeom prst="rect">
+            <a:avLst/>
+          </a:prstGeom>
+          <a:noFill/>
+          <a:ln/>
+        </p:spPr>
+        <p:txBody>
+          <a:bodyPr wrap="square" lIns="0" tIns="0" rIns="0" bIns="0" rtlCol="0" anchor="ctr"/>
+          <a:lstStyle/>
+          <a:p>
+            <a:pPr algn="ctr" indent="0" marL="0">
+              <a:buNone/>
+            </a:pPr>
+            <a:r>
+              <a:rPr lang="en-US" sz="1100" b="1" dirty="0">
+                <a:solidFill>
+                  <a:srgbClr val="475569"/>
+                </a:solidFill>
+                <a:latin typeface="Trebuchet MS" pitchFamily="34" charset="0"/>
+                <a:ea typeface="Trebuchet MS" pitchFamily="34" charset="-122"/>
+                <a:cs typeface="Trebuchet MS" pitchFamily="34" charset="-120"/>
+              </a:rPr>
+              <a:t>Phonemes</a:t>
             </a:r>
             <a:endParaRPr lang="en-US" sz="1100" dirty="0"/>
           </a:p>
@@ -32089,13 +31651,13 @@
       </p:sp>
       <p:sp>
         <p:nvSpPr>
-          <p:cNvPr id="28" name="Shape 26"/>
-          <p:cNvSpPr/>
-          <p:nvPr/>
-        </p:nvSpPr>
-        <p:spPr>
-          <a:xfrm>
-            <a:off x="1874520" y="3273552"/>
+          <p:cNvPr id="32" name="Shape 30"/>
+          <p:cNvSpPr/>
+          <p:nvPr/>
+        </p:nvSpPr>
+        <p:spPr>
+          <a:xfrm>
+            <a:off x="1874520" y="4096512"/>
             <a:ext cx="6903720" cy="658368"/>
           </a:xfrm>
           <a:prstGeom prst="rect">
@@ -32104,30 +31666,30 @@
             </a:avLst>
           </a:prstGeom>
           <a:solidFill>
-            <a:srgbClr val="CCFBF1"/>
-          </a:solidFill>
-          <a:ln w="12700">
-            <a:solidFill>
-              <a:srgbClr val="0D9488"/>
-            </a:solidFill>
-            <a:prstDash val="solid"/>
-          </a:ln>
-        </p:spPr>
-      </p:sp>
-      <p:sp>
-        <p:nvSpPr>
-          <p:cNvPr id="29" name="Shape 27"/>
-          <p:cNvSpPr/>
-          <p:nvPr/>
-        </p:nvSpPr>
-        <p:spPr>
-          <a:xfrm>
-            <a:off x="1978152" y="3364992"/>
-            <a:ext cx="1225296" cy="475488"/>
+            <a:srgbClr val="FCE7F3"/>
+          </a:solidFill>
+          <a:ln w="12700">
+            <a:solidFill>
+              <a:srgbClr val="DB2777"/>
+            </a:solidFill>
+            <a:prstDash val="solid"/>
+          </a:ln>
+        </p:spPr>
+      </p:sp>
+      <p:sp>
+        <p:nvSpPr>
+          <p:cNvPr id="33" name="Shape 31"/>
+          <p:cNvSpPr/>
+          <p:nvPr/>
+        </p:nvSpPr>
+        <p:spPr>
+          <a:xfrm>
+            <a:off x="2427732" y="4169664"/>
+            <a:ext cx="685800" cy="475488"/>
           </a:xfrm>
           <a:prstGeom prst="rect">
             <a:avLst>
-              <a:gd name="adj" fmla="val 9615"/>
+              <a:gd name="adj" fmla="val 7692"/>
             </a:avLst>
           </a:prstGeom>
           <a:solidFill>
@@ -32135,104 +31697,131 @@
           </a:solidFill>
           <a:ln w="12700">
             <a:solidFill>
-              <a:srgbClr val="0D9488"/>
-            </a:solidFill>
-            <a:prstDash val="solid"/>
-          </a:ln>
-        </p:spPr>
-      </p:sp>
-      <p:sp>
-        <p:nvSpPr>
-          <p:cNvPr id="30" name="Text 28"/>
-          <p:cNvSpPr/>
-          <p:nvPr/>
-        </p:nvSpPr>
-        <p:spPr>
-          <a:xfrm>
-            <a:off x="1978152" y="3364992"/>
-            <a:ext cx="1225296" cy="475488"/>
-          </a:xfrm>
-          <a:prstGeom prst="rect">
-            <a:avLst/>
-          </a:prstGeom>
-          <a:noFill/>
-          <a:ln/>
-        </p:spPr>
-        <p:txBody>
-          <a:bodyPr wrap="square" lIns="0" tIns="0" rIns="0" bIns="0" rtlCol="0" anchor="ctr"/>
-          <a:lstStyle/>
-          <a:p>
-            <a:pPr algn="ctr" indent="0" marL="0">
-              <a:buNone/>
-            </a:pPr>
-            <a:r>
-              <a:rPr lang="en-US" sz="1400" b="1" dirty="0">
-                <a:solidFill>
-                  <a:srgbClr val="0D9488"/>
+              <a:srgbClr val="DB2777"/>
+            </a:solidFill>
+            <a:prstDash val="solid"/>
+          </a:ln>
+        </p:spPr>
+      </p:sp>
+      <p:sp>
+        <p:nvSpPr>
+          <p:cNvPr id="34" name="Text 32"/>
+          <p:cNvSpPr/>
+          <p:nvPr/>
+        </p:nvSpPr>
+        <p:spPr>
+          <a:xfrm>
+            <a:off x="2427732" y="4169664"/>
+            <a:ext cx="685800" cy="475488"/>
+          </a:xfrm>
+          <a:prstGeom prst="rect">
+            <a:avLst/>
+          </a:prstGeom>
+          <a:noFill/>
+          <a:ln/>
+        </p:spPr>
+        <p:txBody>
+          <a:bodyPr wrap="square" lIns="0" tIns="0" rIns="0" bIns="0" rtlCol="0" anchor="ctr"/>
+          <a:lstStyle/>
+          <a:p>
+            <a:pPr algn="ctr" indent="0" marL="0">
+              <a:buNone/>
+            </a:pPr>
+            <a:r>
+              <a:rPr lang="en-US" sz="900" b="1" dirty="0">
+                <a:solidFill>
+                  <a:srgbClr val="9D174D"/>
                 </a:solidFill>
                 <a:latin typeface="Trebuchet MS" pitchFamily="34" charset="0"/>
                 <a:ea typeface="Trebuchet MS" pitchFamily="34" charset="-122"/>
                 <a:cs typeface="Trebuchet MS" pitchFamily="34" charset="-120"/>
               </a:rPr>
-              <a:t>ir</a:t>
-            </a:r>
-            <a:endParaRPr lang="en-US" sz="1400" dirty="0"/>
-          </a:p>
-        </p:txBody>
-      </p:sp>
-      <p:sp>
-        <p:nvSpPr>
-          <p:cNvPr id="31" name="Text 29"/>
-          <p:cNvSpPr/>
-          <p:nvPr/>
-        </p:nvSpPr>
-        <p:spPr>
-          <a:xfrm>
-            <a:off x="3203448" y="3364992"/>
-            <a:ext cx="76200" cy="475488"/>
-          </a:xfrm>
-          <a:prstGeom prst="rect">
-            <a:avLst/>
-          </a:prstGeom>
-          <a:noFill/>
-          <a:ln/>
-        </p:spPr>
-        <p:txBody>
-          <a:bodyPr wrap="square" lIns="0" tIns="0" rIns="0" bIns="0" rtlCol="0" anchor="ctr"/>
-          <a:lstStyle/>
-          <a:p>
-            <a:pPr algn="ctr" indent="0" marL="0">
-              <a:buNone/>
-            </a:pPr>
-            <a:r>
-              <a:rPr lang="en-US" sz="1600" b="1" dirty="0">
-                <a:solidFill>
-                  <a:srgbClr val="0D9488"/>
+              <a:t>r</a:t>
+            </a:r>
+            <a:endParaRPr lang="en-US" sz="900" dirty="0"/>
+          </a:p>
+        </p:txBody>
+      </p:sp>
+      <p:sp>
+        <p:nvSpPr>
+          <p:cNvPr id="35" name="Shape 33"/>
+          <p:cNvSpPr/>
+          <p:nvPr/>
+        </p:nvSpPr>
+        <p:spPr>
+          <a:xfrm>
+            <a:off x="3639312" y="4169664"/>
+            <a:ext cx="685800" cy="475488"/>
+          </a:xfrm>
+          <a:prstGeom prst="rect">
+            <a:avLst>
+              <a:gd name="adj" fmla="val 7692"/>
+            </a:avLst>
+          </a:prstGeom>
+          <a:solidFill>
+            <a:srgbClr val="FFFFFF"/>
+          </a:solidFill>
+          <a:ln w="12700">
+            <a:solidFill>
+              <a:srgbClr val="DB2777"/>
+            </a:solidFill>
+            <a:prstDash val="solid"/>
+          </a:ln>
+        </p:spPr>
+      </p:sp>
+      <p:sp>
+        <p:nvSpPr>
+          <p:cNvPr id="36" name="Text 34"/>
+          <p:cNvSpPr/>
+          <p:nvPr/>
+        </p:nvSpPr>
+        <p:spPr>
+          <a:xfrm>
+            <a:off x="3639312" y="4169664"/>
+            <a:ext cx="685800" cy="475488"/>
+          </a:xfrm>
+          <a:prstGeom prst="rect">
+            <a:avLst/>
+          </a:prstGeom>
+          <a:noFill/>
+          <a:ln/>
+        </p:spPr>
+        <p:txBody>
+          <a:bodyPr wrap="square" lIns="0" tIns="0" rIns="0" bIns="0" rtlCol="0" anchor="ctr"/>
+          <a:lstStyle/>
+          <a:p>
+            <a:pPr algn="ctr" indent="0" marL="0">
+              <a:buNone/>
+            </a:pPr>
+            <a:r>
+              <a:rPr lang="en-US" sz="900" b="1" dirty="0">
+                <a:solidFill>
+                  <a:srgbClr val="9D174D"/>
                 </a:solidFill>
                 <a:latin typeface="Trebuchet MS" pitchFamily="34" charset="0"/>
                 <a:ea typeface="Trebuchet MS" pitchFamily="34" charset="-122"/>
                 <a:cs typeface="Trebuchet MS" pitchFamily="34" charset="-120"/>
               </a:rPr>
-              <a:t>·</a:t>
-            </a:r>
-            <a:endParaRPr lang="en-US" sz="1600" dirty="0"/>
-          </a:p>
-        </p:txBody>
-      </p:sp>
-      <p:sp>
-        <p:nvSpPr>
-          <p:cNvPr id="32" name="Shape 30"/>
-          <p:cNvSpPr/>
-          <p:nvPr/>
-        </p:nvSpPr>
-        <p:spPr>
-          <a:xfrm>
-            <a:off x="3279648" y="3364992"/>
-            <a:ext cx="1225296" cy="475488"/>
+              <a:t>e</a:t>
+            </a:r>
+            <a:endParaRPr lang="en-US" sz="900" dirty="0"/>
+          </a:p>
+        </p:txBody>
+      </p:sp>
+      <p:sp>
+        <p:nvSpPr>
+          <p:cNvPr id="37" name="Shape 35"/>
+          <p:cNvSpPr/>
+          <p:nvPr/>
+        </p:nvSpPr>
+        <p:spPr>
+          <a:xfrm>
+            <a:off x="4850892" y="4169664"/>
+            <a:ext cx="685800" cy="475488"/>
           </a:xfrm>
           <a:prstGeom prst="rect">
             <a:avLst>
-              <a:gd name="adj" fmla="val 9615"/>
+              <a:gd name="adj" fmla="val 7692"/>
             </a:avLst>
           </a:prstGeom>
           <a:solidFill>
@@ -32240,104 +31829,131 @@
           </a:solidFill>
           <a:ln w="12700">
             <a:solidFill>
-              <a:srgbClr val="0D9488"/>
-            </a:solidFill>
-            <a:prstDash val="solid"/>
-          </a:ln>
-        </p:spPr>
-      </p:sp>
-      <p:sp>
-        <p:nvSpPr>
-          <p:cNvPr id="33" name="Text 31"/>
-          <p:cNvSpPr/>
-          <p:nvPr/>
-        </p:nvSpPr>
-        <p:spPr>
-          <a:xfrm>
-            <a:off x="3279648" y="3364992"/>
-            <a:ext cx="1225296" cy="475488"/>
-          </a:xfrm>
-          <a:prstGeom prst="rect">
-            <a:avLst/>
-          </a:prstGeom>
-          <a:noFill/>
-          <a:ln/>
-        </p:spPr>
-        <p:txBody>
-          <a:bodyPr wrap="square" lIns="0" tIns="0" rIns="0" bIns="0" rtlCol="0" anchor="ctr"/>
-          <a:lstStyle/>
-          <a:p>
-            <a:pPr algn="ctr" indent="0" marL="0">
-              <a:buNone/>
-            </a:pPr>
-            <a:r>
-              <a:rPr lang="en-US" sz="1400" b="1" dirty="0">
-                <a:solidFill>
-                  <a:srgbClr val="0D9488"/>
+              <a:srgbClr val="DB2777"/>
+            </a:solidFill>
+            <a:prstDash val="solid"/>
+          </a:ln>
+        </p:spPr>
+      </p:sp>
+      <p:sp>
+        <p:nvSpPr>
+          <p:cNvPr id="38" name="Text 36"/>
+          <p:cNvSpPr/>
+          <p:nvPr/>
+        </p:nvSpPr>
+        <p:spPr>
+          <a:xfrm>
+            <a:off x="4850892" y="4169664"/>
+            <a:ext cx="685800" cy="475488"/>
+          </a:xfrm>
+          <a:prstGeom prst="rect">
+            <a:avLst/>
+          </a:prstGeom>
+          <a:noFill/>
+          <a:ln/>
+        </p:spPr>
+        <p:txBody>
+          <a:bodyPr wrap="square" lIns="0" tIns="0" rIns="0" bIns="0" rtlCol="0" anchor="ctr"/>
+          <a:lstStyle/>
+          <a:p>
+            <a:pPr algn="ctr" indent="0" marL="0">
+              <a:buNone/>
+            </a:pPr>
+            <a:r>
+              <a:rPr lang="en-US" sz="900" b="1" dirty="0">
+                <a:solidFill>
+                  <a:srgbClr val="9D174D"/>
                 </a:solidFill>
                 <a:latin typeface="Trebuchet MS" pitchFamily="34" charset="0"/>
                 <a:ea typeface="Trebuchet MS" pitchFamily="34" charset="-122"/>
                 <a:cs typeface="Trebuchet MS" pitchFamily="34" charset="-120"/>
               </a:rPr>
-              <a:t>rep</a:t>
-            </a:r>
-            <a:endParaRPr lang="en-US" sz="1400" dirty="0"/>
-          </a:p>
-        </p:txBody>
-      </p:sp>
-      <p:sp>
-        <p:nvSpPr>
-          <p:cNvPr id="34" name="Text 32"/>
-          <p:cNvSpPr/>
-          <p:nvPr/>
-        </p:nvSpPr>
-        <p:spPr>
-          <a:xfrm>
-            <a:off x="4504944" y="3364992"/>
-            <a:ext cx="76200" cy="475488"/>
-          </a:xfrm>
-          <a:prstGeom prst="rect">
-            <a:avLst/>
-          </a:prstGeom>
-          <a:noFill/>
-          <a:ln/>
-        </p:spPr>
-        <p:txBody>
-          <a:bodyPr wrap="square" lIns="0" tIns="0" rIns="0" bIns="0" rtlCol="0" anchor="ctr"/>
-          <a:lstStyle/>
-          <a:p>
-            <a:pPr algn="ctr" indent="0" marL="0">
-              <a:buNone/>
-            </a:pPr>
-            <a:r>
-              <a:rPr lang="en-US" sz="1600" b="1" dirty="0">
-                <a:solidFill>
-                  <a:srgbClr val="0D9488"/>
+              <a:t>p</a:t>
+            </a:r>
+            <a:endParaRPr lang="en-US" sz="900" dirty="0"/>
+          </a:p>
+        </p:txBody>
+      </p:sp>
+      <p:sp>
+        <p:nvSpPr>
+          <p:cNvPr id="39" name="Shape 37"/>
+          <p:cNvSpPr/>
+          <p:nvPr/>
+        </p:nvSpPr>
+        <p:spPr>
+          <a:xfrm>
+            <a:off x="6062472" y="4169664"/>
+            <a:ext cx="685800" cy="475488"/>
+          </a:xfrm>
+          <a:prstGeom prst="rect">
+            <a:avLst>
+              <a:gd name="adj" fmla="val 7692"/>
+            </a:avLst>
+          </a:prstGeom>
+          <a:solidFill>
+            <a:srgbClr val="FFFFFF"/>
+          </a:solidFill>
+          <a:ln w="12700">
+            <a:solidFill>
+              <a:srgbClr val="DB2777"/>
+            </a:solidFill>
+            <a:prstDash val="solid"/>
+          </a:ln>
+        </p:spPr>
+      </p:sp>
+      <p:sp>
+        <p:nvSpPr>
+          <p:cNvPr id="40" name="Text 38"/>
+          <p:cNvSpPr/>
+          <p:nvPr/>
+        </p:nvSpPr>
+        <p:spPr>
+          <a:xfrm>
+            <a:off x="6062472" y="4169664"/>
+            <a:ext cx="685800" cy="475488"/>
+          </a:xfrm>
+          <a:prstGeom prst="rect">
+            <a:avLst/>
+          </a:prstGeom>
+          <a:noFill/>
+          <a:ln/>
+        </p:spPr>
+        <p:txBody>
+          <a:bodyPr wrap="square" lIns="0" tIns="0" rIns="0" bIns="0" rtlCol="0" anchor="ctr"/>
+          <a:lstStyle/>
+          <a:p>
+            <a:pPr algn="ctr" indent="0" marL="0">
+              <a:buNone/>
+            </a:pPr>
+            <a:r>
+              <a:rPr lang="en-US" sz="900" b="1" dirty="0">
+                <a:solidFill>
+                  <a:srgbClr val="9D174D"/>
                 </a:solidFill>
                 <a:latin typeface="Trebuchet MS" pitchFamily="34" charset="0"/>
                 <a:ea typeface="Trebuchet MS" pitchFamily="34" charset="-122"/>
                 <a:cs typeface="Trebuchet MS" pitchFamily="34" charset="-120"/>
               </a:rPr>
-              <a:t>·</a:t>
-            </a:r>
-            <a:endParaRPr lang="en-US" sz="1600" dirty="0"/>
-          </a:p>
-        </p:txBody>
-      </p:sp>
-      <p:sp>
-        <p:nvSpPr>
-          <p:cNvPr id="35" name="Shape 33"/>
-          <p:cNvSpPr/>
-          <p:nvPr/>
-        </p:nvSpPr>
-        <p:spPr>
-          <a:xfrm>
-            <a:off x="4581144" y="3364992"/>
-            <a:ext cx="1225296" cy="475488"/>
+              <a:t>air</a:t>
+            </a:r>
+            <a:endParaRPr lang="en-US" sz="900" dirty="0"/>
+          </a:p>
+        </p:txBody>
+      </p:sp>
+      <p:sp>
+        <p:nvSpPr>
+          <p:cNvPr id="41" name="Shape 39"/>
+          <p:cNvSpPr/>
+          <p:nvPr/>
+        </p:nvSpPr>
+        <p:spPr>
+          <a:xfrm>
+            <a:off x="7274052" y="4169664"/>
+            <a:ext cx="685800" cy="475488"/>
           </a:xfrm>
           <a:prstGeom prst="rect">
             <a:avLst>
-              <a:gd name="adj" fmla="val 9615"/>
+              <a:gd name="adj" fmla="val 7692"/>
             </a:avLst>
           </a:prstGeom>
           <a:solidFill>
@@ -32345,877 +31961,46 @@
           </a:solidFill>
           <a:ln w="12700">
             <a:solidFill>
-              <a:srgbClr val="0D9488"/>
-            </a:solidFill>
-            <a:prstDash val="solid"/>
-          </a:ln>
-        </p:spPr>
-      </p:sp>
-      <p:sp>
-        <p:nvSpPr>
-          <p:cNvPr id="36" name="Text 34"/>
-          <p:cNvSpPr/>
-          <p:nvPr/>
-        </p:nvSpPr>
-        <p:spPr>
-          <a:xfrm>
-            <a:off x="4581144" y="3364992"/>
-            <a:ext cx="1225296" cy="475488"/>
-          </a:xfrm>
-          <a:prstGeom prst="rect">
-            <a:avLst/>
-          </a:prstGeom>
-          <a:noFill/>
-          <a:ln/>
-        </p:spPr>
-        <p:txBody>
-          <a:bodyPr wrap="square" lIns="0" tIns="0" rIns="0" bIns="0" rtlCol="0" anchor="ctr"/>
-          <a:lstStyle/>
-          <a:p>
-            <a:pPr algn="ctr" indent="0" marL="0">
-              <a:buNone/>
-            </a:pPr>
-            <a:r>
-              <a:rPr lang="en-US" sz="1400" b="1" dirty="0">
-                <a:solidFill>
-                  <a:srgbClr val="0D9488"/>
+              <a:srgbClr val="DB2777"/>
+            </a:solidFill>
+            <a:prstDash val="solid"/>
+          </a:ln>
+        </p:spPr>
+      </p:sp>
+      <p:sp>
+        <p:nvSpPr>
+          <p:cNvPr id="42" name="Text 40"/>
+          <p:cNvSpPr/>
+          <p:nvPr/>
+        </p:nvSpPr>
+        <p:spPr>
+          <a:xfrm>
+            <a:off x="7274052" y="4169664"/>
+            <a:ext cx="685800" cy="475488"/>
+          </a:xfrm>
+          <a:prstGeom prst="rect">
+            <a:avLst/>
+          </a:prstGeom>
+          <a:noFill/>
+          <a:ln/>
+        </p:spPr>
+        <p:txBody>
+          <a:bodyPr wrap="square" lIns="0" tIns="0" rIns="0" bIns="0" rtlCol="0" anchor="ctr"/>
+          <a:lstStyle/>
+          <a:p>
+            <a:pPr algn="ctr" indent="0" marL="0">
+              <a:buNone/>
+            </a:pPr>
+            <a:r>
+              <a:rPr lang="en-US" sz="900" b="1" dirty="0">
+                <a:solidFill>
+                  <a:srgbClr val="9D174D"/>
                 </a:solidFill>
                 <a:latin typeface="Trebuchet MS" pitchFamily="34" charset="0"/>
                 <a:ea typeface="Trebuchet MS" pitchFamily="34" charset="-122"/>
                 <a:cs typeface="Trebuchet MS" pitchFamily="34" charset="-120"/>
               </a:rPr>
-              <a:t>ar</a:t>
-            </a:r>
-            <a:endParaRPr lang="en-US" sz="1400" dirty="0"/>
-          </a:p>
-        </p:txBody>
-      </p:sp>
-      <p:sp>
-        <p:nvSpPr>
-          <p:cNvPr id="37" name="Text 35"/>
-          <p:cNvSpPr/>
-          <p:nvPr/>
-        </p:nvSpPr>
-        <p:spPr>
-          <a:xfrm>
-            <a:off x="5806440" y="3364992"/>
-            <a:ext cx="76200" cy="475488"/>
-          </a:xfrm>
-          <a:prstGeom prst="rect">
-            <a:avLst/>
-          </a:prstGeom>
-          <a:noFill/>
-          <a:ln/>
-        </p:spPr>
-        <p:txBody>
-          <a:bodyPr wrap="square" lIns="0" tIns="0" rIns="0" bIns="0" rtlCol="0" anchor="ctr"/>
-          <a:lstStyle/>
-          <a:p>
-            <a:pPr algn="ctr" indent="0" marL="0">
-              <a:buNone/>
-            </a:pPr>
-            <a:r>
-              <a:rPr lang="en-US" sz="1600" b="1" dirty="0">
-                <a:solidFill>
-                  <a:srgbClr val="0D9488"/>
-                </a:solidFill>
-                <a:latin typeface="Trebuchet MS" pitchFamily="34" charset="0"/>
-                <a:ea typeface="Trebuchet MS" pitchFamily="34" charset="-122"/>
-                <a:cs typeface="Trebuchet MS" pitchFamily="34" charset="-120"/>
-              </a:rPr>
-              <a:t>·</a:t>
-            </a:r>
-            <a:endParaRPr lang="en-US" sz="1600" dirty="0"/>
-          </a:p>
-        </p:txBody>
-      </p:sp>
-      <p:sp>
-        <p:nvSpPr>
-          <p:cNvPr id="38" name="Shape 36"/>
-          <p:cNvSpPr/>
-          <p:nvPr/>
-        </p:nvSpPr>
-        <p:spPr>
-          <a:xfrm>
-            <a:off x="5882640" y="3364992"/>
-            <a:ext cx="1225296" cy="475488"/>
-          </a:xfrm>
-          <a:prstGeom prst="rect">
-            <a:avLst>
-              <a:gd name="adj" fmla="val 9615"/>
-            </a:avLst>
-          </a:prstGeom>
-          <a:solidFill>
-            <a:srgbClr val="FFFFFF"/>
-          </a:solidFill>
-          <a:ln w="12700">
-            <a:solidFill>
-              <a:srgbClr val="0D9488"/>
-            </a:solidFill>
-            <a:prstDash val="solid"/>
-          </a:ln>
-        </p:spPr>
-      </p:sp>
-      <p:sp>
-        <p:nvSpPr>
-          <p:cNvPr id="39" name="Text 37"/>
-          <p:cNvSpPr/>
-          <p:nvPr/>
-        </p:nvSpPr>
-        <p:spPr>
-          <a:xfrm>
-            <a:off x="5882640" y="3364992"/>
-            <a:ext cx="1225296" cy="475488"/>
-          </a:xfrm>
-          <a:prstGeom prst="rect">
-            <a:avLst/>
-          </a:prstGeom>
-          <a:noFill/>
-          <a:ln/>
-        </p:spPr>
-        <p:txBody>
-          <a:bodyPr wrap="square" lIns="0" tIns="0" rIns="0" bIns="0" rtlCol="0" anchor="ctr"/>
-          <a:lstStyle/>
-          <a:p>
-            <a:pPr algn="ctr" indent="0" marL="0">
-              <a:buNone/>
-            </a:pPr>
-            <a:r>
-              <a:rPr lang="en-US" sz="1400" b="1" dirty="0">
-                <a:solidFill>
-                  <a:srgbClr val="0D9488"/>
-                </a:solidFill>
-                <a:latin typeface="Trebuchet MS" pitchFamily="34" charset="0"/>
-                <a:ea typeface="Trebuchet MS" pitchFamily="34" charset="-122"/>
-                <a:cs typeface="Trebuchet MS" pitchFamily="34" charset="-120"/>
-              </a:rPr>
-              <a:t>a</a:t>
-            </a:r>
-            <a:endParaRPr lang="en-US" sz="1400" dirty="0"/>
-          </a:p>
-        </p:txBody>
-      </p:sp>
-      <p:sp>
-        <p:nvSpPr>
-          <p:cNvPr id="40" name="Text 38"/>
-          <p:cNvSpPr/>
-          <p:nvPr/>
-        </p:nvSpPr>
-        <p:spPr>
-          <a:xfrm>
-            <a:off x="7107936" y="3364992"/>
-            <a:ext cx="76200" cy="475488"/>
-          </a:xfrm>
-          <a:prstGeom prst="rect">
-            <a:avLst/>
-          </a:prstGeom>
-          <a:noFill/>
-          <a:ln/>
-        </p:spPr>
-        <p:txBody>
-          <a:bodyPr wrap="square" lIns="0" tIns="0" rIns="0" bIns="0" rtlCol="0" anchor="ctr"/>
-          <a:lstStyle/>
-          <a:p>
-            <a:pPr algn="ctr" indent="0" marL="0">
-              <a:buNone/>
-            </a:pPr>
-            <a:r>
-              <a:rPr lang="en-US" sz="1600" b="1" dirty="0">
-                <a:solidFill>
-                  <a:srgbClr val="0D9488"/>
-                </a:solidFill>
-                <a:latin typeface="Trebuchet MS" pitchFamily="34" charset="0"/>
-                <a:ea typeface="Trebuchet MS" pitchFamily="34" charset="-122"/>
-                <a:cs typeface="Trebuchet MS" pitchFamily="34" charset="-120"/>
-              </a:rPr>
-              <a:t>·</a:t>
-            </a:r>
-            <a:endParaRPr lang="en-US" sz="1600" dirty="0"/>
-          </a:p>
-        </p:txBody>
-      </p:sp>
-      <p:sp>
-        <p:nvSpPr>
-          <p:cNvPr id="41" name="Shape 39"/>
-          <p:cNvSpPr/>
-          <p:nvPr/>
-        </p:nvSpPr>
-        <p:spPr>
-          <a:xfrm>
-            <a:off x="7184136" y="3364992"/>
-            <a:ext cx="1225296" cy="475488"/>
-          </a:xfrm>
-          <a:prstGeom prst="rect">
-            <a:avLst>
-              <a:gd name="adj" fmla="val 9615"/>
-            </a:avLst>
-          </a:prstGeom>
-          <a:solidFill>
-            <a:srgbClr val="FFFFFF"/>
-          </a:solidFill>
-          <a:ln w="12700">
-            <a:solidFill>
-              <a:srgbClr val="0D9488"/>
-            </a:solidFill>
-            <a:prstDash val="solid"/>
-          </a:ln>
-        </p:spPr>
-      </p:sp>
-      <p:sp>
-        <p:nvSpPr>
-          <p:cNvPr id="42" name="Text 40"/>
-          <p:cNvSpPr/>
-          <p:nvPr/>
-        </p:nvSpPr>
-        <p:spPr>
-          <a:xfrm>
-            <a:off x="7184136" y="3364992"/>
-            <a:ext cx="1225296" cy="475488"/>
-          </a:xfrm>
-          <a:prstGeom prst="rect">
-            <a:avLst/>
-          </a:prstGeom>
-          <a:noFill/>
-          <a:ln/>
-        </p:spPr>
-        <p:txBody>
-          <a:bodyPr wrap="square" lIns="0" tIns="0" rIns="0" bIns="0" rtlCol="0" anchor="ctr"/>
-          <a:lstStyle/>
-          <a:p>
-            <a:pPr algn="ctr" indent="0" marL="0">
-              <a:buNone/>
-            </a:pPr>
-            <a:r>
-              <a:rPr lang="en-US" sz="1400" b="1" dirty="0">
-                <a:solidFill>
-                  <a:srgbClr val="0D9488"/>
-                </a:solidFill>
-                <a:latin typeface="Trebuchet MS" pitchFamily="34" charset="0"/>
-                <a:ea typeface="Trebuchet MS" pitchFamily="34" charset="-122"/>
-                <a:cs typeface="Trebuchet MS" pitchFamily="34" charset="-120"/>
-              </a:rPr>
-              <a:t>ble</a:t>
-            </a:r>
-            <a:endParaRPr lang="en-US" sz="1400" dirty="0"/>
-          </a:p>
-        </p:txBody>
-      </p:sp>
-      <p:sp>
-        <p:nvSpPr>
-          <p:cNvPr id="43" name="Shape 41"/>
-          <p:cNvSpPr/>
-          <p:nvPr/>
-        </p:nvSpPr>
-        <p:spPr>
-          <a:xfrm>
-            <a:off x="365760" y="4096512"/>
-            <a:ext cx="1371600" cy="804672"/>
-          </a:xfrm>
-          <a:prstGeom prst="rect">
-            <a:avLst>
-              <a:gd name="adj" fmla="val 6818"/>
-            </a:avLst>
-          </a:prstGeom>
-          <a:solidFill>
-            <a:srgbClr val="E2E8F0"/>
-          </a:solidFill>
-          <a:ln w="12700">
-            <a:solidFill>
-              <a:srgbClr val="E2E8F0"/>
-            </a:solidFill>
-            <a:prstDash val="solid"/>
-          </a:ln>
-        </p:spPr>
-      </p:sp>
-      <p:sp>
-        <p:nvSpPr>
-          <p:cNvPr id="44" name="Text 42"/>
-          <p:cNvSpPr/>
-          <p:nvPr/>
-        </p:nvSpPr>
-        <p:spPr>
-          <a:xfrm>
-            <a:off x="365760" y="4096512"/>
-            <a:ext cx="1371600" cy="804672"/>
-          </a:xfrm>
-          <a:prstGeom prst="rect">
-            <a:avLst/>
-          </a:prstGeom>
-          <a:noFill/>
-          <a:ln/>
-        </p:spPr>
-        <p:txBody>
-          <a:bodyPr wrap="square" lIns="0" tIns="0" rIns="0" bIns="0" rtlCol="0" anchor="ctr"/>
-          <a:lstStyle/>
-          <a:p>
-            <a:pPr algn="ctr" indent="0" marL="0">
-              <a:buNone/>
-            </a:pPr>
-            <a:r>
-              <a:rPr lang="en-US" sz="1100" b="1" dirty="0">
-                <a:solidFill>
-                  <a:srgbClr val="475569"/>
-                </a:solidFill>
-                <a:latin typeface="Trebuchet MS" pitchFamily="34" charset="0"/>
-                <a:ea typeface="Trebuchet MS" pitchFamily="34" charset="-122"/>
-                <a:cs typeface="Trebuchet MS" pitchFamily="34" charset="-120"/>
-              </a:rPr>
-              <a:t>Phonemes</a:t>
-            </a:r>
-            <a:endParaRPr lang="en-US" sz="1100" dirty="0"/>
-          </a:p>
-        </p:txBody>
-      </p:sp>
-      <p:sp>
-        <p:nvSpPr>
-          <p:cNvPr id="45" name="Shape 43"/>
-          <p:cNvSpPr/>
-          <p:nvPr/>
-        </p:nvSpPr>
-        <p:spPr>
-          <a:xfrm>
-            <a:off x="1874520" y="4096512"/>
-            <a:ext cx="6903720" cy="658368"/>
-          </a:xfrm>
-          <a:prstGeom prst="rect">
-            <a:avLst>
-              <a:gd name="adj" fmla="val 8333"/>
-            </a:avLst>
-          </a:prstGeom>
-          <a:solidFill>
-            <a:srgbClr val="FCE7F3"/>
-          </a:solidFill>
-          <a:ln w="12700">
-            <a:solidFill>
-              <a:srgbClr val="DB2777"/>
-            </a:solidFill>
-            <a:prstDash val="solid"/>
-          </a:ln>
-        </p:spPr>
-      </p:sp>
-      <p:sp>
-        <p:nvSpPr>
-          <p:cNvPr id="46" name="Shape 44"/>
-          <p:cNvSpPr/>
-          <p:nvPr/>
-        </p:nvSpPr>
-        <p:spPr>
-          <a:xfrm>
-            <a:off x="2023872" y="4169664"/>
-            <a:ext cx="685800" cy="475488"/>
-          </a:xfrm>
-          <a:prstGeom prst="rect">
-            <a:avLst>
-              <a:gd name="adj" fmla="val 7692"/>
-            </a:avLst>
-          </a:prstGeom>
-          <a:solidFill>
-            <a:srgbClr val="FFFFFF"/>
-          </a:solidFill>
-          <a:ln w="12700">
-            <a:solidFill>
-              <a:srgbClr val="DB2777"/>
-            </a:solidFill>
-            <a:prstDash val="solid"/>
-          </a:ln>
-        </p:spPr>
-      </p:sp>
-      <p:sp>
-        <p:nvSpPr>
-          <p:cNvPr id="47" name="Text 45"/>
-          <p:cNvSpPr/>
-          <p:nvPr/>
-        </p:nvSpPr>
-        <p:spPr>
-          <a:xfrm>
-            <a:off x="2023872" y="4169664"/>
-            <a:ext cx="685800" cy="475488"/>
-          </a:xfrm>
-          <a:prstGeom prst="rect">
-            <a:avLst/>
-          </a:prstGeom>
-          <a:noFill/>
-          <a:ln/>
-        </p:spPr>
-        <p:txBody>
-          <a:bodyPr wrap="square" lIns="0" tIns="0" rIns="0" bIns="0" rtlCol="0" anchor="ctr"/>
-          <a:lstStyle/>
-          <a:p>
-            <a:pPr algn="ctr" indent="0" marL="0">
-              <a:buNone/>
-            </a:pPr>
-            <a:r>
-              <a:rPr lang="en-US" sz="900" b="1" dirty="0">
-                <a:solidFill>
-                  <a:srgbClr val="9D174D"/>
-                </a:solidFill>
-                <a:latin typeface="Trebuchet MS" pitchFamily="34" charset="0"/>
-                <a:ea typeface="Trebuchet MS" pitchFamily="34" charset="-122"/>
-                <a:cs typeface="Trebuchet MS" pitchFamily="34" charset="-120"/>
-              </a:rPr>
-              <a:t>ir</a:t>
-            </a:r>
-            <a:endParaRPr lang="en-US" sz="900" dirty="0"/>
-          </a:p>
-        </p:txBody>
-      </p:sp>
-      <p:sp>
-        <p:nvSpPr>
-          <p:cNvPr id="48" name="Shape 46"/>
-          <p:cNvSpPr/>
-          <p:nvPr/>
-        </p:nvSpPr>
-        <p:spPr>
-          <a:xfrm>
-            <a:off x="2831592" y="4169664"/>
-            <a:ext cx="685800" cy="475488"/>
-          </a:xfrm>
-          <a:prstGeom prst="rect">
-            <a:avLst>
-              <a:gd name="adj" fmla="val 7692"/>
-            </a:avLst>
-          </a:prstGeom>
-          <a:solidFill>
-            <a:srgbClr val="FFFFFF"/>
-          </a:solidFill>
-          <a:ln w="12700">
-            <a:solidFill>
-              <a:srgbClr val="DB2777"/>
-            </a:solidFill>
-            <a:prstDash val="solid"/>
-          </a:ln>
-        </p:spPr>
-      </p:sp>
-      <p:sp>
-        <p:nvSpPr>
-          <p:cNvPr id="49" name="Text 47"/>
-          <p:cNvSpPr/>
-          <p:nvPr/>
-        </p:nvSpPr>
-        <p:spPr>
-          <a:xfrm>
-            <a:off x="2831592" y="4169664"/>
-            <a:ext cx="685800" cy="475488"/>
-          </a:xfrm>
-          <a:prstGeom prst="rect">
-            <a:avLst/>
-          </a:prstGeom>
-          <a:noFill/>
-          <a:ln/>
-        </p:spPr>
-        <p:txBody>
-          <a:bodyPr wrap="square" lIns="0" tIns="0" rIns="0" bIns="0" rtlCol="0" anchor="ctr"/>
-          <a:lstStyle/>
-          <a:p>
-            <a:pPr algn="ctr" indent="0" marL="0">
-              <a:buNone/>
-            </a:pPr>
-            <a:r>
-              <a:rPr lang="en-US" sz="900" b="1" dirty="0">
-                <a:solidFill>
-                  <a:srgbClr val="9D174D"/>
-                </a:solidFill>
-                <a:latin typeface="Trebuchet MS" pitchFamily="34" charset="0"/>
-                <a:ea typeface="Trebuchet MS" pitchFamily="34" charset="-122"/>
-                <a:cs typeface="Trebuchet MS" pitchFamily="34" charset="-120"/>
-              </a:rPr>
-              <a:t>r</a:t>
-            </a:r>
-            <a:endParaRPr lang="en-US" sz="900" dirty="0"/>
-          </a:p>
-        </p:txBody>
-      </p:sp>
-      <p:sp>
-        <p:nvSpPr>
-          <p:cNvPr id="50" name="Shape 48"/>
-          <p:cNvSpPr/>
-          <p:nvPr/>
-        </p:nvSpPr>
-        <p:spPr>
-          <a:xfrm>
-            <a:off x="3639312" y="4169664"/>
-            <a:ext cx="685800" cy="475488"/>
-          </a:xfrm>
-          <a:prstGeom prst="rect">
-            <a:avLst>
-              <a:gd name="adj" fmla="val 7692"/>
-            </a:avLst>
-          </a:prstGeom>
-          <a:solidFill>
-            <a:srgbClr val="FFFFFF"/>
-          </a:solidFill>
-          <a:ln w="12700">
-            <a:solidFill>
-              <a:srgbClr val="DB2777"/>
-            </a:solidFill>
-            <a:prstDash val="solid"/>
-          </a:ln>
-        </p:spPr>
-      </p:sp>
-      <p:sp>
-        <p:nvSpPr>
-          <p:cNvPr id="51" name="Text 49"/>
-          <p:cNvSpPr/>
-          <p:nvPr/>
-        </p:nvSpPr>
-        <p:spPr>
-          <a:xfrm>
-            <a:off x="3639312" y="4169664"/>
-            <a:ext cx="685800" cy="475488"/>
-          </a:xfrm>
-          <a:prstGeom prst="rect">
-            <a:avLst/>
-          </a:prstGeom>
-          <a:noFill/>
-          <a:ln/>
-        </p:spPr>
-        <p:txBody>
-          <a:bodyPr wrap="square" lIns="0" tIns="0" rIns="0" bIns="0" rtlCol="0" anchor="ctr"/>
-          <a:lstStyle/>
-          <a:p>
-            <a:pPr algn="ctr" indent="0" marL="0">
-              <a:buNone/>
-            </a:pPr>
-            <a:r>
-              <a:rPr lang="en-US" sz="900" b="1" dirty="0">
-                <a:solidFill>
-                  <a:srgbClr val="9D174D"/>
-                </a:solidFill>
-                <a:latin typeface="Trebuchet MS" pitchFamily="34" charset="0"/>
-                <a:ea typeface="Trebuchet MS" pitchFamily="34" charset="-122"/>
-                <a:cs typeface="Trebuchet MS" pitchFamily="34" charset="-120"/>
-              </a:rPr>
-              <a:t>e</a:t>
-            </a:r>
-            <a:endParaRPr lang="en-US" sz="900" dirty="0"/>
-          </a:p>
-        </p:txBody>
-      </p:sp>
-      <p:sp>
-        <p:nvSpPr>
-          <p:cNvPr id="52" name="Shape 50"/>
-          <p:cNvSpPr/>
-          <p:nvPr/>
-        </p:nvSpPr>
-        <p:spPr>
-          <a:xfrm>
-            <a:off x="4447032" y="4169664"/>
-            <a:ext cx="685800" cy="475488"/>
-          </a:xfrm>
-          <a:prstGeom prst="rect">
-            <a:avLst>
-              <a:gd name="adj" fmla="val 7692"/>
-            </a:avLst>
-          </a:prstGeom>
-          <a:solidFill>
-            <a:srgbClr val="FFFFFF"/>
-          </a:solidFill>
-          <a:ln w="12700">
-            <a:solidFill>
-              <a:srgbClr val="DB2777"/>
-            </a:solidFill>
-            <a:prstDash val="solid"/>
-          </a:ln>
-        </p:spPr>
-      </p:sp>
-      <p:sp>
-        <p:nvSpPr>
-          <p:cNvPr id="53" name="Text 51"/>
-          <p:cNvSpPr/>
-          <p:nvPr/>
-        </p:nvSpPr>
-        <p:spPr>
-          <a:xfrm>
-            <a:off x="4447032" y="4169664"/>
-            <a:ext cx="685800" cy="475488"/>
-          </a:xfrm>
-          <a:prstGeom prst="rect">
-            <a:avLst/>
-          </a:prstGeom>
-          <a:noFill/>
-          <a:ln/>
-        </p:spPr>
-        <p:txBody>
-          <a:bodyPr wrap="square" lIns="0" tIns="0" rIns="0" bIns="0" rtlCol="0" anchor="ctr"/>
-          <a:lstStyle/>
-          <a:p>
-            <a:pPr algn="ctr" indent="0" marL="0">
-              <a:buNone/>
-            </a:pPr>
-            <a:r>
-              <a:rPr lang="en-US" sz="900" b="1" dirty="0">
-                <a:solidFill>
-                  <a:srgbClr val="9D174D"/>
-                </a:solidFill>
-                <a:latin typeface="Trebuchet MS" pitchFamily="34" charset="0"/>
-                <a:ea typeface="Trebuchet MS" pitchFamily="34" charset="-122"/>
-                <a:cs typeface="Trebuchet MS" pitchFamily="34" charset="-120"/>
-              </a:rPr>
-              <a:t>p</a:t>
-            </a:r>
-            <a:endParaRPr lang="en-US" sz="900" dirty="0"/>
-          </a:p>
-        </p:txBody>
-      </p:sp>
-      <p:sp>
-        <p:nvSpPr>
-          <p:cNvPr id="54" name="Shape 52"/>
-          <p:cNvSpPr/>
-          <p:nvPr/>
-        </p:nvSpPr>
-        <p:spPr>
-          <a:xfrm>
-            <a:off x="5254752" y="4169664"/>
-            <a:ext cx="685800" cy="475488"/>
-          </a:xfrm>
-          <a:prstGeom prst="rect">
-            <a:avLst>
-              <a:gd name="adj" fmla="val 7692"/>
-            </a:avLst>
-          </a:prstGeom>
-          <a:solidFill>
-            <a:srgbClr val="FFFFFF"/>
-          </a:solidFill>
-          <a:ln w="12700">
-            <a:solidFill>
-              <a:srgbClr val="DB2777"/>
-            </a:solidFill>
-            <a:prstDash val="solid"/>
-          </a:ln>
-        </p:spPr>
-      </p:sp>
-      <p:sp>
-        <p:nvSpPr>
-          <p:cNvPr id="55" name="Text 53"/>
-          <p:cNvSpPr/>
-          <p:nvPr/>
-        </p:nvSpPr>
-        <p:spPr>
-          <a:xfrm>
-            <a:off x="5254752" y="4169664"/>
-            <a:ext cx="685800" cy="475488"/>
-          </a:xfrm>
-          <a:prstGeom prst="rect">
-            <a:avLst/>
-          </a:prstGeom>
-          <a:noFill/>
-          <a:ln/>
-        </p:spPr>
-        <p:txBody>
-          <a:bodyPr wrap="square" lIns="0" tIns="0" rIns="0" bIns="0" rtlCol="0" anchor="ctr"/>
-          <a:lstStyle/>
-          <a:p>
-            <a:pPr algn="ctr" indent="0" marL="0">
-              <a:buNone/>
-            </a:pPr>
-            <a:r>
-              <a:rPr lang="en-US" sz="900" b="1" dirty="0">
-                <a:solidFill>
-                  <a:srgbClr val="9D174D"/>
-                </a:solidFill>
-                <a:latin typeface="Trebuchet MS" pitchFamily="34" charset="0"/>
-                <a:ea typeface="Trebuchet MS" pitchFamily="34" charset="-122"/>
-                <a:cs typeface="Trebuchet MS" pitchFamily="34" charset="-120"/>
-              </a:rPr>
-              <a:t>ar</a:t>
-            </a:r>
-            <a:endParaRPr lang="en-US" sz="900" dirty="0"/>
-          </a:p>
-        </p:txBody>
-      </p:sp>
-      <p:sp>
-        <p:nvSpPr>
-          <p:cNvPr id="56" name="Shape 54"/>
-          <p:cNvSpPr/>
-          <p:nvPr/>
-        </p:nvSpPr>
-        <p:spPr>
-          <a:xfrm>
-            <a:off x="6062472" y="4169664"/>
-            <a:ext cx="685800" cy="475488"/>
-          </a:xfrm>
-          <a:prstGeom prst="rect">
-            <a:avLst>
-              <a:gd name="adj" fmla="val 7692"/>
-            </a:avLst>
-          </a:prstGeom>
-          <a:solidFill>
-            <a:srgbClr val="FFFFFF"/>
-          </a:solidFill>
-          <a:ln w="12700">
-            <a:solidFill>
-              <a:srgbClr val="DB2777"/>
-            </a:solidFill>
-            <a:prstDash val="solid"/>
-          </a:ln>
-        </p:spPr>
-      </p:sp>
-      <p:sp>
-        <p:nvSpPr>
-          <p:cNvPr id="57" name="Text 55"/>
-          <p:cNvSpPr/>
-          <p:nvPr/>
-        </p:nvSpPr>
-        <p:spPr>
-          <a:xfrm>
-            <a:off x="6062472" y="4169664"/>
-            <a:ext cx="685800" cy="475488"/>
-          </a:xfrm>
-          <a:prstGeom prst="rect">
-            <a:avLst/>
-          </a:prstGeom>
-          <a:noFill/>
-          <a:ln/>
-        </p:spPr>
-        <p:txBody>
-          <a:bodyPr wrap="square" lIns="0" tIns="0" rIns="0" bIns="0" rtlCol="0" anchor="ctr"/>
-          <a:lstStyle/>
-          <a:p>
-            <a:pPr algn="ctr" indent="0" marL="0">
-              <a:buNone/>
-            </a:pPr>
-            <a:r>
-              <a:rPr lang="en-US" sz="900" b="1" dirty="0">
-                <a:solidFill>
-                  <a:srgbClr val="9D174D"/>
-                </a:solidFill>
-                <a:latin typeface="Trebuchet MS" pitchFamily="34" charset="0"/>
-                <a:ea typeface="Trebuchet MS" pitchFamily="34" charset="-122"/>
-                <a:cs typeface="Trebuchet MS" pitchFamily="34" charset="-120"/>
-              </a:rPr>
-              <a:t>a</a:t>
-            </a:r>
-            <a:endParaRPr lang="en-US" sz="900" dirty="0"/>
-          </a:p>
-        </p:txBody>
-      </p:sp>
-      <p:sp>
-        <p:nvSpPr>
-          <p:cNvPr id="58" name="Shape 56"/>
-          <p:cNvSpPr/>
-          <p:nvPr/>
-        </p:nvSpPr>
-        <p:spPr>
-          <a:xfrm>
-            <a:off x="6870192" y="4169664"/>
-            <a:ext cx="685800" cy="475488"/>
-          </a:xfrm>
-          <a:prstGeom prst="rect">
-            <a:avLst>
-              <a:gd name="adj" fmla="val 7692"/>
-            </a:avLst>
-          </a:prstGeom>
-          <a:solidFill>
-            <a:srgbClr val="FFFFFF"/>
-          </a:solidFill>
-          <a:ln w="12700">
-            <a:solidFill>
-              <a:srgbClr val="DB2777"/>
-            </a:solidFill>
-            <a:prstDash val="solid"/>
-          </a:ln>
-        </p:spPr>
-      </p:sp>
-      <p:sp>
-        <p:nvSpPr>
-          <p:cNvPr id="59" name="Text 57"/>
-          <p:cNvSpPr/>
-          <p:nvPr/>
-        </p:nvSpPr>
-        <p:spPr>
-          <a:xfrm>
-            <a:off x="6870192" y="4169664"/>
-            <a:ext cx="685800" cy="475488"/>
-          </a:xfrm>
-          <a:prstGeom prst="rect">
-            <a:avLst/>
-          </a:prstGeom>
-          <a:noFill/>
-          <a:ln/>
-        </p:spPr>
-        <p:txBody>
-          <a:bodyPr wrap="square" lIns="0" tIns="0" rIns="0" bIns="0" rtlCol="0" anchor="ctr"/>
-          <a:lstStyle/>
-          <a:p>
-            <a:pPr algn="ctr" indent="0" marL="0">
-              <a:buNone/>
-            </a:pPr>
-            <a:r>
-              <a:rPr lang="en-US" sz="900" b="1" dirty="0">
-                <a:solidFill>
-                  <a:srgbClr val="9D174D"/>
-                </a:solidFill>
-                <a:latin typeface="Trebuchet MS" pitchFamily="34" charset="0"/>
-                <a:ea typeface="Trebuchet MS" pitchFamily="34" charset="-122"/>
-                <a:cs typeface="Trebuchet MS" pitchFamily="34" charset="-120"/>
-              </a:rPr>
-              <a:t>b</a:t>
-            </a:r>
-            <a:endParaRPr lang="en-US" sz="900" dirty="0"/>
-          </a:p>
-        </p:txBody>
-      </p:sp>
-      <p:sp>
-        <p:nvSpPr>
-          <p:cNvPr id="60" name="Shape 58"/>
-          <p:cNvSpPr/>
-          <p:nvPr/>
-        </p:nvSpPr>
-        <p:spPr>
-          <a:xfrm>
-            <a:off x="7677912" y="4169664"/>
-            <a:ext cx="685800" cy="475488"/>
-          </a:xfrm>
-          <a:prstGeom prst="rect">
-            <a:avLst>
-              <a:gd name="adj" fmla="val 7692"/>
-            </a:avLst>
-          </a:prstGeom>
-          <a:solidFill>
-            <a:srgbClr val="FFFFFF"/>
-          </a:solidFill>
-          <a:ln w="12700">
-            <a:solidFill>
-              <a:srgbClr val="DB2777"/>
-            </a:solidFill>
-            <a:prstDash val="solid"/>
-          </a:ln>
-        </p:spPr>
-      </p:sp>
-      <p:sp>
-        <p:nvSpPr>
-          <p:cNvPr id="61" name="Text 59"/>
-          <p:cNvSpPr/>
-          <p:nvPr/>
-        </p:nvSpPr>
-        <p:spPr>
-          <a:xfrm>
-            <a:off x="7677912" y="4169664"/>
-            <a:ext cx="685800" cy="475488"/>
-          </a:xfrm>
-          <a:prstGeom prst="rect">
-            <a:avLst/>
-          </a:prstGeom>
-          <a:noFill/>
-          <a:ln/>
-        </p:spPr>
-        <p:txBody>
-          <a:bodyPr wrap="square" lIns="0" tIns="0" rIns="0" bIns="0" rtlCol="0" anchor="ctr"/>
-          <a:lstStyle/>
-          <a:p>
-            <a:pPr algn="ctr" indent="0" marL="0">
-              <a:buNone/>
-            </a:pPr>
-            <a:r>
-              <a:rPr lang="en-US" sz="900" b="1" dirty="0">
-                <a:solidFill>
-                  <a:srgbClr val="9D174D"/>
-                </a:solidFill>
-                <a:latin typeface="Trebuchet MS" pitchFamily="34" charset="0"/>
-                <a:ea typeface="Trebuchet MS" pitchFamily="34" charset="-122"/>
-                <a:cs typeface="Trebuchet MS" pitchFamily="34" charset="-120"/>
-              </a:rPr>
-              <a:t>le</a:t>
+              <a:t>s</a:t>
             </a:r>
             <a:endParaRPr lang="en-US" sz="900" dirty="0"/>
           </a:p>
@@ -33507,7 +32292,7 @@
                 <a:ea typeface="Calibri" pitchFamily="34" charset="-122"/>
                 <a:cs typeface="Calibri" pitchFamily="34" charset="-120"/>
               </a:rPr>
-              <a:t>Word Labs  •  wordlabs.app  •  Root: 'repair' = fix or make good again</a:t>
+              <a:t>Word Labs  •  wordlabs.app  •  Root: 'repair' = fix or restore something broken</a:t>
             </a:r>
             <a:endParaRPr lang="en-US" sz="800" dirty="0"/>
           </a:p>
@@ -34676,7 +33461,7 @@
                 <a:ea typeface="Calibri" pitchFamily="34" charset="-122"/>
                 <a:cs typeface="Calibri" pitchFamily="34" charset="-120"/>
               </a:rPr>
-              <a:t>Word Labs  •  wordlabs.app  •  Root: 'repair' = fix or make good again</a:t>
+              <a:t>Word Labs  •  wordlabs.app  •  Root: 'repair' = fix or restore something broken</a:t>
             </a:r>
             <a:endParaRPr lang="en-US" sz="800" dirty="0"/>
           </a:p>
@@ -35322,7 +34107,7 @@
                 <a:ea typeface="Trebuchet MS" pitchFamily="34" charset="-122"/>
                 <a:cs typeface="Trebuchet MS" pitchFamily="34" charset="-120"/>
               </a:rPr>
-              <a:t>pre-</a:t>
+              <a:t>re-</a:t>
             </a:r>
             <a:endParaRPr lang="en-US" sz="1300" dirty="0"/>
           </a:p>
@@ -35475,7 +34260,7 @@
                 <a:ea typeface="Trebuchet MS" pitchFamily="34" charset="-122"/>
                 <a:cs typeface="Trebuchet MS" pitchFamily="34" charset="-120"/>
               </a:rPr>
-              <a:t>re-</a:t>
+              <a:t>pre-</a:t>
             </a:r>
             <a:endParaRPr lang="en-US" sz="1300" dirty="0"/>
           </a:p>
@@ -36576,7 +35361,7 @@
                 <a:ea typeface="Calibri" pitchFamily="34" charset="-122"/>
                 <a:cs typeface="Calibri" pitchFamily="34" charset="-120"/>
               </a:rPr>
-              <a:t>Word Labs  •  wordlabs.app  •  Root: 'repair' = fix or make good again</a:t>
+              <a:t>Word Labs  •  wordlabs.app  •  Root: 'repair' = fix or restore something broken</a:t>
             </a:r>
             <a:endParaRPr lang="en-US" sz="800" dirty="0"/>
           </a:p>
@@ -36740,7 +35525,7 @@
                 <a:ea typeface="Calibri" pitchFamily="34" charset="-122"/>
                 <a:cs typeface="Calibri" pitchFamily="34" charset="-120"/>
               </a:rPr>
-              <a:t>The core part of a word carrying its basic meaning. For example, 'repair' means 'fix or make good again'.</a:t>
+              <a:t>The core part of a word carrying its basic meaning. For example, 'repair' means 'fix or restore something broken'.</a:t>
             </a:r>
             <a:endParaRPr lang="en-US" sz="1350" dirty="0"/>
           </a:p>
@@ -37360,7 +36145,7 @@
                 <a:ea typeface="Calibri" pitchFamily="34" charset="-122"/>
                 <a:cs typeface="Calibri" pitchFamily="34" charset="-120"/>
               </a:rPr>
-              <a:t>Word Labs  •  wordlabs.app  •  Root: 'repair' = fix or make good again</a:t>
+              <a:t>Word Labs  •  wordlabs.app  •  Root: 'repair' = fix or restore something broken</a:t>
             </a:r>
             <a:endParaRPr lang="en-US" sz="800" dirty="0"/>
           </a:p>
@@ -37472,7 +36257,7 @@
                 <a:ea typeface="Calibri" pitchFamily="34" charset="-122"/>
                 <a:cs typeface="Calibri" pitchFamily="34" charset="-120"/>
               </a:rPr>
-              <a:t>1.  The word 'repair' comes from a Latin word meaning to fix or restore.</a:t>
+              <a:t>1.  The word 'irreparable' means something that cannot be fixed.</a:t>
             </a:r>
             <a:endParaRPr lang="en-US" sz="1300" dirty="0"/>
           </a:p>
@@ -37611,7 +36396,7 @@
                 <a:ea typeface="Calibri" pitchFamily="34" charset="-122"/>
                 <a:cs typeface="Calibri" pitchFamily="34" charset="-120"/>
               </a:rPr>
-              <a:t>2.  The word 'irreparable' means something can easily be repaired.</a:t>
+              <a:t>2.  The root 'repair' comes from the Greek language.</a:t>
             </a:r>
             <a:endParaRPr lang="en-US" sz="1300" dirty="0"/>
           </a:p>
@@ -37750,7 +36535,7 @@
                 <a:ea typeface="Calibri" pitchFamily="34" charset="-122"/>
                 <a:cs typeface="Calibri" pitchFamily="34" charset="-120"/>
               </a:rPr>
-              <a:t>3.  Adding the suffix '-er' to 'repair' makes a word that means a person who fixes things.</a:t>
+              <a:t>3.  Adding '-able' to 'repair' makes the word 'repairable', meaning able to be fixed.</a:t>
             </a:r>
             <a:endParaRPr lang="en-US" sz="1300" dirty="0"/>
           </a:p>
@@ -37889,7 +36674,7 @@
                 <a:ea typeface="Calibri" pitchFamily="34" charset="-122"/>
                 <a:cs typeface="Calibri" pitchFamily="34" charset="-120"/>
               </a:rPr>
-              <a:t>4.  The prefix 'ir-' in 'irreparable' means 'not'.</a:t>
+              <a:t>4.  The word 'repairing' is a noun describing a finished object.</a:t>
             </a:r>
             <a:endParaRPr lang="en-US" sz="1300" dirty="0"/>
           </a:p>
@@ -37912,11 +36697,11 @@
             </a:avLst>
           </a:prstGeom>
           <a:solidFill>
-            <a:srgbClr val="DCFCE7"/>
-          </a:solidFill>
-          <a:ln w="12700">
-            <a:solidFill>
-              <a:srgbClr val="16A34A"/>
+            <a:srgbClr val="FEE2E2"/>
+          </a:solidFill>
+          <a:ln w="12700">
+            <a:solidFill>
+              <a:srgbClr val="DC2626"/>
             </a:solidFill>
             <a:prstDash val="solid"/>
           </a:ln>
@@ -37949,13 +36734,13 @@
             <a:r>
               <a:rPr lang="en-US" sz="1100" b="1" dirty="0">
                 <a:solidFill>
-                  <a:srgbClr val="16A34A"/>
+                  <a:srgbClr val="DC2626"/>
                 </a:solidFill>
                 <a:latin typeface="Trebuchet MS" pitchFamily="34" charset="0"/>
                 <a:ea typeface="Trebuchet MS" pitchFamily="34" charset="-122"/>
                 <a:cs typeface="Trebuchet MS" pitchFamily="34" charset="-120"/>
               </a:rPr>
-              <a:t>TRUE</a:t>
+              <a:t>FALSE</a:t>
             </a:r>
             <a:endParaRPr lang="en-US" sz="1100" dirty="0"/>
           </a:p>
@@ -38028,7 +36813,7 @@
                 <a:ea typeface="Calibri" pitchFamily="34" charset="-122"/>
                 <a:cs typeface="Calibri" pitchFamily="34" charset="-120"/>
               </a:rPr>
-              <a:t>5.  The word 'repairing' is a noun that names a type of tool.</a:t>
+              <a:t>5.  A 'repairer' is a person who fixes broken things.</a:t>
             </a:r>
             <a:endParaRPr lang="en-US" sz="1300" dirty="0"/>
           </a:p>
@@ -38051,11 +36836,11 @@
             </a:avLst>
           </a:prstGeom>
           <a:solidFill>
-            <a:srgbClr val="FEE2E2"/>
-          </a:solidFill>
-          <a:ln w="12700">
-            <a:solidFill>
-              <a:srgbClr val="DC2626"/>
+            <a:srgbClr val="DCFCE7"/>
+          </a:solidFill>
+          <a:ln w="12700">
+            <a:solidFill>
+              <a:srgbClr val="16A34A"/>
             </a:solidFill>
             <a:prstDash val="solid"/>
           </a:ln>
@@ -38088,13 +36873,13 @@
             <a:r>
               <a:rPr lang="en-US" sz="1100" b="1" dirty="0">
                 <a:solidFill>
-                  <a:srgbClr val="DC2626"/>
+                  <a:srgbClr val="16A34A"/>
                 </a:solidFill>
                 <a:latin typeface="Trebuchet MS" pitchFamily="34" charset="0"/>
                 <a:ea typeface="Trebuchet MS" pitchFamily="34" charset="-122"/>
                 <a:cs typeface="Trebuchet MS" pitchFamily="34" charset="-120"/>
               </a:rPr>
-              <a:t>FALSE</a:t>
+              <a:t>TRUE</a:t>
             </a:r>
             <a:endParaRPr lang="en-US" sz="1100" dirty="0"/>
           </a:p>
@@ -38386,7 +37171,7 @@
                 <a:ea typeface="Calibri" pitchFamily="34" charset="-122"/>
                 <a:cs typeface="Calibri" pitchFamily="34" charset="-120"/>
               </a:rPr>
-              <a:t>Word Labs  •  wordlabs.app  •  Root: 'repair' = fix or make good again</a:t>
+              <a:t>Word Labs  •  wordlabs.app  •  Root: 'repair' = fix or restore something broken</a:t>
             </a:r>
             <a:endParaRPr lang="en-US" sz="800" dirty="0"/>
           </a:p>
@@ -38523,7 +37308,7 @@
                 <a:ea typeface="Trebuchet MS" pitchFamily="34" charset="-122"/>
                 <a:cs typeface="Trebuchet MS" pitchFamily="34" charset="-120"/>
               </a:rPr>
-              <a:t>fix or make good again</a:t>
+              <a:t>fix or restore something broken</a:t>
             </a:r>
             <a:endParaRPr lang="en-US" sz="2000" dirty="0"/>
           </a:p>
@@ -39355,7 +38140,7 @@
                 <a:ea typeface="Calibri" pitchFamily="34" charset="-122"/>
                 <a:cs typeface="Calibri" pitchFamily="34" charset="-120"/>
               </a:rPr>
-              <a:t>Word Labs  •  wordlabs.app  •  Root: 'repair' = fix or make good again</a:t>
+              <a:t>Word Labs  •  wordlabs.app  •  Root: 'repair' = fix or restore something broken</a:t>
             </a:r>
             <a:endParaRPr lang="en-US" sz="800" dirty="0"/>
           </a:p>
@@ -40001,7 +38786,7 @@
                 <a:ea typeface="Trebuchet MS" pitchFamily="34" charset="-122"/>
                 <a:cs typeface="Trebuchet MS" pitchFamily="34" charset="-120"/>
               </a:rPr>
-              <a:t>pre-</a:t>
+              <a:t>re-</a:t>
             </a:r>
             <a:endParaRPr lang="en-US" sz="1300" dirty="0"/>
           </a:p>
@@ -40154,7 +38939,7 @@
                 <a:ea typeface="Trebuchet MS" pitchFamily="34" charset="-122"/>
                 <a:cs typeface="Trebuchet MS" pitchFamily="34" charset="-120"/>
               </a:rPr>
-              <a:t>re-</a:t>
+              <a:t>pre-</a:t>
             </a:r>
             <a:endParaRPr lang="en-US" sz="1300" dirty="0"/>
           </a:p>
@@ -41129,7 +39914,7 @@
                 <a:ea typeface="Calibri" pitchFamily="34" charset="-122"/>
                 <a:cs typeface="Calibri" pitchFamily="34" charset="-120"/>
               </a:rPr>
-              <a:t>Word Labs  •  wordlabs.app  •  Root: 'repair' = fix or make good again</a:t>
+              <a:t>Word Labs  •  wordlabs.app  •  Root: 'repair' = fix or restore something broken</a:t>
             </a:r>
             <a:endParaRPr lang="en-US" sz="800" dirty="0"/>
           </a:p>
@@ -41307,7 +40092,7 @@
                 <a:ea typeface="Calibri" pitchFamily="34" charset="-122"/>
                 <a:cs typeface="Calibri" pitchFamily="34" charset="-120"/>
               </a:rPr>
-              <a:t>More than one act of fixing something, or fixes something.</a:t>
+              <a:t>More than one fix, or the act of fixing several things.</a:t>
             </a:r>
             <a:endParaRPr lang="en-US" sz="1200" dirty="0"/>
           </a:p>
@@ -41585,7 +40370,7 @@
                 <a:ea typeface="Calibri" pitchFamily="34" charset="-122"/>
                 <a:cs typeface="Calibri" pitchFamily="34" charset="-120"/>
               </a:rPr>
-              <a:t>In the process of fixing something right now.</a:t>
+              <a:t>The act of fixing something right now.</a:t>
             </a:r>
             <a:endParaRPr lang="en-US" sz="1200" dirty="0"/>
           </a:p>
@@ -41724,7 +40509,7 @@
                 <a:ea typeface="Calibri" pitchFamily="34" charset="-122"/>
                 <a:cs typeface="Calibri" pitchFamily="34" charset="-120"/>
               </a:rPr>
-              <a:t>So badly damaged that it cannot be fixed.</a:t>
+              <a:t>Something so badly damaged it cannot be fixed.</a:t>
             </a:r>
             <a:endParaRPr lang="en-US" sz="1200" dirty="0"/>
           </a:p>
@@ -42002,7 +40787,7 @@
                 <a:ea typeface="Calibri" pitchFamily="34" charset="-122"/>
                 <a:cs typeface="Calibri" pitchFamily="34" charset="-120"/>
               </a:rPr>
-              <a:t>Able to be fixed.</a:t>
+              <a:t>Something that is able to be fixed.</a:t>
             </a:r>
             <a:endParaRPr lang="en-US" sz="1200" dirty="0"/>
           </a:p>
@@ -42433,7 +41218,7 @@
                 <a:ea typeface="Calibri" pitchFamily="34" charset="-122"/>
                 <a:cs typeface="Calibri" pitchFamily="34" charset="-120"/>
               </a:rPr>
-              <a:t>Word Labs  •  wordlabs.app  •  Root: 'repair' = fix or make good again</a:t>
+              <a:t>Word Labs  •  wordlabs.app  •  Root: 'repair' = fix or restore something broken</a:t>
             </a:r>
             <a:endParaRPr lang="en-US" sz="800" dirty="0"/>
           </a:p>
@@ -42636,7 +41421,7 @@
                 <a:ea typeface="Calibri" pitchFamily="34" charset="-122"/>
                 <a:cs typeface="Calibri" pitchFamily="34" charset="-120"/>
               </a:rPr>
-              <a:t>The mechanic will repair the bicycle so you can ride it safely to school.</a:t>
+              <a:t>The mechanic was repairing the old bicycle so the children could ride it again.</a:t>
             </a:r>
             <a:endParaRPr lang="en-US" sz="1500" dirty="0"/>
           </a:p>
@@ -42800,7 +41585,7 @@
                 <a:ea typeface="Calibri" pitchFamily="34" charset="-122"/>
                 <a:cs typeface="Calibri" pitchFamily="34" charset="-120"/>
               </a:rPr>
-              <a:t>After the storm, the council sent workers to repair the broken fence in the park.</a:t>
+              <a:t>After the storm, the council organised repairs to the damaged park fence.</a:t>
             </a:r>
             <a:endParaRPr lang="en-US" sz="1500" dirty="0"/>
           </a:p>
@@ -42964,7 +41749,7 @@
                 <a:ea typeface="Calibri" pitchFamily="34" charset="-122"/>
                 <a:cs typeface="Calibri" pitchFamily="34" charset="-120"/>
               </a:rPr>
-              <a:t>Mum said the crack in the vase was irreparable, so we could not glue it back together.</a:t>
+              <a:t>Luckily, the crack in the vase was repairable if we used the right glue.</a:t>
             </a:r>
             <a:endParaRPr lang="en-US" sz="1500" dirty="0"/>
           </a:p>

--- a/output/wordlabs-repair-3day.pptx
+++ b/output/wordlabs-repair-3day.pptx
@@ -4240,7 +4240,7 @@
                 <a:ea typeface="Calibri" pitchFamily="34" charset="-122"/>
                 <a:cs typeface="Calibri" pitchFamily="34" charset="-120"/>
               </a:rPr>
-              <a:t>"fix or restore something broken"</a:t>
+              <a:t>"fix"</a:t>
             </a:r>
             <a:endParaRPr lang="en-US" sz="2200" dirty="0"/>
           </a:p>
@@ -4279,7 +4279,7 @@
                 <a:ea typeface="Calibri" pitchFamily="34" charset="-122"/>
                 <a:cs typeface="Calibri" pitchFamily="34" charset="-120"/>
               </a:rPr>
-              <a:t>Origin: Latin: reparare</a:t>
+              <a:t>Origin: Core English root</a:t>
             </a:r>
             <a:endParaRPr lang="en-US" sz="1300" dirty="0"/>
           </a:p>
@@ -5288,7 +5288,7 @@
                 <a:ea typeface="Calibri" pitchFamily="34" charset="-122"/>
                 <a:cs typeface="Calibri" pitchFamily="34" charset="-120"/>
               </a:rPr>
-              <a:t>Word Labs  •  wordlabs.app  •  Root: 'repair' = fix or restore something broken</a:t>
+              <a:t>Word Labs  •  wordlabs.app  •  Root: 'repair' = fix</a:t>
             </a:r>
             <a:endParaRPr lang="en-US" sz="800" dirty="0"/>
           </a:p>
@@ -5622,7 +5622,7 @@
                 <a:ea typeface="Trebuchet MS" pitchFamily="34" charset="-122"/>
                 <a:cs typeface="Trebuchet MS" pitchFamily="34" charset="-120"/>
               </a:rPr>
-              <a:t>1</a:t>
+              <a:t>0</a:t>
             </a:r>
             <a:pPr algn="ctr" indent="0" marL="0">
               <a:buNone/>
@@ -5928,7 +5928,7 @@
                 <a:ea typeface="Calibri" pitchFamily="34" charset="-122"/>
                 <a:cs typeface="Calibri" pitchFamily="34" charset="-120"/>
               </a:rPr>
-              <a:t>Word Labs  •  wordlabs.app  •  Root: 'repair' = fix or restore something broken</a:t>
+              <a:t>Word Labs  •  wordlabs.app  •  Root: 'repair' = fix</a:t>
             </a:r>
             <a:endParaRPr lang="en-US" sz="800" dirty="0"/>
           </a:p>
@@ -6040,7 +6040,7 @@
                 <a:ea typeface="Calibri" pitchFamily="34" charset="-122"/>
                 <a:cs typeface="Calibri" pitchFamily="34" charset="-120"/>
               </a:rPr>
-              <a:t>The </a:t>
+              <a:t>The roof </a:t>
             </a:r>
             <a:pPr algn="l" indent="0" marL="0">
               <a:buNone/>
@@ -6057,7 +6057,7 @@
                 <a:ea typeface="Calibri" pitchFamily="34" charset="-122"/>
                 <a:cs typeface="Calibri" pitchFamily="34" charset="-120"/>
               </a:rPr>
-              <a:t>repairer</a:t>
+              <a:t>repairs</a:t>
             </a:r>
             <a:pPr algn="l" indent="0" marL="0">
               <a:buNone/>
@@ -6071,7 +6071,7 @@
                 <a:ea typeface="Calibri" pitchFamily="34" charset="-122"/>
                 <a:cs typeface="Calibri" pitchFamily="34" charset="-120"/>
               </a:rPr>
-              <a:t> worked carefully on the broken chair, and soon it was fully </a:t>
+              <a:t> cost more money than expected. The plumber </a:t>
             </a:r>
             <a:pPr algn="l" indent="0" marL="0">
               <a:buNone/>
@@ -6102,7 +6102,7 @@
                 <a:ea typeface="Calibri" pitchFamily="34" charset="-122"/>
                 <a:cs typeface="Calibri" pitchFamily="34" charset="-120"/>
               </a:rPr>
-              <a:t>.</a:t>
+              <a:t> the leaking pipe under the sink.</a:t>
             </a:r>
             <a:endParaRPr lang="en-US" sz="1800" dirty="0"/>
           </a:p>
@@ -6257,7 +6257,7 @@
                 <a:ea typeface="Trebuchet MS" pitchFamily="34" charset="-122"/>
                 <a:cs typeface="Trebuchet MS" pitchFamily="34" charset="-120"/>
               </a:rPr>
-              <a:t>repairer</a:t>
+              <a:t>repairs</a:t>
             </a:r>
             <a:endParaRPr lang="en-US" sz="1400" dirty="0"/>
           </a:p>
@@ -6716,7 +6716,7 @@
                 <a:ea typeface="Calibri" pitchFamily="34" charset="-122"/>
                 <a:cs typeface="Calibri" pitchFamily="34" charset="-120"/>
               </a:rPr>
-              <a:t>Word Labs  •  wordlabs.app  •  Root: 'repair' = fix or restore something broken</a:t>
+              <a:t>Word Labs  •  wordlabs.app  •  Root: 'repair' = fix</a:t>
             </a:r>
             <a:endParaRPr lang="en-US" sz="800" dirty="0"/>
           </a:p>
@@ -6855,7 +6855,7 @@
                 <a:ea typeface="Trebuchet MS" pitchFamily="34" charset="-122"/>
                 <a:cs typeface="Trebuchet MS" pitchFamily="34" charset="-120"/>
               </a:rPr>
-              <a:t>repairer</a:t>
+              <a:t>repairs</a:t>
             </a:r>
             <a:endParaRPr lang="en-US" sz="2800" dirty="0"/>
           </a:p>
@@ -7543,7 +7543,7 @@
                 <a:ea typeface="Calibri" pitchFamily="34" charset="-122"/>
                 <a:cs typeface="Calibri" pitchFamily="34" charset="-120"/>
               </a:rPr>
-              <a:t>Word Labs  •  wordlabs.app  •  Root: 'repair' = fix or restore something broken</a:t>
+              <a:t>Word Labs  •  wordlabs.app  •  Root: 'repair' = fix</a:t>
             </a:r>
             <a:endParaRPr lang="en-US" sz="800" dirty="0"/>
           </a:p>
@@ -7682,7 +7682,7 @@
                 <a:ea typeface="Trebuchet MS" pitchFamily="34" charset="-122"/>
                 <a:cs typeface="Trebuchet MS" pitchFamily="34" charset="-120"/>
               </a:rPr>
-              <a:t>repairer</a:t>
+              <a:t>repairs</a:t>
             </a:r>
             <a:endParaRPr lang="en-US" sz="2800" dirty="0"/>
           </a:p>
@@ -7860,7 +7860,7 @@
                 <a:ea typeface="Calibri" pitchFamily="34" charset="-122"/>
                 <a:cs typeface="Calibri" pitchFamily="34" charset="-120"/>
               </a:rPr>
-              <a:t>fix or restore</a:t>
+              <a:t>fix</a:t>
             </a:r>
             <a:endParaRPr lang="en-US" sz="850" dirty="0"/>
           </a:p>
@@ -7933,7 +7933,7 @@
                 <a:ea typeface="Trebuchet MS" pitchFamily="34" charset="-122"/>
                 <a:cs typeface="Trebuchet MS" pitchFamily="34" charset="-120"/>
               </a:rPr>
-              <a:t>er</a:t>
+              <a:t>s</a:t>
             </a:r>
             <a:endParaRPr lang="en-US" sz="1300" dirty="0"/>
           </a:p>
@@ -7972,7 +7972,7 @@
                 <a:ea typeface="Calibri" pitchFamily="34" charset="-122"/>
                 <a:cs typeface="Calibri" pitchFamily="34" charset="-120"/>
               </a:rPr>
-              <a:t>a person who does something</a:t>
+              <a:t>plural or present tense</a:t>
             </a:r>
             <a:endParaRPr lang="en-US" sz="850" dirty="0"/>
           </a:p>
@@ -8528,7 +8528,7 @@
                 <a:ea typeface="Calibri" pitchFamily="34" charset="-122"/>
                 <a:cs typeface="Calibri" pitchFamily="34" charset="-120"/>
               </a:rPr>
-              <a:t>Word Labs  •  wordlabs.app  •  Root: 'repair' = fix or restore something broken</a:t>
+              <a:t>Word Labs  •  wordlabs.app  •  Root: 'repair' = fix</a:t>
             </a:r>
             <a:endParaRPr lang="en-US" sz="800" dirty="0"/>
           </a:p>
@@ -8667,7 +8667,7 @@
                 <a:ea typeface="Trebuchet MS" pitchFamily="34" charset="-122"/>
                 <a:cs typeface="Trebuchet MS" pitchFamily="34" charset="-120"/>
               </a:rPr>
-              <a:t>repairer</a:t>
+              <a:t>repairs</a:t>
             </a:r>
             <a:endParaRPr lang="en-US" sz="2800" dirty="0"/>
           </a:p>
@@ -8845,7 +8845,7 @@
                 <a:ea typeface="Calibri" pitchFamily="34" charset="-122"/>
                 <a:cs typeface="Calibri" pitchFamily="34" charset="-120"/>
               </a:rPr>
-              <a:t>fix or restore</a:t>
+              <a:t>fix</a:t>
             </a:r>
             <a:endParaRPr lang="en-US" sz="850" dirty="0"/>
           </a:p>
@@ -8918,7 +8918,7 @@
                 <a:ea typeface="Trebuchet MS" pitchFamily="34" charset="-122"/>
                 <a:cs typeface="Trebuchet MS" pitchFamily="34" charset="-120"/>
               </a:rPr>
-              <a:t>er</a:t>
+              <a:t>s</a:t>
             </a:r>
             <a:endParaRPr lang="en-US" sz="1300" dirty="0"/>
           </a:p>
@@ -8957,7 +8957,7 @@
                 <a:ea typeface="Calibri" pitchFamily="34" charset="-122"/>
                 <a:cs typeface="Calibri" pitchFamily="34" charset="-120"/>
               </a:rPr>
-              <a:t>a person who does something</a:t>
+              <a:t>plural or present tense</a:t>
             </a:r>
             <a:endParaRPr lang="en-US" sz="850" dirty="0"/>
           </a:p>
@@ -9064,7 +9064,7 @@
         </p:nvSpPr>
         <p:spPr>
           <a:xfrm>
-            <a:off x="2313432" y="3364992"/>
+            <a:off x="2999232" y="3364992"/>
             <a:ext cx="1645920" cy="475488"/>
           </a:xfrm>
           <a:prstGeom prst="rect">
@@ -9091,7 +9091,7 @@
         </p:nvSpPr>
         <p:spPr>
           <a:xfrm>
-            <a:off x="2313432" y="3364992"/>
+            <a:off x="2999232" y="3364992"/>
             <a:ext cx="1645920" cy="475488"/>
           </a:xfrm>
           <a:prstGeom prst="rect">
@@ -9130,8 +9130,8 @@
         </p:nvSpPr>
         <p:spPr>
           <a:xfrm>
-            <a:off x="3959352" y="3364992"/>
-            <a:ext cx="411480" cy="475488"/>
+            <a:off x="4645152" y="3364992"/>
+            <a:ext cx="1097280" cy="475488"/>
           </a:xfrm>
           <a:prstGeom prst="rect">
             <a:avLst/>
@@ -9169,7 +9169,7 @@
         </p:nvSpPr>
         <p:spPr>
           <a:xfrm>
-            <a:off x="4370832" y="3364992"/>
+            <a:off x="5742432" y="3364992"/>
             <a:ext cx="1645920" cy="475488"/>
           </a:xfrm>
           <a:prstGeom prst="rect">
@@ -9196,7 +9196,7 @@
         </p:nvSpPr>
         <p:spPr>
           <a:xfrm>
-            <a:off x="4370832" y="3364992"/>
+            <a:off x="5742432" y="3364992"/>
             <a:ext cx="1645920" cy="475488"/>
           </a:xfrm>
           <a:prstGeom prst="rect">
@@ -9221,7 +9221,7 @@
                 <a:ea typeface="Trebuchet MS" pitchFamily="34" charset="-122"/>
                 <a:cs typeface="Trebuchet MS" pitchFamily="34" charset="-120"/>
               </a:rPr>
-              <a:t>pair</a:t>
+              <a:t>pairs</a:t>
             </a:r>
             <a:endParaRPr lang="en-US" sz="1400" dirty="0"/>
           </a:p>
@@ -9229,14 +9229,41 @@
       </p:sp>
       <p:sp>
         <p:nvSpPr>
-          <p:cNvPr id="30" name="Text 28"/>
-          <p:cNvSpPr/>
-          <p:nvPr/>
-        </p:nvSpPr>
-        <p:spPr>
-          <a:xfrm>
-            <a:off x="6016752" y="3364992"/>
-            <a:ext cx="411480" cy="475488"/>
+          <p:cNvPr id="30" name="Shape 28"/>
+          <p:cNvSpPr/>
+          <p:nvPr/>
+        </p:nvSpPr>
+        <p:spPr>
+          <a:xfrm>
+            <a:off x="365760" y="4096512"/>
+            <a:ext cx="1371600" cy="804672"/>
+          </a:xfrm>
+          <a:prstGeom prst="rect">
+            <a:avLst>
+              <a:gd name="adj" fmla="val 6818"/>
+            </a:avLst>
+          </a:prstGeom>
+          <a:solidFill>
+            <a:srgbClr val="E2E8F0"/>
+          </a:solidFill>
+          <a:ln w="12700">
+            <a:solidFill>
+              <a:srgbClr val="E2E8F0"/>
+            </a:solidFill>
+            <a:prstDash val="solid"/>
+          </a:ln>
+        </p:spPr>
+      </p:sp>
+      <p:sp>
+        <p:nvSpPr>
+          <p:cNvPr id="31" name="Text 29"/>
+          <p:cNvSpPr/>
+          <p:nvPr/>
+        </p:nvSpPr>
+        <p:spPr>
+          <a:xfrm>
+            <a:off x="365760" y="4096512"/>
+            <a:ext cx="1371600" cy="804672"/>
           </a:xfrm>
           <a:prstGeom prst="rect">
             <a:avLst/>
@@ -9252,96 +9279,30 @@
               <a:buNone/>
             </a:pPr>
             <a:r>
-              <a:rPr lang="en-US" sz="1600" b="1" dirty="0">
-                <a:solidFill>
-                  <a:srgbClr val="0D9488"/>
+              <a:rPr lang="en-US" sz="1100" b="1" dirty="0">
+                <a:solidFill>
+                  <a:srgbClr val="475569"/>
                 </a:solidFill>
                 <a:latin typeface="Trebuchet MS" pitchFamily="34" charset="0"/>
                 <a:ea typeface="Trebuchet MS" pitchFamily="34" charset="-122"/>
                 <a:cs typeface="Trebuchet MS" pitchFamily="34" charset="-120"/>
               </a:rPr>
-              <a:t>·</a:t>
-            </a:r>
-            <a:endParaRPr lang="en-US" sz="1600" dirty="0"/>
-          </a:p>
-        </p:txBody>
-      </p:sp>
-      <p:sp>
-        <p:nvSpPr>
-          <p:cNvPr id="31" name="Shape 29"/>
-          <p:cNvSpPr/>
-          <p:nvPr/>
-        </p:nvSpPr>
-        <p:spPr>
-          <a:xfrm>
-            <a:off x="6428232" y="3364992"/>
-            <a:ext cx="1645920" cy="475488"/>
-          </a:xfrm>
-          <a:prstGeom prst="rect">
-            <a:avLst>
-              <a:gd name="adj" fmla="val 9615"/>
-            </a:avLst>
-          </a:prstGeom>
-          <a:solidFill>
-            <a:srgbClr val="FFFFFF"/>
-          </a:solidFill>
-          <a:ln w="12700">
-            <a:solidFill>
-              <a:srgbClr val="0D9488"/>
-            </a:solidFill>
-            <a:prstDash val="solid"/>
-          </a:ln>
-        </p:spPr>
-      </p:sp>
-      <p:sp>
-        <p:nvSpPr>
-          <p:cNvPr id="32" name="Text 30"/>
-          <p:cNvSpPr/>
-          <p:nvPr/>
-        </p:nvSpPr>
-        <p:spPr>
-          <a:xfrm>
-            <a:off x="6428232" y="3364992"/>
-            <a:ext cx="1645920" cy="475488"/>
-          </a:xfrm>
-          <a:prstGeom prst="rect">
-            <a:avLst/>
-          </a:prstGeom>
-          <a:noFill/>
-          <a:ln/>
-        </p:spPr>
-        <p:txBody>
-          <a:bodyPr wrap="square" lIns="0" tIns="0" rIns="0" bIns="0" rtlCol="0" anchor="ctr"/>
-          <a:lstStyle/>
-          <a:p>
-            <a:pPr algn="ctr" indent="0" marL="0">
-              <a:buNone/>
-            </a:pPr>
-            <a:r>
-              <a:rPr lang="en-US" sz="1400" b="1" dirty="0">
-                <a:solidFill>
-                  <a:srgbClr val="0D9488"/>
-                </a:solidFill>
-                <a:latin typeface="Trebuchet MS" pitchFamily="34" charset="0"/>
-                <a:ea typeface="Trebuchet MS" pitchFamily="34" charset="-122"/>
-                <a:cs typeface="Trebuchet MS" pitchFamily="34" charset="-120"/>
-              </a:rPr>
-              <a:t>er</a:t>
-            </a:r>
-            <a:endParaRPr lang="en-US" sz="1400" dirty="0"/>
-          </a:p>
-        </p:txBody>
-      </p:sp>
-      <p:sp>
-        <p:nvSpPr>
-          <p:cNvPr id="33" name="Shape 31"/>
-          <p:cNvSpPr/>
-          <p:nvPr/>
-        </p:nvSpPr>
-        <p:spPr>
-          <a:xfrm>
-            <a:off x="365760" y="4096512"/>
-            <a:ext cx="1371600" cy="804672"/>
+              <a:t>Phonemes</a:t>
+            </a:r>
+            <a:endParaRPr lang="en-US" sz="1100" dirty="0"/>
+          </a:p>
+        </p:txBody>
+      </p:sp>
+      <p:sp>
+        <p:nvSpPr>
+          <p:cNvPr id="32" name="Shape 30"/>
+          <p:cNvSpPr/>
+          <p:nvPr/>
+        </p:nvSpPr>
+        <p:spPr>
+          <a:xfrm>
+            <a:off x="1874520" y="4096512"/>
+            <a:ext cx="6903720" cy="804672"/>
           </a:xfrm>
           <a:prstGeom prst="rect">
             <a:avLst>
@@ -9349,85 +9310,19 @@
             </a:avLst>
           </a:prstGeom>
           <a:solidFill>
-            <a:srgbClr val="E2E8F0"/>
+            <a:srgbClr val="F8FAFC"/>
           </a:solidFill>
           <a:ln w="12700">
             <a:solidFill>
               <a:srgbClr val="E2E8F0"/>
             </a:solidFill>
-            <a:prstDash val="solid"/>
-          </a:ln>
-        </p:spPr>
-      </p:sp>
-      <p:sp>
-        <p:nvSpPr>
-          <p:cNvPr id="34" name="Text 32"/>
-          <p:cNvSpPr/>
-          <p:nvPr/>
-        </p:nvSpPr>
-        <p:spPr>
-          <a:xfrm>
-            <a:off x="365760" y="4096512"/>
-            <a:ext cx="1371600" cy="804672"/>
-          </a:xfrm>
-          <a:prstGeom prst="rect">
-            <a:avLst/>
-          </a:prstGeom>
-          <a:noFill/>
-          <a:ln/>
-        </p:spPr>
-        <p:txBody>
-          <a:bodyPr wrap="square" lIns="0" tIns="0" rIns="0" bIns="0" rtlCol="0" anchor="ctr"/>
-          <a:lstStyle/>
-          <a:p>
-            <a:pPr algn="ctr" indent="0" marL="0">
-              <a:buNone/>
-            </a:pPr>
-            <a:r>
-              <a:rPr lang="en-US" sz="1100" b="1" dirty="0">
-                <a:solidFill>
-                  <a:srgbClr val="475569"/>
-                </a:solidFill>
-                <a:latin typeface="Trebuchet MS" pitchFamily="34" charset="0"/>
-                <a:ea typeface="Trebuchet MS" pitchFamily="34" charset="-122"/>
-                <a:cs typeface="Trebuchet MS" pitchFamily="34" charset="-120"/>
-              </a:rPr>
-              <a:t>Phonemes</a:t>
-            </a:r>
-            <a:endParaRPr lang="en-US" sz="1100" dirty="0"/>
-          </a:p>
-        </p:txBody>
-      </p:sp>
-      <p:sp>
-        <p:nvSpPr>
-          <p:cNvPr id="35" name="Shape 33"/>
-          <p:cNvSpPr/>
-          <p:nvPr/>
-        </p:nvSpPr>
-        <p:spPr>
-          <a:xfrm>
-            <a:off x="1874520" y="4096512"/>
-            <a:ext cx="6903720" cy="804672"/>
-          </a:xfrm>
-          <a:prstGeom prst="rect">
-            <a:avLst>
-              <a:gd name="adj" fmla="val 6818"/>
-            </a:avLst>
-          </a:prstGeom>
-          <a:solidFill>
-            <a:srgbClr val="F8FAFC"/>
-          </a:solidFill>
-          <a:ln w="12700">
-            <a:solidFill>
-              <a:srgbClr val="E2E8F0"/>
-            </a:solidFill>
             <a:prstDash val="dash"/>
           </a:ln>
         </p:spPr>
       </p:sp>
       <p:sp>
         <p:nvSpPr>
-          <p:cNvPr id="36" name="Text 34"/>
+          <p:cNvPr id="33" name="Text 31"/>
           <p:cNvSpPr/>
           <p:nvPr/>
         </p:nvSpPr>
@@ -9750,7 +9645,7 @@
                 <a:ea typeface="Calibri" pitchFamily="34" charset="-122"/>
                 <a:cs typeface="Calibri" pitchFamily="34" charset="-120"/>
               </a:rPr>
-              <a:t>Word Labs  •  wordlabs.app  •  Root: 'repair' = fix or restore something broken</a:t>
+              <a:t>Word Labs  •  wordlabs.app  •  Root: 'repair' = fix</a:t>
             </a:r>
             <a:endParaRPr lang="en-US" sz="800" dirty="0"/>
           </a:p>
@@ -9889,7 +9784,7 @@
                 <a:ea typeface="Trebuchet MS" pitchFamily="34" charset="-122"/>
                 <a:cs typeface="Trebuchet MS" pitchFamily="34" charset="-120"/>
               </a:rPr>
-              <a:t>repairer</a:t>
+              <a:t>repairs</a:t>
             </a:r>
             <a:endParaRPr lang="en-US" sz="2800" dirty="0"/>
           </a:p>
@@ -10067,7 +9962,7 @@
                 <a:ea typeface="Calibri" pitchFamily="34" charset="-122"/>
                 <a:cs typeface="Calibri" pitchFamily="34" charset="-120"/>
               </a:rPr>
-              <a:t>fix or restore</a:t>
+              <a:t>fix</a:t>
             </a:r>
             <a:endParaRPr lang="en-US" sz="850" dirty="0"/>
           </a:p>
@@ -10140,7 +10035,7 @@
                 <a:ea typeface="Trebuchet MS" pitchFamily="34" charset="-122"/>
                 <a:cs typeface="Trebuchet MS" pitchFamily="34" charset="-120"/>
               </a:rPr>
-              <a:t>er</a:t>
+              <a:t>s</a:t>
             </a:r>
             <a:endParaRPr lang="en-US" sz="1300" dirty="0"/>
           </a:p>
@@ -10179,7 +10074,7 @@
                 <a:ea typeface="Calibri" pitchFamily="34" charset="-122"/>
                 <a:cs typeface="Calibri" pitchFamily="34" charset="-120"/>
               </a:rPr>
-              <a:t>a person who does something</a:t>
+              <a:t>plural or present tense</a:t>
             </a:r>
             <a:endParaRPr lang="en-US" sz="850" dirty="0"/>
           </a:p>
@@ -10286,7 +10181,7 @@
         </p:nvSpPr>
         <p:spPr>
           <a:xfrm>
-            <a:off x="2313432" y="3364992"/>
+            <a:off x="2999232" y="3364992"/>
             <a:ext cx="1645920" cy="475488"/>
           </a:xfrm>
           <a:prstGeom prst="rect">
@@ -10313,7 +10208,7 @@
         </p:nvSpPr>
         <p:spPr>
           <a:xfrm>
-            <a:off x="2313432" y="3364992"/>
+            <a:off x="2999232" y="3364992"/>
             <a:ext cx="1645920" cy="475488"/>
           </a:xfrm>
           <a:prstGeom prst="rect">
@@ -10352,8 +10247,8 @@
         </p:nvSpPr>
         <p:spPr>
           <a:xfrm>
-            <a:off x="3959352" y="3364992"/>
-            <a:ext cx="411480" cy="475488"/>
+            <a:off x="4645152" y="3364992"/>
+            <a:ext cx="1097280" cy="475488"/>
           </a:xfrm>
           <a:prstGeom prst="rect">
             <a:avLst/>
@@ -10391,7 +10286,7 @@
         </p:nvSpPr>
         <p:spPr>
           <a:xfrm>
-            <a:off x="4370832" y="3364992"/>
+            <a:off x="5742432" y="3364992"/>
             <a:ext cx="1645920" cy="475488"/>
           </a:xfrm>
           <a:prstGeom prst="rect">
@@ -10418,7 +10313,7 @@
         </p:nvSpPr>
         <p:spPr>
           <a:xfrm>
-            <a:off x="4370832" y="3364992"/>
+            <a:off x="5742432" y="3364992"/>
             <a:ext cx="1645920" cy="475488"/>
           </a:xfrm>
           <a:prstGeom prst="rect">
@@ -10443,7 +10338,7 @@
                 <a:ea typeface="Trebuchet MS" pitchFamily="34" charset="-122"/>
                 <a:cs typeface="Trebuchet MS" pitchFamily="34" charset="-120"/>
               </a:rPr>
-              <a:t>pair</a:t>
+              <a:t>pairs</a:t>
             </a:r>
             <a:endParaRPr lang="en-US" sz="1400" dirty="0"/>
           </a:p>
@@ -10451,14 +10346,41 @@
       </p:sp>
       <p:sp>
         <p:nvSpPr>
-          <p:cNvPr id="30" name="Text 28"/>
-          <p:cNvSpPr/>
-          <p:nvPr/>
-        </p:nvSpPr>
-        <p:spPr>
-          <a:xfrm>
-            <a:off x="6016752" y="3364992"/>
-            <a:ext cx="411480" cy="475488"/>
+          <p:cNvPr id="30" name="Shape 28"/>
+          <p:cNvSpPr/>
+          <p:nvPr/>
+        </p:nvSpPr>
+        <p:spPr>
+          <a:xfrm>
+            <a:off x="365760" y="4096512"/>
+            <a:ext cx="1371600" cy="804672"/>
+          </a:xfrm>
+          <a:prstGeom prst="rect">
+            <a:avLst>
+              <a:gd name="adj" fmla="val 6818"/>
+            </a:avLst>
+          </a:prstGeom>
+          <a:solidFill>
+            <a:srgbClr val="E2E8F0"/>
+          </a:solidFill>
+          <a:ln w="12700">
+            <a:solidFill>
+              <a:srgbClr val="E2E8F0"/>
+            </a:solidFill>
+            <a:prstDash val="solid"/>
+          </a:ln>
+        </p:spPr>
+      </p:sp>
+      <p:sp>
+        <p:nvSpPr>
+          <p:cNvPr id="31" name="Text 29"/>
+          <p:cNvSpPr/>
+          <p:nvPr/>
+        </p:nvSpPr>
+        <p:spPr>
+          <a:xfrm>
+            <a:off x="365760" y="4096512"/>
+            <a:ext cx="1371600" cy="804672"/>
           </a:xfrm>
           <a:prstGeom prst="rect">
             <a:avLst/>
@@ -10474,57 +10396,84 @@
               <a:buNone/>
             </a:pPr>
             <a:r>
-              <a:rPr lang="en-US" sz="1600" b="1" dirty="0">
-                <a:solidFill>
-                  <a:srgbClr val="0D9488"/>
+              <a:rPr lang="en-US" sz="1100" b="1" dirty="0">
+                <a:solidFill>
+                  <a:srgbClr val="475569"/>
                 </a:solidFill>
                 <a:latin typeface="Trebuchet MS" pitchFamily="34" charset="0"/>
                 <a:ea typeface="Trebuchet MS" pitchFamily="34" charset="-122"/>
                 <a:cs typeface="Trebuchet MS" pitchFamily="34" charset="-120"/>
               </a:rPr>
-              <a:t>·</a:t>
-            </a:r>
-            <a:endParaRPr lang="en-US" sz="1600" dirty="0"/>
-          </a:p>
-        </p:txBody>
-      </p:sp>
-      <p:sp>
-        <p:nvSpPr>
-          <p:cNvPr id="31" name="Shape 29"/>
-          <p:cNvSpPr/>
-          <p:nvPr/>
-        </p:nvSpPr>
-        <p:spPr>
-          <a:xfrm>
-            <a:off x="6428232" y="3364992"/>
-            <a:ext cx="1645920" cy="475488"/>
+              <a:t>Phonemes</a:t>
+            </a:r>
+            <a:endParaRPr lang="en-US" sz="1100" dirty="0"/>
+          </a:p>
+        </p:txBody>
+      </p:sp>
+      <p:sp>
+        <p:nvSpPr>
+          <p:cNvPr id="32" name="Shape 30"/>
+          <p:cNvSpPr/>
+          <p:nvPr/>
+        </p:nvSpPr>
+        <p:spPr>
+          <a:xfrm>
+            <a:off x="1874520" y="4096512"/>
+            <a:ext cx="6903720" cy="658368"/>
           </a:xfrm>
           <a:prstGeom prst="rect">
             <a:avLst>
-              <a:gd name="adj" fmla="val 9615"/>
+              <a:gd name="adj" fmla="val 8333"/>
             </a:avLst>
           </a:prstGeom>
           <a:solidFill>
+            <a:srgbClr val="FCE7F3"/>
+          </a:solidFill>
+          <a:ln w="12700">
+            <a:solidFill>
+              <a:srgbClr val="DB2777"/>
+            </a:solidFill>
+            <a:prstDash val="solid"/>
+          </a:ln>
+        </p:spPr>
+      </p:sp>
+      <p:sp>
+        <p:nvSpPr>
+          <p:cNvPr id="33" name="Shape 31"/>
+          <p:cNvSpPr/>
+          <p:nvPr/>
+        </p:nvSpPr>
+        <p:spPr>
+          <a:xfrm>
+            <a:off x="2427732" y="4169664"/>
+            <a:ext cx="685800" cy="475488"/>
+          </a:xfrm>
+          <a:prstGeom prst="rect">
+            <a:avLst>
+              <a:gd name="adj" fmla="val 7692"/>
+            </a:avLst>
+          </a:prstGeom>
+          <a:solidFill>
             <a:srgbClr val="FFFFFF"/>
           </a:solidFill>
           <a:ln w="12700">
             <a:solidFill>
-              <a:srgbClr val="0D9488"/>
-            </a:solidFill>
-            <a:prstDash val="solid"/>
-          </a:ln>
-        </p:spPr>
-      </p:sp>
-      <p:sp>
-        <p:nvSpPr>
-          <p:cNvPr id="32" name="Text 30"/>
-          <p:cNvSpPr/>
-          <p:nvPr/>
-        </p:nvSpPr>
-        <p:spPr>
-          <a:xfrm>
-            <a:off x="6428232" y="3364992"/>
-            <a:ext cx="1645920" cy="475488"/>
+              <a:srgbClr val="DB2777"/>
+            </a:solidFill>
+            <a:prstDash val="solid"/>
+          </a:ln>
+        </p:spPr>
+      </p:sp>
+      <p:sp>
+        <p:nvSpPr>
+          <p:cNvPr id="34" name="Text 32"/>
+          <p:cNvSpPr/>
+          <p:nvPr/>
+        </p:nvSpPr>
+        <p:spPr>
+          <a:xfrm>
+            <a:off x="2427732" y="4169664"/>
+            <a:ext cx="685800" cy="475488"/>
           </a:xfrm>
           <a:prstGeom prst="rect">
             <a:avLst/>
@@ -10540,57 +10489,57 @@
               <a:buNone/>
             </a:pPr>
             <a:r>
-              <a:rPr lang="en-US" sz="1400" b="1" dirty="0">
-                <a:solidFill>
-                  <a:srgbClr val="0D9488"/>
+              <a:rPr lang="en-US" sz="900" b="1" dirty="0">
+                <a:solidFill>
+                  <a:srgbClr val="9D174D"/>
                 </a:solidFill>
                 <a:latin typeface="Trebuchet MS" pitchFamily="34" charset="0"/>
                 <a:ea typeface="Trebuchet MS" pitchFamily="34" charset="-122"/>
                 <a:cs typeface="Trebuchet MS" pitchFamily="34" charset="-120"/>
               </a:rPr>
-              <a:t>er</a:t>
-            </a:r>
-            <a:endParaRPr lang="en-US" sz="1400" dirty="0"/>
-          </a:p>
-        </p:txBody>
-      </p:sp>
-      <p:sp>
-        <p:nvSpPr>
-          <p:cNvPr id="33" name="Shape 31"/>
-          <p:cNvSpPr/>
-          <p:nvPr/>
-        </p:nvSpPr>
-        <p:spPr>
-          <a:xfrm>
-            <a:off x="365760" y="4096512"/>
-            <a:ext cx="1371600" cy="804672"/>
+              <a:t>r</a:t>
+            </a:r>
+            <a:endParaRPr lang="en-US" sz="900" dirty="0"/>
+          </a:p>
+        </p:txBody>
+      </p:sp>
+      <p:sp>
+        <p:nvSpPr>
+          <p:cNvPr id="35" name="Shape 33"/>
+          <p:cNvSpPr/>
+          <p:nvPr/>
+        </p:nvSpPr>
+        <p:spPr>
+          <a:xfrm>
+            <a:off x="3639312" y="4169664"/>
+            <a:ext cx="685800" cy="475488"/>
           </a:xfrm>
           <a:prstGeom prst="rect">
             <a:avLst>
-              <a:gd name="adj" fmla="val 6818"/>
+              <a:gd name="adj" fmla="val 7692"/>
             </a:avLst>
           </a:prstGeom>
           <a:solidFill>
-            <a:srgbClr val="E2E8F0"/>
-          </a:solidFill>
-          <a:ln w="12700">
-            <a:solidFill>
-              <a:srgbClr val="E2E8F0"/>
-            </a:solidFill>
-            <a:prstDash val="solid"/>
-          </a:ln>
-        </p:spPr>
-      </p:sp>
-      <p:sp>
-        <p:nvSpPr>
-          <p:cNvPr id="34" name="Text 32"/>
-          <p:cNvSpPr/>
-          <p:nvPr/>
-        </p:nvSpPr>
-        <p:spPr>
-          <a:xfrm>
-            <a:off x="365760" y="4096512"/>
-            <a:ext cx="1371600" cy="804672"/>
+            <a:srgbClr val="FFFFFF"/>
+          </a:solidFill>
+          <a:ln w="12700">
+            <a:solidFill>
+              <a:srgbClr val="DB2777"/>
+            </a:solidFill>
+            <a:prstDash val="solid"/>
+          </a:ln>
+        </p:spPr>
+      </p:sp>
+      <p:sp>
+        <p:nvSpPr>
+          <p:cNvPr id="36" name="Text 34"/>
+          <p:cNvSpPr/>
+          <p:nvPr/>
+        </p:nvSpPr>
+        <p:spPr>
+          <a:xfrm>
+            <a:off x="3639312" y="4169664"/>
+            <a:ext cx="685800" cy="475488"/>
           </a:xfrm>
           <a:prstGeom prst="rect">
             <a:avLst/>
@@ -10606,56 +10555,29 @@
               <a:buNone/>
             </a:pPr>
             <a:r>
-              <a:rPr lang="en-US" sz="1100" b="1" dirty="0">
-                <a:solidFill>
-                  <a:srgbClr val="475569"/>
+              <a:rPr lang="en-US" sz="900" b="1" dirty="0">
+                <a:solidFill>
+                  <a:srgbClr val="9D174D"/>
                 </a:solidFill>
                 <a:latin typeface="Trebuchet MS" pitchFamily="34" charset="0"/>
                 <a:ea typeface="Trebuchet MS" pitchFamily="34" charset="-122"/>
                 <a:cs typeface="Trebuchet MS" pitchFamily="34" charset="-120"/>
               </a:rPr>
-              <a:t>Phonemes</a:t>
-            </a:r>
-            <a:endParaRPr lang="en-US" sz="1100" dirty="0"/>
-          </a:p>
-        </p:txBody>
-      </p:sp>
-      <p:sp>
-        <p:nvSpPr>
-          <p:cNvPr id="35" name="Shape 33"/>
-          <p:cNvSpPr/>
-          <p:nvPr/>
-        </p:nvSpPr>
-        <p:spPr>
-          <a:xfrm>
-            <a:off x="1874520" y="4096512"/>
-            <a:ext cx="6903720" cy="658368"/>
-          </a:xfrm>
-          <a:prstGeom prst="rect">
-            <a:avLst>
-              <a:gd name="adj" fmla="val 8333"/>
-            </a:avLst>
-          </a:prstGeom>
-          <a:solidFill>
-            <a:srgbClr val="FCE7F3"/>
-          </a:solidFill>
-          <a:ln w="12700">
-            <a:solidFill>
-              <a:srgbClr val="DB2777"/>
-            </a:solidFill>
-            <a:prstDash val="solid"/>
-          </a:ln>
-        </p:spPr>
-      </p:sp>
-      <p:sp>
-        <p:nvSpPr>
-          <p:cNvPr id="36" name="Shape 34"/>
-          <p:cNvSpPr/>
-          <p:nvPr/>
-        </p:nvSpPr>
-        <p:spPr>
-          <a:xfrm>
-            <a:off x="2427732" y="4169664"/>
+              <a:t>e</a:t>
+            </a:r>
+            <a:endParaRPr lang="en-US" sz="900" dirty="0"/>
+          </a:p>
+        </p:txBody>
+      </p:sp>
+      <p:sp>
+        <p:nvSpPr>
+          <p:cNvPr id="37" name="Shape 35"/>
+          <p:cNvSpPr/>
+          <p:nvPr/>
+        </p:nvSpPr>
+        <p:spPr>
+          <a:xfrm>
+            <a:off x="4850892" y="4169664"/>
             <a:ext cx="685800" cy="475488"/>
           </a:xfrm>
           <a:prstGeom prst="rect">
@@ -10676,13 +10598,13 @@
       </p:sp>
       <p:sp>
         <p:nvSpPr>
-          <p:cNvPr id="37" name="Text 35"/>
-          <p:cNvSpPr/>
-          <p:nvPr/>
-        </p:nvSpPr>
-        <p:spPr>
-          <a:xfrm>
-            <a:off x="2427732" y="4169664"/>
+          <p:cNvPr id="38" name="Text 36"/>
+          <p:cNvSpPr/>
+          <p:nvPr/>
+        </p:nvSpPr>
+        <p:spPr>
+          <a:xfrm>
+            <a:off x="4850892" y="4169664"/>
             <a:ext cx="685800" cy="475488"/>
           </a:xfrm>
           <a:prstGeom prst="rect">
@@ -10707,7 +10629,7 @@
                 <a:ea typeface="Trebuchet MS" pitchFamily="34" charset="-122"/>
                 <a:cs typeface="Trebuchet MS" pitchFamily="34" charset="-120"/>
               </a:rPr>
-              <a:t>r</a:t>
+              <a:t>p</a:t>
             </a:r>
             <a:endParaRPr lang="en-US" sz="900" dirty="0"/>
           </a:p>
@@ -10715,13 +10637,13 @@
       </p:sp>
       <p:sp>
         <p:nvSpPr>
-          <p:cNvPr id="38" name="Shape 36"/>
-          <p:cNvSpPr/>
-          <p:nvPr/>
-        </p:nvSpPr>
-        <p:spPr>
-          <a:xfrm>
-            <a:off x="3639312" y="4169664"/>
+          <p:cNvPr id="39" name="Shape 37"/>
+          <p:cNvSpPr/>
+          <p:nvPr/>
+        </p:nvSpPr>
+        <p:spPr>
+          <a:xfrm>
+            <a:off x="6062472" y="4169664"/>
             <a:ext cx="685800" cy="475488"/>
           </a:xfrm>
           <a:prstGeom prst="rect">
@@ -10742,13 +10664,13 @@
       </p:sp>
       <p:sp>
         <p:nvSpPr>
-          <p:cNvPr id="39" name="Text 37"/>
-          <p:cNvSpPr/>
-          <p:nvPr/>
-        </p:nvSpPr>
-        <p:spPr>
-          <a:xfrm>
-            <a:off x="3639312" y="4169664"/>
+          <p:cNvPr id="40" name="Text 38"/>
+          <p:cNvSpPr/>
+          <p:nvPr/>
+        </p:nvSpPr>
+        <p:spPr>
+          <a:xfrm>
+            <a:off x="6062472" y="4169664"/>
             <a:ext cx="685800" cy="475488"/>
           </a:xfrm>
           <a:prstGeom prst="rect">
@@ -10773,7 +10695,7 @@
                 <a:ea typeface="Trebuchet MS" pitchFamily="34" charset="-122"/>
                 <a:cs typeface="Trebuchet MS" pitchFamily="34" charset="-120"/>
               </a:rPr>
-              <a:t>e</a:t>
+              <a:t>air</a:t>
             </a:r>
             <a:endParaRPr lang="en-US" sz="900" dirty="0"/>
           </a:p>
@@ -10781,13 +10703,13 @@
       </p:sp>
       <p:sp>
         <p:nvSpPr>
-          <p:cNvPr id="40" name="Shape 38"/>
-          <p:cNvSpPr/>
-          <p:nvPr/>
-        </p:nvSpPr>
-        <p:spPr>
-          <a:xfrm>
-            <a:off x="4850892" y="4169664"/>
+          <p:cNvPr id="41" name="Shape 39"/>
+          <p:cNvSpPr/>
+          <p:nvPr/>
+        </p:nvSpPr>
+        <p:spPr>
+          <a:xfrm>
+            <a:off x="7274052" y="4169664"/>
             <a:ext cx="685800" cy="475488"/>
           </a:xfrm>
           <a:prstGeom prst="rect">
@@ -10808,13 +10730,13 @@
       </p:sp>
       <p:sp>
         <p:nvSpPr>
-          <p:cNvPr id="41" name="Text 39"/>
-          <p:cNvSpPr/>
-          <p:nvPr/>
-        </p:nvSpPr>
-        <p:spPr>
-          <a:xfrm>
-            <a:off x="4850892" y="4169664"/>
+          <p:cNvPr id="42" name="Text 40"/>
+          <p:cNvSpPr/>
+          <p:nvPr/>
+        </p:nvSpPr>
+        <p:spPr>
+          <a:xfrm>
+            <a:off x="7274052" y="4169664"/>
             <a:ext cx="685800" cy="475488"/>
           </a:xfrm>
           <a:prstGeom prst="rect">
@@ -10839,139 +10761,7 @@
                 <a:ea typeface="Trebuchet MS" pitchFamily="34" charset="-122"/>
                 <a:cs typeface="Trebuchet MS" pitchFamily="34" charset="-120"/>
               </a:rPr>
-              <a:t>p</a:t>
-            </a:r>
-            <a:endParaRPr lang="en-US" sz="900" dirty="0"/>
-          </a:p>
-        </p:txBody>
-      </p:sp>
-      <p:sp>
-        <p:nvSpPr>
-          <p:cNvPr id="42" name="Shape 40"/>
-          <p:cNvSpPr/>
-          <p:nvPr/>
-        </p:nvSpPr>
-        <p:spPr>
-          <a:xfrm>
-            <a:off x="6062472" y="4169664"/>
-            <a:ext cx="685800" cy="475488"/>
-          </a:xfrm>
-          <a:prstGeom prst="rect">
-            <a:avLst>
-              <a:gd name="adj" fmla="val 7692"/>
-            </a:avLst>
-          </a:prstGeom>
-          <a:solidFill>
-            <a:srgbClr val="FFFFFF"/>
-          </a:solidFill>
-          <a:ln w="12700">
-            <a:solidFill>
-              <a:srgbClr val="DB2777"/>
-            </a:solidFill>
-            <a:prstDash val="solid"/>
-          </a:ln>
-        </p:spPr>
-      </p:sp>
-      <p:sp>
-        <p:nvSpPr>
-          <p:cNvPr id="43" name="Text 41"/>
-          <p:cNvSpPr/>
-          <p:nvPr/>
-        </p:nvSpPr>
-        <p:spPr>
-          <a:xfrm>
-            <a:off x="6062472" y="4169664"/>
-            <a:ext cx="685800" cy="475488"/>
-          </a:xfrm>
-          <a:prstGeom prst="rect">
-            <a:avLst/>
-          </a:prstGeom>
-          <a:noFill/>
-          <a:ln/>
-        </p:spPr>
-        <p:txBody>
-          <a:bodyPr wrap="square" lIns="0" tIns="0" rIns="0" bIns="0" rtlCol="0" anchor="ctr"/>
-          <a:lstStyle/>
-          <a:p>
-            <a:pPr algn="ctr" indent="0" marL="0">
-              <a:buNone/>
-            </a:pPr>
-            <a:r>
-              <a:rPr lang="en-US" sz="900" b="1" dirty="0">
-                <a:solidFill>
-                  <a:srgbClr val="9D174D"/>
-                </a:solidFill>
-                <a:latin typeface="Trebuchet MS" pitchFamily="34" charset="0"/>
-                <a:ea typeface="Trebuchet MS" pitchFamily="34" charset="-122"/>
-                <a:cs typeface="Trebuchet MS" pitchFamily="34" charset="-120"/>
-              </a:rPr>
-              <a:t>air</a:t>
-            </a:r>
-            <a:endParaRPr lang="en-US" sz="900" dirty="0"/>
-          </a:p>
-        </p:txBody>
-      </p:sp>
-      <p:sp>
-        <p:nvSpPr>
-          <p:cNvPr id="44" name="Shape 42"/>
-          <p:cNvSpPr/>
-          <p:nvPr/>
-        </p:nvSpPr>
-        <p:spPr>
-          <a:xfrm>
-            <a:off x="7274052" y="4169664"/>
-            <a:ext cx="685800" cy="475488"/>
-          </a:xfrm>
-          <a:prstGeom prst="rect">
-            <a:avLst>
-              <a:gd name="adj" fmla="val 7692"/>
-            </a:avLst>
-          </a:prstGeom>
-          <a:solidFill>
-            <a:srgbClr val="FFFFFF"/>
-          </a:solidFill>
-          <a:ln w="12700">
-            <a:solidFill>
-              <a:srgbClr val="DB2777"/>
-            </a:solidFill>
-            <a:prstDash val="solid"/>
-          </a:ln>
-        </p:spPr>
-      </p:sp>
-      <p:sp>
-        <p:nvSpPr>
-          <p:cNvPr id="45" name="Text 43"/>
-          <p:cNvSpPr/>
-          <p:nvPr/>
-        </p:nvSpPr>
-        <p:spPr>
-          <a:xfrm>
-            <a:off x="7274052" y="4169664"/>
-            <a:ext cx="685800" cy="475488"/>
-          </a:xfrm>
-          <a:prstGeom prst="rect">
-            <a:avLst/>
-          </a:prstGeom>
-          <a:noFill/>
-          <a:ln/>
-        </p:spPr>
-        <p:txBody>
-          <a:bodyPr wrap="square" lIns="0" tIns="0" rIns="0" bIns="0" rtlCol="0" anchor="ctr"/>
-          <a:lstStyle/>
-          <a:p>
-            <a:pPr algn="ctr" indent="0" marL="0">
-              <a:buNone/>
-            </a:pPr>
-            <a:r>
-              <a:rPr lang="en-US" sz="900" b="1" dirty="0">
-                <a:solidFill>
-                  <a:srgbClr val="9D174D"/>
-                </a:solidFill>
-                <a:latin typeface="Trebuchet MS" pitchFamily="34" charset="0"/>
-                <a:ea typeface="Trebuchet MS" pitchFamily="34" charset="-122"/>
-                <a:cs typeface="Trebuchet MS" pitchFamily="34" charset="-120"/>
-              </a:rPr>
-              <a:t>er</a:t>
+              <a:t>s</a:t>
             </a:r>
             <a:endParaRPr lang="en-US" sz="900" dirty="0"/>
           </a:p>
@@ -11263,7 +11053,7 @@
                 <a:ea typeface="Calibri" pitchFamily="34" charset="-122"/>
                 <a:cs typeface="Calibri" pitchFamily="34" charset="-120"/>
               </a:rPr>
-              <a:t>Word Labs  •  wordlabs.app  •  Root: 'repair' = fix or restore something broken</a:t>
+              <a:t>Word Labs  •  wordlabs.app  •  Root: 'repair' = fix</a:t>
             </a:r>
             <a:endParaRPr lang="en-US" sz="800" dirty="0"/>
           </a:p>
@@ -12090,7 +11880,7 @@
                 <a:ea typeface="Calibri" pitchFamily="34" charset="-122"/>
                 <a:cs typeface="Calibri" pitchFamily="34" charset="-120"/>
               </a:rPr>
-              <a:t>Word Labs  •  wordlabs.app  •  Root: 'repair' = fix or restore something broken</a:t>
+              <a:t>Word Labs  •  wordlabs.app  •  Root: 'repair' = fix</a:t>
             </a:r>
             <a:endParaRPr lang="en-US" sz="800" dirty="0"/>
           </a:p>
@@ -12407,7 +12197,7 @@
                 <a:ea typeface="Calibri" pitchFamily="34" charset="-122"/>
                 <a:cs typeface="Calibri" pitchFamily="34" charset="-120"/>
               </a:rPr>
-              <a:t>fix or restore</a:t>
+              <a:t>fix</a:t>
             </a:r>
             <a:endParaRPr lang="en-US" sz="850" dirty="0"/>
           </a:p>
@@ -12519,7 +12309,7 @@
                 <a:ea typeface="Calibri" pitchFamily="34" charset="-122"/>
                 <a:cs typeface="Calibri" pitchFamily="34" charset="-120"/>
               </a:rPr>
-              <a:t>in the past</a:t>
+              <a:t>past tense</a:t>
             </a:r>
             <a:endParaRPr lang="en-US" sz="850" dirty="0"/>
           </a:p>
@@ -13075,7 +12865,7 @@
                 <a:ea typeface="Calibri" pitchFamily="34" charset="-122"/>
                 <a:cs typeface="Calibri" pitchFamily="34" charset="-120"/>
               </a:rPr>
-              <a:t>Word Labs  •  wordlabs.app  •  Root: 'repair' = fix or restore something broken</a:t>
+              <a:t>Word Labs  •  wordlabs.app  •  Root: 'repair' = fix</a:t>
             </a:r>
             <a:endParaRPr lang="en-US" sz="800" dirty="0"/>
           </a:p>
@@ -13392,7 +13182,7 @@
                 <a:ea typeface="Calibri" pitchFamily="34" charset="-122"/>
                 <a:cs typeface="Calibri" pitchFamily="34" charset="-120"/>
               </a:rPr>
-              <a:t>fix or restore</a:t>
+              <a:t>fix</a:t>
             </a:r>
             <a:endParaRPr lang="en-US" sz="850" dirty="0"/>
           </a:p>
@@ -13504,7 +13294,7 @@
                 <a:ea typeface="Calibri" pitchFamily="34" charset="-122"/>
                 <a:cs typeface="Calibri" pitchFamily="34" charset="-120"/>
               </a:rPr>
-              <a:t>in the past</a:t>
+              <a:t>past tense</a:t>
             </a:r>
             <a:endParaRPr lang="en-US" sz="850" dirty="0"/>
           </a:p>
@@ -14101,7 +13891,7 @@
                 <a:ea typeface="Calibri" pitchFamily="34" charset="-122"/>
                 <a:cs typeface="Calibri" pitchFamily="34" charset="-120"/>
               </a:rPr>
-              <a:t>Root 'repair' — fix or restore something broken</a:t>
+              <a:t>Root 'repair' — fix</a:t>
             </a:r>
             <a:endParaRPr lang="en-US" sz="1600" dirty="0"/>
           </a:p>
@@ -14457,7 +14247,7 @@
                 <a:ea typeface="Calibri" pitchFamily="34" charset="-122"/>
                 <a:cs typeface="Calibri" pitchFamily="34" charset="-120"/>
               </a:rPr>
-              <a:t>Word Labs  •  wordlabs.app  •  Root: 'repair' = fix or restore something broken</a:t>
+              <a:t>Word Labs  •  wordlabs.app  •  Root: 'repair' = fix</a:t>
             </a:r>
             <a:endParaRPr lang="en-US" sz="800" dirty="0"/>
           </a:p>
@@ -14774,7 +14564,7 @@
                 <a:ea typeface="Calibri" pitchFamily="34" charset="-122"/>
                 <a:cs typeface="Calibri" pitchFamily="34" charset="-120"/>
               </a:rPr>
-              <a:t>fix or restore</a:t>
+              <a:t>fix</a:t>
             </a:r>
             <a:endParaRPr lang="en-US" sz="850" dirty="0"/>
           </a:p>
@@ -14886,7 +14676,7 @@
                 <a:ea typeface="Calibri" pitchFamily="34" charset="-122"/>
                 <a:cs typeface="Calibri" pitchFamily="34" charset="-120"/>
               </a:rPr>
-              <a:t>in the past</a:t>
+              <a:t>past tense</a:t>
             </a:r>
             <a:endParaRPr lang="en-US" sz="850" dirty="0"/>
           </a:p>
@@ -16147,7 +15937,7 @@
                 <a:ea typeface="Calibri" pitchFamily="34" charset="-122"/>
                 <a:cs typeface="Calibri" pitchFamily="34" charset="-120"/>
               </a:rPr>
-              <a:t>Word Labs  •  wordlabs.app  •  Root: 'repair' = fix or restore something broken</a:t>
+              <a:t>Word Labs  •  wordlabs.app  •  Root: 'repair' = fix</a:t>
             </a:r>
             <a:endParaRPr lang="en-US" sz="800" dirty="0"/>
           </a:p>
@@ -16481,7 +16271,7 @@
                 <a:ea typeface="Trebuchet MS" pitchFamily="34" charset="-122"/>
                 <a:cs typeface="Trebuchet MS" pitchFamily="34" charset="-120"/>
               </a:rPr>
-              <a:t>2</a:t>
+              <a:t>1</a:t>
             </a:r>
             <a:pPr algn="ctr" indent="0" marL="0">
               <a:buNone/>
@@ -16495,7 +16285,7 @@
                 <a:ea typeface="Trebuchet MS" pitchFamily="34" charset="-122"/>
                 <a:cs typeface="Trebuchet MS" pitchFamily="34" charset="-120"/>
               </a:rPr>
-              <a:t>  punctuation marks</a:t>
+              <a:t>  punctuation mark</a:t>
             </a:r>
             <a:endParaRPr lang="en-US" sz="2800" dirty="0"/>
           </a:p>
@@ -16787,7 +16577,7 @@
                 <a:ea typeface="Calibri" pitchFamily="34" charset="-122"/>
                 <a:cs typeface="Calibri" pitchFamily="34" charset="-120"/>
               </a:rPr>
-              <a:t>Word Labs  •  wordlabs.app  •  Root: 'repair' = fix or restore something broken</a:t>
+              <a:t>Word Labs  •  wordlabs.app  •  Root: 'repair' = fix</a:t>
             </a:r>
             <a:endParaRPr lang="en-US" sz="800" dirty="0"/>
           </a:p>
@@ -16899,7 +16689,7 @@
                 <a:ea typeface="Calibri" pitchFamily="34" charset="-122"/>
                 <a:cs typeface="Calibri" pitchFamily="34" charset="-120"/>
               </a:rPr>
-              <a:t>The </a:t>
+              <a:t>The shoe </a:t>
             </a:r>
             <a:pPr algn="l" indent="0" marL="0">
               <a:buNone/>
@@ -16916,7 +16706,7 @@
                 <a:ea typeface="Calibri" pitchFamily="34" charset="-122"/>
                 <a:cs typeface="Calibri" pitchFamily="34" charset="-120"/>
               </a:rPr>
-              <a:t>repairing</a:t>
+              <a:t>repairer</a:t>
             </a:r>
             <a:pPr algn="l" indent="0" marL="0">
               <a:buNone/>
@@ -16930,7 +16720,7 @@
                 <a:ea typeface="Calibri" pitchFamily="34" charset="-122"/>
                 <a:cs typeface="Calibri" pitchFamily="34" charset="-120"/>
               </a:rPr>
-              <a:t> of the roof was difficult; however, the damage was </a:t>
+              <a:t> mended the torn strap in minutes. Dad spent the afternoon </a:t>
             </a:r>
             <a:pPr algn="l" indent="0" marL="0">
               <a:buNone/>
@@ -16947,7 +16737,7 @@
                 <a:ea typeface="Calibri" pitchFamily="34" charset="-122"/>
                 <a:cs typeface="Calibri" pitchFamily="34" charset="-120"/>
               </a:rPr>
-              <a:t>repairable</a:t>
+              <a:t>repairing</a:t>
             </a:r>
             <a:pPr algn="l" indent="0" marL="0">
               <a:buNone/>
@@ -16961,7 +16751,7 @@
                 <a:ea typeface="Calibri" pitchFamily="34" charset="-122"/>
                 <a:cs typeface="Calibri" pitchFamily="34" charset="-120"/>
               </a:rPr>
-              <a:t>, and all </a:t>
+              <a:t> the wobbly table leg. Luckily, the cracked screen was </a:t>
             </a:r>
             <a:pPr algn="l" indent="0" marL="0">
               <a:buNone/>
@@ -16978,7 +16768,7 @@
                 <a:ea typeface="Calibri" pitchFamily="34" charset="-122"/>
                 <a:cs typeface="Calibri" pitchFamily="34" charset="-120"/>
               </a:rPr>
-              <a:t>repairs</a:t>
+              <a:t>repairable</a:t>
             </a:r>
             <a:pPr algn="l" indent="0" marL="0">
               <a:buNone/>
@@ -16992,7 +16782,7 @@
                 <a:ea typeface="Calibri" pitchFamily="34" charset="-122"/>
                 <a:cs typeface="Calibri" pitchFamily="34" charset="-120"/>
               </a:rPr>
-              <a:t> were finished by Friday.</a:t>
+              <a:t>.</a:t>
             </a:r>
             <a:endParaRPr lang="en-US" sz="1800" dirty="0"/>
           </a:p>
@@ -17147,7 +16937,7 @@
                 <a:ea typeface="Trebuchet MS" pitchFamily="34" charset="-122"/>
                 <a:cs typeface="Trebuchet MS" pitchFamily="34" charset="-120"/>
               </a:rPr>
-              <a:t>repairing</a:t>
+              <a:t>repairer</a:t>
             </a:r>
             <a:endParaRPr lang="en-US" sz="1400" dirty="0"/>
           </a:p>
@@ -17275,7 +17065,7 @@
                 <a:ea typeface="Trebuchet MS" pitchFamily="34" charset="-122"/>
                 <a:cs typeface="Trebuchet MS" pitchFamily="34" charset="-120"/>
               </a:rPr>
-              <a:t>repairable</a:t>
+              <a:t>repairing</a:t>
             </a:r>
             <a:endParaRPr lang="en-US" sz="1400" dirty="0"/>
           </a:p>
@@ -17403,7 +17193,7 @@
                 <a:ea typeface="Trebuchet MS" pitchFamily="34" charset="-122"/>
                 <a:cs typeface="Trebuchet MS" pitchFamily="34" charset="-120"/>
               </a:rPr>
-              <a:t>repairs</a:t>
+              <a:t>repairable</a:t>
             </a:r>
             <a:endParaRPr lang="en-US" sz="1400" dirty="0"/>
           </a:p>
@@ -17734,7 +17524,7 @@
                 <a:ea typeface="Calibri" pitchFamily="34" charset="-122"/>
                 <a:cs typeface="Calibri" pitchFamily="34" charset="-120"/>
               </a:rPr>
-              <a:t>Word Labs  •  wordlabs.app  •  Root: 'repair' = fix or restore something broken</a:t>
+              <a:t>Word Labs  •  wordlabs.app  •  Root: 'repair' = fix</a:t>
             </a:r>
             <a:endParaRPr lang="en-US" sz="800" dirty="0"/>
           </a:p>
@@ -17873,7 +17663,7 @@
                 <a:ea typeface="Trebuchet MS" pitchFamily="34" charset="-122"/>
                 <a:cs typeface="Trebuchet MS" pitchFamily="34" charset="-120"/>
               </a:rPr>
-              <a:t>repairing</a:t>
+              <a:t>repairer</a:t>
             </a:r>
             <a:endParaRPr lang="en-US" sz="2800" dirty="0"/>
           </a:p>
@@ -18561,7 +18351,7 @@
                 <a:ea typeface="Calibri" pitchFamily="34" charset="-122"/>
                 <a:cs typeface="Calibri" pitchFamily="34" charset="-120"/>
               </a:rPr>
-              <a:t>Word Labs  •  wordlabs.app  •  Root: 'repair' = fix or restore something broken</a:t>
+              <a:t>Word Labs  •  wordlabs.app  •  Root: 'repair' = fix</a:t>
             </a:r>
             <a:endParaRPr lang="en-US" sz="800" dirty="0"/>
           </a:p>
@@ -18700,7 +18490,7 @@
                 <a:ea typeface="Trebuchet MS" pitchFamily="34" charset="-122"/>
                 <a:cs typeface="Trebuchet MS" pitchFamily="34" charset="-120"/>
               </a:rPr>
-              <a:t>repairing</a:t>
+              <a:t>repairer</a:t>
             </a:r>
             <a:endParaRPr lang="en-US" sz="2800" dirty="0"/>
           </a:p>
@@ -18878,7 +18668,7 @@
                 <a:ea typeface="Calibri" pitchFamily="34" charset="-122"/>
                 <a:cs typeface="Calibri" pitchFamily="34" charset="-120"/>
               </a:rPr>
-              <a:t>fix or restore</a:t>
+              <a:t>fix</a:t>
             </a:r>
             <a:endParaRPr lang="en-US" sz="850" dirty="0"/>
           </a:p>
@@ -18951,7 +18741,7 @@
                 <a:ea typeface="Trebuchet MS" pitchFamily="34" charset="-122"/>
                 <a:cs typeface="Trebuchet MS" pitchFamily="34" charset="-120"/>
               </a:rPr>
-              <a:t>ing</a:t>
+              <a:t>er</a:t>
             </a:r>
             <a:endParaRPr lang="en-US" sz="1300" dirty="0"/>
           </a:p>
@@ -18990,7 +18780,7 @@
                 <a:ea typeface="Calibri" pitchFamily="34" charset="-122"/>
                 <a:cs typeface="Calibri" pitchFamily="34" charset="-120"/>
               </a:rPr>
-              <a:t>action happening now</a:t>
+              <a:t>person who; more</a:t>
             </a:r>
             <a:endParaRPr lang="en-US" sz="850" dirty="0"/>
           </a:p>
@@ -19546,7 +19336,7 @@
                 <a:ea typeface="Calibri" pitchFamily="34" charset="-122"/>
                 <a:cs typeface="Calibri" pitchFamily="34" charset="-120"/>
               </a:rPr>
-              <a:t>Word Labs  •  wordlabs.app  •  Root: 'repair' = fix or restore something broken</a:t>
+              <a:t>Word Labs  •  wordlabs.app  •  Root: 'repair' = fix</a:t>
             </a:r>
             <a:endParaRPr lang="en-US" sz="800" dirty="0"/>
           </a:p>
@@ -19685,7 +19475,7 @@
                 <a:ea typeface="Trebuchet MS" pitchFamily="34" charset="-122"/>
                 <a:cs typeface="Trebuchet MS" pitchFamily="34" charset="-120"/>
               </a:rPr>
-              <a:t>repairing</a:t>
+              <a:t>repairer</a:t>
             </a:r>
             <a:endParaRPr lang="en-US" sz="2800" dirty="0"/>
           </a:p>
@@ -19863,7 +19653,7 @@
                 <a:ea typeface="Calibri" pitchFamily="34" charset="-122"/>
                 <a:cs typeface="Calibri" pitchFamily="34" charset="-120"/>
               </a:rPr>
-              <a:t>fix or restore</a:t>
+              <a:t>fix</a:t>
             </a:r>
             <a:endParaRPr lang="en-US" sz="850" dirty="0"/>
           </a:p>
@@ -19936,7 +19726,7 @@
                 <a:ea typeface="Trebuchet MS" pitchFamily="34" charset="-122"/>
                 <a:cs typeface="Trebuchet MS" pitchFamily="34" charset="-120"/>
               </a:rPr>
-              <a:t>ing</a:t>
+              <a:t>er</a:t>
             </a:r>
             <a:endParaRPr lang="en-US" sz="1300" dirty="0"/>
           </a:p>
@@ -19975,7 +19765,7 @@
                 <a:ea typeface="Calibri" pitchFamily="34" charset="-122"/>
                 <a:cs typeface="Calibri" pitchFamily="34" charset="-120"/>
               </a:rPr>
-              <a:t>action happening now</a:t>
+              <a:t>person who; more</a:t>
             </a:r>
             <a:endParaRPr lang="en-US" sz="850" dirty="0"/>
           </a:p>
@@ -20344,7 +20134,7 @@
                 <a:ea typeface="Trebuchet MS" pitchFamily="34" charset="-122"/>
                 <a:cs typeface="Trebuchet MS" pitchFamily="34" charset="-120"/>
               </a:rPr>
-              <a:t>ing</a:t>
+              <a:t>er</a:t>
             </a:r>
             <a:endParaRPr lang="en-US" sz="1400" dirty="0"/>
           </a:p>
@@ -20768,7 +20558,7 @@
                 <a:ea typeface="Calibri" pitchFamily="34" charset="-122"/>
                 <a:cs typeface="Calibri" pitchFamily="34" charset="-120"/>
               </a:rPr>
-              <a:t>Word Labs  •  wordlabs.app  •  Root: 'repair' = fix or restore something broken</a:t>
+              <a:t>Word Labs  •  wordlabs.app  •  Root: 'repair' = fix</a:t>
             </a:r>
             <a:endParaRPr lang="en-US" sz="800" dirty="0"/>
           </a:p>
@@ -20907,7 +20697,7 @@
                 <a:ea typeface="Trebuchet MS" pitchFamily="34" charset="-122"/>
                 <a:cs typeface="Trebuchet MS" pitchFamily="34" charset="-120"/>
               </a:rPr>
-              <a:t>repairing</a:t>
+              <a:t>repairer</a:t>
             </a:r>
             <a:endParaRPr lang="en-US" sz="2800" dirty="0"/>
           </a:p>
@@ -21085,7 +20875,7 @@
                 <a:ea typeface="Calibri" pitchFamily="34" charset="-122"/>
                 <a:cs typeface="Calibri" pitchFamily="34" charset="-120"/>
               </a:rPr>
-              <a:t>fix or restore</a:t>
+              <a:t>fix</a:t>
             </a:r>
             <a:endParaRPr lang="en-US" sz="850" dirty="0"/>
           </a:p>
@@ -21158,7 +20948,7 @@
                 <a:ea typeface="Trebuchet MS" pitchFamily="34" charset="-122"/>
                 <a:cs typeface="Trebuchet MS" pitchFamily="34" charset="-120"/>
               </a:rPr>
-              <a:t>ing</a:t>
+              <a:t>er</a:t>
             </a:r>
             <a:endParaRPr lang="en-US" sz="1300" dirty="0"/>
           </a:p>
@@ -21197,7 +20987,7 @@
                 <a:ea typeface="Calibri" pitchFamily="34" charset="-122"/>
                 <a:cs typeface="Calibri" pitchFamily="34" charset="-120"/>
               </a:rPr>
-              <a:t>action happening now</a:t>
+              <a:t>person who; more</a:t>
             </a:r>
             <a:endParaRPr lang="en-US" sz="850" dirty="0"/>
           </a:p>
@@ -21566,7 +21356,7 @@
                 <a:ea typeface="Trebuchet MS" pitchFamily="34" charset="-122"/>
                 <a:cs typeface="Trebuchet MS" pitchFamily="34" charset="-120"/>
               </a:rPr>
-              <a:t>ing</a:t>
+              <a:t>er</a:t>
             </a:r>
             <a:endParaRPr lang="en-US" sz="1400" dirty="0"/>
           </a:p>
@@ -21673,7 +21463,7 @@
         </p:nvSpPr>
         <p:spPr>
           <a:xfrm>
-            <a:off x="2254649" y="4169664"/>
+            <a:off x="2427732" y="4169664"/>
             <a:ext cx="685800" cy="475488"/>
           </a:xfrm>
           <a:prstGeom prst="rect">
@@ -21700,7 +21490,7 @@
         </p:nvSpPr>
         <p:spPr>
           <a:xfrm>
-            <a:off x="2254649" y="4169664"/>
+            <a:off x="2427732" y="4169664"/>
             <a:ext cx="685800" cy="475488"/>
           </a:xfrm>
           <a:prstGeom prst="rect">
@@ -21739,7 +21529,7 @@
         </p:nvSpPr>
         <p:spPr>
           <a:xfrm>
-            <a:off x="3293146" y="4169664"/>
+            <a:off x="3639312" y="4169664"/>
             <a:ext cx="685800" cy="475488"/>
           </a:xfrm>
           <a:prstGeom prst="rect">
@@ -21766,7 +21556,7 @@
         </p:nvSpPr>
         <p:spPr>
           <a:xfrm>
-            <a:off x="3293146" y="4169664"/>
+            <a:off x="3639312" y="4169664"/>
             <a:ext cx="685800" cy="475488"/>
           </a:xfrm>
           <a:prstGeom prst="rect">
@@ -21805,7 +21595,7 @@
         </p:nvSpPr>
         <p:spPr>
           <a:xfrm>
-            <a:off x="4331643" y="4169664"/>
+            <a:off x="4850892" y="4169664"/>
             <a:ext cx="685800" cy="475488"/>
           </a:xfrm>
           <a:prstGeom prst="rect">
@@ -21832,7 +21622,7 @@
         </p:nvSpPr>
         <p:spPr>
           <a:xfrm>
-            <a:off x="4331643" y="4169664"/>
+            <a:off x="4850892" y="4169664"/>
             <a:ext cx="685800" cy="475488"/>
           </a:xfrm>
           <a:prstGeom prst="rect">
@@ -21871,7 +21661,7 @@
         </p:nvSpPr>
         <p:spPr>
           <a:xfrm>
-            <a:off x="5370141" y="4169664"/>
+            <a:off x="6062472" y="4169664"/>
             <a:ext cx="685800" cy="475488"/>
           </a:xfrm>
           <a:prstGeom prst="rect">
@@ -21898,7 +21688,7 @@
         </p:nvSpPr>
         <p:spPr>
           <a:xfrm>
-            <a:off x="5370141" y="4169664"/>
+            <a:off x="6062472" y="4169664"/>
             <a:ext cx="685800" cy="475488"/>
           </a:xfrm>
           <a:prstGeom prst="rect">
@@ -21937,7 +21727,7 @@
         </p:nvSpPr>
         <p:spPr>
           <a:xfrm>
-            <a:off x="6408638" y="4169664"/>
+            <a:off x="7274052" y="4169664"/>
             <a:ext cx="685800" cy="475488"/>
           </a:xfrm>
           <a:prstGeom prst="rect">
@@ -21964,7 +21754,7 @@
         </p:nvSpPr>
         <p:spPr>
           <a:xfrm>
-            <a:off x="6408638" y="4169664"/>
+            <a:off x="7274052" y="4169664"/>
             <a:ext cx="685800" cy="475488"/>
           </a:xfrm>
           <a:prstGeom prst="rect">
@@ -21989,73 +21779,7 @@
                 <a:ea typeface="Trebuchet MS" pitchFamily="34" charset="-122"/>
                 <a:cs typeface="Trebuchet MS" pitchFamily="34" charset="-120"/>
               </a:rPr>
-              <a:t>i</a:t>
-            </a:r>
-            <a:endParaRPr lang="en-US" sz="900" dirty="0"/>
-          </a:p>
-        </p:txBody>
-      </p:sp>
-      <p:sp>
-        <p:nvSpPr>
-          <p:cNvPr id="46" name="Shape 44"/>
-          <p:cNvSpPr/>
-          <p:nvPr/>
-        </p:nvSpPr>
-        <p:spPr>
-          <a:xfrm>
-            <a:off x="7447135" y="4169664"/>
-            <a:ext cx="685800" cy="475488"/>
-          </a:xfrm>
-          <a:prstGeom prst="rect">
-            <a:avLst>
-              <a:gd name="adj" fmla="val 7692"/>
-            </a:avLst>
-          </a:prstGeom>
-          <a:solidFill>
-            <a:srgbClr val="FFFFFF"/>
-          </a:solidFill>
-          <a:ln w="12700">
-            <a:solidFill>
-              <a:srgbClr val="DB2777"/>
-            </a:solidFill>
-            <a:prstDash val="solid"/>
-          </a:ln>
-        </p:spPr>
-      </p:sp>
-      <p:sp>
-        <p:nvSpPr>
-          <p:cNvPr id="47" name="Text 45"/>
-          <p:cNvSpPr/>
-          <p:nvPr/>
-        </p:nvSpPr>
-        <p:spPr>
-          <a:xfrm>
-            <a:off x="7447135" y="4169664"/>
-            <a:ext cx="685800" cy="475488"/>
-          </a:xfrm>
-          <a:prstGeom prst="rect">
-            <a:avLst/>
-          </a:prstGeom>
-          <a:noFill/>
-          <a:ln/>
-        </p:spPr>
-        <p:txBody>
-          <a:bodyPr wrap="square" lIns="0" tIns="0" rIns="0" bIns="0" rtlCol="0" anchor="ctr"/>
-          <a:lstStyle/>
-          <a:p>
-            <a:pPr algn="ctr" indent="0" marL="0">
-              <a:buNone/>
-            </a:pPr>
-            <a:r>
-              <a:rPr lang="en-US" sz="900" b="1" dirty="0">
-                <a:solidFill>
-                  <a:srgbClr val="9D174D"/>
-                </a:solidFill>
-                <a:latin typeface="Trebuchet MS" pitchFamily="34" charset="0"/>
-                <a:ea typeface="Trebuchet MS" pitchFamily="34" charset="-122"/>
-                <a:cs typeface="Trebuchet MS" pitchFamily="34" charset="-120"/>
-              </a:rPr>
-              <a:t>ng</a:t>
+              <a:t>er</a:t>
             </a:r>
             <a:endParaRPr lang="en-US" sz="900" dirty="0"/>
           </a:p>
@@ -22347,7 +22071,7 @@
                 <a:ea typeface="Calibri" pitchFamily="34" charset="-122"/>
                 <a:cs typeface="Calibri" pitchFamily="34" charset="-120"/>
               </a:rPr>
-              <a:t>Word Labs  •  wordlabs.app  •  Root: 'repair' = fix or restore something broken</a:t>
+              <a:t>Word Labs  •  wordlabs.app  •  Root: 'repair' = fix</a:t>
             </a:r>
             <a:endParaRPr lang="en-US" sz="800" dirty="0"/>
           </a:p>
@@ -22486,7 +22210,7 @@
                 <a:ea typeface="Trebuchet MS" pitchFamily="34" charset="-122"/>
                 <a:cs typeface="Trebuchet MS" pitchFamily="34" charset="-120"/>
               </a:rPr>
-              <a:t>repairable</a:t>
+              <a:t>repairing</a:t>
             </a:r>
             <a:endParaRPr lang="en-US" sz="2800" dirty="0"/>
           </a:p>
@@ -23174,7 +22898,7 @@
                 <a:ea typeface="Calibri" pitchFamily="34" charset="-122"/>
                 <a:cs typeface="Calibri" pitchFamily="34" charset="-120"/>
               </a:rPr>
-              <a:t>Word Labs  •  wordlabs.app  •  Root: 'repair' = fix or restore something broken</a:t>
+              <a:t>Word Labs  •  wordlabs.app  •  Root: 'repair' = fix</a:t>
             </a:r>
             <a:endParaRPr lang="en-US" sz="800" dirty="0"/>
           </a:p>
@@ -23313,7 +23037,7 @@
                 <a:ea typeface="Trebuchet MS" pitchFamily="34" charset="-122"/>
                 <a:cs typeface="Trebuchet MS" pitchFamily="34" charset="-120"/>
               </a:rPr>
-              <a:t>repairable</a:t>
+              <a:t>repairing</a:t>
             </a:r>
             <a:endParaRPr lang="en-US" sz="2800" dirty="0"/>
           </a:p>
@@ -23491,7 +23215,7 @@
                 <a:ea typeface="Calibri" pitchFamily="34" charset="-122"/>
                 <a:cs typeface="Calibri" pitchFamily="34" charset="-120"/>
               </a:rPr>
-              <a:t>fix or restore</a:t>
+              <a:t>fix</a:t>
             </a:r>
             <a:endParaRPr lang="en-US" sz="850" dirty="0"/>
           </a:p>
@@ -23564,7 +23288,7 @@
                 <a:ea typeface="Trebuchet MS" pitchFamily="34" charset="-122"/>
                 <a:cs typeface="Trebuchet MS" pitchFamily="34" charset="-120"/>
               </a:rPr>
-              <a:t>able</a:t>
+              <a:t>ing</a:t>
             </a:r>
             <a:endParaRPr lang="en-US" sz="1300" dirty="0"/>
           </a:p>
@@ -23603,7 +23327,7 @@
                 <a:ea typeface="Calibri" pitchFamily="34" charset="-122"/>
                 <a:cs typeface="Calibri" pitchFamily="34" charset="-120"/>
               </a:rPr>
-              <a:t>able to be done</a:t>
+              <a:t>happening now</a:t>
             </a:r>
             <a:endParaRPr lang="en-US" sz="850" dirty="0"/>
           </a:p>
@@ -24159,7 +23883,7 @@
                 <a:ea typeface="Calibri" pitchFamily="34" charset="-122"/>
                 <a:cs typeface="Calibri" pitchFamily="34" charset="-120"/>
               </a:rPr>
-              <a:t>Word Labs  •  wordlabs.app  •  Root: 'repair' = fix or restore something broken</a:t>
+              <a:t>Word Labs  •  wordlabs.app  •  Root: 'repair' = fix</a:t>
             </a:r>
             <a:endParaRPr lang="en-US" sz="800" dirty="0"/>
           </a:p>
@@ -24232,7 +23956,7 @@
                 <a:ea typeface="Trebuchet MS" pitchFamily="34" charset="-122"/>
                 <a:cs typeface="Trebuchet MS" pitchFamily="34" charset="-120"/>
               </a:rPr>
-              <a:t>We are learning that the root 'repair' means 'fix or restore something broken'.</a:t>
+              <a:t>We are learning that the root 'repair' means 'fix'.</a:t>
             </a:r>
             <a:endParaRPr lang="en-US" sz="2000" dirty="0"/>
           </a:p>
@@ -24878,7 +24602,7 @@
                 <a:ea typeface="Calibri" pitchFamily="34" charset="-122"/>
                 <a:cs typeface="Calibri" pitchFamily="34" charset="-120"/>
               </a:rPr>
-              <a:t>Word Labs  •  wordlabs.app  •  Root: 'repair' = fix or restore something broken</a:t>
+              <a:t>Word Labs  •  wordlabs.app  •  Root: 'repair' = fix</a:t>
             </a:r>
             <a:endParaRPr lang="en-US" sz="800" dirty="0"/>
           </a:p>
@@ -25017,7 +24741,7 @@
                 <a:ea typeface="Trebuchet MS" pitchFamily="34" charset="-122"/>
                 <a:cs typeface="Trebuchet MS" pitchFamily="34" charset="-120"/>
               </a:rPr>
-              <a:t>repairable</a:t>
+              <a:t>repairing</a:t>
             </a:r>
             <a:endParaRPr lang="en-US" sz="2800" dirty="0"/>
           </a:p>
@@ -25195,7 +24919,7 @@
                 <a:ea typeface="Calibri" pitchFamily="34" charset="-122"/>
                 <a:cs typeface="Calibri" pitchFamily="34" charset="-120"/>
               </a:rPr>
-              <a:t>fix or restore</a:t>
+              <a:t>fix</a:t>
             </a:r>
             <a:endParaRPr lang="en-US" sz="850" dirty="0"/>
           </a:p>
@@ -25268,7 +24992,7 @@
                 <a:ea typeface="Trebuchet MS" pitchFamily="34" charset="-122"/>
                 <a:cs typeface="Trebuchet MS" pitchFamily="34" charset="-120"/>
               </a:rPr>
-              <a:t>able</a:t>
+              <a:t>ing</a:t>
             </a:r>
             <a:endParaRPr lang="en-US" sz="1300" dirty="0"/>
           </a:p>
@@ -25307,7 +25031,7 @@
                 <a:ea typeface="Calibri" pitchFamily="34" charset="-122"/>
                 <a:cs typeface="Calibri" pitchFamily="34" charset="-120"/>
               </a:rPr>
-              <a:t>able to be done</a:t>
+              <a:t>happening now</a:t>
             </a:r>
             <a:endParaRPr lang="en-US" sz="850" dirty="0"/>
           </a:p>
@@ -25414,8 +25138,8 @@
         </p:nvSpPr>
         <p:spPr>
           <a:xfrm>
-            <a:off x="1975104" y="3364992"/>
-            <a:ext cx="1554480" cy="475488"/>
+            <a:off x="2313432" y="3364992"/>
+            <a:ext cx="1645920" cy="475488"/>
           </a:xfrm>
           <a:prstGeom prst="rect">
             <a:avLst>
@@ -25441,8 +25165,8 @@
         </p:nvSpPr>
         <p:spPr>
           <a:xfrm>
-            <a:off x="1975104" y="3364992"/>
-            <a:ext cx="1554480" cy="475488"/>
+            <a:off x="2313432" y="3364992"/>
+            <a:ext cx="1645920" cy="475488"/>
           </a:xfrm>
           <a:prstGeom prst="rect">
             <a:avLst/>
@@ -25480,8 +25204,8 @@
         </p:nvSpPr>
         <p:spPr>
           <a:xfrm>
-            <a:off x="3529584" y="3364992"/>
-            <a:ext cx="73152" cy="475488"/>
+            <a:off x="3959352" y="3364992"/>
+            <a:ext cx="411480" cy="475488"/>
           </a:xfrm>
           <a:prstGeom prst="rect">
             <a:avLst/>
@@ -25519,8 +25243,8 @@
         </p:nvSpPr>
         <p:spPr>
           <a:xfrm>
-            <a:off x="3602736" y="3364992"/>
-            <a:ext cx="1554480" cy="475488"/>
+            <a:off x="4370832" y="3364992"/>
+            <a:ext cx="1645920" cy="475488"/>
           </a:xfrm>
           <a:prstGeom prst="rect">
             <a:avLst>
@@ -25546,8 +25270,8 @@
         </p:nvSpPr>
         <p:spPr>
           <a:xfrm>
-            <a:off x="3602736" y="3364992"/>
-            <a:ext cx="1554480" cy="475488"/>
+            <a:off x="4370832" y="3364992"/>
+            <a:ext cx="1645920" cy="475488"/>
           </a:xfrm>
           <a:prstGeom prst="rect">
             <a:avLst/>
@@ -25585,8 +25309,8 @@
         </p:nvSpPr>
         <p:spPr>
           <a:xfrm>
-            <a:off x="5157216" y="3364992"/>
-            <a:ext cx="73152" cy="475488"/>
+            <a:off x="6016752" y="3364992"/>
+            <a:ext cx="411480" cy="475488"/>
           </a:xfrm>
           <a:prstGeom prst="rect">
             <a:avLst/>
@@ -25624,8 +25348,8 @@
         </p:nvSpPr>
         <p:spPr>
           <a:xfrm>
-            <a:off x="5230368" y="3364992"/>
-            <a:ext cx="1554480" cy="475488"/>
+            <a:off x="6428232" y="3364992"/>
+            <a:ext cx="1645920" cy="475488"/>
           </a:xfrm>
           <a:prstGeom prst="rect">
             <a:avLst>
@@ -25651,8 +25375,8 @@
         </p:nvSpPr>
         <p:spPr>
           <a:xfrm>
-            <a:off x="5230368" y="3364992"/>
-            <a:ext cx="1554480" cy="475488"/>
+            <a:off x="6428232" y="3364992"/>
+            <a:ext cx="1645920" cy="475488"/>
           </a:xfrm>
           <a:prstGeom prst="rect">
             <a:avLst/>
@@ -25676,7 +25400,7 @@
                 <a:ea typeface="Trebuchet MS" pitchFamily="34" charset="-122"/>
                 <a:cs typeface="Trebuchet MS" pitchFamily="34" charset="-120"/>
               </a:rPr>
-              <a:t>a</a:t>
+              <a:t>ing</a:t>
             </a:r>
             <a:endParaRPr lang="en-US" sz="1400" dirty="0"/>
           </a:p>
@@ -25684,14 +25408,41 @@
       </p:sp>
       <p:sp>
         <p:nvSpPr>
-          <p:cNvPr id="33" name="Text 31"/>
-          <p:cNvSpPr/>
-          <p:nvPr/>
-        </p:nvSpPr>
-        <p:spPr>
-          <a:xfrm>
-            <a:off x="6784848" y="3364992"/>
-            <a:ext cx="73152" cy="475488"/>
+          <p:cNvPr id="33" name="Shape 31"/>
+          <p:cNvSpPr/>
+          <p:nvPr/>
+        </p:nvSpPr>
+        <p:spPr>
+          <a:xfrm>
+            <a:off x="365760" y="4096512"/>
+            <a:ext cx="1371600" cy="804672"/>
+          </a:xfrm>
+          <a:prstGeom prst="rect">
+            <a:avLst>
+              <a:gd name="adj" fmla="val 6818"/>
+            </a:avLst>
+          </a:prstGeom>
+          <a:solidFill>
+            <a:srgbClr val="E2E8F0"/>
+          </a:solidFill>
+          <a:ln w="12700">
+            <a:solidFill>
+              <a:srgbClr val="E2E8F0"/>
+            </a:solidFill>
+            <a:prstDash val="solid"/>
+          </a:ln>
+        </p:spPr>
+      </p:sp>
+      <p:sp>
+        <p:nvSpPr>
+          <p:cNvPr id="34" name="Text 32"/>
+          <p:cNvSpPr/>
+          <p:nvPr/>
+        </p:nvSpPr>
+        <p:spPr>
+          <a:xfrm>
+            <a:off x="365760" y="4096512"/>
+            <a:ext cx="1371600" cy="804672"/>
           </a:xfrm>
           <a:prstGeom prst="rect">
             <a:avLst/>
@@ -25707,96 +25458,30 @@
               <a:buNone/>
             </a:pPr>
             <a:r>
-              <a:rPr lang="en-US" sz="1600" b="1" dirty="0">
-                <a:solidFill>
-                  <a:srgbClr val="0D9488"/>
+              <a:rPr lang="en-US" sz="1100" b="1" dirty="0">
+                <a:solidFill>
+                  <a:srgbClr val="475569"/>
                 </a:solidFill>
                 <a:latin typeface="Trebuchet MS" pitchFamily="34" charset="0"/>
                 <a:ea typeface="Trebuchet MS" pitchFamily="34" charset="-122"/>
                 <a:cs typeface="Trebuchet MS" pitchFamily="34" charset="-120"/>
               </a:rPr>
-              <a:t>·</a:t>
-            </a:r>
-            <a:endParaRPr lang="en-US" sz="1600" dirty="0"/>
-          </a:p>
-        </p:txBody>
-      </p:sp>
-      <p:sp>
-        <p:nvSpPr>
-          <p:cNvPr id="34" name="Shape 32"/>
-          <p:cNvSpPr/>
-          <p:nvPr/>
-        </p:nvSpPr>
-        <p:spPr>
-          <a:xfrm>
-            <a:off x="6858000" y="3364992"/>
-            <a:ext cx="1554480" cy="475488"/>
-          </a:xfrm>
-          <a:prstGeom prst="rect">
-            <a:avLst>
-              <a:gd name="adj" fmla="val 9615"/>
-            </a:avLst>
-          </a:prstGeom>
-          <a:solidFill>
-            <a:srgbClr val="FFFFFF"/>
-          </a:solidFill>
-          <a:ln w="12700">
-            <a:solidFill>
-              <a:srgbClr val="0D9488"/>
-            </a:solidFill>
-            <a:prstDash val="solid"/>
-          </a:ln>
-        </p:spPr>
-      </p:sp>
-      <p:sp>
-        <p:nvSpPr>
-          <p:cNvPr id="35" name="Text 33"/>
-          <p:cNvSpPr/>
-          <p:nvPr/>
-        </p:nvSpPr>
-        <p:spPr>
-          <a:xfrm>
-            <a:off x="6858000" y="3364992"/>
-            <a:ext cx="1554480" cy="475488"/>
-          </a:xfrm>
-          <a:prstGeom prst="rect">
-            <a:avLst/>
-          </a:prstGeom>
-          <a:noFill/>
-          <a:ln/>
-        </p:spPr>
-        <p:txBody>
-          <a:bodyPr wrap="square" lIns="0" tIns="0" rIns="0" bIns="0" rtlCol="0" anchor="ctr"/>
-          <a:lstStyle/>
-          <a:p>
-            <a:pPr algn="ctr" indent="0" marL="0">
-              <a:buNone/>
-            </a:pPr>
-            <a:r>
-              <a:rPr lang="en-US" sz="1400" b="1" dirty="0">
-                <a:solidFill>
-                  <a:srgbClr val="0D9488"/>
-                </a:solidFill>
-                <a:latin typeface="Trebuchet MS" pitchFamily="34" charset="0"/>
-                <a:ea typeface="Trebuchet MS" pitchFamily="34" charset="-122"/>
-                <a:cs typeface="Trebuchet MS" pitchFamily="34" charset="-120"/>
-              </a:rPr>
-              <a:t>ble</a:t>
-            </a:r>
-            <a:endParaRPr lang="en-US" sz="1400" dirty="0"/>
-          </a:p>
-        </p:txBody>
-      </p:sp>
-      <p:sp>
-        <p:nvSpPr>
-          <p:cNvPr id="36" name="Shape 34"/>
-          <p:cNvSpPr/>
-          <p:nvPr/>
-        </p:nvSpPr>
-        <p:spPr>
-          <a:xfrm>
-            <a:off x="365760" y="4096512"/>
-            <a:ext cx="1371600" cy="804672"/>
+              <a:t>Phonemes</a:t>
+            </a:r>
+            <a:endParaRPr lang="en-US" sz="1100" dirty="0"/>
+          </a:p>
+        </p:txBody>
+      </p:sp>
+      <p:sp>
+        <p:nvSpPr>
+          <p:cNvPr id="35" name="Shape 33"/>
+          <p:cNvSpPr/>
+          <p:nvPr/>
+        </p:nvSpPr>
+        <p:spPr>
+          <a:xfrm>
+            <a:off x="1874520" y="4096512"/>
+            <a:ext cx="6903720" cy="804672"/>
           </a:xfrm>
           <a:prstGeom prst="rect">
             <a:avLst>
@@ -25804,85 +25489,19 @@
             </a:avLst>
           </a:prstGeom>
           <a:solidFill>
-            <a:srgbClr val="E2E8F0"/>
+            <a:srgbClr val="F8FAFC"/>
           </a:solidFill>
           <a:ln w="12700">
             <a:solidFill>
               <a:srgbClr val="E2E8F0"/>
             </a:solidFill>
-            <a:prstDash val="solid"/>
-          </a:ln>
-        </p:spPr>
-      </p:sp>
-      <p:sp>
-        <p:nvSpPr>
-          <p:cNvPr id="37" name="Text 35"/>
-          <p:cNvSpPr/>
-          <p:nvPr/>
-        </p:nvSpPr>
-        <p:spPr>
-          <a:xfrm>
-            <a:off x="365760" y="4096512"/>
-            <a:ext cx="1371600" cy="804672"/>
-          </a:xfrm>
-          <a:prstGeom prst="rect">
-            <a:avLst/>
-          </a:prstGeom>
-          <a:noFill/>
-          <a:ln/>
-        </p:spPr>
-        <p:txBody>
-          <a:bodyPr wrap="square" lIns="0" tIns="0" rIns="0" bIns="0" rtlCol="0" anchor="ctr"/>
-          <a:lstStyle/>
-          <a:p>
-            <a:pPr algn="ctr" indent="0" marL="0">
-              <a:buNone/>
-            </a:pPr>
-            <a:r>
-              <a:rPr lang="en-US" sz="1100" b="1" dirty="0">
-                <a:solidFill>
-                  <a:srgbClr val="475569"/>
-                </a:solidFill>
-                <a:latin typeface="Trebuchet MS" pitchFamily="34" charset="0"/>
-                <a:ea typeface="Trebuchet MS" pitchFamily="34" charset="-122"/>
-                <a:cs typeface="Trebuchet MS" pitchFamily="34" charset="-120"/>
-              </a:rPr>
-              <a:t>Phonemes</a:t>
-            </a:r>
-            <a:endParaRPr lang="en-US" sz="1100" dirty="0"/>
-          </a:p>
-        </p:txBody>
-      </p:sp>
-      <p:sp>
-        <p:nvSpPr>
-          <p:cNvPr id="38" name="Shape 36"/>
-          <p:cNvSpPr/>
-          <p:nvPr/>
-        </p:nvSpPr>
-        <p:spPr>
-          <a:xfrm>
-            <a:off x="1874520" y="4096512"/>
-            <a:ext cx="6903720" cy="804672"/>
-          </a:xfrm>
-          <a:prstGeom prst="rect">
-            <a:avLst>
-              <a:gd name="adj" fmla="val 6818"/>
-            </a:avLst>
-          </a:prstGeom>
-          <a:solidFill>
-            <a:srgbClr val="F8FAFC"/>
-          </a:solidFill>
-          <a:ln w="12700">
-            <a:solidFill>
-              <a:srgbClr val="E2E8F0"/>
-            </a:solidFill>
             <a:prstDash val="dash"/>
           </a:ln>
         </p:spPr>
       </p:sp>
       <p:sp>
         <p:nvSpPr>
-          <p:cNvPr id="39" name="Text 37"/>
+          <p:cNvPr id="36" name="Text 34"/>
           <p:cNvSpPr/>
           <p:nvPr/>
         </p:nvSpPr>
@@ -26205,7 +25824,7 @@
                 <a:ea typeface="Calibri" pitchFamily="34" charset="-122"/>
                 <a:cs typeface="Calibri" pitchFamily="34" charset="-120"/>
               </a:rPr>
-              <a:t>Word Labs  •  wordlabs.app  •  Root: 'repair' = fix or restore something broken</a:t>
+              <a:t>Word Labs  •  wordlabs.app  •  Root: 'repair' = fix</a:t>
             </a:r>
             <a:endParaRPr lang="en-US" sz="800" dirty="0"/>
           </a:p>
@@ -26344,7 +25963,7 @@
                 <a:ea typeface="Trebuchet MS" pitchFamily="34" charset="-122"/>
                 <a:cs typeface="Trebuchet MS" pitchFamily="34" charset="-120"/>
               </a:rPr>
-              <a:t>repairable</a:t>
+              <a:t>repairing</a:t>
             </a:r>
             <a:endParaRPr lang="en-US" sz="2800" dirty="0"/>
           </a:p>
@@ -26522,7 +26141,7 @@
                 <a:ea typeface="Calibri" pitchFamily="34" charset="-122"/>
                 <a:cs typeface="Calibri" pitchFamily="34" charset="-120"/>
               </a:rPr>
-              <a:t>fix or restore</a:t>
+              <a:t>fix</a:t>
             </a:r>
             <a:endParaRPr lang="en-US" sz="850" dirty="0"/>
           </a:p>
@@ -26595,7 +26214,7 @@
                 <a:ea typeface="Trebuchet MS" pitchFamily="34" charset="-122"/>
                 <a:cs typeface="Trebuchet MS" pitchFamily="34" charset="-120"/>
               </a:rPr>
-              <a:t>able</a:t>
+              <a:t>ing</a:t>
             </a:r>
             <a:endParaRPr lang="en-US" sz="1300" dirty="0"/>
           </a:p>
@@ -26634,7 +26253,7 @@
                 <a:ea typeface="Calibri" pitchFamily="34" charset="-122"/>
                 <a:cs typeface="Calibri" pitchFamily="34" charset="-120"/>
               </a:rPr>
-              <a:t>able to be done</a:t>
+              <a:t>happening now</a:t>
             </a:r>
             <a:endParaRPr lang="en-US" sz="850" dirty="0"/>
           </a:p>
@@ -26741,8 +26360,8 @@
         </p:nvSpPr>
         <p:spPr>
           <a:xfrm>
-            <a:off x="1975104" y="3364992"/>
-            <a:ext cx="1554480" cy="475488"/>
+            <a:off x="2313432" y="3364992"/>
+            <a:ext cx="1645920" cy="475488"/>
           </a:xfrm>
           <a:prstGeom prst="rect">
             <a:avLst>
@@ -26768,8 +26387,8 @@
         </p:nvSpPr>
         <p:spPr>
           <a:xfrm>
-            <a:off x="1975104" y="3364992"/>
-            <a:ext cx="1554480" cy="475488"/>
+            <a:off x="2313432" y="3364992"/>
+            <a:ext cx="1645920" cy="475488"/>
           </a:xfrm>
           <a:prstGeom prst="rect">
             <a:avLst/>
@@ -26807,8 +26426,8 @@
         </p:nvSpPr>
         <p:spPr>
           <a:xfrm>
-            <a:off x="3529584" y="3364992"/>
-            <a:ext cx="73152" cy="475488"/>
+            <a:off x="3959352" y="3364992"/>
+            <a:ext cx="411480" cy="475488"/>
           </a:xfrm>
           <a:prstGeom prst="rect">
             <a:avLst/>
@@ -26846,8 +26465,8 @@
         </p:nvSpPr>
         <p:spPr>
           <a:xfrm>
-            <a:off x="3602736" y="3364992"/>
-            <a:ext cx="1554480" cy="475488"/>
+            <a:off x="4370832" y="3364992"/>
+            <a:ext cx="1645920" cy="475488"/>
           </a:xfrm>
           <a:prstGeom prst="rect">
             <a:avLst>
@@ -26873,8 +26492,8 @@
         </p:nvSpPr>
         <p:spPr>
           <a:xfrm>
-            <a:off x="3602736" y="3364992"/>
-            <a:ext cx="1554480" cy="475488"/>
+            <a:off x="4370832" y="3364992"/>
+            <a:ext cx="1645920" cy="475488"/>
           </a:xfrm>
           <a:prstGeom prst="rect">
             <a:avLst/>
@@ -26912,8 +26531,8 @@
         </p:nvSpPr>
         <p:spPr>
           <a:xfrm>
-            <a:off x="5157216" y="3364992"/>
-            <a:ext cx="73152" cy="475488"/>
+            <a:off x="6016752" y="3364992"/>
+            <a:ext cx="411480" cy="475488"/>
           </a:xfrm>
           <a:prstGeom prst="rect">
             <a:avLst/>
@@ -26951,8 +26570,8 @@
         </p:nvSpPr>
         <p:spPr>
           <a:xfrm>
-            <a:off x="5230368" y="3364992"/>
-            <a:ext cx="1554480" cy="475488"/>
+            <a:off x="6428232" y="3364992"/>
+            <a:ext cx="1645920" cy="475488"/>
           </a:xfrm>
           <a:prstGeom prst="rect">
             <a:avLst>
@@ -26978,8 +26597,8 @@
         </p:nvSpPr>
         <p:spPr>
           <a:xfrm>
-            <a:off x="5230368" y="3364992"/>
-            <a:ext cx="1554480" cy="475488"/>
+            <a:off x="6428232" y="3364992"/>
+            <a:ext cx="1645920" cy="475488"/>
           </a:xfrm>
           <a:prstGeom prst="rect">
             <a:avLst/>
@@ -27003,7 +26622,7 @@
                 <a:ea typeface="Trebuchet MS" pitchFamily="34" charset="-122"/>
                 <a:cs typeface="Trebuchet MS" pitchFamily="34" charset="-120"/>
               </a:rPr>
-              <a:t>a</a:t>
+              <a:t>ing</a:t>
             </a:r>
             <a:endParaRPr lang="en-US" sz="1400" dirty="0"/>
           </a:p>
@@ -27011,14 +26630,41 @@
       </p:sp>
       <p:sp>
         <p:nvSpPr>
-          <p:cNvPr id="33" name="Text 31"/>
-          <p:cNvSpPr/>
-          <p:nvPr/>
-        </p:nvSpPr>
-        <p:spPr>
-          <a:xfrm>
-            <a:off x="6784848" y="3364992"/>
-            <a:ext cx="73152" cy="475488"/>
+          <p:cNvPr id="33" name="Shape 31"/>
+          <p:cNvSpPr/>
+          <p:nvPr/>
+        </p:nvSpPr>
+        <p:spPr>
+          <a:xfrm>
+            <a:off x="365760" y="4096512"/>
+            <a:ext cx="1371600" cy="804672"/>
+          </a:xfrm>
+          <a:prstGeom prst="rect">
+            <a:avLst>
+              <a:gd name="adj" fmla="val 6818"/>
+            </a:avLst>
+          </a:prstGeom>
+          <a:solidFill>
+            <a:srgbClr val="E2E8F0"/>
+          </a:solidFill>
+          <a:ln w="12700">
+            <a:solidFill>
+              <a:srgbClr val="E2E8F0"/>
+            </a:solidFill>
+            <a:prstDash val="solid"/>
+          </a:ln>
+        </p:spPr>
+      </p:sp>
+      <p:sp>
+        <p:nvSpPr>
+          <p:cNvPr id="34" name="Text 32"/>
+          <p:cNvSpPr/>
+          <p:nvPr/>
+        </p:nvSpPr>
+        <p:spPr>
+          <a:xfrm>
+            <a:off x="365760" y="4096512"/>
+            <a:ext cx="1371600" cy="804672"/>
           </a:xfrm>
           <a:prstGeom prst="rect">
             <a:avLst/>
@@ -27034,57 +26680,84 @@
               <a:buNone/>
             </a:pPr>
             <a:r>
-              <a:rPr lang="en-US" sz="1600" b="1" dirty="0">
-                <a:solidFill>
-                  <a:srgbClr val="0D9488"/>
+              <a:rPr lang="en-US" sz="1100" b="1" dirty="0">
+                <a:solidFill>
+                  <a:srgbClr val="475569"/>
                 </a:solidFill>
                 <a:latin typeface="Trebuchet MS" pitchFamily="34" charset="0"/>
                 <a:ea typeface="Trebuchet MS" pitchFamily="34" charset="-122"/>
                 <a:cs typeface="Trebuchet MS" pitchFamily="34" charset="-120"/>
               </a:rPr>
-              <a:t>·</a:t>
-            </a:r>
-            <a:endParaRPr lang="en-US" sz="1600" dirty="0"/>
-          </a:p>
-        </p:txBody>
-      </p:sp>
-      <p:sp>
-        <p:nvSpPr>
-          <p:cNvPr id="34" name="Shape 32"/>
-          <p:cNvSpPr/>
-          <p:nvPr/>
-        </p:nvSpPr>
-        <p:spPr>
-          <a:xfrm>
-            <a:off x="6858000" y="3364992"/>
-            <a:ext cx="1554480" cy="475488"/>
+              <a:t>Phonemes</a:t>
+            </a:r>
+            <a:endParaRPr lang="en-US" sz="1100" dirty="0"/>
+          </a:p>
+        </p:txBody>
+      </p:sp>
+      <p:sp>
+        <p:nvSpPr>
+          <p:cNvPr id="35" name="Shape 33"/>
+          <p:cNvSpPr/>
+          <p:nvPr/>
+        </p:nvSpPr>
+        <p:spPr>
+          <a:xfrm>
+            <a:off x="1874520" y="4096512"/>
+            <a:ext cx="6903720" cy="658368"/>
           </a:xfrm>
           <a:prstGeom prst="rect">
             <a:avLst>
-              <a:gd name="adj" fmla="val 9615"/>
+              <a:gd name="adj" fmla="val 8333"/>
             </a:avLst>
           </a:prstGeom>
           <a:solidFill>
+            <a:srgbClr val="FCE7F3"/>
+          </a:solidFill>
+          <a:ln w="12700">
+            <a:solidFill>
+              <a:srgbClr val="DB2777"/>
+            </a:solidFill>
+            <a:prstDash val="solid"/>
+          </a:ln>
+        </p:spPr>
+      </p:sp>
+      <p:sp>
+        <p:nvSpPr>
+          <p:cNvPr id="36" name="Shape 34"/>
+          <p:cNvSpPr/>
+          <p:nvPr/>
+        </p:nvSpPr>
+        <p:spPr>
+          <a:xfrm>
+            <a:off x="2254649" y="4169664"/>
+            <a:ext cx="685800" cy="475488"/>
+          </a:xfrm>
+          <a:prstGeom prst="rect">
+            <a:avLst>
+              <a:gd name="adj" fmla="val 7692"/>
+            </a:avLst>
+          </a:prstGeom>
+          <a:solidFill>
             <a:srgbClr val="FFFFFF"/>
           </a:solidFill>
           <a:ln w="12700">
             <a:solidFill>
-              <a:srgbClr val="0D9488"/>
-            </a:solidFill>
-            <a:prstDash val="solid"/>
-          </a:ln>
-        </p:spPr>
-      </p:sp>
-      <p:sp>
-        <p:nvSpPr>
-          <p:cNvPr id="35" name="Text 33"/>
-          <p:cNvSpPr/>
-          <p:nvPr/>
-        </p:nvSpPr>
-        <p:spPr>
-          <a:xfrm>
-            <a:off x="6858000" y="3364992"/>
-            <a:ext cx="1554480" cy="475488"/>
+              <a:srgbClr val="DB2777"/>
+            </a:solidFill>
+            <a:prstDash val="solid"/>
+          </a:ln>
+        </p:spPr>
+      </p:sp>
+      <p:sp>
+        <p:nvSpPr>
+          <p:cNvPr id="37" name="Text 35"/>
+          <p:cNvSpPr/>
+          <p:nvPr/>
+        </p:nvSpPr>
+        <p:spPr>
+          <a:xfrm>
+            <a:off x="2254649" y="4169664"/>
+            <a:ext cx="685800" cy="475488"/>
           </a:xfrm>
           <a:prstGeom prst="rect">
             <a:avLst/>
@@ -27100,57 +26773,57 @@
               <a:buNone/>
             </a:pPr>
             <a:r>
-              <a:rPr lang="en-US" sz="1400" b="1" dirty="0">
-                <a:solidFill>
-                  <a:srgbClr val="0D9488"/>
+              <a:rPr lang="en-US" sz="900" b="1" dirty="0">
+                <a:solidFill>
+                  <a:srgbClr val="9D174D"/>
                 </a:solidFill>
                 <a:latin typeface="Trebuchet MS" pitchFamily="34" charset="0"/>
                 <a:ea typeface="Trebuchet MS" pitchFamily="34" charset="-122"/>
                 <a:cs typeface="Trebuchet MS" pitchFamily="34" charset="-120"/>
               </a:rPr>
-              <a:t>ble</a:t>
-            </a:r>
-            <a:endParaRPr lang="en-US" sz="1400" dirty="0"/>
-          </a:p>
-        </p:txBody>
-      </p:sp>
-      <p:sp>
-        <p:nvSpPr>
-          <p:cNvPr id="36" name="Shape 34"/>
-          <p:cNvSpPr/>
-          <p:nvPr/>
-        </p:nvSpPr>
-        <p:spPr>
-          <a:xfrm>
-            <a:off x="365760" y="4096512"/>
-            <a:ext cx="1371600" cy="804672"/>
+              <a:t>r</a:t>
+            </a:r>
+            <a:endParaRPr lang="en-US" sz="900" dirty="0"/>
+          </a:p>
+        </p:txBody>
+      </p:sp>
+      <p:sp>
+        <p:nvSpPr>
+          <p:cNvPr id="38" name="Shape 36"/>
+          <p:cNvSpPr/>
+          <p:nvPr/>
+        </p:nvSpPr>
+        <p:spPr>
+          <a:xfrm>
+            <a:off x="3293146" y="4169664"/>
+            <a:ext cx="685800" cy="475488"/>
           </a:xfrm>
           <a:prstGeom prst="rect">
             <a:avLst>
-              <a:gd name="adj" fmla="val 6818"/>
+              <a:gd name="adj" fmla="val 7692"/>
             </a:avLst>
           </a:prstGeom>
           <a:solidFill>
-            <a:srgbClr val="E2E8F0"/>
-          </a:solidFill>
-          <a:ln w="12700">
-            <a:solidFill>
-              <a:srgbClr val="E2E8F0"/>
-            </a:solidFill>
-            <a:prstDash val="solid"/>
-          </a:ln>
-        </p:spPr>
-      </p:sp>
-      <p:sp>
-        <p:nvSpPr>
-          <p:cNvPr id="37" name="Text 35"/>
-          <p:cNvSpPr/>
-          <p:nvPr/>
-        </p:nvSpPr>
-        <p:spPr>
-          <a:xfrm>
-            <a:off x="365760" y="4096512"/>
-            <a:ext cx="1371600" cy="804672"/>
+            <a:srgbClr val="FFFFFF"/>
+          </a:solidFill>
+          <a:ln w="12700">
+            <a:solidFill>
+              <a:srgbClr val="DB2777"/>
+            </a:solidFill>
+            <a:prstDash val="solid"/>
+          </a:ln>
+        </p:spPr>
+      </p:sp>
+      <p:sp>
+        <p:nvSpPr>
+          <p:cNvPr id="39" name="Text 37"/>
+          <p:cNvSpPr/>
+          <p:nvPr/>
+        </p:nvSpPr>
+        <p:spPr>
+          <a:xfrm>
+            <a:off x="3293146" y="4169664"/>
+            <a:ext cx="685800" cy="475488"/>
           </a:xfrm>
           <a:prstGeom prst="rect">
             <a:avLst/>
@@ -27166,56 +26839,29 @@
               <a:buNone/>
             </a:pPr>
             <a:r>
-              <a:rPr lang="en-US" sz="1100" b="1" dirty="0">
-                <a:solidFill>
-                  <a:srgbClr val="475569"/>
+              <a:rPr lang="en-US" sz="900" b="1" dirty="0">
+                <a:solidFill>
+                  <a:srgbClr val="9D174D"/>
                 </a:solidFill>
                 <a:latin typeface="Trebuchet MS" pitchFamily="34" charset="0"/>
                 <a:ea typeface="Trebuchet MS" pitchFamily="34" charset="-122"/>
                 <a:cs typeface="Trebuchet MS" pitchFamily="34" charset="-120"/>
               </a:rPr>
-              <a:t>Phonemes</a:t>
-            </a:r>
-            <a:endParaRPr lang="en-US" sz="1100" dirty="0"/>
-          </a:p>
-        </p:txBody>
-      </p:sp>
-      <p:sp>
-        <p:nvSpPr>
-          <p:cNvPr id="38" name="Shape 36"/>
-          <p:cNvSpPr/>
-          <p:nvPr/>
-        </p:nvSpPr>
-        <p:spPr>
-          <a:xfrm>
-            <a:off x="1874520" y="4096512"/>
-            <a:ext cx="6903720" cy="658368"/>
-          </a:xfrm>
-          <a:prstGeom prst="rect">
-            <a:avLst>
-              <a:gd name="adj" fmla="val 8333"/>
-            </a:avLst>
-          </a:prstGeom>
-          <a:solidFill>
-            <a:srgbClr val="FCE7F3"/>
-          </a:solidFill>
-          <a:ln w="12700">
-            <a:solidFill>
-              <a:srgbClr val="DB2777"/>
-            </a:solidFill>
-            <a:prstDash val="solid"/>
-          </a:ln>
-        </p:spPr>
-      </p:sp>
-      <p:sp>
-        <p:nvSpPr>
-          <p:cNvPr id="39" name="Shape 37"/>
-          <p:cNvSpPr/>
-          <p:nvPr/>
-        </p:nvSpPr>
-        <p:spPr>
-          <a:xfrm>
-            <a:off x="2124837" y="4169664"/>
+              <a:t>e</a:t>
+            </a:r>
+            <a:endParaRPr lang="en-US" sz="900" dirty="0"/>
+          </a:p>
+        </p:txBody>
+      </p:sp>
+      <p:sp>
+        <p:nvSpPr>
+          <p:cNvPr id="40" name="Shape 38"/>
+          <p:cNvSpPr/>
+          <p:nvPr/>
+        </p:nvSpPr>
+        <p:spPr>
+          <a:xfrm>
+            <a:off x="4331643" y="4169664"/>
             <a:ext cx="685800" cy="475488"/>
           </a:xfrm>
           <a:prstGeom prst="rect">
@@ -27236,13 +26882,13 @@
       </p:sp>
       <p:sp>
         <p:nvSpPr>
-          <p:cNvPr id="40" name="Text 38"/>
-          <p:cNvSpPr/>
-          <p:nvPr/>
-        </p:nvSpPr>
-        <p:spPr>
-          <a:xfrm>
-            <a:off x="2124837" y="4169664"/>
+          <p:cNvPr id="41" name="Text 39"/>
+          <p:cNvSpPr/>
+          <p:nvPr/>
+        </p:nvSpPr>
+        <p:spPr>
+          <a:xfrm>
+            <a:off x="4331643" y="4169664"/>
             <a:ext cx="685800" cy="475488"/>
           </a:xfrm>
           <a:prstGeom prst="rect">
@@ -27267,7 +26913,7 @@
                 <a:ea typeface="Trebuchet MS" pitchFamily="34" charset="-122"/>
                 <a:cs typeface="Trebuchet MS" pitchFamily="34" charset="-120"/>
               </a:rPr>
-              <a:t>r</a:t>
+              <a:t>p</a:t>
             </a:r>
             <a:endParaRPr lang="en-US" sz="900" dirty="0"/>
           </a:p>
@@ -27275,13 +26921,13 @@
       </p:sp>
       <p:sp>
         <p:nvSpPr>
-          <p:cNvPr id="41" name="Shape 39"/>
-          <p:cNvSpPr/>
-          <p:nvPr/>
-        </p:nvSpPr>
-        <p:spPr>
-          <a:xfrm>
-            <a:off x="3033522" y="4169664"/>
+          <p:cNvPr id="42" name="Shape 40"/>
+          <p:cNvSpPr/>
+          <p:nvPr/>
+        </p:nvSpPr>
+        <p:spPr>
+          <a:xfrm>
+            <a:off x="5370141" y="4169664"/>
             <a:ext cx="685800" cy="475488"/>
           </a:xfrm>
           <a:prstGeom prst="rect">
@@ -27302,13 +26948,13 @@
       </p:sp>
       <p:sp>
         <p:nvSpPr>
-          <p:cNvPr id="42" name="Text 40"/>
-          <p:cNvSpPr/>
-          <p:nvPr/>
-        </p:nvSpPr>
-        <p:spPr>
-          <a:xfrm>
-            <a:off x="3033522" y="4169664"/>
+          <p:cNvPr id="43" name="Text 41"/>
+          <p:cNvSpPr/>
+          <p:nvPr/>
+        </p:nvSpPr>
+        <p:spPr>
+          <a:xfrm>
+            <a:off x="5370141" y="4169664"/>
             <a:ext cx="685800" cy="475488"/>
           </a:xfrm>
           <a:prstGeom prst="rect">
@@ -27333,7 +26979,7 @@
                 <a:ea typeface="Trebuchet MS" pitchFamily="34" charset="-122"/>
                 <a:cs typeface="Trebuchet MS" pitchFamily="34" charset="-120"/>
               </a:rPr>
-              <a:t>e</a:t>
+              <a:t>air</a:t>
             </a:r>
             <a:endParaRPr lang="en-US" sz="900" dirty="0"/>
           </a:p>
@@ -27341,13 +26987,13 @@
       </p:sp>
       <p:sp>
         <p:nvSpPr>
-          <p:cNvPr id="43" name="Shape 41"/>
-          <p:cNvSpPr/>
-          <p:nvPr/>
-        </p:nvSpPr>
-        <p:spPr>
-          <a:xfrm>
-            <a:off x="3942207" y="4169664"/>
+          <p:cNvPr id="44" name="Shape 42"/>
+          <p:cNvSpPr/>
+          <p:nvPr/>
+        </p:nvSpPr>
+        <p:spPr>
+          <a:xfrm>
+            <a:off x="6408638" y="4169664"/>
             <a:ext cx="685800" cy="475488"/>
           </a:xfrm>
           <a:prstGeom prst="rect">
@@ -27368,13 +27014,13 @@
       </p:sp>
       <p:sp>
         <p:nvSpPr>
-          <p:cNvPr id="44" name="Text 42"/>
-          <p:cNvSpPr/>
-          <p:nvPr/>
-        </p:nvSpPr>
-        <p:spPr>
-          <a:xfrm>
-            <a:off x="3942207" y="4169664"/>
+          <p:cNvPr id="45" name="Text 43"/>
+          <p:cNvSpPr/>
+          <p:nvPr/>
+        </p:nvSpPr>
+        <p:spPr>
+          <a:xfrm>
+            <a:off x="6408638" y="4169664"/>
             <a:ext cx="685800" cy="475488"/>
           </a:xfrm>
           <a:prstGeom prst="rect">
@@ -27399,7 +27045,7 @@
                 <a:ea typeface="Trebuchet MS" pitchFamily="34" charset="-122"/>
                 <a:cs typeface="Trebuchet MS" pitchFamily="34" charset="-120"/>
               </a:rPr>
-              <a:t>p</a:t>
+              <a:t>i</a:t>
             </a:r>
             <a:endParaRPr lang="en-US" sz="900" dirty="0"/>
           </a:p>
@@ -27407,13 +27053,13 @@
       </p:sp>
       <p:sp>
         <p:nvSpPr>
-          <p:cNvPr id="45" name="Shape 43"/>
-          <p:cNvSpPr/>
-          <p:nvPr/>
-        </p:nvSpPr>
-        <p:spPr>
-          <a:xfrm>
-            <a:off x="4850892" y="4169664"/>
+          <p:cNvPr id="46" name="Shape 44"/>
+          <p:cNvSpPr/>
+          <p:nvPr/>
+        </p:nvSpPr>
+        <p:spPr>
+          <a:xfrm>
+            <a:off x="7447135" y="4169664"/>
             <a:ext cx="685800" cy="475488"/>
           </a:xfrm>
           <a:prstGeom prst="rect">
@@ -27434,13 +27080,13 @@
       </p:sp>
       <p:sp>
         <p:nvSpPr>
-          <p:cNvPr id="46" name="Text 44"/>
-          <p:cNvSpPr/>
-          <p:nvPr/>
-        </p:nvSpPr>
-        <p:spPr>
-          <a:xfrm>
-            <a:off x="4850892" y="4169664"/>
+          <p:cNvPr id="47" name="Text 45"/>
+          <p:cNvSpPr/>
+          <p:nvPr/>
+        </p:nvSpPr>
+        <p:spPr>
+          <a:xfrm>
+            <a:off x="7447135" y="4169664"/>
             <a:ext cx="685800" cy="475488"/>
           </a:xfrm>
           <a:prstGeom prst="rect">
@@ -27465,205 +27111,7 @@
                 <a:ea typeface="Trebuchet MS" pitchFamily="34" charset="-122"/>
                 <a:cs typeface="Trebuchet MS" pitchFamily="34" charset="-120"/>
               </a:rPr>
-              <a:t>air</a:t>
-            </a:r>
-            <a:endParaRPr lang="en-US" sz="900" dirty="0"/>
-          </a:p>
-        </p:txBody>
-      </p:sp>
-      <p:sp>
-        <p:nvSpPr>
-          <p:cNvPr id="47" name="Shape 45"/>
-          <p:cNvSpPr/>
-          <p:nvPr/>
-        </p:nvSpPr>
-        <p:spPr>
-          <a:xfrm>
-            <a:off x="5759577" y="4169664"/>
-            <a:ext cx="685800" cy="475488"/>
-          </a:xfrm>
-          <a:prstGeom prst="rect">
-            <a:avLst>
-              <a:gd name="adj" fmla="val 7692"/>
-            </a:avLst>
-          </a:prstGeom>
-          <a:solidFill>
-            <a:srgbClr val="FFFFFF"/>
-          </a:solidFill>
-          <a:ln w="12700">
-            <a:solidFill>
-              <a:srgbClr val="DB2777"/>
-            </a:solidFill>
-            <a:prstDash val="solid"/>
-          </a:ln>
-        </p:spPr>
-      </p:sp>
-      <p:sp>
-        <p:nvSpPr>
-          <p:cNvPr id="48" name="Text 46"/>
-          <p:cNvSpPr/>
-          <p:nvPr/>
-        </p:nvSpPr>
-        <p:spPr>
-          <a:xfrm>
-            <a:off x="5759577" y="4169664"/>
-            <a:ext cx="685800" cy="475488"/>
-          </a:xfrm>
-          <a:prstGeom prst="rect">
-            <a:avLst/>
-          </a:prstGeom>
-          <a:noFill/>
-          <a:ln/>
-        </p:spPr>
-        <p:txBody>
-          <a:bodyPr wrap="square" lIns="0" tIns="0" rIns="0" bIns="0" rtlCol="0" anchor="ctr"/>
-          <a:lstStyle/>
-          <a:p>
-            <a:pPr algn="ctr" indent="0" marL="0">
-              <a:buNone/>
-            </a:pPr>
-            <a:r>
-              <a:rPr lang="en-US" sz="900" b="1" dirty="0">
-                <a:solidFill>
-                  <a:srgbClr val="9D174D"/>
-                </a:solidFill>
-                <a:latin typeface="Trebuchet MS" pitchFamily="34" charset="0"/>
-                <a:ea typeface="Trebuchet MS" pitchFamily="34" charset="-122"/>
-                <a:cs typeface="Trebuchet MS" pitchFamily="34" charset="-120"/>
-              </a:rPr>
-              <a:t>a</a:t>
-            </a:r>
-            <a:endParaRPr lang="en-US" sz="900" dirty="0"/>
-          </a:p>
-        </p:txBody>
-      </p:sp>
-      <p:sp>
-        <p:nvSpPr>
-          <p:cNvPr id="49" name="Shape 47"/>
-          <p:cNvSpPr/>
-          <p:nvPr/>
-        </p:nvSpPr>
-        <p:spPr>
-          <a:xfrm>
-            <a:off x="6668262" y="4169664"/>
-            <a:ext cx="685800" cy="475488"/>
-          </a:xfrm>
-          <a:prstGeom prst="rect">
-            <a:avLst>
-              <a:gd name="adj" fmla="val 7692"/>
-            </a:avLst>
-          </a:prstGeom>
-          <a:solidFill>
-            <a:srgbClr val="FFFFFF"/>
-          </a:solidFill>
-          <a:ln w="12700">
-            <a:solidFill>
-              <a:srgbClr val="DB2777"/>
-            </a:solidFill>
-            <a:prstDash val="solid"/>
-          </a:ln>
-        </p:spPr>
-      </p:sp>
-      <p:sp>
-        <p:nvSpPr>
-          <p:cNvPr id="50" name="Text 48"/>
-          <p:cNvSpPr/>
-          <p:nvPr/>
-        </p:nvSpPr>
-        <p:spPr>
-          <a:xfrm>
-            <a:off x="6668262" y="4169664"/>
-            <a:ext cx="685800" cy="475488"/>
-          </a:xfrm>
-          <a:prstGeom prst="rect">
-            <a:avLst/>
-          </a:prstGeom>
-          <a:noFill/>
-          <a:ln/>
-        </p:spPr>
-        <p:txBody>
-          <a:bodyPr wrap="square" lIns="0" tIns="0" rIns="0" bIns="0" rtlCol="0" anchor="ctr"/>
-          <a:lstStyle/>
-          <a:p>
-            <a:pPr algn="ctr" indent="0" marL="0">
-              <a:buNone/>
-            </a:pPr>
-            <a:r>
-              <a:rPr lang="en-US" sz="900" b="1" dirty="0">
-                <a:solidFill>
-                  <a:srgbClr val="9D174D"/>
-                </a:solidFill>
-                <a:latin typeface="Trebuchet MS" pitchFamily="34" charset="0"/>
-                <a:ea typeface="Trebuchet MS" pitchFamily="34" charset="-122"/>
-                <a:cs typeface="Trebuchet MS" pitchFamily="34" charset="-120"/>
-              </a:rPr>
-              <a:t>b</a:t>
-            </a:r>
-            <a:endParaRPr lang="en-US" sz="900" dirty="0"/>
-          </a:p>
-        </p:txBody>
-      </p:sp>
-      <p:sp>
-        <p:nvSpPr>
-          <p:cNvPr id="51" name="Shape 49"/>
-          <p:cNvSpPr/>
-          <p:nvPr/>
-        </p:nvSpPr>
-        <p:spPr>
-          <a:xfrm>
-            <a:off x="7576947" y="4169664"/>
-            <a:ext cx="685800" cy="475488"/>
-          </a:xfrm>
-          <a:prstGeom prst="rect">
-            <a:avLst>
-              <a:gd name="adj" fmla="val 7692"/>
-            </a:avLst>
-          </a:prstGeom>
-          <a:solidFill>
-            <a:srgbClr val="FFFFFF"/>
-          </a:solidFill>
-          <a:ln w="12700">
-            <a:solidFill>
-              <a:srgbClr val="DB2777"/>
-            </a:solidFill>
-            <a:prstDash val="solid"/>
-          </a:ln>
-        </p:spPr>
-      </p:sp>
-      <p:sp>
-        <p:nvSpPr>
-          <p:cNvPr id="52" name="Text 50"/>
-          <p:cNvSpPr/>
-          <p:nvPr/>
-        </p:nvSpPr>
-        <p:spPr>
-          <a:xfrm>
-            <a:off x="7576947" y="4169664"/>
-            <a:ext cx="685800" cy="475488"/>
-          </a:xfrm>
-          <a:prstGeom prst="rect">
-            <a:avLst/>
-          </a:prstGeom>
-          <a:noFill/>
-          <a:ln/>
-        </p:spPr>
-        <p:txBody>
-          <a:bodyPr wrap="square" lIns="0" tIns="0" rIns="0" bIns="0" rtlCol="0" anchor="ctr"/>
-          <a:lstStyle/>
-          <a:p>
-            <a:pPr algn="ctr" indent="0" marL="0">
-              <a:buNone/>
-            </a:pPr>
-            <a:r>
-              <a:rPr lang="en-US" sz="900" b="1" dirty="0">
-                <a:solidFill>
-                  <a:srgbClr val="9D174D"/>
-                </a:solidFill>
-                <a:latin typeface="Trebuchet MS" pitchFamily="34" charset="0"/>
-                <a:ea typeface="Trebuchet MS" pitchFamily="34" charset="-122"/>
-                <a:cs typeface="Trebuchet MS" pitchFamily="34" charset="-120"/>
-              </a:rPr>
-              <a:t>le</a:t>
+              <a:t>ng</a:t>
             </a:r>
             <a:endParaRPr lang="en-US" sz="900" dirty="0"/>
           </a:p>
@@ -27955,7 +27403,7 @@
                 <a:ea typeface="Calibri" pitchFamily="34" charset="-122"/>
                 <a:cs typeface="Calibri" pitchFamily="34" charset="-120"/>
               </a:rPr>
-              <a:t>Word Labs  •  wordlabs.app  •  Root: 'repair' = fix or restore something broken</a:t>
+              <a:t>Word Labs  •  wordlabs.app  •  Root: 'repair' = fix</a:t>
             </a:r>
             <a:endParaRPr lang="en-US" sz="800" dirty="0"/>
           </a:p>
@@ -28094,7 +27542,7 @@
                 <a:ea typeface="Trebuchet MS" pitchFamily="34" charset="-122"/>
                 <a:cs typeface="Trebuchet MS" pitchFamily="34" charset="-120"/>
               </a:rPr>
-              <a:t>repairs</a:t>
+              <a:t>repairable</a:t>
             </a:r>
             <a:endParaRPr lang="en-US" sz="2800" dirty="0"/>
           </a:p>
@@ -28782,7 +28230,7 @@
                 <a:ea typeface="Calibri" pitchFamily="34" charset="-122"/>
                 <a:cs typeface="Calibri" pitchFamily="34" charset="-120"/>
               </a:rPr>
-              <a:t>Word Labs  •  wordlabs.app  •  Root: 'repair' = fix or restore something broken</a:t>
+              <a:t>Word Labs  •  wordlabs.app  •  Root: 'repair' = fix</a:t>
             </a:r>
             <a:endParaRPr lang="en-US" sz="800" dirty="0"/>
           </a:p>
@@ -28921,7 +28369,7 @@
                 <a:ea typeface="Trebuchet MS" pitchFamily="34" charset="-122"/>
                 <a:cs typeface="Trebuchet MS" pitchFamily="34" charset="-120"/>
               </a:rPr>
-              <a:t>repairs</a:t>
+              <a:t>repairable</a:t>
             </a:r>
             <a:endParaRPr lang="en-US" sz="2800" dirty="0"/>
           </a:p>
@@ -29099,7 +28547,7 @@
                 <a:ea typeface="Calibri" pitchFamily="34" charset="-122"/>
                 <a:cs typeface="Calibri" pitchFamily="34" charset="-120"/>
               </a:rPr>
-              <a:t>fix or restore</a:t>
+              <a:t>fix</a:t>
             </a:r>
             <a:endParaRPr lang="en-US" sz="850" dirty="0"/>
           </a:p>
@@ -29172,7 +28620,7 @@
                 <a:ea typeface="Trebuchet MS" pitchFamily="34" charset="-122"/>
                 <a:cs typeface="Trebuchet MS" pitchFamily="34" charset="-120"/>
               </a:rPr>
-              <a:t>s</a:t>
+              <a:t>able</a:t>
             </a:r>
             <a:endParaRPr lang="en-US" sz="1300" dirty="0"/>
           </a:p>
@@ -29211,7 +28659,7 @@
                 <a:ea typeface="Calibri" pitchFamily="34" charset="-122"/>
                 <a:cs typeface="Calibri" pitchFamily="34" charset="-120"/>
               </a:rPr>
-              <a:t>more than one, or ongoing work</a:t>
+              <a:t>able to</a:t>
             </a:r>
             <a:endParaRPr lang="en-US" sz="850" dirty="0"/>
           </a:p>
@@ -29767,7 +29215,7 @@
                 <a:ea typeface="Calibri" pitchFamily="34" charset="-122"/>
                 <a:cs typeface="Calibri" pitchFamily="34" charset="-120"/>
               </a:rPr>
-              <a:t>Word Labs  •  wordlabs.app  •  Root: 'repair' = fix or restore something broken</a:t>
+              <a:t>Word Labs  •  wordlabs.app  •  Root: 'repair' = fix</a:t>
             </a:r>
             <a:endParaRPr lang="en-US" sz="800" dirty="0"/>
           </a:p>
@@ -29906,7 +29354,7 @@
                 <a:ea typeface="Trebuchet MS" pitchFamily="34" charset="-122"/>
                 <a:cs typeface="Trebuchet MS" pitchFamily="34" charset="-120"/>
               </a:rPr>
-              <a:t>repairs</a:t>
+              <a:t>repairable</a:t>
             </a:r>
             <a:endParaRPr lang="en-US" sz="2800" dirty="0"/>
           </a:p>
@@ -30084,7 +29532,7 @@
                 <a:ea typeface="Calibri" pitchFamily="34" charset="-122"/>
                 <a:cs typeface="Calibri" pitchFamily="34" charset="-120"/>
               </a:rPr>
-              <a:t>fix or restore</a:t>
+              <a:t>fix</a:t>
             </a:r>
             <a:endParaRPr lang="en-US" sz="850" dirty="0"/>
           </a:p>
@@ -30157,7 +29605,7 @@
                 <a:ea typeface="Trebuchet MS" pitchFamily="34" charset="-122"/>
                 <a:cs typeface="Trebuchet MS" pitchFamily="34" charset="-120"/>
               </a:rPr>
-              <a:t>s</a:t>
+              <a:t>able</a:t>
             </a:r>
             <a:endParaRPr lang="en-US" sz="1300" dirty="0"/>
           </a:p>
@@ -30196,7 +29644,7 @@
                 <a:ea typeface="Calibri" pitchFamily="34" charset="-122"/>
                 <a:cs typeface="Calibri" pitchFamily="34" charset="-120"/>
               </a:rPr>
-              <a:t>more than one, or ongoing work</a:t>
+              <a:t>able to</a:t>
             </a:r>
             <a:endParaRPr lang="en-US" sz="850" dirty="0"/>
           </a:p>
@@ -30303,8 +29751,8 @@
         </p:nvSpPr>
         <p:spPr>
           <a:xfrm>
-            <a:off x="2999232" y="3364992"/>
-            <a:ext cx="1645920" cy="475488"/>
+            <a:off x="1975104" y="3364992"/>
+            <a:ext cx="1554480" cy="475488"/>
           </a:xfrm>
           <a:prstGeom prst="rect">
             <a:avLst>
@@ -30330,8 +29778,8 @@
         </p:nvSpPr>
         <p:spPr>
           <a:xfrm>
-            <a:off x="2999232" y="3364992"/>
-            <a:ext cx="1645920" cy="475488"/>
+            <a:off x="1975104" y="3364992"/>
+            <a:ext cx="1554480" cy="475488"/>
           </a:xfrm>
           <a:prstGeom prst="rect">
             <a:avLst/>
@@ -30369,8 +29817,8 @@
         </p:nvSpPr>
         <p:spPr>
           <a:xfrm>
-            <a:off x="4645152" y="3364992"/>
-            <a:ext cx="1097280" cy="475488"/>
+            <a:off x="3529584" y="3364992"/>
+            <a:ext cx="73152" cy="475488"/>
           </a:xfrm>
           <a:prstGeom prst="rect">
             <a:avLst/>
@@ -30408,8 +29856,8 @@
         </p:nvSpPr>
         <p:spPr>
           <a:xfrm>
-            <a:off x="5742432" y="3364992"/>
-            <a:ext cx="1645920" cy="475488"/>
+            <a:off x="3602736" y="3364992"/>
+            <a:ext cx="1554480" cy="475488"/>
           </a:xfrm>
           <a:prstGeom prst="rect">
             <a:avLst>
@@ -30435,8 +29883,8 @@
         </p:nvSpPr>
         <p:spPr>
           <a:xfrm>
-            <a:off x="5742432" y="3364992"/>
-            <a:ext cx="1645920" cy="475488"/>
+            <a:off x="3602736" y="3364992"/>
+            <a:ext cx="1554480" cy="475488"/>
           </a:xfrm>
           <a:prstGeom prst="rect">
             <a:avLst/>
@@ -30460,7 +29908,7 @@
                 <a:ea typeface="Trebuchet MS" pitchFamily="34" charset="-122"/>
                 <a:cs typeface="Trebuchet MS" pitchFamily="34" charset="-120"/>
               </a:rPr>
-              <a:t>pairs</a:t>
+              <a:t>pair</a:t>
             </a:r>
             <a:endParaRPr lang="en-US" sz="1400" dirty="0"/>
           </a:p>
@@ -30468,7 +29916,217 @@
       </p:sp>
       <p:sp>
         <p:nvSpPr>
-          <p:cNvPr id="30" name="Shape 28"/>
+          <p:cNvPr id="30" name="Text 28"/>
+          <p:cNvSpPr/>
+          <p:nvPr/>
+        </p:nvSpPr>
+        <p:spPr>
+          <a:xfrm>
+            <a:off x="5157216" y="3364992"/>
+            <a:ext cx="73152" cy="475488"/>
+          </a:xfrm>
+          <a:prstGeom prst="rect">
+            <a:avLst/>
+          </a:prstGeom>
+          <a:noFill/>
+          <a:ln/>
+        </p:spPr>
+        <p:txBody>
+          <a:bodyPr wrap="square" lIns="0" tIns="0" rIns="0" bIns="0" rtlCol="0" anchor="ctr"/>
+          <a:lstStyle/>
+          <a:p>
+            <a:pPr algn="ctr" indent="0" marL="0">
+              <a:buNone/>
+            </a:pPr>
+            <a:r>
+              <a:rPr lang="en-US" sz="1600" b="1" dirty="0">
+                <a:solidFill>
+                  <a:srgbClr val="0D9488"/>
+                </a:solidFill>
+                <a:latin typeface="Trebuchet MS" pitchFamily="34" charset="0"/>
+                <a:ea typeface="Trebuchet MS" pitchFamily="34" charset="-122"/>
+                <a:cs typeface="Trebuchet MS" pitchFamily="34" charset="-120"/>
+              </a:rPr>
+              <a:t>·</a:t>
+            </a:r>
+            <a:endParaRPr lang="en-US" sz="1600" dirty="0"/>
+          </a:p>
+        </p:txBody>
+      </p:sp>
+      <p:sp>
+        <p:nvSpPr>
+          <p:cNvPr id="31" name="Shape 29"/>
+          <p:cNvSpPr/>
+          <p:nvPr/>
+        </p:nvSpPr>
+        <p:spPr>
+          <a:xfrm>
+            <a:off x="5230368" y="3364992"/>
+            <a:ext cx="1554480" cy="475488"/>
+          </a:xfrm>
+          <a:prstGeom prst="rect">
+            <a:avLst>
+              <a:gd name="adj" fmla="val 9615"/>
+            </a:avLst>
+          </a:prstGeom>
+          <a:solidFill>
+            <a:srgbClr val="FFFFFF"/>
+          </a:solidFill>
+          <a:ln w="12700">
+            <a:solidFill>
+              <a:srgbClr val="0D9488"/>
+            </a:solidFill>
+            <a:prstDash val="solid"/>
+          </a:ln>
+        </p:spPr>
+      </p:sp>
+      <p:sp>
+        <p:nvSpPr>
+          <p:cNvPr id="32" name="Text 30"/>
+          <p:cNvSpPr/>
+          <p:nvPr/>
+        </p:nvSpPr>
+        <p:spPr>
+          <a:xfrm>
+            <a:off x="5230368" y="3364992"/>
+            <a:ext cx="1554480" cy="475488"/>
+          </a:xfrm>
+          <a:prstGeom prst="rect">
+            <a:avLst/>
+          </a:prstGeom>
+          <a:noFill/>
+          <a:ln/>
+        </p:spPr>
+        <p:txBody>
+          <a:bodyPr wrap="square" lIns="0" tIns="0" rIns="0" bIns="0" rtlCol="0" anchor="ctr"/>
+          <a:lstStyle/>
+          <a:p>
+            <a:pPr algn="ctr" indent="0" marL="0">
+              <a:buNone/>
+            </a:pPr>
+            <a:r>
+              <a:rPr lang="en-US" sz="1400" b="1" dirty="0">
+                <a:solidFill>
+                  <a:srgbClr val="0D9488"/>
+                </a:solidFill>
+                <a:latin typeface="Trebuchet MS" pitchFamily="34" charset="0"/>
+                <a:ea typeface="Trebuchet MS" pitchFamily="34" charset="-122"/>
+                <a:cs typeface="Trebuchet MS" pitchFamily="34" charset="-120"/>
+              </a:rPr>
+              <a:t>a</a:t>
+            </a:r>
+            <a:endParaRPr lang="en-US" sz="1400" dirty="0"/>
+          </a:p>
+        </p:txBody>
+      </p:sp>
+      <p:sp>
+        <p:nvSpPr>
+          <p:cNvPr id="33" name="Text 31"/>
+          <p:cNvSpPr/>
+          <p:nvPr/>
+        </p:nvSpPr>
+        <p:spPr>
+          <a:xfrm>
+            <a:off x="6784848" y="3364992"/>
+            <a:ext cx="73152" cy="475488"/>
+          </a:xfrm>
+          <a:prstGeom prst="rect">
+            <a:avLst/>
+          </a:prstGeom>
+          <a:noFill/>
+          <a:ln/>
+        </p:spPr>
+        <p:txBody>
+          <a:bodyPr wrap="square" lIns="0" tIns="0" rIns="0" bIns="0" rtlCol="0" anchor="ctr"/>
+          <a:lstStyle/>
+          <a:p>
+            <a:pPr algn="ctr" indent="0" marL="0">
+              <a:buNone/>
+            </a:pPr>
+            <a:r>
+              <a:rPr lang="en-US" sz="1600" b="1" dirty="0">
+                <a:solidFill>
+                  <a:srgbClr val="0D9488"/>
+                </a:solidFill>
+                <a:latin typeface="Trebuchet MS" pitchFamily="34" charset="0"/>
+                <a:ea typeface="Trebuchet MS" pitchFamily="34" charset="-122"/>
+                <a:cs typeface="Trebuchet MS" pitchFamily="34" charset="-120"/>
+              </a:rPr>
+              <a:t>·</a:t>
+            </a:r>
+            <a:endParaRPr lang="en-US" sz="1600" dirty="0"/>
+          </a:p>
+        </p:txBody>
+      </p:sp>
+      <p:sp>
+        <p:nvSpPr>
+          <p:cNvPr id="34" name="Shape 32"/>
+          <p:cNvSpPr/>
+          <p:nvPr/>
+        </p:nvSpPr>
+        <p:spPr>
+          <a:xfrm>
+            <a:off x="6858000" y="3364992"/>
+            <a:ext cx="1554480" cy="475488"/>
+          </a:xfrm>
+          <a:prstGeom prst="rect">
+            <a:avLst>
+              <a:gd name="adj" fmla="val 9615"/>
+            </a:avLst>
+          </a:prstGeom>
+          <a:solidFill>
+            <a:srgbClr val="FFFFFF"/>
+          </a:solidFill>
+          <a:ln w="12700">
+            <a:solidFill>
+              <a:srgbClr val="0D9488"/>
+            </a:solidFill>
+            <a:prstDash val="solid"/>
+          </a:ln>
+        </p:spPr>
+      </p:sp>
+      <p:sp>
+        <p:nvSpPr>
+          <p:cNvPr id="35" name="Text 33"/>
+          <p:cNvSpPr/>
+          <p:nvPr/>
+        </p:nvSpPr>
+        <p:spPr>
+          <a:xfrm>
+            <a:off x="6858000" y="3364992"/>
+            <a:ext cx="1554480" cy="475488"/>
+          </a:xfrm>
+          <a:prstGeom prst="rect">
+            <a:avLst/>
+          </a:prstGeom>
+          <a:noFill/>
+          <a:ln/>
+        </p:spPr>
+        <p:txBody>
+          <a:bodyPr wrap="square" lIns="0" tIns="0" rIns="0" bIns="0" rtlCol="0" anchor="ctr"/>
+          <a:lstStyle/>
+          <a:p>
+            <a:pPr algn="ctr" indent="0" marL="0">
+              <a:buNone/>
+            </a:pPr>
+            <a:r>
+              <a:rPr lang="en-US" sz="1400" b="1" dirty="0">
+                <a:solidFill>
+                  <a:srgbClr val="0D9488"/>
+                </a:solidFill>
+                <a:latin typeface="Trebuchet MS" pitchFamily="34" charset="0"/>
+                <a:ea typeface="Trebuchet MS" pitchFamily="34" charset="-122"/>
+                <a:cs typeface="Trebuchet MS" pitchFamily="34" charset="-120"/>
+              </a:rPr>
+              <a:t>ble</a:t>
+            </a:r>
+            <a:endParaRPr lang="en-US" sz="1400" dirty="0"/>
+          </a:p>
+        </p:txBody>
+      </p:sp>
+      <p:sp>
+        <p:nvSpPr>
+          <p:cNvPr id="36" name="Shape 34"/>
           <p:cNvSpPr/>
           <p:nvPr/>
         </p:nvSpPr>
@@ -30495,7 +30153,7 @@
       </p:sp>
       <p:sp>
         <p:nvSpPr>
-          <p:cNvPr id="31" name="Text 29"/>
+          <p:cNvPr id="37" name="Text 35"/>
           <p:cNvSpPr/>
           <p:nvPr/>
         </p:nvSpPr>
@@ -30534,7 +30192,7 @@
       </p:sp>
       <p:sp>
         <p:nvSpPr>
-          <p:cNvPr id="32" name="Shape 30"/>
+          <p:cNvPr id="38" name="Shape 36"/>
           <p:cNvSpPr/>
           <p:nvPr/>
         </p:nvSpPr>
@@ -30561,7 +30219,7 @@
       </p:sp>
       <p:sp>
         <p:nvSpPr>
-          <p:cNvPr id="33" name="Text 31"/>
+          <p:cNvPr id="39" name="Text 37"/>
           <p:cNvSpPr/>
           <p:nvPr/>
         </p:nvSpPr>
@@ -30884,7 +30542,7 @@
                 <a:ea typeface="Calibri" pitchFamily="34" charset="-122"/>
                 <a:cs typeface="Calibri" pitchFamily="34" charset="-120"/>
               </a:rPr>
-              <a:t>Word Labs  •  wordlabs.app  •  Root: 'repair' = fix or restore something broken</a:t>
+              <a:t>Word Labs  •  wordlabs.app  •  Root: 'repair' = fix</a:t>
             </a:r>
             <a:endParaRPr lang="en-US" sz="800" dirty="0"/>
           </a:p>
@@ -31023,7 +30681,7 @@
                 <a:ea typeface="Trebuchet MS" pitchFamily="34" charset="-122"/>
                 <a:cs typeface="Trebuchet MS" pitchFamily="34" charset="-120"/>
               </a:rPr>
-              <a:t>repairs</a:t>
+              <a:t>repairable</a:t>
             </a:r>
             <a:endParaRPr lang="en-US" sz="2800" dirty="0"/>
           </a:p>
@@ -31201,7 +30859,7 @@
                 <a:ea typeface="Calibri" pitchFamily="34" charset="-122"/>
                 <a:cs typeface="Calibri" pitchFamily="34" charset="-120"/>
               </a:rPr>
-              <a:t>fix or restore</a:t>
+              <a:t>fix</a:t>
             </a:r>
             <a:endParaRPr lang="en-US" sz="850" dirty="0"/>
           </a:p>
@@ -31274,7 +30932,7 @@
                 <a:ea typeface="Trebuchet MS" pitchFamily="34" charset="-122"/>
                 <a:cs typeface="Trebuchet MS" pitchFamily="34" charset="-120"/>
               </a:rPr>
-              <a:t>s</a:t>
+              <a:t>able</a:t>
             </a:r>
             <a:endParaRPr lang="en-US" sz="1300" dirty="0"/>
           </a:p>
@@ -31313,7 +30971,7 @@
                 <a:ea typeface="Calibri" pitchFamily="34" charset="-122"/>
                 <a:cs typeface="Calibri" pitchFamily="34" charset="-120"/>
               </a:rPr>
-              <a:t>more than one, or ongoing work</a:t>
+              <a:t>able to</a:t>
             </a:r>
             <a:endParaRPr lang="en-US" sz="850" dirty="0"/>
           </a:p>
@@ -31420,8 +31078,8 @@
         </p:nvSpPr>
         <p:spPr>
           <a:xfrm>
-            <a:off x="2999232" y="3364992"/>
-            <a:ext cx="1645920" cy="475488"/>
+            <a:off x="1975104" y="3364992"/>
+            <a:ext cx="1554480" cy="475488"/>
           </a:xfrm>
           <a:prstGeom prst="rect">
             <a:avLst>
@@ -31447,8 +31105,8 @@
         </p:nvSpPr>
         <p:spPr>
           <a:xfrm>
-            <a:off x="2999232" y="3364992"/>
-            <a:ext cx="1645920" cy="475488"/>
+            <a:off x="1975104" y="3364992"/>
+            <a:ext cx="1554480" cy="475488"/>
           </a:xfrm>
           <a:prstGeom prst="rect">
             <a:avLst/>
@@ -31486,8 +31144,8 @@
         </p:nvSpPr>
         <p:spPr>
           <a:xfrm>
-            <a:off x="4645152" y="3364992"/>
-            <a:ext cx="1097280" cy="475488"/>
+            <a:off x="3529584" y="3364992"/>
+            <a:ext cx="73152" cy="475488"/>
           </a:xfrm>
           <a:prstGeom prst="rect">
             <a:avLst/>
@@ -31525,8 +31183,8 @@
         </p:nvSpPr>
         <p:spPr>
           <a:xfrm>
-            <a:off x="5742432" y="3364992"/>
-            <a:ext cx="1645920" cy="475488"/>
+            <a:off x="3602736" y="3364992"/>
+            <a:ext cx="1554480" cy="475488"/>
           </a:xfrm>
           <a:prstGeom prst="rect">
             <a:avLst>
@@ -31552,8 +31210,8 @@
         </p:nvSpPr>
         <p:spPr>
           <a:xfrm>
-            <a:off x="5742432" y="3364992"/>
-            <a:ext cx="1645920" cy="475488"/>
+            <a:off x="3602736" y="3364992"/>
+            <a:ext cx="1554480" cy="475488"/>
           </a:xfrm>
           <a:prstGeom prst="rect">
             <a:avLst/>
@@ -31577,7 +31235,7 @@
                 <a:ea typeface="Trebuchet MS" pitchFamily="34" charset="-122"/>
                 <a:cs typeface="Trebuchet MS" pitchFamily="34" charset="-120"/>
               </a:rPr>
-              <a:t>pairs</a:t>
+              <a:t>pair</a:t>
             </a:r>
             <a:endParaRPr lang="en-US" sz="1400" dirty="0"/>
           </a:p>
@@ -31585,7 +31243,217 @@
       </p:sp>
       <p:sp>
         <p:nvSpPr>
-          <p:cNvPr id="30" name="Shape 28"/>
+          <p:cNvPr id="30" name="Text 28"/>
+          <p:cNvSpPr/>
+          <p:nvPr/>
+        </p:nvSpPr>
+        <p:spPr>
+          <a:xfrm>
+            <a:off x="5157216" y="3364992"/>
+            <a:ext cx="73152" cy="475488"/>
+          </a:xfrm>
+          <a:prstGeom prst="rect">
+            <a:avLst/>
+          </a:prstGeom>
+          <a:noFill/>
+          <a:ln/>
+        </p:spPr>
+        <p:txBody>
+          <a:bodyPr wrap="square" lIns="0" tIns="0" rIns="0" bIns="0" rtlCol="0" anchor="ctr"/>
+          <a:lstStyle/>
+          <a:p>
+            <a:pPr algn="ctr" indent="0" marL="0">
+              <a:buNone/>
+            </a:pPr>
+            <a:r>
+              <a:rPr lang="en-US" sz="1600" b="1" dirty="0">
+                <a:solidFill>
+                  <a:srgbClr val="0D9488"/>
+                </a:solidFill>
+                <a:latin typeface="Trebuchet MS" pitchFamily="34" charset="0"/>
+                <a:ea typeface="Trebuchet MS" pitchFamily="34" charset="-122"/>
+                <a:cs typeface="Trebuchet MS" pitchFamily="34" charset="-120"/>
+              </a:rPr>
+              <a:t>·</a:t>
+            </a:r>
+            <a:endParaRPr lang="en-US" sz="1600" dirty="0"/>
+          </a:p>
+        </p:txBody>
+      </p:sp>
+      <p:sp>
+        <p:nvSpPr>
+          <p:cNvPr id="31" name="Shape 29"/>
+          <p:cNvSpPr/>
+          <p:nvPr/>
+        </p:nvSpPr>
+        <p:spPr>
+          <a:xfrm>
+            <a:off x="5230368" y="3364992"/>
+            <a:ext cx="1554480" cy="475488"/>
+          </a:xfrm>
+          <a:prstGeom prst="rect">
+            <a:avLst>
+              <a:gd name="adj" fmla="val 9615"/>
+            </a:avLst>
+          </a:prstGeom>
+          <a:solidFill>
+            <a:srgbClr val="FFFFFF"/>
+          </a:solidFill>
+          <a:ln w="12700">
+            <a:solidFill>
+              <a:srgbClr val="0D9488"/>
+            </a:solidFill>
+            <a:prstDash val="solid"/>
+          </a:ln>
+        </p:spPr>
+      </p:sp>
+      <p:sp>
+        <p:nvSpPr>
+          <p:cNvPr id="32" name="Text 30"/>
+          <p:cNvSpPr/>
+          <p:nvPr/>
+        </p:nvSpPr>
+        <p:spPr>
+          <a:xfrm>
+            <a:off x="5230368" y="3364992"/>
+            <a:ext cx="1554480" cy="475488"/>
+          </a:xfrm>
+          <a:prstGeom prst="rect">
+            <a:avLst/>
+          </a:prstGeom>
+          <a:noFill/>
+          <a:ln/>
+        </p:spPr>
+        <p:txBody>
+          <a:bodyPr wrap="square" lIns="0" tIns="0" rIns="0" bIns="0" rtlCol="0" anchor="ctr"/>
+          <a:lstStyle/>
+          <a:p>
+            <a:pPr algn="ctr" indent="0" marL="0">
+              <a:buNone/>
+            </a:pPr>
+            <a:r>
+              <a:rPr lang="en-US" sz="1400" b="1" dirty="0">
+                <a:solidFill>
+                  <a:srgbClr val="0D9488"/>
+                </a:solidFill>
+                <a:latin typeface="Trebuchet MS" pitchFamily="34" charset="0"/>
+                <a:ea typeface="Trebuchet MS" pitchFamily="34" charset="-122"/>
+                <a:cs typeface="Trebuchet MS" pitchFamily="34" charset="-120"/>
+              </a:rPr>
+              <a:t>a</a:t>
+            </a:r>
+            <a:endParaRPr lang="en-US" sz="1400" dirty="0"/>
+          </a:p>
+        </p:txBody>
+      </p:sp>
+      <p:sp>
+        <p:nvSpPr>
+          <p:cNvPr id="33" name="Text 31"/>
+          <p:cNvSpPr/>
+          <p:nvPr/>
+        </p:nvSpPr>
+        <p:spPr>
+          <a:xfrm>
+            <a:off x="6784848" y="3364992"/>
+            <a:ext cx="73152" cy="475488"/>
+          </a:xfrm>
+          <a:prstGeom prst="rect">
+            <a:avLst/>
+          </a:prstGeom>
+          <a:noFill/>
+          <a:ln/>
+        </p:spPr>
+        <p:txBody>
+          <a:bodyPr wrap="square" lIns="0" tIns="0" rIns="0" bIns="0" rtlCol="0" anchor="ctr"/>
+          <a:lstStyle/>
+          <a:p>
+            <a:pPr algn="ctr" indent="0" marL="0">
+              <a:buNone/>
+            </a:pPr>
+            <a:r>
+              <a:rPr lang="en-US" sz="1600" b="1" dirty="0">
+                <a:solidFill>
+                  <a:srgbClr val="0D9488"/>
+                </a:solidFill>
+                <a:latin typeface="Trebuchet MS" pitchFamily="34" charset="0"/>
+                <a:ea typeface="Trebuchet MS" pitchFamily="34" charset="-122"/>
+                <a:cs typeface="Trebuchet MS" pitchFamily="34" charset="-120"/>
+              </a:rPr>
+              <a:t>·</a:t>
+            </a:r>
+            <a:endParaRPr lang="en-US" sz="1600" dirty="0"/>
+          </a:p>
+        </p:txBody>
+      </p:sp>
+      <p:sp>
+        <p:nvSpPr>
+          <p:cNvPr id="34" name="Shape 32"/>
+          <p:cNvSpPr/>
+          <p:nvPr/>
+        </p:nvSpPr>
+        <p:spPr>
+          <a:xfrm>
+            <a:off x="6858000" y="3364992"/>
+            <a:ext cx="1554480" cy="475488"/>
+          </a:xfrm>
+          <a:prstGeom prst="rect">
+            <a:avLst>
+              <a:gd name="adj" fmla="val 9615"/>
+            </a:avLst>
+          </a:prstGeom>
+          <a:solidFill>
+            <a:srgbClr val="FFFFFF"/>
+          </a:solidFill>
+          <a:ln w="12700">
+            <a:solidFill>
+              <a:srgbClr val="0D9488"/>
+            </a:solidFill>
+            <a:prstDash val="solid"/>
+          </a:ln>
+        </p:spPr>
+      </p:sp>
+      <p:sp>
+        <p:nvSpPr>
+          <p:cNvPr id="35" name="Text 33"/>
+          <p:cNvSpPr/>
+          <p:nvPr/>
+        </p:nvSpPr>
+        <p:spPr>
+          <a:xfrm>
+            <a:off x="6858000" y="3364992"/>
+            <a:ext cx="1554480" cy="475488"/>
+          </a:xfrm>
+          <a:prstGeom prst="rect">
+            <a:avLst/>
+          </a:prstGeom>
+          <a:noFill/>
+          <a:ln/>
+        </p:spPr>
+        <p:txBody>
+          <a:bodyPr wrap="square" lIns="0" tIns="0" rIns="0" bIns="0" rtlCol="0" anchor="ctr"/>
+          <a:lstStyle/>
+          <a:p>
+            <a:pPr algn="ctr" indent="0" marL="0">
+              <a:buNone/>
+            </a:pPr>
+            <a:r>
+              <a:rPr lang="en-US" sz="1400" b="1" dirty="0">
+                <a:solidFill>
+                  <a:srgbClr val="0D9488"/>
+                </a:solidFill>
+                <a:latin typeface="Trebuchet MS" pitchFamily="34" charset="0"/>
+                <a:ea typeface="Trebuchet MS" pitchFamily="34" charset="-122"/>
+                <a:cs typeface="Trebuchet MS" pitchFamily="34" charset="-120"/>
+              </a:rPr>
+              <a:t>ble</a:t>
+            </a:r>
+            <a:endParaRPr lang="en-US" sz="1400" dirty="0"/>
+          </a:p>
+        </p:txBody>
+      </p:sp>
+      <p:sp>
+        <p:nvSpPr>
+          <p:cNvPr id="36" name="Shape 34"/>
           <p:cNvSpPr/>
           <p:nvPr/>
         </p:nvSpPr>
@@ -31612,7 +31480,7 @@
       </p:sp>
       <p:sp>
         <p:nvSpPr>
-          <p:cNvPr id="31" name="Text 29"/>
+          <p:cNvPr id="37" name="Text 35"/>
           <p:cNvSpPr/>
           <p:nvPr/>
         </p:nvSpPr>
@@ -31651,7 +31519,7 @@
       </p:sp>
       <p:sp>
         <p:nvSpPr>
-          <p:cNvPr id="32" name="Shape 30"/>
+          <p:cNvPr id="38" name="Shape 36"/>
           <p:cNvSpPr/>
           <p:nvPr/>
         </p:nvSpPr>
@@ -31678,13 +31546,13 @@
       </p:sp>
       <p:sp>
         <p:nvSpPr>
-          <p:cNvPr id="33" name="Shape 31"/>
-          <p:cNvSpPr/>
-          <p:nvPr/>
-        </p:nvSpPr>
-        <p:spPr>
-          <a:xfrm>
-            <a:off x="2427732" y="4169664"/>
+          <p:cNvPr id="39" name="Shape 37"/>
+          <p:cNvSpPr/>
+          <p:nvPr/>
+        </p:nvSpPr>
+        <p:spPr>
+          <a:xfrm>
+            <a:off x="2124837" y="4169664"/>
             <a:ext cx="685800" cy="475488"/>
           </a:xfrm>
           <a:prstGeom prst="rect">
@@ -31705,13 +31573,13 @@
       </p:sp>
       <p:sp>
         <p:nvSpPr>
-          <p:cNvPr id="34" name="Text 32"/>
-          <p:cNvSpPr/>
-          <p:nvPr/>
-        </p:nvSpPr>
-        <p:spPr>
-          <a:xfrm>
-            <a:off x="2427732" y="4169664"/>
+          <p:cNvPr id="40" name="Text 38"/>
+          <p:cNvSpPr/>
+          <p:nvPr/>
+        </p:nvSpPr>
+        <p:spPr>
+          <a:xfrm>
+            <a:off x="2124837" y="4169664"/>
             <a:ext cx="685800" cy="475488"/>
           </a:xfrm>
           <a:prstGeom prst="rect">
@@ -31744,13 +31612,13 @@
       </p:sp>
       <p:sp>
         <p:nvSpPr>
-          <p:cNvPr id="35" name="Shape 33"/>
-          <p:cNvSpPr/>
-          <p:nvPr/>
-        </p:nvSpPr>
-        <p:spPr>
-          <a:xfrm>
-            <a:off x="3639312" y="4169664"/>
+          <p:cNvPr id="41" name="Shape 39"/>
+          <p:cNvSpPr/>
+          <p:nvPr/>
+        </p:nvSpPr>
+        <p:spPr>
+          <a:xfrm>
+            <a:off x="3033522" y="4169664"/>
             <a:ext cx="685800" cy="475488"/>
           </a:xfrm>
           <a:prstGeom prst="rect">
@@ -31771,13 +31639,13 @@
       </p:sp>
       <p:sp>
         <p:nvSpPr>
-          <p:cNvPr id="36" name="Text 34"/>
-          <p:cNvSpPr/>
-          <p:nvPr/>
-        </p:nvSpPr>
-        <p:spPr>
-          <a:xfrm>
-            <a:off x="3639312" y="4169664"/>
+          <p:cNvPr id="42" name="Text 40"/>
+          <p:cNvSpPr/>
+          <p:nvPr/>
+        </p:nvSpPr>
+        <p:spPr>
+          <a:xfrm>
+            <a:off x="3033522" y="4169664"/>
             <a:ext cx="685800" cy="475488"/>
           </a:xfrm>
           <a:prstGeom prst="rect">
@@ -31810,13 +31678,13 @@
       </p:sp>
       <p:sp>
         <p:nvSpPr>
-          <p:cNvPr id="37" name="Shape 35"/>
-          <p:cNvSpPr/>
-          <p:nvPr/>
-        </p:nvSpPr>
-        <p:spPr>
-          <a:xfrm>
-            <a:off x="4850892" y="4169664"/>
+          <p:cNvPr id="43" name="Shape 41"/>
+          <p:cNvSpPr/>
+          <p:nvPr/>
+        </p:nvSpPr>
+        <p:spPr>
+          <a:xfrm>
+            <a:off x="3942207" y="4169664"/>
             <a:ext cx="685800" cy="475488"/>
           </a:xfrm>
           <a:prstGeom prst="rect">
@@ -31837,13 +31705,13 @@
       </p:sp>
       <p:sp>
         <p:nvSpPr>
-          <p:cNvPr id="38" name="Text 36"/>
-          <p:cNvSpPr/>
-          <p:nvPr/>
-        </p:nvSpPr>
-        <p:spPr>
-          <a:xfrm>
-            <a:off x="4850892" y="4169664"/>
+          <p:cNvPr id="44" name="Text 42"/>
+          <p:cNvSpPr/>
+          <p:nvPr/>
+        </p:nvSpPr>
+        <p:spPr>
+          <a:xfrm>
+            <a:off x="3942207" y="4169664"/>
             <a:ext cx="685800" cy="475488"/>
           </a:xfrm>
           <a:prstGeom prst="rect">
@@ -31876,13 +31744,13 @@
       </p:sp>
       <p:sp>
         <p:nvSpPr>
-          <p:cNvPr id="39" name="Shape 37"/>
-          <p:cNvSpPr/>
-          <p:nvPr/>
-        </p:nvSpPr>
-        <p:spPr>
-          <a:xfrm>
-            <a:off x="6062472" y="4169664"/>
+          <p:cNvPr id="45" name="Shape 43"/>
+          <p:cNvSpPr/>
+          <p:nvPr/>
+        </p:nvSpPr>
+        <p:spPr>
+          <a:xfrm>
+            <a:off x="4850892" y="4169664"/>
             <a:ext cx="685800" cy="475488"/>
           </a:xfrm>
           <a:prstGeom prst="rect">
@@ -31903,13 +31771,13 @@
       </p:sp>
       <p:sp>
         <p:nvSpPr>
-          <p:cNvPr id="40" name="Text 38"/>
-          <p:cNvSpPr/>
-          <p:nvPr/>
-        </p:nvSpPr>
-        <p:spPr>
-          <a:xfrm>
-            <a:off x="6062472" y="4169664"/>
+          <p:cNvPr id="46" name="Text 44"/>
+          <p:cNvSpPr/>
+          <p:nvPr/>
+        </p:nvSpPr>
+        <p:spPr>
+          <a:xfrm>
+            <a:off x="4850892" y="4169664"/>
             <a:ext cx="685800" cy="475488"/>
           </a:xfrm>
           <a:prstGeom prst="rect">
@@ -31942,13 +31810,13 @@
       </p:sp>
       <p:sp>
         <p:nvSpPr>
-          <p:cNvPr id="41" name="Shape 39"/>
-          <p:cNvSpPr/>
-          <p:nvPr/>
-        </p:nvSpPr>
-        <p:spPr>
-          <a:xfrm>
-            <a:off x="7274052" y="4169664"/>
+          <p:cNvPr id="47" name="Shape 45"/>
+          <p:cNvSpPr/>
+          <p:nvPr/>
+        </p:nvSpPr>
+        <p:spPr>
+          <a:xfrm>
+            <a:off x="5759577" y="4169664"/>
             <a:ext cx="685800" cy="475488"/>
           </a:xfrm>
           <a:prstGeom prst="rect">
@@ -31969,13 +31837,13 @@
       </p:sp>
       <p:sp>
         <p:nvSpPr>
-          <p:cNvPr id="42" name="Text 40"/>
-          <p:cNvSpPr/>
-          <p:nvPr/>
-        </p:nvSpPr>
-        <p:spPr>
-          <a:xfrm>
-            <a:off x="7274052" y="4169664"/>
+          <p:cNvPr id="48" name="Text 46"/>
+          <p:cNvSpPr/>
+          <p:nvPr/>
+        </p:nvSpPr>
+        <p:spPr>
+          <a:xfrm>
+            <a:off x="5759577" y="4169664"/>
             <a:ext cx="685800" cy="475488"/>
           </a:xfrm>
           <a:prstGeom prst="rect">
@@ -32000,7 +31868,139 @@
                 <a:ea typeface="Trebuchet MS" pitchFamily="34" charset="-122"/>
                 <a:cs typeface="Trebuchet MS" pitchFamily="34" charset="-120"/>
               </a:rPr>
-              <a:t>s</a:t>
+              <a:t>a</a:t>
+            </a:r>
+            <a:endParaRPr lang="en-US" sz="900" dirty="0"/>
+          </a:p>
+        </p:txBody>
+      </p:sp>
+      <p:sp>
+        <p:nvSpPr>
+          <p:cNvPr id="49" name="Shape 47"/>
+          <p:cNvSpPr/>
+          <p:nvPr/>
+        </p:nvSpPr>
+        <p:spPr>
+          <a:xfrm>
+            <a:off x="6668262" y="4169664"/>
+            <a:ext cx="685800" cy="475488"/>
+          </a:xfrm>
+          <a:prstGeom prst="rect">
+            <a:avLst>
+              <a:gd name="adj" fmla="val 7692"/>
+            </a:avLst>
+          </a:prstGeom>
+          <a:solidFill>
+            <a:srgbClr val="FFFFFF"/>
+          </a:solidFill>
+          <a:ln w="12700">
+            <a:solidFill>
+              <a:srgbClr val="DB2777"/>
+            </a:solidFill>
+            <a:prstDash val="solid"/>
+          </a:ln>
+        </p:spPr>
+      </p:sp>
+      <p:sp>
+        <p:nvSpPr>
+          <p:cNvPr id="50" name="Text 48"/>
+          <p:cNvSpPr/>
+          <p:nvPr/>
+        </p:nvSpPr>
+        <p:spPr>
+          <a:xfrm>
+            <a:off x="6668262" y="4169664"/>
+            <a:ext cx="685800" cy="475488"/>
+          </a:xfrm>
+          <a:prstGeom prst="rect">
+            <a:avLst/>
+          </a:prstGeom>
+          <a:noFill/>
+          <a:ln/>
+        </p:spPr>
+        <p:txBody>
+          <a:bodyPr wrap="square" lIns="0" tIns="0" rIns="0" bIns="0" rtlCol="0" anchor="ctr"/>
+          <a:lstStyle/>
+          <a:p>
+            <a:pPr algn="ctr" indent="0" marL="0">
+              <a:buNone/>
+            </a:pPr>
+            <a:r>
+              <a:rPr lang="en-US" sz="900" b="1" dirty="0">
+                <a:solidFill>
+                  <a:srgbClr val="9D174D"/>
+                </a:solidFill>
+                <a:latin typeface="Trebuchet MS" pitchFamily="34" charset="0"/>
+                <a:ea typeface="Trebuchet MS" pitchFamily="34" charset="-122"/>
+                <a:cs typeface="Trebuchet MS" pitchFamily="34" charset="-120"/>
+              </a:rPr>
+              <a:t>b</a:t>
+            </a:r>
+            <a:endParaRPr lang="en-US" sz="900" dirty="0"/>
+          </a:p>
+        </p:txBody>
+      </p:sp>
+      <p:sp>
+        <p:nvSpPr>
+          <p:cNvPr id="51" name="Shape 49"/>
+          <p:cNvSpPr/>
+          <p:nvPr/>
+        </p:nvSpPr>
+        <p:spPr>
+          <a:xfrm>
+            <a:off x="7576947" y="4169664"/>
+            <a:ext cx="685800" cy="475488"/>
+          </a:xfrm>
+          <a:prstGeom prst="rect">
+            <a:avLst>
+              <a:gd name="adj" fmla="val 7692"/>
+            </a:avLst>
+          </a:prstGeom>
+          <a:solidFill>
+            <a:srgbClr val="FFFFFF"/>
+          </a:solidFill>
+          <a:ln w="12700">
+            <a:solidFill>
+              <a:srgbClr val="DB2777"/>
+            </a:solidFill>
+            <a:prstDash val="solid"/>
+          </a:ln>
+        </p:spPr>
+      </p:sp>
+      <p:sp>
+        <p:nvSpPr>
+          <p:cNvPr id="52" name="Text 50"/>
+          <p:cNvSpPr/>
+          <p:nvPr/>
+        </p:nvSpPr>
+        <p:spPr>
+          <a:xfrm>
+            <a:off x="7576947" y="4169664"/>
+            <a:ext cx="685800" cy="475488"/>
+          </a:xfrm>
+          <a:prstGeom prst="rect">
+            <a:avLst/>
+          </a:prstGeom>
+          <a:noFill/>
+          <a:ln/>
+        </p:spPr>
+        <p:txBody>
+          <a:bodyPr wrap="square" lIns="0" tIns="0" rIns="0" bIns="0" rtlCol="0" anchor="ctr"/>
+          <a:lstStyle/>
+          <a:p>
+            <a:pPr algn="ctr" indent="0" marL="0">
+              <a:buNone/>
+            </a:pPr>
+            <a:r>
+              <a:rPr lang="en-US" sz="900" b="1" dirty="0">
+                <a:solidFill>
+                  <a:srgbClr val="9D174D"/>
+                </a:solidFill>
+                <a:latin typeface="Trebuchet MS" pitchFamily="34" charset="0"/>
+                <a:ea typeface="Trebuchet MS" pitchFamily="34" charset="-122"/>
+                <a:cs typeface="Trebuchet MS" pitchFamily="34" charset="-120"/>
+              </a:rPr>
+              <a:t>le</a:t>
             </a:r>
             <a:endParaRPr lang="en-US" sz="900" dirty="0"/>
           </a:p>
@@ -32292,7 +32292,7 @@
                 <a:ea typeface="Calibri" pitchFamily="34" charset="-122"/>
                 <a:cs typeface="Calibri" pitchFamily="34" charset="-120"/>
               </a:rPr>
-              <a:t>Word Labs  •  wordlabs.app  •  Root: 'repair' = fix or restore something broken</a:t>
+              <a:t>Word Labs  •  wordlabs.app  •  Root: 'repair' = fix</a:t>
             </a:r>
             <a:endParaRPr lang="en-US" sz="800" dirty="0"/>
           </a:p>
@@ -33461,7 +33461,7 @@
                 <a:ea typeface="Calibri" pitchFamily="34" charset="-122"/>
                 <a:cs typeface="Calibri" pitchFamily="34" charset="-120"/>
               </a:rPr>
-              <a:t>Word Labs  •  wordlabs.app  •  Root: 'repair' = fix or restore something broken</a:t>
+              <a:t>Word Labs  •  wordlabs.app  •  Root: 'repair' = fix</a:t>
             </a:r>
             <a:endParaRPr lang="en-US" sz="800" dirty="0"/>
           </a:p>
@@ -33719,7 +33719,7 @@
             <a:avLst/>
           </a:prstGeom>
           <a:solidFill>
-            <a:srgbClr val="DDD6FE"/>
+            <a:srgbClr val="F8FAFC"/>
           </a:solidFill>
           <a:ln w="12700">
             <a:solidFill>
@@ -33731,14 +33731,39 @@
       </p:sp>
       <p:sp>
         <p:nvSpPr>
-          <p:cNvPr id="18" name="Text 16"/>
-          <p:cNvSpPr/>
-          <p:nvPr/>
-        </p:nvSpPr>
-        <p:spPr>
-          <a:xfrm>
-            <a:off x="365760" y="1563624"/>
-            <a:ext cx="2468880" cy="402336"/>
+          <p:cNvPr id="18" name="Shape 16"/>
+          <p:cNvSpPr/>
+          <p:nvPr/>
+        </p:nvSpPr>
+        <p:spPr>
+          <a:xfrm>
+            <a:off x="2971800" y="1563624"/>
+            <a:ext cx="2834640" cy="402336"/>
+          </a:xfrm>
+          <a:prstGeom prst="rect">
+            <a:avLst/>
+          </a:prstGeom>
+          <a:solidFill>
+            <a:srgbClr val="CCFBF1"/>
+          </a:solidFill>
+          <a:ln w="12700">
+            <a:solidFill>
+              <a:srgbClr val="E2E8F0"/>
+            </a:solidFill>
+            <a:prstDash val="solid"/>
+          </a:ln>
+        </p:spPr>
+      </p:sp>
+      <p:sp>
+        <p:nvSpPr>
+          <p:cNvPr id="19" name="Text 17"/>
+          <p:cNvSpPr/>
+          <p:nvPr/>
+        </p:nvSpPr>
+        <p:spPr>
+          <a:xfrm>
+            <a:off x="2971800" y="1563624"/>
+            <a:ext cx="2834640" cy="402336"/>
           </a:xfrm>
           <a:prstGeom prst="rect">
             <a:avLst/>
@@ -33756,13 +33781,13 @@
             <a:r>
               <a:rPr lang="en-US" sz="1300" b="1" dirty="0">
                 <a:solidFill>
-                  <a:srgbClr val="4C1D95"/>
+                  <a:srgbClr val="0F766E"/>
                 </a:solidFill>
                 <a:latin typeface="Trebuchet MS" pitchFamily="34" charset="0"/>
                 <a:ea typeface="Trebuchet MS" pitchFamily="34" charset="-122"/>
                 <a:cs typeface="Trebuchet MS" pitchFamily="34" charset="-120"/>
               </a:rPr>
-              <a:t>ir-</a:t>
+              <a:t>repair</a:t>
             </a:r>
             <a:endParaRPr lang="en-US" sz="1300" dirty="0"/>
           </a:p>
@@ -33770,20 +33795,20 @@
       </p:sp>
       <p:sp>
         <p:nvSpPr>
-          <p:cNvPr id="19" name="Shape 17"/>
-          <p:cNvSpPr/>
-          <p:nvPr/>
-        </p:nvSpPr>
-        <p:spPr>
-          <a:xfrm>
-            <a:off x="2971800" y="1563624"/>
+          <p:cNvPr id="20" name="Shape 18"/>
+          <p:cNvSpPr/>
+          <p:nvPr/>
+        </p:nvSpPr>
+        <p:spPr>
+          <a:xfrm>
+            <a:off x="5943600" y="1563624"/>
             <a:ext cx="2834640" cy="402336"/>
           </a:xfrm>
           <a:prstGeom prst="rect">
             <a:avLst/>
           </a:prstGeom>
           <a:solidFill>
-            <a:srgbClr val="CCFBF1"/>
+            <a:srgbClr val="FCE7F3"/>
           </a:solidFill>
           <a:ln w="12700">
             <a:solidFill>
@@ -33795,13 +33820,13 @@
       </p:sp>
       <p:sp>
         <p:nvSpPr>
-          <p:cNvPr id="20" name="Text 18"/>
-          <p:cNvSpPr/>
-          <p:nvPr/>
-        </p:nvSpPr>
-        <p:spPr>
-          <a:xfrm>
-            <a:off x="2971800" y="1563624"/>
+          <p:cNvPr id="21" name="Text 19"/>
+          <p:cNvSpPr/>
+          <p:nvPr/>
+        </p:nvSpPr>
+        <p:spPr>
+          <a:xfrm>
+            <a:off x="5943600" y="1563624"/>
             <a:ext cx="2834640" cy="402336"/>
           </a:xfrm>
           <a:prstGeom prst="rect">
@@ -33820,13 +33845,13 @@
             <a:r>
               <a:rPr lang="en-US" sz="1300" b="1" dirty="0">
                 <a:solidFill>
-                  <a:srgbClr val="0F766E"/>
+                  <a:srgbClr val="9D174D"/>
                 </a:solidFill>
                 <a:latin typeface="Trebuchet MS" pitchFamily="34" charset="0"/>
                 <a:ea typeface="Trebuchet MS" pitchFamily="34" charset="-122"/>
                 <a:cs typeface="Trebuchet MS" pitchFamily="34" charset="-120"/>
               </a:rPr>
-              <a:t>repair</a:t>
+              <a:t>-able</a:t>
             </a:r>
             <a:endParaRPr lang="en-US" sz="1300" dirty="0"/>
           </a:p>
@@ -33834,19 +33859,69 @@
       </p:sp>
       <p:sp>
         <p:nvSpPr>
-          <p:cNvPr id="21" name="Shape 19"/>
-          <p:cNvSpPr/>
-          <p:nvPr/>
-        </p:nvSpPr>
-        <p:spPr>
-          <a:xfrm>
-            <a:off x="5943600" y="1563624"/>
+          <p:cNvPr id="22" name="Shape 20"/>
+          <p:cNvSpPr/>
+          <p:nvPr/>
+        </p:nvSpPr>
+        <p:spPr>
+          <a:xfrm>
+            <a:off x="365760" y="1984248"/>
+            <a:ext cx="2468880" cy="402336"/>
+          </a:xfrm>
+          <a:prstGeom prst="rect">
+            <a:avLst/>
+          </a:prstGeom>
+          <a:solidFill>
+            <a:srgbClr val="F1F5F9"/>
+          </a:solidFill>
+          <a:ln w="12700">
+            <a:solidFill>
+              <a:srgbClr val="E2E8F0"/>
+            </a:solidFill>
+            <a:prstDash val="solid"/>
+          </a:ln>
+        </p:spPr>
+      </p:sp>
+      <p:sp>
+        <p:nvSpPr>
+          <p:cNvPr id="23" name="Shape 21"/>
+          <p:cNvSpPr/>
+          <p:nvPr/>
+        </p:nvSpPr>
+        <p:spPr>
+          <a:xfrm>
+            <a:off x="2971800" y="1984248"/>
             <a:ext cx="2834640" cy="402336"/>
           </a:xfrm>
           <a:prstGeom prst="rect">
             <a:avLst/>
           </a:prstGeom>
           <a:solidFill>
+            <a:srgbClr val="F1F5F9"/>
+          </a:solidFill>
+          <a:ln w="12700">
+            <a:solidFill>
+              <a:srgbClr val="E2E8F0"/>
+            </a:solidFill>
+            <a:prstDash val="solid"/>
+          </a:ln>
+        </p:spPr>
+      </p:sp>
+      <p:sp>
+        <p:nvSpPr>
+          <p:cNvPr id="24" name="Shape 22"/>
+          <p:cNvSpPr/>
+          <p:nvPr/>
+        </p:nvSpPr>
+        <p:spPr>
+          <a:xfrm>
+            <a:off x="5943600" y="1984248"/>
+            <a:ext cx="2834640" cy="402336"/>
+          </a:xfrm>
+          <a:prstGeom prst="rect">
+            <a:avLst/>
+          </a:prstGeom>
+          <a:solidFill>
             <a:srgbClr val="FCE7F3"/>
           </a:solidFill>
           <a:ln w="12700">
@@ -33859,13 +33934,13 @@
       </p:sp>
       <p:sp>
         <p:nvSpPr>
-          <p:cNvPr id="22" name="Text 20"/>
-          <p:cNvSpPr/>
-          <p:nvPr/>
-        </p:nvSpPr>
-        <p:spPr>
-          <a:xfrm>
-            <a:off x="5943600" y="1563624"/>
+          <p:cNvPr id="25" name="Text 23"/>
+          <p:cNvSpPr/>
+          <p:nvPr/>
+        </p:nvSpPr>
+        <p:spPr>
+          <a:xfrm>
+            <a:off x="5943600" y="1984248"/>
             <a:ext cx="2834640" cy="402336"/>
           </a:xfrm>
           <a:prstGeom prst="rect">
@@ -33898,20 +33973,20 @@
       </p:sp>
       <p:sp>
         <p:nvSpPr>
-          <p:cNvPr id="23" name="Shape 21"/>
-          <p:cNvSpPr/>
-          <p:nvPr/>
-        </p:nvSpPr>
-        <p:spPr>
-          <a:xfrm>
-            <a:off x="365760" y="1984248"/>
+          <p:cNvPr id="26" name="Shape 24"/>
+          <p:cNvSpPr/>
+          <p:nvPr/>
+        </p:nvSpPr>
+        <p:spPr>
+          <a:xfrm>
+            <a:off x="365760" y="2404872"/>
             <a:ext cx="2468880" cy="402336"/>
           </a:xfrm>
           <a:prstGeom prst="rect">
             <a:avLst/>
           </a:prstGeom>
           <a:solidFill>
-            <a:srgbClr val="DDD6FE"/>
+            <a:srgbClr val="F8FAFC"/>
           </a:solidFill>
           <a:ln w="12700">
             <a:solidFill>
@@ -33923,14 +33998,64 @@
       </p:sp>
       <p:sp>
         <p:nvSpPr>
-          <p:cNvPr id="24" name="Text 22"/>
-          <p:cNvSpPr/>
-          <p:nvPr/>
-        </p:nvSpPr>
-        <p:spPr>
-          <a:xfrm>
-            <a:off x="365760" y="1984248"/>
-            <a:ext cx="2468880" cy="402336"/>
+          <p:cNvPr id="27" name="Shape 25"/>
+          <p:cNvSpPr/>
+          <p:nvPr/>
+        </p:nvSpPr>
+        <p:spPr>
+          <a:xfrm>
+            <a:off x="2971800" y="2404872"/>
+            <a:ext cx="2834640" cy="402336"/>
+          </a:xfrm>
+          <a:prstGeom prst="rect">
+            <a:avLst/>
+          </a:prstGeom>
+          <a:solidFill>
+            <a:srgbClr val="F8FAFC"/>
+          </a:solidFill>
+          <a:ln w="12700">
+            <a:solidFill>
+              <a:srgbClr val="E2E8F0"/>
+            </a:solidFill>
+            <a:prstDash val="solid"/>
+          </a:ln>
+        </p:spPr>
+      </p:sp>
+      <p:sp>
+        <p:nvSpPr>
+          <p:cNvPr id="28" name="Shape 26"/>
+          <p:cNvSpPr/>
+          <p:nvPr/>
+        </p:nvSpPr>
+        <p:spPr>
+          <a:xfrm>
+            <a:off x="5943600" y="2404872"/>
+            <a:ext cx="2834640" cy="402336"/>
+          </a:xfrm>
+          <a:prstGeom prst="rect">
+            <a:avLst/>
+          </a:prstGeom>
+          <a:solidFill>
+            <a:srgbClr val="FCE7F3"/>
+          </a:solidFill>
+          <a:ln w="12700">
+            <a:solidFill>
+              <a:srgbClr val="E2E8F0"/>
+            </a:solidFill>
+            <a:prstDash val="solid"/>
+          </a:ln>
+        </p:spPr>
+      </p:sp>
+      <p:sp>
+        <p:nvSpPr>
+          <p:cNvPr id="29" name="Text 27"/>
+          <p:cNvSpPr/>
+          <p:nvPr/>
+        </p:nvSpPr>
+        <p:spPr>
+          <a:xfrm>
+            <a:off x="5943600" y="2404872"/>
+            <a:ext cx="2834640" cy="402336"/>
           </a:xfrm>
           <a:prstGeom prst="rect">
             <a:avLst/>
@@ -33948,13 +34073,13 @@
             <a:r>
               <a:rPr lang="en-US" sz="1300" b="1" dirty="0">
                 <a:solidFill>
-                  <a:srgbClr val="4C1D95"/>
+                  <a:srgbClr val="9D174D"/>
                 </a:solidFill>
                 <a:latin typeface="Trebuchet MS" pitchFamily="34" charset="0"/>
                 <a:ea typeface="Trebuchet MS" pitchFamily="34" charset="-122"/>
                 <a:cs typeface="Trebuchet MS" pitchFamily="34" charset="-120"/>
               </a:rPr>
-              <a:t>un-</a:t>
+              <a:t>-er</a:t>
             </a:r>
             <a:endParaRPr lang="en-US" sz="1300" dirty="0"/>
           </a:p>
@@ -33962,13 +34087,38 @@
       </p:sp>
       <p:sp>
         <p:nvSpPr>
-          <p:cNvPr id="25" name="Shape 23"/>
-          <p:cNvSpPr/>
-          <p:nvPr/>
-        </p:nvSpPr>
-        <p:spPr>
-          <a:xfrm>
-            <a:off x="2971800" y="1984248"/>
+          <p:cNvPr id="30" name="Shape 28"/>
+          <p:cNvSpPr/>
+          <p:nvPr/>
+        </p:nvSpPr>
+        <p:spPr>
+          <a:xfrm>
+            <a:off x="365760" y="2825496"/>
+            <a:ext cx="2468880" cy="402336"/>
+          </a:xfrm>
+          <a:prstGeom prst="rect">
+            <a:avLst/>
+          </a:prstGeom>
+          <a:solidFill>
+            <a:srgbClr val="F1F5F9"/>
+          </a:solidFill>
+          <a:ln w="12700">
+            <a:solidFill>
+              <a:srgbClr val="E2E8F0"/>
+            </a:solidFill>
+            <a:prstDash val="solid"/>
+          </a:ln>
+        </p:spPr>
+      </p:sp>
+      <p:sp>
+        <p:nvSpPr>
+          <p:cNvPr id="31" name="Shape 29"/>
+          <p:cNvSpPr/>
+          <p:nvPr/>
+        </p:nvSpPr>
+        <p:spPr>
+          <a:xfrm>
+            <a:off x="2971800" y="2825496"/>
             <a:ext cx="2834640" cy="402336"/>
           </a:xfrm>
           <a:prstGeom prst="rect">
@@ -33987,13 +34137,13 @@
       </p:sp>
       <p:sp>
         <p:nvSpPr>
-          <p:cNvPr id="26" name="Shape 24"/>
-          <p:cNvSpPr/>
-          <p:nvPr/>
-        </p:nvSpPr>
-        <p:spPr>
-          <a:xfrm>
-            <a:off x="5943600" y="1984248"/>
+          <p:cNvPr id="32" name="Shape 30"/>
+          <p:cNvSpPr/>
+          <p:nvPr/>
+        </p:nvSpPr>
+        <p:spPr>
+          <a:xfrm>
+            <a:off x="5943600" y="2825496"/>
             <a:ext cx="2834640" cy="402336"/>
           </a:xfrm>
           <a:prstGeom prst="rect">
@@ -34012,13 +34162,13 @@
       </p:sp>
       <p:sp>
         <p:nvSpPr>
-          <p:cNvPr id="27" name="Text 25"/>
-          <p:cNvSpPr/>
-          <p:nvPr/>
-        </p:nvSpPr>
-        <p:spPr>
-          <a:xfrm>
-            <a:off x="5943600" y="1984248"/>
+          <p:cNvPr id="33" name="Text 31"/>
+          <p:cNvSpPr/>
+          <p:nvPr/>
+        </p:nvSpPr>
+        <p:spPr>
+          <a:xfrm>
+            <a:off x="5943600" y="2825496"/>
             <a:ext cx="2834640" cy="402336"/>
           </a:xfrm>
           <a:prstGeom prst="rect">
@@ -34051,20 +34201,20 @@
       </p:sp>
       <p:sp>
         <p:nvSpPr>
-          <p:cNvPr id="28" name="Shape 26"/>
-          <p:cNvSpPr/>
-          <p:nvPr/>
-        </p:nvSpPr>
-        <p:spPr>
-          <a:xfrm>
-            <a:off x="365760" y="2404872"/>
+          <p:cNvPr id="34" name="Shape 32"/>
+          <p:cNvSpPr/>
+          <p:nvPr/>
+        </p:nvSpPr>
+        <p:spPr>
+          <a:xfrm>
+            <a:off x="365760" y="3246120"/>
             <a:ext cx="2468880" cy="402336"/>
           </a:xfrm>
           <a:prstGeom prst="rect">
             <a:avLst/>
           </a:prstGeom>
           <a:solidFill>
-            <a:srgbClr val="DDD6FE"/>
+            <a:srgbClr val="F8FAFC"/>
           </a:solidFill>
           <a:ln w="12700">
             <a:solidFill>
@@ -34076,14 +34226,64 @@
       </p:sp>
       <p:sp>
         <p:nvSpPr>
-          <p:cNvPr id="29" name="Text 27"/>
-          <p:cNvSpPr/>
-          <p:nvPr/>
-        </p:nvSpPr>
-        <p:spPr>
-          <a:xfrm>
-            <a:off x="365760" y="2404872"/>
-            <a:ext cx="2468880" cy="402336"/>
+          <p:cNvPr id="35" name="Shape 33"/>
+          <p:cNvSpPr/>
+          <p:nvPr/>
+        </p:nvSpPr>
+        <p:spPr>
+          <a:xfrm>
+            <a:off x="2971800" y="3246120"/>
+            <a:ext cx="2834640" cy="402336"/>
+          </a:xfrm>
+          <a:prstGeom prst="rect">
+            <a:avLst/>
+          </a:prstGeom>
+          <a:solidFill>
+            <a:srgbClr val="F8FAFC"/>
+          </a:solidFill>
+          <a:ln w="12700">
+            <a:solidFill>
+              <a:srgbClr val="E2E8F0"/>
+            </a:solidFill>
+            <a:prstDash val="solid"/>
+          </a:ln>
+        </p:spPr>
+      </p:sp>
+      <p:sp>
+        <p:nvSpPr>
+          <p:cNvPr id="36" name="Shape 34"/>
+          <p:cNvSpPr/>
+          <p:nvPr/>
+        </p:nvSpPr>
+        <p:spPr>
+          <a:xfrm>
+            <a:off x="5943600" y="3246120"/>
+            <a:ext cx="2834640" cy="402336"/>
+          </a:xfrm>
+          <a:prstGeom prst="rect">
+            <a:avLst/>
+          </a:prstGeom>
+          <a:solidFill>
+            <a:srgbClr val="FCE7F3"/>
+          </a:solidFill>
+          <a:ln w="12700">
+            <a:solidFill>
+              <a:srgbClr val="E2E8F0"/>
+            </a:solidFill>
+            <a:prstDash val="solid"/>
+          </a:ln>
+        </p:spPr>
+      </p:sp>
+      <p:sp>
+        <p:nvSpPr>
+          <p:cNvPr id="37" name="Text 35"/>
+          <p:cNvSpPr/>
+          <p:nvPr/>
+        </p:nvSpPr>
+        <p:spPr>
+          <a:xfrm>
+            <a:off x="5943600" y="3246120"/>
+            <a:ext cx="2834640" cy="402336"/>
           </a:xfrm>
           <a:prstGeom prst="rect">
             <a:avLst/>
@@ -34101,13 +34301,13 @@
             <a:r>
               <a:rPr lang="en-US" sz="1300" b="1" dirty="0">
                 <a:solidFill>
-                  <a:srgbClr val="4C1D95"/>
+                  <a:srgbClr val="9D174D"/>
                 </a:solidFill>
                 <a:latin typeface="Trebuchet MS" pitchFamily="34" charset="0"/>
                 <a:ea typeface="Trebuchet MS" pitchFamily="34" charset="-122"/>
                 <a:cs typeface="Trebuchet MS" pitchFamily="34" charset="-120"/>
               </a:rPr>
-              <a:t>re-</a:t>
+              <a:t>-s</a:t>
             </a:r>
             <a:endParaRPr lang="en-US" sz="1300" dirty="0"/>
           </a:p>
@@ -34115,64 +34315,14 @@
       </p:sp>
       <p:sp>
         <p:nvSpPr>
-          <p:cNvPr id="30" name="Shape 28"/>
-          <p:cNvSpPr/>
-          <p:nvPr/>
-        </p:nvSpPr>
-        <p:spPr>
-          <a:xfrm>
-            <a:off x="2971800" y="2404872"/>
-            <a:ext cx="2834640" cy="402336"/>
-          </a:xfrm>
-          <a:prstGeom prst="rect">
-            <a:avLst/>
-          </a:prstGeom>
-          <a:solidFill>
-            <a:srgbClr val="F8FAFC"/>
-          </a:solidFill>
-          <a:ln w="12700">
-            <a:solidFill>
-              <a:srgbClr val="E2E8F0"/>
-            </a:solidFill>
-            <a:prstDash val="solid"/>
-          </a:ln>
-        </p:spPr>
-      </p:sp>
-      <p:sp>
-        <p:nvSpPr>
-          <p:cNvPr id="31" name="Shape 29"/>
-          <p:cNvSpPr/>
-          <p:nvPr/>
-        </p:nvSpPr>
-        <p:spPr>
-          <a:xfrm>
-            <a:off x="5943600" y="2404872"/>
-            <a:ext cx="2834640" cy="402336"/>
-          </a:xfrm>
-          <a:prstGeom prst="rect">
-            <a:avLst/>
-          </a:prstGeom>
-          <a:solidFill>
-            <a:srgbClr val="FCE7F3"/>
-          </a:solidFill>
-          <a:ln w="12700">
-            <a:solidFill>
-              <a:srgbClr val="E2E8F0"/>
-            </a:solidFill>
-            <a:prstDash val="solid"/>
-          </a:ln>
-        </p:spPr>
-      </p:sp>
-      <p:sp>
-        <p:nvSpPr>
-          <p:cNvPr id="32" name="Text 30"/>
-          <p:cNvSpPr/>
-          <p:nvPr/>
-        </p:nvSpPr>
-        <p:spPr>
-          <a:xfrm>
-            <a:off x="5943600" y="2404872"/>
-            <a:ext cx="2834640" cy="402336"/>
+          <p:cNvPr id="38" name="Text 36"/>
+          <p:cNvSpPr/>
+          <p:nvPr/>
+        </p:nvSpPr>
+        <p:spPr>
+          <a:xfrm>
+            <a:off x="365760" y="3611880"/>
+            <a:ext cx="1828800" cy="347472"/>
           </a:xfrm>
           <a:prstGeom prst="rect">
             <a:avLst/>
@@ -34184,59 +34334,61 @@
           <a:bodyPr wrap="square" lIns="0" tIns="0" rIns="0" bIns="0" rtlCol="0" anchor="ctr"/>
           <a:lstStyle/>
           <a:p>
-            <a:pPr algn="ctr" indent="0" marL="0">
-              <a:buNone/>
-            </a:pPr>
-            <a:r>
-              <a:rPr lang="en-US" sz="1300" b="1" dirty="0">
-                <a:solidFill>
-                  <a:srgbClr val="9D174D"/>
+            <a:pPr algn="l" indent="0" marL="0">
+              <a:buNone/>
+            </a:pPr>
+            <a:r>
+              <a:rPr lang="en-US" sz="1200" b="1" dirty="0">
+                <a:solidFill>
+                  <a:srgbClr val="0F172A"/>
                 </a:solidFill>
                 <a:latin typeface="Trebuchet MS" pitchFamily="34" charset="0"/>
                 <a:ea typeface="Trebuchet MS" pitchFamily="34" charset="-122"/>
                 <a:cs typeface="Trebuchet MS" pitchFamily="34" charset="-120"/>
               </a:rPr>
-              <a:t>-er</a:t>
-            </a:r>
-            <a:endParaRPr lang="en-US" sz="1300" dirty="0"/>
-          </a:p>
-        </p:txBody>
-      </p:sp>
-      <p:sp>
-        <p:nvSpPr>
-          <p:cNvPr id="33" name="Shape 31"/>
-          <p:cNvSpPr/>
-          <p:nvPr/>
-        </p:nvSpPr>
-        <p:spPr>
-          <a:xfrm>
-            <a:off x="365760" y="2825496"/>
-            <a:ext cx="2468880" cy="402336"/>
-          </a:xfrm>
-          <a:prstGeom prst="rect">
-            <a:avLst/>
-          </a:prstGeom>
-          <a:solidFill>
-            <a:srgbClr val="DDD6FE"/>
-          </a:solidFill>
-          <a:ln w="12700">
-            <a:solidFill>
-              <a:srgbClr val="E2E8F0"/>
-            </a:solidFill>
-            <a:prstDash val="solid"/>
-          </a:ln>
-        </p:spPr>
-      </p:sp>
-      <p:sp>
-        <p:nvSpPr>
-          <p:cNvPr id="34" name="Text 32"/>
-          <p:cNvSpPr/>
-          <p:nvPr/>
-        </p:nvSpPr>
-        <p:spPr>
-          <a:xfrm>
-            <a:off x="365760" y="2825496"/>
-            <a:ext cx="2468880" cy="402336"/>
+              <a:t>Sample words:</a:t>
+            </a:r>
+            <a:endParaRPr lang="en-US" sz="1200" dirty="0"/>
+          </a:p>
+        </p:txBody>
+      </p:sp>
+      <p:sp>
+        <p:nvSpPr>
+          <p:cNvPr id="39" name="Shape 37"/>
+          <p:cNvSpPr/>
+          <p:nvPr/>
+        </p:nvSpPr>
+        <p:spPr>
+          <a:xfrm>
+            <a:off x="365760" y="4023360"/>
+            <a:ext cx="2011680" cy="402336"/>
+          </a:xfrm>
+          <a:prstGeom prst="rect">
+            <a:avLst>
+              <a:gd name="adj" fmla="val 13636"/>
+            </a:avLst>
+          </a:prstGeom>
+          <a:solidFill>
+            <a:srgbClr val="EEF2FF"/>
+          </a:solidFill>
+          <a:ln w="12700">
+            <a:solidFill>
+              <a:srgbClr val="6366F1"/>
+            </a:solidFill>
+            <a:prstDash val="solid"/>
+          </a:ln>
+        </p:spPr>
+      </p:sp>
+      <p:sp>
+        <p:nvSpPr>
+          <p:cNvPr id="40" name="Text 38"/>
+          <p:cNvSpPr/>
+          <p:nvPr/>
+        </p:nvSpPr>
+        <p:spPr>
+          <a:xfrm>
+            <a:off x="365760" y="4023360"/>
+            <a:ext cx="2011680" cy="402336"/>
           </a:xfrm>
           <a:prstGeom prst="rect">
             <a:avLst/>
@@ -34252,824 +34404,15 @@
               <a:buNone/>
             </a:pPr>
             <a:r>
-              <a:rPr lang="en-US" sz="1300" b="1" dirty="0">
-                <a:solidFill>
-                  <a:srgbClr val="4C1D95"/>
+              <a:rPr lang="en-US" sz="1200" b="1" dirty="0">
+                <a:solidFill>
+                  <a:srgbClr val="4338CA"/>
                 </a:solidFill>
                 <a:latin typeface="Trebuchet MS" pitchFamily="34" charset="0"/>
                 <a:ea typeface="Trebuchet MS" pitchFamily="34" charset="-122"/>
                 <a:cs typeface="Trebuchet MS" pitchFamily="34" charset="-120"/>
               </a:rPr>
-              <a:t>pre-</a:t>
-            </a:r>
-            <a:endParaRPr lang="en-US" sz="1300" dirty="0"/>
-          </a:p>
-        </p:txBody>
-      </p:sp>
-      <p:sp>
-        <p:nvSpPr>
-          <p:cNvPr id="35" name="Shape 33"/>
-          <p:cNvSpPr/>
-          <p:nvPr/>
-        </p:nvSpPr>
-        <p:spPr>
-          <a:xfrm>
-            <a:off x="2971800" y="2825496"/>
-            <a:ext cx="2834640" cy="402336"/>
-          </a:xfrm>
-          <a:prstGeom prst="rect">
-            <a:avLst/>
-          </a:prstGeom>
-          <a:solidFill>
-            <a:srgbClr val="F1F5F9"/>
-          </a:solidFill>
-          <a:ln w="12700">
-            <a:solidFill>
-              <a:srgbClr val="E2E8F0"/>
-            </a:solidFill>
-            <a:prstDash val="solid"/>
-          </a:ln>
-        </p:spPr>
-      </p:sp>
-      <p:sp>
-        <p:nvSpPr>
-          <p:cNvPr id="36" name="Shape 34"/>
-          <p:cNvSpPr/>
-          <p:nvPr/>
-        </p:nvSpPr>
-        <p:spPr>
-          <a:xfrm>
-            <a:off x="5943600" y="2825496"/>
-            <a:ext cx="2834640" cy="402336"/>
-          </a:xfrm>
-          <a:prstGeom prst="rect">
-            <a:avLst/>
-          </a:prstGeom>
-          <a:solidFill>
-            <a:srgbClr val="FCE7F3"/>
-          </a:solidFill>
-          <a:ln w="12700">
-            <a:solidFill>
-              <a:srgbClr val="E2E8F0"/>
-            </a:solidFill>
-            <a:prstDash val="solid"/>
-          </a:ln>
-        </p:spPr>
-      </p:sp>
-      <p:sp>
-        <p:nvSpPr>
-          <p:cNvPr id="37" name="Text 35"/>
-          <p:cNvSpPr/>
-          <p:nvPr/>
-        </p:nvSpPr>
-        <p:spPr>
-          <a:xfrm>
-            <a:off x="5943600" y="2825496"/>
-            <a:ext cx="2834640" cy="402336"/>
-          </a:xfrm>
-          <a:prstGeom prst="rect">
-            <a:avLst/>
-          </a:prstGeom>
-          <a:noFill/>
-          <a:ln/>
-        </p:spPr>
-        <p:txBody>
-          <a:bodyPr wrap="square" lIns="0" tIns="0" rIns="0" bIns="0" rtlCol="0" anchor="ctr"/>
-          <a:lstStyle/>
-          <a:p>
-            <a:pPr algn="ctr" indent="0" marL="0">
-              <a:buNone/>
-            </a:pPr>
-            <a:r>
-              <a:rPr lang="en-US" sz="1300" b="1" dirty="0">
-                <a:solidFill>
-                  <a:srgbClr val="9D174D"/>
-                </a:solidFill>
-                <a:latin typeface="Trebuchet MS" pitchFamily="34" charset="0"/>
-                <a:ea typeface="Trebuchet MS" pitchFamily="34" charset="-122"/>
-                <a:cs typeface="Trebuchet MS" pitchFamily="34" charset="-120"/>
-              </a:rPr>
-              <a:t>-able</a:t>
-            </a:r>
-            <a:endParaRPr lang="en-US" sz="1300" dirty="0"/>
-          </a:p>
-        </p:txBody>
-      </p:sp>
-      <p:sp>
-        <p:nvSpPr>
-          <p:cNvPr id="38" name="Shape 36"/>
-          <p:cNvSpPr/>
-          <p:nvPr/>
-        </p:nvSpPr>
-        <p:spPr>
-          <a:xfrm>
-            <a:off x="365760" y="3246120"/>
-            <a:ext cx="2468880" cy="402336"/>
-          </a:xfrm>
-          <a:prstGeom prst="rect">
-            <a:avLst/>
-          </a:prstGeom>
-          <a:solidFill>
-            <a:srgbClr val="DDD6FE"/>
-          </a:solidFill>
-          <a:ln w="12700">
-            <a:solidFill>
-              <a:srgbClr val="E2E8F0"/>
-            </a:solidFill>
-            <a:prstDash val="solid"/>
-          </a:ln>
-        </p:spPr>
-      </p:sp>
-      <p:sp>
-        <p:nvSpPr>
-          <p:cNvPr id="39" name="Text 37"/>
-          <p:cNvSpPr/>
-          <p:nvPr/>
-        </p:nvSpPr>
-        <p:spPr>
-          <a:xfrm>
-            <a:off x="365760" y="3246120"/>
-            <a:ext cx="2468880" cy="402336"/>
-          </a:xfrm>
-          <a:prstGeom prst="rect">
-            <a:avLst/>
-          </a:prstGeom>
-          <a:noFill/>
-          <a:ln/>
-        </p:spPr>
-        <p:txBody>
-          <a:bodyPr wrap="square" lIns="0" tIns="0" rIns="0" bIns="0" rtlCol="0" anchor="ctr"/>
-          <a:lstStyle/>
-          <a:p>
-            <a:pPr algn="ctr" indent="0" marL="0">
-              <a:buNone/>
-            </a:pPr>
-            <a:r>
-              <a:rPr lang="en-US" sz="1300" b="1" dirty="0">
-                <a:solidFill>
-                  <a:srgbClr val="4C1D95"/>
-                </a:solidFill>
-                <a:latin typeface="Trebuchet MS" pitchFamily="34" charset="0"/>
-                <a:ea typeface="Trebuchet MS" pitchFamily="34" charset="-122"/>
-                <a:cs typeface="Trebuchet MS" pitchFamily="34" charset="-120"/>
-              </a:rPr>
-              <a:t>mis-</a:t>
-            </a:r>
-            <a:endParaRPr lang="en-US" sz="1300" dirty="0"/>
-          </a:p>
-        </p:txBody>
-      </p:sp>
-      <p:sp>
-        <p:nvSpPr>
-          <p:cNvPr id="40" name="Shape 38"/>
-          <p:cNvSpPr/>
-          <p:nvPr/>
-        </p:nvSpPr>
-        <p:spPr>
-          <a:xfrm>
-            <a:off x="2971800" y="3246120"/>
-            <a:ext cx="2834640" cy="402336"/>
-          </a:xfrm>
-          <a:prstGeom prst="rect">
-            <a:avLst/>
-          </a:prstGeom>
-          <a:solidFill>
-            <a:srgbClr val="F8FAFC"/>
-          </a:solidFill>
-          <a:ln w="12700">
-            <a:solidFill>
-              <a:srgbClr val="E2E8F0"/>
-            </a:solidFill>
-            <a:prstDash val="solid"/>
-          </a:ln>
-        </p:spPr>
-      </p:sp>
-      <p:sp>
-        <p:nvSpPr>
-          <p:cNvPr id="41" name="Shape 39"/>
-          <p:cNvSpPr/>
-          <p:nvPr/>
-        </p:nvSpPr>
-        <p:spPr>
-          <a:xfrm>
-            <a:off x="5943600" y="3246120"/>
-            <a:ext cx="2834640" cy="402336"/>
-          </a:xfrm>
-          <a:prstGeom prst="rect">
-            <a:avLst/>
-          </a:prstGeom>
-          <a:solidFill>
-            <a:srgbClr val="FCE7F3"/>
-          </a:solidFill>
-          <a:ln w="12700">
-            <a:solidFill>
-              <a:srgbClr val="E2E8F0"/>
-            </a:solidFill>
-            <a:prstDash val="solid"/>
-          </a:ln>
-        </p:spPr>
-      </p:sp>
-      <p:sp>
-        <p:nvSpPr>
-          <p:cNvPr id="42" name="Text 40"/>
-          <p:cNvSpPr/>
-          <p:nvPr/>
-        </p:nvSpPr>
-        <p:spPr>
-          <a:xfrm>
-            <a:off x="5943600" y="3246120"/>
-            <a:ext cx="2834640" cy="402336"/>
-          </a:xfrm>
-          <a:prstGeom prst="rect">
-            <a:avLst/>
-          </a:prstGeom>
-          <a:noFill/>
-          <a:ln/>
-        </p:spPr>
-        <p:txBody>
-          <a:bodyPr wrap="square" lIns="0" tIns="0" rIns="0" bIns="0" rtlCol="0" anchor="ctr"/>
-          <a:lstStyle/>
-          <a:p>
-            <a:pPr algn="ctr" indent="0" marL="0">
-              <a:buNone/>
-            </a:pPr>
-            <a:r>
-              <a:rPr lang="en-US" sz="1300" b="1" dirty="0">
-                <a:solidFill>
-                  <a:srgbClr val="9D174D"/>
-                </a:solidFill>
-                <a:latin typeface="Trebuchet MS" pitchFamily="34" charset="0"/>
-                <a:ea typeface="Trebuchet MS" pitchFamily="34" charset="-122"/>
-                <a:cs typeface="Trebuchet MS" pitchFamily="34" charset="-120"/>
-              </a:rPr>
-              <a:t>-s</a:t>
-            </a:r>
-            <a:endParaRPr lang="en-US" sz="1300" dirty="0"/>
-          </a:p>
-        </p:txBody>
-      </p:sp>
-      <p:sp>
-        <p:nvSpPr>
-          <p:cNvPr id="43" name="Text 41"/>
-          <p:cNvSpPr/>
-          <p:nvPr/>
-        </p:nvSpPr>
-        <p:spPr>
-          <a:xfrm>
-            <a:off x="365760" y="3611880"/>
-            <a:ext cx="1828800" cy="347472"/>
-          </a:xfrm>
-          <a:prstGeom prst="rect">
-            <a:avLst/>
-          </a:prstGeom>
-          <a:noFill/>
-          <a:ln/>
-        </p:spPr>
-        <p:txBody>
-          <a:bodyPr wrap="square" lIns="0" tIns="0" rIns="0" bIns="0" rtlCol="0" anchor="ctr"/>
-          <a:lstStyle/>
-          <a:p>
-            <a:pPr algn="l" indent="0" marL="0">
-              <a:buNone/>
-            </a:pPr>
-            <a:r>
-              <a:rPr lang="en-US" sz="1200" b="1" dirty="0">
-                <a:solidFill>
-                  <a:srgbClr val="0F172A"/>
-                </a:solidFill>
-                <a:latin typeface="Trebuchet MS" pitchFamily="34" charset="0"/>
-                <a:ea typeface="Trebuchet MS" pitchFamily="34" charset="-122"/>
-                <a:cs typeface="Trebuchet MS" pitchFamily="34" charset="-120"/>
-              </a:rPr>
-              <a:t>Sample words:</a:t>
-            </a:r>
-            <a:endParaRPr lang="en-US" sz="1200" dirty="0"/>
-          </a:p>
-        </p:txBody>
-      </p:sp>
-      <p:sp>
-        <p:nvSpPr>
-          <p:cNvPr id="44" name="Shape 42"/>
-          <p:cNvSpPr/>
-          <p:nvPr/>
-        </p:nvSpPr>
-        <p:spPr>
-          <a:xfrm>
-            <a:off x="365760" y="4023360"/>
-            <a:ext cx="2011680" cy="402336"/>
-          </a:xfrm>
-          <a:prstGeom prst="rect">
-            <a:avLst>
-              <a:gd name="adj" fmla="val 13636"/>
-            </a:avLst>
-          </a:prstGeom>
-          <a:solidFill>
-            <a:srgbClr val="EEF2FF"/>
-          </a:solidFill>
-          <a:ln w="12700">
-            <a:solidFill>
-              <a:srgbClr val="6366F1"/>
-            </a:solidFill>
-            <a:prstDash val="solid"/>
-          </a:ln>
-        </p:spPr>
-      </p:sp>
-      <p:sp>
-        <p:nvSpPr>
-          <p:cNvPr id="45" name="Text 43"/>
-          <p:cNvSpPr/>
-          <p:nvPr/>
-        </p:nvSpPr>
-        <p:spPr>
-          <a:xfrm>
-            <a:off x="365760" y="4023360"/>
-            <a:ext cx="2011680" cy="402336"/>
-          </a:xfrm>
-          <a:prstGeom prst="rect">
-            <a:avLst/>
-          </a:prstGeom>
-          <a:noFill/>
-          <a:ln/>
-        </p:spPr>
-        <p:txBody>
-          <a:bodyPr wrap="square" lIns="0" tIns="0" rIns="0" bIns="0" rtlCol="0" anchor="ctr"/>
-          <a:lstStyle/>
-          <a:p>
-            <a:pPr algn="ctr" indent="0" marL="0">
-              <a:buNone/>
-            </a:pPr>
-            <a:r>
-              <a:rPr lang="en-US" sz="1200" b="1" dirty="0">
-                <a:solidFill>
-                  <a:srgbClr val="4338CA"/>
-                </a:solidFill>
-                <a:latin typeface="Trebuchet MS" pitchFamily="34" charset="0"/>
-                <a:ea typeface="Trebuchet MS" pitchFamily="34" charset="-122"/>
-                <a:cs typeface="Trebuchet MS" pitchFamily="34" charset="-120"/>
-              </a:rPr>
               <a:t>repair</a:t>
-            </a:r>
-            <a:endParaRPr lang="en-US" sz="1200" dirty="0"/>
-          </a:p>
-        </p:txBody>
-      </p:sp>
-      <p:sp>
-        <p:nvSpPr>
-          <p:cNvPr id="46" name="Shape 44"/>
-          <p:cNvSpPr/>
-          <p:nvPr/>
-        </p:nvSpPr>
-        <p:spPr>
-          <a:xfrm>
-            <a:off x="2542032" y="4023360"/>
-            <a:ext cx="2011680" cy="402336"/>
-          </a:xfrm>
-          <a:prstGeom prst="rect">
-            <a:avLst>
-              <a:gd name="adj" fmla="val 13636"/>
-            </a:avLst>
-          </a:prstGeom>
-          <a:solidFill>
-            <a:srgbClr val="EEF2FF"/>
-          </a:solidFill>
-          <a:ln w="12700">
-            <a:solidFill>
-              <a:srgbClr val="6366F1"/>
-            </a:solidFill>
-            <a:prstDash val="solid"/>
-          </a:ln>
-        </p:spPr>
-      </p:sp>
-      <p:sp>
-        <p:nvSpPr>
-          <p:cNvPr id="47" name="Text 45"/>
-          <p:cNvSpPr/>
-          <p:nvPr/>
-        </p:nvSpPr>
-        <p:spPr>
-          <a:xfrm>
-            <a:off x="2542032" y="4023360"/>
-            <a:ext cx="2011680" cy="402336"/>
-          </a:xfrm>
-          <a:prstGeom prst="rect">
-            <a:avLst/>
-          </a:prstGeom>
-          <a:noFill/>
-          <a:ln/>
-        </p:spPr>
-        <p:txBody>
-          <a:bodyPr wrap="square" lIns="0" tIns="0" rIns="0" bIns="0" rtlCol="0" anchor="ctr"/>
-          <a:lstStyle/>
-          <a:p>
-            <a:pPr algn="ctr" indent="0" marL="0">
-              <a:buNone/>
-            </a:pPr>
-            <a:r>
-              <a:rPr lang="en-US" sz="1200" b="1" dirty="0">
-                <a:solidFill>
-                  <a:srgbClr val="4338CA"/>
-                </a:solidFill>
-                <a:latin typeface="Trebuchet MS" pitchFamily="34" charset="0"/>
-                <a:ea typeface="Trebuchet MS" pitchFamily="34" charset="-122"/>
-                <a:cs typeface="Trebuchet MS" pitchFamily="34" charset="-120"/>
-              </a:rPr>
-              <a:t>repaired</a:t>
-            </a:r>
-            <a:endParaRPr lang="en-US" sz="1200" dirty="0"/>
-          </a:p>
-        </p:txBody>
-      </p:sp>
-      <p:sp>
-        <p:nvSpPr>
-          <p:cNvPr id="48" name="Shape 46"/>
-          <p:cNvSpPr/>
-          <p:nvPr/>
-        </p:nvSpPr>
-        <p:spPr>
-          <a:xfrm>
-            <a:off x="4718304" y="4023360"/>
-            <a:ext cx="2011680" cy="402336"/>
-          </a:xfrm>
-          <a:prstGeom prst="rect">
-            <a:avLst>
-              <a:gd name="adj" fmla="val 13636"/>
-            </a:avLst>
-          </a:prstGeom>
-          <a:solidFill>
-            <a:srgbClr val="EEF2FF"/>
-          </a:solidFill>
-          <a:ln w="12700">
-            <a:solidFill>
-              <a:srgbClr val="6366F1"/>
-            </a:solidFill>
-            <a:prstDash val="solid"/>
-          </a:ln>
-        </p:spPr>
-      </p:sp>
-      <p:sp>
-        <p:nvSpPr>
-          <p:cNvPr id="49" name="Text 47"/>
-          <p:cNvSpPr/>
-          <p:nvPr/>
-        </p:nvSpPr>
-        <p:spPr>
-          <a:xfrm>
-            <a:off x="4718304" y="4023360"/>
-            <a:ext cx="2011680" cy="402336"/>
-          </a:xfrm>
-          <a:prstGeom prst="rect">
-            <a:avLst/>
-          </a:prstGeom>
-          <a:noFill/>
-          <a:ln/>
-        </p:spPr>
-        <p:txBody>
-          <a:bodyPr wrap="square" lIns="0" tIns="0" rIns="0" bIns="0" rtlCol="0" anchor="ctr"/>
-          <a:lstStyle/>
-          <a:p>
-            <a:pPr algn="ctr" indent="0" marL="0">
-              <a:buNone/>
-            </a:pPr>
-            <a:r>
-              <a:rPr lang="en-US" sz="1200" b="1" dirty="0">
-                <a:solidFill>
-                  <a:srgbClr val="4338CA"/>
-                </a:solidFill>
-                <a:latin typeface="Trebuchet MS" pitchFamily="34" charset="0"/>
-                <a:ea typeface="Trebuchet MS" pitchFamily="34" charset="-122"/>
-                <a:cs typeface="Trebuchet MS" pitchFamily="34" charset="-120"/>
-              </a:rPr>
-              <a:t>repairing</a:t>
-            </a:r>
-            <a:endParaRPr lang="en-US" sz="1200" dirty="0"/>
-          </a:p>
-        </p:txBody>
-      </p:sp>
-      <p:sp>
-        <p:nvSpPr>
-          <p:cNvPr id="50" name="Shape 48"/>
-          <p:cNvSpPr/>
-          <p:nvPr/>
-        </p:nvSpPr>
-        <p:spPr>
-          <a:xfrm>
-            <a:off x="6894576" y="4023360"/>
-            <a:ext cx="2011680" cy="402336"/>
-          </a:xfrm>
-          <a:prstGeom prst="rect">
-            <a:avLst>
-              <a:gd name="adj" fmla="val 13636"/>
-            </a:avLst>
-          </a:prstGeom>
-          <a:solidFill>
-            <a:srgbClr val="EEF2FF"/>
-          </a:solidFill>
-          <a:ln w="12700">
-            <a:solidFill>
-              <a:srgbClr val="6366F1"/>
-            </a:solidFill>
-            <a:prstDash val="solid"/>
-          </a:ln>
-        </p:spPr>
-      </p:sp>
-      <p:sp>
-        <p:nvSpPr>
-          <p:cNvPr id="51" name="Text 49"/>
-          <p:cNvSpPr/>
-          <p:nvPr/>
-        </p:nvSpPr>
-        <p:spPr>
-          <a:xfrm>
-            <a:off x="6894576" y="4023360"/>
-            <a:ext cx="2011680" cy="402336"/>
-          </a:xfrm>
-          <a:prstGeom prst="rect">
-            <a:avLst/>
-          </a:prstGeom>
-          <a:noFill/>
-          <a:ln/>
-        </p:spPr>
-        <p:txBody>
-          <a:bodyPr wrap="square" lIns="0" tIns="0" rIns="0" bIns="0" rtlCol="0" anchor="ctr"/>
-          <a:lstStyle/>
-          <a:p>
-            <a:pPr algn="ctr" indent="0" marL="0">
-              <a:buNone/>
-            </a:pPr>
-            <a:r>
-              <a:rPr lang="en-US" sz="1200" b="1" dirty="0">
-                <a:solidFill>
-                  <a:srgbClr val="4338CA"/>
-                </a:solidFill>
-                <a:latin typeface="Trebuchet MS" pitchFamily="34" charset="0"/>
-                <a:ea typeface="Trebuchet MS" pitchFamily="34" charset="-122"/>
-                <a:cs typeface="Trebuchet MS" pitchFamily="34" charset="-120"/>
-              </a:rPr>
-              <a:t>repairer</a:t>
-            </a:r>
-            <a:endParaRPr lang="en-US" sz="1200" dirty="0"/>
-          </a:p>
-        </p:txBody>
-      </p:sp>
-      <p:sp>
-        <p:nvSpPr>
-          <p:cNvPr id="52" name="Shape 50"/>
-          <p:cNvSpPr/>
-          <p:nvPr/>
-        </p:nvSpPr>
-        <p:spPr>
-          <a:xfrm>
-            <a:off x="365760" y="4498848"/>
-            <a:ext cx="2011680" cy="402336"/>
-          </a:xfrm>
-          <a:prstGeom prst="rect">
-            <a:avLst>
-              <a:gd name="adj" fmla="val 13636"/>
-            </a:avLst>
-          </a:prstGeom>
-          <a:solidFill>
-            <a:srgbClr val="EEF2FF"/>
-          </a:solidFill>
-          <a:ln w="12700">
-            <a:solidFill>
-              <a:srgbClr val="6366F1"/>
-            </a:solidFill>
-            <a:prstDash val="solid"/>
-          </a:ln>
-        </p:spPr>
-      </p:sp>
-      <p:sp>
-        <p:nvSpPr>
-          <p:cNvPr id="53" name="Text 51"/>
-          <p:cNvSpPr/>
-          <p:nvPr/>
-        </p:nvSpPr>
-        <p:spPr>
-          <a:xfrm>
-            <a:off x="365760" y="4498848"/>
-            <a:ext cx="2011680" cy="402336"/>
-          </a:xfrm>
-          <a:prstGeom prst="rect">
-            <a:avLst/>
-          </a:prstGeom>
-          <a:noFill/>
-          <a:ln/>
-        </p:spPr>
-        <p:txBody>
-          <a:bodyPr wrap="square" lIns="0" tIns="0" rIns="0" bIns="0" rtlCol="0" anchor="ctr"/>
-          <a:lstStyle/>
-          <a:p>
-            <a:pPr algn="ctr" indent="0" marL="0">
-              <a:buNone/>
-            </a:pPr>
-            <a:r>
-              <a:rPr lang="en-US" sz="1200" b="1" dirty="0">
-                <a:solidFill>
-                  <a:srgbClr val="4338CA"/>
-                </a:solidFill>
-                <a:latin typeface="Trebuchet MS" pitchFamily="34" charset="0"/>
-                <a:ea typeface="Trebuchet MS" pitchFamily="34" charset="-122"/>
-                <a:cs typeface="Trebuchet MS" pitchFamily="34" charset="-120"/>
-              </a:rPr>
-              <a:t>repairs</a:t>
-            </a:r>
-            <a:endParaRPr lang="en-US" sz="1200" dirty="0"/>
-          </a:p>
-        </p:txBody>
-      </p:sp>
-      <p:sp>
-        <p:nvSpPr>
-          <p:cNvPr id="54" name="Shape 52"/>
-          <p:cNvSpPr/>
-          <p:nvPr/>
-        </p:nvSpPr>
-        <p:spPr>
-          <a:xfrm>
-            <a:off x="2542032" y="4498848"/>
-            <a:ext cx="2011680" cy="402336"/>
-          </a:xfrm>
-          <a:prstGeom prst="rect">
-            <a:avLst>
-              <a:gd name="adj" fmla="val 13636"/>
-            </a:avLst>
-          </a:prstGeom>
-          <a:solidFill>
-            <a:srgbClr val="EEF2FF"/>
-          </a:solidFill>
-          <a:ln w="12700">
-            <a:solidFill>
-              <a:srgbClr val="6366F1"/>
-            </a:solidFill>
-            <a:prstDash val="solid"/>
-          </a:ln>
-        </p:spPr>
-      </p:sp>
-      <p:sp>
-        <p:nvSpPr>
-          <p:cNvPr id="55" name="Text 53"/>
-          <p:cNvSpPr/>
-          <p:nvPr/>
-        </p:nvSpPr>
-        <p:spPr>
-          <a:xfrm>
-            <a:off x="2542032" y="4498848"/>
-            <a:ext cx="2011680" cy="402336"/>
-          </a:xfrm>
-          <a:prstGeom prst="rect">
-            <a:avLst/>
-          </a:prstGeom>
-          <a:noFill/>
-          <a:ln/>
-        </p:spPr>
-        <p:txBody>
-          <a:bodyPr wrap="square" lIns="0" tIns="0" rIns="0" bIns="0" rtlCol="0" anchor="ctr"/>
-          <a:lstStyle/>
-          <a:p>
-            <a:pPr algn="ctr" indent="0" marL="0">
-              <a:buNone/>
-            </a:pPr>
-            <a:r>
-              <a:rPr lang="en-US" sz="1200" b="1" dirty="0">
-                <a:solidFill>
-                  <a:srgbClr val="4338CA"/>
-                </a:solidFill>
-                <a:latin typeface="Trebuchet MS" pitchFamily="34" charset="0"/>
-                <a:ea typeface="Trebuchet MS" pitchFamily="34" charset="-122"/>
-                <a:cs typeface="Trebuchet MS" pitchFamily="34" charset="-120"/>
-              </a:rPr>
-              <a:t>repairable</a:t>
-            </a:r>
-            <a:endParaRPr lang="en-US" sz="1200" dirty="0"/>
-          </a:p>
-        </p:txBody>
-      </p:sp>
-      <p:sp>
-        <p:nvSpPr>
-          <p:cNvPr id="56" name="Shape 54"/>
-          <p:cNvSpPr/>
-          <p:nvPr/>
-        </p:nvSpPr>
-        <p:spPr>
-          <a:xfrm>
-            <a:off x="4718304" y="4498848"/>
-            <a:ext cx="2011680" cy="402336"/>
-          </a:xfrm>
-          <a:prstGeom prst="rect">
-            <a:avLst>
-              <a:gd name="adj" fmla="val 13636"/>
-            </a:avLst>
-          </a:prstGeom>
-          <a:solidFill>
-            <a:srgbClr val="EEF2FF"/>
-          </a:solidFill>
-          <a:ln w="12700">
-            <a:solidFill>
-              <a:srgbClr val="6366F1"/>
-            </a:solidFill>
-            <a:prstDash val="solid"/>
-          </a:ln>
-        </p:spPr>
-      </p:sp>
-      <p:sp>
-        <p:nvSpPr>
-          <p:cNvPr id="57" name="Text 55"/>
-          <p:cNvSpPr/>
-          <p:nvPr/>
-        </p:nvSpPr>
-        <p:spPr>
-          <a:xfrm>
-            <a:off x="4718304" y="4498848"/>
-            <a:ext cx="2011680" cy="402336"/>
-          </a:xfrm>
-          <a:prstGeom prst="rect">
-            <a:avLst/>
-          </a:prstGeom>
-          <a:noFill/>
-          <a:ln/>
-        </p:spPr>
-        <p:txBody>
-          <a:bodyPr wrap="square" lIns="0" tIns="0" rIns="0" bIns="0" rtlCol="0" anchor="ctr"/>
-          <a:lstStyle/>
-          <a:p>
-            <a:pPr algn="ctr" indent="0" marL="0">
-              <a:buNone/>
-            </a:pPr>
-            <a:r>
-              <a:rPr lang="en-US" sz="1200" b="1" dirty="0">
-                <a:solidFill>
-                  <a:srgbClr val="4338CA"/>
-                </a:solidFill>
-                <a:latin typeface="Trebuchet MS" pitchFamily="34" charset="0"/>
-                <a:ea typeface="Trebuchet MS" pitchFamily="34" charset="-122"/>
-                <a:cs typeface="Trebuchet MS" pitchFamily="34" charset="-120"/>
-              </a:rPr>
-              <a:t>irreparable</a:t>
-            </a:r>
-            <a:endParaRPr lang="en-US" sz="1200" dirty="0"/>
-          </a:p>
-        </p:txBody>
-      </p:sp>
-      <p:sp>
-        <p:nvSpPr>
-          <p:cNvPr id="58" name="Shape 56"/>
-          <p:cNvSpPr/>
-          <p:nvPr/>
-        </p:nvSpPr>
-        <p:spPr>
-          <a:xfrm>
-            <a:off x="6894576" y="4498848"/>
-            <a:ext cx="2011680" cy="402336"/>
-          </a:xfrm>
-          <a:prstGeom prst="rect">
-            <a:avLst>
-              <a:gd name="adj" fmla="val 13636"/>
-            </a:avLst>
-          </a:prstGeom>
-          <a:solidFill>
-            <a:srgbClr val="EEF2FF"/>
-          </a:solidFill>
-          <a:ln w="12700">
-            <a:solidFill>
-              <a:srgbClr val="6366F1"/>
-            </a:solidFill>
-            <a:prstDash val="solid"/>
-          </a:ln>
-        </p:spPr>
-      </p:sp>
-      <p:sp>
-        <p:nvSpPr>
-          <p:cNvPr id="59" name="Text 57"/>
-          <p:cNvSpPr/>
-          <p:nvPr/>
-        </p:nvSpPr>
-        <p:spPr>
-          <a:xfrm>
-            <a:off x="6894576" y="4498848"/>
-            <a:ext cx="2011680" cy="402336"/>
-          </a:xfrm>
-          <a:prstGeom prst="rect">
-            <a:avLst/>
-          </a:prstGeom>
-          <a:noFill/>
-          <a:ln/>
-        </p:spPr>
-        <p:txBody>
-          <a:bodyPr wrap="square" lIns="0" tIns="0" rIns="0" bIns="0" rtlCol="0" anchor="ctr"/>
-          <a:lstStyle/>
-          <a:p>
-            <a:pPr algn="ctr" indent="0" marL="0">
-              <a:buNone/>
-            </a:pPr>
-            <a:r>
-              <a:rPr lang="en-US" sz="1200" b="1" dirty="0">
-                <a:solidFill>
-                  <a:srgbClr val="4338CA"/>
-                </a:solidFill>
-                <a:latin typeface="Trebuchet MS" pitchFamily="34" charset="0"/>
-                <a:ea typeface="Trebuchet MS" pitchFamily="34" charset="-122"/>
-                <a:cs typeface="Trebuchet MS" pitchFamily="34" charset="-120"/>
-              </a:rPr>
-              <a:t>unrepairable</a:t>
             </a:r>
             <a:endParaRPr lang="en-US" sz="1200" dirty="0"/>
           </a:p>
@@ -35361,7 +34704,7 @@
                 <a:ea typeface="Calibri" pitchFamily="34" charset="-122"/>
                 <a:cs typeface="Calibri" pitchFamily="34" charset="-120"/>
               </a:rPr>
-              <a:t>Word Labs  •  wordlabs.app  •  Root: 'repair' = fix or restore something broken</a:t>
+              <a:t>Word Labs  •  wordlabs.app  •  Root: 'repair' = fix</a:t>
             </a:r>
             <a:endParaRPr lang="en-US" sz="800" dirty="0"/>
           </a:p>
@@ -35525,7 +34868,7 @@
                 <a:ea typeface="Calibri" pitchFamily="34" charset="-122"/>
                 <a:cs typeface="Calibri" pitchFamily="34" charset="-120"/>
               </a:rPr>
-              <a:t>The core part of a word carrying its basic meaning. For example, 'repair' means 'fix or restore something broken'.</a:t>
+              <a:t>The core part of a word carrying its basic meaning. For example, 'repair' means 'fix'.</a:t>
             </a:r>
             <a:endParaRPr lang="en-US" sz="1350" dirty="0"/>
           </a:p>
@@ -36145,7 +35488,7 @@
                 <a:ea typeface="Calibri" pitchFamily="34" charset="-122"/>
                 <a:cs typeface="Calibri" pitchFamily="34" charset="-120"/>
               </a:rPr>
-              <a:t>Word Labs  •  wordlabs.app  •  Root: 'repair' = fix or restore something broken</a:t>
+              <a:t>Word Labs  •  wordlabs.app  •  Root: 'repair' = fix</a:t>
             </a:r>
             <a:endParaRPr lang="en-US" sz="800" dirty="0"/>
           </a:p>
@@ -36257,7 +35600,7 @@
                 <a:ea typeface="Calibri" pitchFamily="34" charset="-122"/>
                 <a:cs typeface="Calibri" pitchFamily="34" charset="-120"/>
               </a:rPr>
-              <a:t>1.  The word 'irreparable' means something that cannot be fixed.</a:t>
+              <a:t>1.  'repair' means 'fix'.</a:t>
             </a:r>
             <a:endParaRPr lang="en-US" sz="1300" dirty="0"/>
           </a:p>
@@ -36396,7 +35739,7 @@
                 <a:ea typeface="Calibri" pitchFamily="34" charset="-122"/>
                 <a:cs typeface="Calibri" pitchFamily="34" charset="-120"/>
               </a:rPr>
-              <a:t>2.  The root 'repair' comes from the Greek language.</a:t>
+              <a:t>2.  'repair' means 'to fix something that is broken or damaged'.</a:t>
             </a:r>
             <a:endParaRPr lang="en-US" sz="1300" dirty="0"/>
           </a:p>
@@ -36419,11 +35762,11 @@
             </a:avLst>
           </a:prstGeom>
           <a:solidFill>
-            <a:srgbClr val="FEE2E2"/>
-          </a:solidFill>
-          <a:ln w="12700">
-            <a:solidFill>
-              <a:srgbClr val="DC2626"/>
+            <a:srgbClr val="DCFCE7"/>
+          </a:solidFill>
+          <a:ln w="12700">
+            <a:solidFill>
+              <a:srgbClr val="16A34A"/>
             </a:solidFill>
             <a:prstDash val="solid"/>
           </a:ln>
@@ -36456,13 +35799,13 @@
             <a:r>
               <a:rPr lang="en-US" sz="1100" b="1" dirty="0">
                 <a:solidFill>
-                  <a:srgbClr val="DC2626"/>
+                  <a:srgbClr val="16A34A"/>
                 </a:solidFill>
                 <a:latin typeface="Trebuchet MS" pitchFamily="34" charset="0"/>
                 <a:ea typeface="Trebuchet MS" pitchFamily="34" charset="-122"/>
                 <a:cs typeface="Trebuchet MS" pitchFamily="34" charset="-120"/>
               </a:rPr>
-              <a:t>FALSE</a:t>
+              <a:t>TRUE</a:t>
             </a:r>
             <a:endParaRPr lang="en-US" sz="1100" dirty="0"/>
           </a:p>
@@ -36535,7 +35878,7 @@
                 <a:ea typeface="Calibri" pitchFamily="34" charset="-122"/>
                 <a:cs typeface="Calibri" pitchFamily="34" charset="-120"/>
               </a:rPr>
-              <a:t>3.  Adding '-able' to 'repair' makes the word 'repairable', meaning able to be fixed.</a:t>
+              <a:t>3.  'repair' means 'to buy something brand new'.</a:t>
             </a:r>
             <a:endParaRPr lang="en-US" sz="1300" dirty="0"/>
           </a:p>
@@ -36558,11 +35901,11 @@
             </a:avLst>
           </a:prstGeom>
           <a:solidFill>
-            <a:srgbClr val="DCFCE7"/>
-          </a:solidFill>
-          <a:ln w="12700">
-            <a:solidFill>
-              <a:srgbClr val="16A34A"/>
+            <a:srgbClr val="FEE2E2"/>
+          </a:solidFill>
+          <a:ln w="12700">
+            <a:solidFill>
+              <a:srgbClr val="DC2626"/>
             </a:solidFill>
             <a:prstDash val="solid"/>
           </a:ln>
@@ -36595,291 +35938,13 @@
             <a:r>
               <a:rPr lang="en-US" sz="1100" b="1" dirty="0">
                 <a:solidFill>
-                  <a:srgbClr val="16A34A"/>
+                  <a:srgbClr val="DC2626"/>
                 </a:solidFill>
                 <a:latin typeface="Trebuchet MS" pitchFamily="34" charset="0"/>
                 <a:ea typeface="Trebuchet MS" pitchFamily="34" charset="-122"/>
                 <a:cs typeface="Trebuchet MS" pitchFamily="34" charset="-120"/>
               </a:rPr>
-              <a:t>TRUE</a:t>
-            </a:r>
-            <a:endParaRPr lang="en-US" sz="1100" dirty="0"/>
-          </a:p>
-        </p:txBody>
-      </p:sp>
-      <p:sp>
-        <p:nvSpPr>
-          <p:cNvPr id="23" name="Shape 21"/>
-          <p:cNvSpPr/>
-          <p:nvPr/>
-        </p:nvSpPr>
-        <p:spPr>
-          <a:xfrm>
-            <a:off x="365760" y="3291840"/>
-            <a:ext cx="7315200" cy="566928"/>
-          </a:xfrm>
-          <a:prstGeom prst="rect">
-            <a:avLst>
-              <a:gd name="adj" fmla="val 12903"/>
-            </a:avLst>
-          </a:prstGeom>
-          <a:solidFill>
-            <a:srgbClr val="F8FAFC"/>
-          </a:solidFill>
-          <a:ln w="12700">
-            <a:solidFill>
-              <a:srgbClr val="E2E8F0"/>
-            </a:solidFill>
-            <a:prstDash val="solid"/>
-          </a:ln>
-          <a:effectLst>
-            <a:outerShdw sx="100000" sy="100000" kx="0" ky="0" algn="bl" rotWithShape="0" blurRad="101600" dist="38100" dir="8100000">
-              <a:srgbClr val="000000">
-                <a:alpha val="12000"/>
-              </a:srgbClr>
-            </a:outerShdw>
-          </a:effectLst>
-        </p:spPr>
-      </p:sp>
-      <p:sp>
-        <p:nvSpPr>
-          <p:cNvPr id="24" name="Text 22"/>
-          <p:cNvSpPr/>
-          <p:nvPr/>
-        </p:nvSpPr>
-        <p:spPr>
-          <a:xfrm>
-            <a:off x="548640" y="3291840"/>
-            <a:ext cx="6949440" cy="566928"/>
-          </a:xfrm>
-          <a:prstGeom prst="rect">
-            <a:avLst/>
-          </a:prstGeom>
-          <a:noFill/>
-          <a:ln/>
-        </p:spPr>
-        <p:txBody>
-          <a:bodyPr wrap="square" rtlCol="0" anchor="ctr"/>
-          <a:lstStyle/>
-          <a:p>
-            <a:pPr algn="l" indent="0" marL="0">
-              <a:buNone/>
-            </a:pPr>
-            <a:r>
-              <a:rPr lang="en-US" sz="1300" dirty="0">
-                <a:solidFill>
-                  <a:srgbClr val="0F172A"/>
-                </a:solidFill>
-                <a:latin typeface="Calibri" pitchFamily="34" charset="0"/>
-                <a:ea typeface="Calibri" pitchFamily="34" charset="-122"/>
-                <a:cs typeface="Calibri" pitchFamily="34" charset="-120"/>
-              </a:rPr>
-              <a:t>4.  The word 'repairing' is a noun describing a finished object.</a:t>
-            </a:r>
-            <a:endParaRPr lang="en-US" sz="1300" dirty="0"/>
-          </a:p>
-        </p:txBody>
-      </p:sp>
-      <p:sp>
-        <p:nvSpPr>
-          <p:cNvPr id="25" name="Shape 23"/>
-          <p:cNvSpPr/>
-          <p:nvPr/>
-        </p:nvSpPr>
-        <p:spPr>
-          <a:xfrm>
-            <a:off x="7772400" y="3291840"/>
-            <a:ext cx="1005840" cy="566928"/>
-          </a:xfrm>
-          <a:prstGeom prst="rect">
-            <a:avLst>
-              <a:gd name="adj" fmla="val 12903"/>
-            </a:avLst>
-          </a:prstGeom>
-          <a:solidFill>
-            <a:srgbClr val="FEE2E2"/>
-          </a:solidFill>
-          <a:ln w="12700">
-            <a:solidFill>
-              <a:srgbClr val="DC2626"/>
-            </a:solidFill>
-            <a:prstDash val="solid"/>
-          </a:ln>
-        </p:spPr>
-      </p:sp>
-      <p:sp>
-        <p:nvSpPr>
-          <p:cNvPr id="26" name="Text 24"/>
-          <p:cNvSpPr/>
-          <p:nvPr/>
-        </p:nvSpPr>
-        <p:spPr>
-          <a:xfrm>
-            <a:off x="7772400" y="3291840"/>
-            <a:ext cx="1005840" cy="566928"/>
-          </a:xfrm>
-          <a:prstGeom prst="rect">
-            <a:avLst/>
-          </a:prstGeom>
-          <a:noFill/>
-          <a:ln/>
-        </p:spPr>
-        <p:txBody>
-          <a:bodyPr wrap="square" lIns="0" tIns="0" rIns="0" bIns="0" rtlCol="0" anchor="ctr"/>
-          <a:lstStyle/>
-          <a:p>
-            <a:pPr algn="ctr" indent="0" marL="0">
-              <a:buNone/>
-            </a:pPr>
-            <a:r>
-              <a:rPr lang="en-US" sz="1100" b="1" dirty="0">
-                <a:solidFill>
-                  <a:srgbClr val="DC2626"/>
-                </a:solidFill>
-                <a:latin typeface="Trebuchet MS" pitchFamily="34" charset="0"/>
-                <a:ea typeface="Trebuchet MS" pitchFamily="34" charset="-122"/>
-                <a:cs typeface="Trebuchet MS" pitchFamily="34" charset="-120"/>
-              </a:rPr>
               <a:t>FALSE</a:t>
-            </a:r>
-            <a:endParaRPr lang="en-US" sz="1100" dirty="0"/>
-          </a:p>
-        </p:txBody>
-      </p:sp>
-      <p:sp>
-        <p:nvSpPr>
-          <p:cNvPr id="27" name="Shape 25"/>
-          <p:cNvSpPr/>
-          <p:nvPr/>
-        </p:nvSpPr>
-        <p:spPr>
-          <a:xfrm>
-            <a:off x="365760" y="3986784"/>
-            <a:ext cx="7315200" cy="566928"/>
-          </a:xfrm>
-          <a:prstGeom prst="rect">
-            <a:avLst>
-              <a:gd name="adj" fmla="val 12903"/>
-            </a:avLst>
-          </a:prstGeom>
-          <a:solidFill>
-            <a:srgbClr val="F8FAFC"/>
-          </a:solidFill>
-          <a:ln w="12700">
-            <a:solidFill>
-              <a:srgbClr val="E2E8F0"/>
-            </a:solidFill>
-            <a:prstDash val="solid"/>
-          </a:ln>
-          <a:effectLst>
-            <a:outerShdw sx="100000" sy="100000" kx="0" ky="0" algn="bl" rotWithShape="0" blurRad="101600" dist="38100" dir="8100000">
-              <a:srgbClr val="000000">
-                <a:alpha val="12000"/>
-              </a:srgbClr>
-            </a:outerShdw>
-          </a:effectLst>
-        </p:spPr>
-      </p:sp>
-      <p:sp>
-        <p:nvSpPr>
-          <p:cNvPr id="28" name="Text 26"/>
-          <p:cNvSpPr/>
-          <p:nvPr/>
-        </p:nvSpPr>
-        <p:spPr>
-          <a:xfrm>
-            <a:off x="548640" y="3986784"/>
-            <a:ext cx="6949440" cy="566928"/>
-          </a:xfrm>
-          <a:prstGeom prst="rect">
-            <a:avLst/>
-          </a:prstGeom>
-          <a:noFill/>
-          <a:ln/>
-        </p:spPr>
-        <p:txBody>
-          <a:bodyPr wrap="square" rtlCol="0" anchor="ctr"/>
-          <a:lstStyle/>
-          <a:p>
-            <a:pPr algn="l" indent="0" marL="0">
-              <a:buNone/>
-            </a:pPr>
-            <a:r>
-              <a:rPr lang="en-US" sz="1300" dirty="0">
-                <a:solidFill>
-                  <a:srgbClr val="0F172A"/>
-                </a:solidFill>
-                <a:latin typeface="Calibri" pitchFamily="34" charset="0"/>
-                <a:ea typeface="Calibri" pitchFamily="34" charset="-122"/>
-                <a:cs typeface="Calibri" pitchFamily="34" charset="-120"/>
-              </a:rPr>
-              <a:t>5.  A 'repairer' is a person who fixes broken things.</a:t>
-            </a:r>
-            <a:endParaRPr lang="en-US" sz="1300" dirty="0"/>
-          </a:p>
-        </p:txBody>
-      </p:sp>
-      <p:sp>
-        <p:nvSpPr>
-          <p:cNvPr id="29" name="Shape 27"/>
-          <p:cNvSpPr/>
-          <p:nvPr/>
-        </p:nvSpPr>
-        <p:spPr>
-          <a:xfrm>
-            <a:off x="7772400" y="3986784"/>
-            <a:ext cx="1005840" cy="566928"/>
-          </a:xfrm>
-          <a:prstGeom prst="rect">
-            <a:avLst>
-              <a:gd name="adj" fmla="val 12903"/>
-            </a:avLst>
-          </a:prstGeom>
-          <a:solidFill>
-            <a:srgbClr val="DCFCE7"/>
-          </a:solidFill>
-          <a:ln w="12700">
-            <a:solidFill>
-              <a:srgbClr val="16A34A"/>
-            </a:solidFill>
-            <a:prstDash val="solid"/>
-          </a:ln>
-        </p:spPr>
-      </p:sp>
-      <p:sp>
-        <p:nvSpPr>
-          <p:cNvPr id="30" name="Text 28"/>
-          <p:cNvSpPr/>
-          <p:nvPr/>
-        </p:nvSpPr>
-        <p:spPr>
-          <a:xfrm>
-            <a:off x="7772400" y="3986784"/>
-            <a:ext cx="1005840" cy="566928"/>
-          </a:xfrm>
-          <a:prstGeom prst="rect">
-            <a:avLst/>
-          </a:prstGeom>
-          <a:noFill/>
-          <a:ln/>
-        </p:spPr>
-        <p:txBody>
-          <a:bodyPr wrap="square" lIns="0" tIns="0" rIns="0" bIns="0" rtlCol="0" anchor="ctr"/>
-          <a:lstStyle/>
-          <a:p>
-            <a:pPr algn="ctr" indent="0" marL="0">
-              <a:buNone/>
-            </a:pPr>
-            <a:r>
-              <a:rPr lang="en-US" sz="1100" b="1" dirty="0">
-                <a:solidFill>
-                  <a:srgbClr val="16A34A"/>
-                </a:solidFill>
-                <a:latin typeface="Trebuchet MS" pitchFamily="34" charset="0"/>
-                <a:ea typeface="Trebuchet MS" pitchFamily="34" charset="-122"/>
-                <a:cs typeface="Trebuchet MS" pitchFamily="34" charset="-120"/>
-              </a:rPr>
-              <a:t>TRUE</a:t>
             </a:r>
             <a:endParaRPr lang="en-US" sz="1100" dirty="0"/>
           </a:p>
@@ -37171,7 +36236,7 @@
                 <a:ea typeface="Calibri" pitchFamily="34" charset="-122"/>
                 <a:cs typeface="Calibri" pitchFamily="34" charset="-120"/>
               </a:rPr>
-              <a:t>Word Labs  •  wordlabs.app  •  Root: 'repair' = fix or restore something broken</a:t>
+              <a:t>Word Labs  •  wordlabs.app  •  Root: 'repair' = fix</a:t>
             </a:r>
             <a:endParaRPr lang="en-US" sz="800" dirty="0"/>
           </a:p>
@@ -37308,7 +36373,7 @@
                 <a:ea typeface="Trebuchet MS" pitchFamily="34" charset="-122"/>
                 <a:cs typeface="Trebuchet MS" pitchFamily="34" charset="-120"/>
               </a:rPr>
-              <a:t>fix or restore something broken</a:t>
+              <a:t>fix</a:t>
             </a:r>
             <a:endParaRPr lang="en-US" sz="2000" dirty="0"/>
           </a:p>
@@ -37347,7 +36412,7 @@
                 <a:ea typeface="Calibri" pitchFamily="34" charset="-122"/>
                 <a:cs typeface="Calibri" pitchFamily="34" charset="-120"/>
               </a:rPr>
-              <a:t>Origin: Latin: reparare</a:t>
+              <a:t>Origin: Core English root</a:t>
             </a:r>
             <a:endParaRPr lang="en-US" sz="1100" dirty="0"/>
           </a:p>
@@ -37453,402 +36518,6 @@
                 <a:cs typeface="Trebuchet MS" pitchFamily="34" charset="-120"/>
               </a:rPr>
               <a:t>repair</a:t>
-            </a:r>
-            <a:endParaRPr lang="en-US" sz="1300" dirty="0"/>
-          </a:p>
-        </p:txBody>
-      </p:sp>
-      <p:sp>
-        <p:nvSpPr>
-          <p:cNvPr id="18" name="Shape 16"/>
-          <p:cNvSpPr/>
-          <p:nvPr/>
-        </p:nvSpPr>
-        <p:spPr>
-          <a:xfrm>
-            <a:off x="2514600" y="2743200"/>
-            <a:ext cx="2011680" cy="502920"/>
-          </a:xfrm>
-          <a:prstGeom prst="rect">
-            <a:avLst>
-              <a:gd name="adj" fmla="val 14545"/>
-            </a:avLst>
-          </a:prstGeom>
-          <a:solidFill>
-            <a:srgbClr val="EEF2FF"/>
-          </a:solidFill>
-          <a:ln w="12700">
-            <a:solidFill>
-              <a:srgbClr val="6366F1"/>
-            </a:solidFill>
-            <a:prstDash val="solid"/>
-          </a:ln>
-        </p:spPr>
-      </p:sp>
-      <p:sp>
-        <p:nvSpPr>
-          <p:cNvPr id="19" name="Text 17"/>
-          <p:cNvSpPr/>
-          <p:nvPr/>
-        </p:nvSpPr>
-        <p:spPr>
-          <a:xfrm>
-            <a:off x="2514600" y="2743200"/>
-            <a:ext cx="2011680" cy="502920"/>
-          </a:xfrm>
-          <a:prstGeom prst="rect">
-            <a:avLst/>
-          </a:prstGeom>
-          <a:noFill/>
-          <a:ln/>
-        </p:spPr>
-        <p:txBody>
-          <a:bodyPr wrap="square" lIns="0" tIns="0" rIns="0" bIns="0" rtlCol="0" anchor="ctr"/>
-          <a:lstStyle/>
-          <a:p>
-            <a:pPr algn="ctr" indent="0" marL="0">
-              <a:buNone/>
-            </a:pPr>
-            <a:r>
-              <a:rPr lang="en-US" sz="1300" b="1" dirty="0">
-                <a:solidFill>
-                  <a:srgbClr val="4338CA"/>
-                </a:solidFill>
-                <a:latin typeface="Trebuchet MS" pitchFamily="34" charset="0"/>
-                <a:ea typeface="Trebuchet MS" pitchFamily="34" charset="-122"/>
-                <a:cs typeface="Trebuchet MS" pitchFamily="34" charset="-120"/>
-              </a:rPr>
-              <a:t>repaired</a:t>
-            </a:r>
-            <a:endParaRPr lang="en-US" sz="1300" dirty="0"/>
-          </a:p>
-        </p:txBody>
-      </p:sp>
-      <p:sp>
-        <p:nvSpPr>
-          <p:cNvPr id="20" name="Shape 18"/>
-          <p:cNvSpPr/>
-          <p:nvPr/>
-        </p:nvSpPr>
-        <p:spPr>
-          <a:xfrm>
-            <a:off x="4663440" y="2743200"/>
-            <a:ext cx="2011680" cy="502920"/>
-          </a:xfrm>
-          <a:prstGeom prst="rect">
-            <a:avLst>
-              <a:gd name="adj" fmla="val 14545"/>
-            </a:avLst>
-          </a:prstGeom>
-          <a:solidFill>
-            <a:srgbClr val="EEF2FF"/>
-          </a:solidFill>
-          <a:ln w="12700">
-            <a:solidFill>
-              <a:srgbClr val="6366F1"/>
-            </a:solidFill>
-            <a:prstDash val="solid"/>
-          </a:ln>
-        </p:spPr>
-      </p:sp>
-      <p:sp>
-        <p:nvSpPr>
-          <p:cNvPr id="21" name="Text 19"/>
-          <p:cNvSpPr/>
-          <p:nvPr/>
-        </p:nvSpPr>
-        <p:spPr>
-          <a:xfrm>
-            <a:off x="4663440" y="2743200"/>
-            <a:ext cx="2011680" cy="502920"/>
-          </a:xfrm>
-          <a:prstGeom prst="rect">
-            <a:avLst/>
-          </a:prstGeom>
-          <a:noFill/>
-          <a:ln/>
-        </p:spPr>
-        <p:txBody>
-          <a:bodyPr wrap="square" lIns="0" tIns="0" rIns="0" bIns="0" rtlCol="0" anchor="ctr"/>
-          <a:lstStyle/>
-          <a:p>
-            <a:pPr algn="ctr" indent="0" marL="0">
-              <a:buNone/>
-            </a:pPr>
-            <a:r>
-              <a:rPr lang="en-US" sz="1300" b="1" dirty="0">
-                <a:solidFill>
-                  <a:srgbClr val="4338CA"/>
-                </a:solidFill>
-                <a:latin typeface="Trebuchet MS" pitchFamily="34" charset="0"/>
-                <a:ea typeface="Trebuchet MS" pitchFamily="34" charset="-122"/>
-                <a:cs typeface="Trebuchet MS" pitchFamily="34" charset="-120"/>
-              </a:rPr>
-              <a:t>repairing</a:t>
-            </a:r>
-            <a:endParaRPr lang="en-US" sz="1300" dirty="0"/>
-          </a:p>
-        </p:txBody>
-      </p:sp>
-      <p:sp>
-        <p:nvSpPr>
-          <p:cNvPr id="22" name="Shape 20"/>
-          <p:cNvSpPr/>
-          <p:nvPr/>
-        </p:nvSpPr>
-        <p:spPr>
-          <a:xfrm>
-            <a:off x="6812280" y="2743200"/>
-            <a:ext cx="2011680" cy="502920"/>
-          </a:xfrm>
-          <a:prstGeom prst="rect">
-            <a:avLst>
-              <a:gd name="adj" fmla="val 14545"/>
-            </a:avLst>
-          </a:prstGeom>
-          <a:solidFill>
-            <a:srgbClr val="EEF2FF"/>
-          </a:solidFill>
-          <a:ln w="12700">
-            <a:solidFill>
-              <a:srgbClr val="6366F1"/>
-            </a:solidFill>
-            <a:prstDash val="solid"/>
-          </a:ln>
-        </p:spPr>
-      </p:sp>
-      <p:sp>
-        <p:nvSpPr>
-          <p:cNvPr id="23" name="Text 21"/>
-          <p:cNvSpPr/>
-          <p:nvPr/>
-        </p:nvSpPr>
-        <p:spPr>
-          <a:xfrm>
-            <a:off x="6812280" y="2743200"/>
-            <a:ext cx="2011680" cy="502920"/>
-          </a:xfrm>
-          <a:prstGeom prst="rect">
-            <a:avLst/>
-          </a:prstGeom>
-          <a:noFill/>
-          <a:ln/>
-        </p:spPr>
-        <p:txBody>
-          <a:bodyPr wrap="square" lIns="0" tIns="0" rIns="0" bIns="0" rtlCol="0" anchor="ctr"/>
-          <a:lstStyle/>
-          <a:p>
-            <a:pPr algn="ctr" indent="0" marL="0">
-              <a:buNone/>
-            </a:pPr>
-            <a:r>
-              <a:rPr lang="en-US" sz="1300" b="1" dirty="0">
-                <a:solidFill>
-                  <a:srgbClr val="4338CA"/>
-                </a:solidFill>
-                <a:latin typeface="Trebuchet MS" pitchFamily="34" charset="0"/>
-                <a:ea typeface="Trebuchet MS" pitchFamily="34" charset="-122"/>
-                <a:cs typeface="Trebuchet MS" pitchFamily="34" charset="-120"/>
-              </a:rPr>
-              <a:t>repairer</a:t>
-            </a:r>
-            <a:endParaRPr lang="en-US" sz="1300" dirty="0"/>
-          </a:p>
-        </p:txBody>
-      </p:sp>
-      <p:sp>
-        <p:nvSpPr>
-          <p:cNvPr id="24" name="Shape 22"/>
-          <p:cNvSpPr/>
-          <p:nvPr/>
-        </p:nvSpPr>
-        <p:spPr>
-          <a:xfrm>
-            <a:off x="365760" y="3401568"/>
-            <a:ext cx="2011680" cy="502920"/>
-          </a:xfrm>
-          <a:prstGeom prst="rect">
-            <a:avLst>
-              <a:gd name="adj" fmla="val 14545"/>
-            </a:avLst>
-          </a:prstGeom>
-          <a:solidFill>
-            <a:srgbClr val="EEF2FF"/>
-          </a:solidFill>
-          <a:ln w="12700">
-            <a:solidFill>
-              <a:srgbClr val="6366F1"/>
-            </a:solidFill>
-            <a:prstDash val="solid"/>
-          </a:ln>
-        </p:spPr>
-      </p:sp>
-      <p:sp>
-        <p:nvSpPr>
-          <p:cNvPr id="25" name="Text 23"/>
-          <p:cNvSpPr/>
-          <p:nvPr/>
-        </p:nvSpPr>
-        <p:spPr>
-          <a:xfrm>
-            <a:off x="365760" y="3401568"/>
-            <a:ext cx="2011680" cy="502920"/>
-          </a:xfrm>
-          <a:prstGeom prst="rect">
-            <a:avLst/>
-          </a:prstGeom>
-          <a:noFill/>
-          <a:ln/>
-        </p:spPr>
-        <p:txBody>
-          <a:bodyPr wrap="square" lIns="0" tIns="0" rIns="0" bIns="0" rtlCol="0" anchor="ctr"/>
-          <a:lstStyle/>
-          <a:p>
-            <a:pPr algn="ctr" indent="0" marL="0">
-              <a:buNone/>
-            </a:pPr>
-            <a:r>
-              <a:rPr lang="en-US" sz="1300" b="1" dirty="0">
-                <a:solidFill>
-                  <a:srgbClr val="4338CA"/>
-                </a:solidFill>
-                <a:latin typeface="Trebuchet MS" pitchFamily="34" charset="0"/>
-                <a:ea typeface="Trebuchet MS" pitchFamily="34" charset="-122"/>
-                <a:cs typeface="Trebuchet MS" pitchFamily="34" charset="-120"/>
-              </a:rPr>
-              <a:t>repairs</a:t>
-            </a:r>
-            <a:endParaRPr lang="en-US" sz="1300" dirty="0"/>
-          </a:p>
-        </p:txBody>
-      </p:sp>
-      <p:sp>
-        <p:nvSpPr>
-          <p:cNvPr id="26" name="Shape 24"/>
-          <p:cNvSpPr/>
-          <p:nvPr/>
-        </p:nvSpPr>
-        <p:spPr>
-          <a:xfrm>
-            <a:off x="2514600" y="3401568"/>
-            <a:ext cx="2011680" cy="502920"/>
-          </a:xfrm>
-          <a:prstGeom prst="rect">
-            <a:avLst>
-              <a:gd name="adj" fmla="val 14545"/>
-            </a:avLst>
-          </a:prstGeom>
-          <a:solidFill>
-            <a:srgbClr val="EEF2FF"/>
-          </a:solidFill>
-          <a:ln w="12700">
-            <a:solidFill>
-              <a:srgbClr val="6366F1"/>
-            </a:solidFill>
-            <a:prstDash val="solid"/>
-          </a:ln>
-        </p:spPr>
-      </p:sp>
-      <p:sp>
-        <p:nvSpPr>
-          <p:cNvPr id="27" name="Text 25"/>
-          <p:cNvSpPr/>
-          <p:nvPr/>
-        </p:nvSpPr>
-        <p:spPr>
-          <a:xfrm>
-            <a:off x="2514600" y="3401568"/>
-            <a:ext cx="2011680" cy="502920"/>
-          </a:xfrm>
-          <a:prstGeom prst="rect">
-            <a:avLst/>
-          </a:prstGeom>
-          <a:noFill/>
-          <a:ln/>
-        </p:spPr>
-        <p:txBody>
-          <a:bodyPr wrap="square" lIns="0" tIns="0" rIns="0" bIns="0" rtlCol="0" anchor="ctr"/>
-          <a:lstStyle/>
-          <a:p>
-            <a:pPr algn="ctr" indent="0" marL="0">
-              <a:buNone/>
-            </a:pPr>
-            <a:r>
-              <a:rPr lang="en-US" sz="1300" b="1" dirty="0">
-                <a:solidFill>
-                  <a:srgbClr val="4338CA"/>
-                </a:solidFill>
-                <a:latin typeface="Trebuchet MS" pitchFamily="34" charset="0"/>
-                <a:ea typeface="Trebuchet MS" pitchFamily="34" charset="-122"/>
-                <a:cs typeface="Trebuchet MS" pitchFamily="34" charset="-120"/>
-              </a:rPr>
-              <a:t>repairable</a:t>
-            </a:r>
-            <a:endParaRPr lang="en-US" sz="1300" dirty="0"/>
-          </a:p>
-        </p:txBody>
-      </p:sp>
-      <p:sp>
-        <p:nvSpPr>
-          <p:cNvPr id="28" name="Shape 26"/>
-          <p:cNvSpPr/>
-          <p:nvPr/>
-        </p:nvSpPr>
-        <p:spPr>
-          <a:xfrm>
-            <a:off x="4663440" y="3401568"/>
-            <a:ext cx="2011680" cy="502920"/>
-          </a:xfrm>
-          <a:prstGeom prst="rect">
-            <a:avLst>
-              <a:gd name="adj" fmla="val 14545"/>
-            </a:avLst>
-          </a:prstGeom>
-          <a:solidFill>
-            <a:srgbClr val="EEF2FF"/>
-          </a:solidFill>
-          <a:ln w="12700">
-            <a:solidFill>
-              <a:srgbClr val="6366F1"/>
-            </a:solidFill>
-            <a:prstDash val="solid"/>
-          </a:ln>
-        </p:spPr>
-      </p:sp>
-      <p:sp>
-        <p:nvSpPr>
-          <p:cNvPr id="29" name="Text 27"/>
-          <p:cNvSpPr/>
-          <p:nvPr/>
-        </p:nvSpPr>
-        <p:spPr>
-          <a:xfrm>
-            <a:off x="4663440" y="3401568"/>
-            <a:ext cx="2011680" cy="502920"/>
-          </a:xfrm>
-          <a:prstGeom prst="rect">
-            <a:avLst/>
-          </a:prstGeom>
-          <a:noFill/>
-          <a:ln/>
-        </p:spPr>
-        <p:txBody>
-          <a:bodyPr wrap="square" lIns="0" tIns="0" rIns="0" bIns="0" rtlCol="0" anchor="ctr"/>
-          <a:lstStyle/>
-          <a:p>
-            <a:pPr algn="ctr" indent="0" marL="0">
-              <a:buNone/>
-            </a:pPr>
-            <a:r>
-              <a:rPr lang="en-US" sz="1300" b="1" dirty="0">
-                <a:solidFill>
-                  <a:srgbClr val="4338CA"/>
-                </a:solidFill>
-                <a:latin typeface="Trebuchet MS" pitchFamily="34" charset="0"/>
-                <a:ea typeface="Trebuchet MS" pitchFamily="34" charset="-122"/>
-                <a:cs typeface="Trebuchet MS" pitchFamily="34" charset="-120"/>
-              </a:rPr>
-              <a:t>irreparable</a:t>
             </a:r>
             <a:endParaRPr lang="en-US" sz="1300" dirty="0"/>
           </a:p>
@@ -38140,7 +36809,7 @@
                 <a:ea typeface="Calibri" pitchFamily="34" charset="-122"/>
                 <a:cs typeface="Calibri" pitchFamily="34" charset="-120"/>
               </a:rPr>
-              <a:t>Word Labs  •  wordlabs.app  •  Root: 'repair' = fix or restore something broken</a:t>
+              <a:t>Word Labs  •  wordlabs.app  •  Root: 'repair' = fix</a:t>
             </a:r>
             <a:endParaRPr lang="en-US" sz="800" dirty="0"/>
           </a:p>
@@ -38398,7 +37067,7 @@
             <a:avLst/>
           </a:prstGeom>
           <a:solidFill>
-            <a:srgbClr val="DDD6FE"/>
+            <a:srgbClr val="F8FAFC"/>
           </a:solidFill>
           <a:ln w="12700">
             <a:solidFill>
@@ -38410,14 +37079,39 @@
       </p:sp>
       <p:sp>
         <p:nvSpPr>
-          <p:cNvPr id="18" name="Text 16"/>
-          <p:cNvSpPr/>
-          <p:nvPr/>
-        </p:nvSpPr>
-        <p:spPr>
-          <a:xfrm>
-            <a:off x="640080" y="1755648"/>
-            <a:ext cx="1463040" cy="420624"/>
+          <p:cNvPr id="18" name="Shape 16"/>
+          <p:cNvSpPr/>
+          <p:nvPr/>
+        </p:nvSpPr>
+        <p:spPr>
+          <a:xfrm>
+            <a:off x="3291840" y="1755648"/>
+            <a:ext cx="1645920" cy="420624"/>
+          </a:xfrm>
+          <a:prstGeom prst="rect">
+            <a:avLst/>
+          </a:prstGeom>
+          <a:solidFill>
+            <a:srgbClr val="CCFBF1"/>
+          </a:solidFill>
+          <a:ln w="12700">
+            <a:solidFill>
+              <a:srgbClr val="E5E7EB"/>
+            </a:solidFill>
+            <a:prstDash val="solid"/>
+          </a:ln>
+        </p:spPr>
+      </p:sp>
+      <p:sp>
+        <p:nvSpPr>
+          <p:cNvPr id="19" name="Text 17"/>
+          <p:cNvSpPr/>
+          <p:nvPr/>
+        </p:nvSpPr>
+        <p:spPr>
+          <a:xfrm>
+            <a:off x="3291840" y="1755648"/>
+            <a:ext cx="1645920" cy="420624"/>
           </a:xfrm>
           <a:prstGeom prst="rect">
             <a:avLst/>
@@ -38435,13 +37129,13 @@
             <a:r>
               <a:rPr lang="en-US" sz="1300" b="1" dirty="0">
                 <a:solidFill>
-                  <a:srgbClr val="4C1D95"/>
+                  <a:srgbClr val="0F766E"/>
                 </a:solidFill>
                 <a:latin typeface="Trebuchet MS" pitchFamily="34" charset="0"/>
                 <a:ea typeface="Trebuchet MS" pitchFamily="34" charset="-122"/>
                 <a:cs typeface="Trebuchet MS" pitchFamily="34" charset="-120"/>
               </a:rPr>
-              <a:t>ir-</a:t>
+              <a:t>repair</a:t>
             </a:r>
             <a:endParaRPr lang="en-US" sz="1300" dirty="0"/>
           </a:p>
@@ -38449,20 +37143,20 @@
       </p:sp>
       <p:sp>
         <p:nvSpPr>
-          <p:cNvPr id="19" name="Shape 17"/>
-          <p:cNvSpPr/>
-          <p:nvPr/>
-        </p:nvSpPr>
-        <p:spPr>
-          <a:xfrm>
-            <a:off x="3291840" y="1755648"/>
-            <a:ext cx="1645920" cy="420624"/>
-          </a:xfrm>
-          <a:prstGeom prst="rect">
-            <a:avLst/>
-          </a:prstGeom>
-          <a:solidFill>
-            <a:srgbClr val="CCFBF1"/>
+          <p:cNvPr id="20" name="Shape 18"/>
+          <p:cNvSpPr/>
+          <p:nvPr/>
+        </p:nvSpPr>
+        <p:spPr>
+          <a:xfrm>
+            <a:off x="5943600" y="1755648"/>
+            <a:ext cx="1463040" cy="420624"/>
+          </a:xfrm>
+          <a:prstGeom prst="rect">
+            <a:avLst/>
+          </a:prstGeom>
+          <a:solidFill>
+            <a:srgbClr val="FCE7F3"/>
           </a:solidFill>
           <a:ln w="12700">
             <a:solidFill>
@@ -38474,14 +37168,14 @@
       </p:sp>
       <p:sp>
         <p:nvSpPr>
-          <p:cNvPr id="20" name="Text 18"/>
-          <p:cNvSpPr/>
-          <p:nvPr/>
-        </p:nvSpPr>
-        <p:spPr>
-          <a:xfrm>
-            <a:off x="3291840" y="1755648"/>
-            <a:ext cx="1645920" cy="420624"/>
+          <p:cNvPr id="21" name="Text 19"/>
+          <p:cNvSpPr/>
+          <p:nvPr/>
+        </p:nvSpPr>
+        <p:spPr>
+          <a:xfrm>
+            <a:off x="5943600" y="1755648"/>
+            <a:ext cx="1463040" cy="420624"/>
           </a:xfrm>
           <a:prstGeom prst="rect">
             <a:avLst/>
@@ -38499,13 +37193,13 @@
             <a:r>
               <a:rPr lang="en-US" sz="1300" b="1" dirty="0">
                 <a:solidFill>
-                  <a:srgbClr val="0F766E"/>
+                  <a:srgbClr val="9D174D"/>
                 </a:solidFill>
                 <a:latin typeface="Trebuchet MS" pitchFamily="34" charset="0"/>
                 <a:ea typeface="Trebuchet MS" pitchFamily="34" charset="-122"/>
                 <a:cs typeface="Trebuchet MS" pitchFamily="34" charset="-120"/>
               </a:rPr>
-              <a:t>repair</a:t>
+              <a:t>-able</a:t>
             </a:r>
             <a:endParaRPr lang="en-US" sz="1300" dirty="0"/>
           </a:p>
@@ -38513,19 +37207,69 @@
       </p:sp>
       <p:sp>
         <p:nvSpPr>
-          <p:cNvPr id="21" name="Shape 19"/>
-          <p:cNvSpPr/>
-          <p:nvPr/>
-        </p:nvSpPr>
-        <p:spPr>
-          <a:xfrm>
-            <a:off x="5943600" y="1755648"/>
+          <p:cNvPr id="22" name="Shape 20"/>
+          <p:cNvSpPr/>
+          <p:nvPr/>
+        </p:nvSpPr>
+        <p:spPr>
+          <a:xfrm>
+            <a:off x="640080" y="2212848"/>
             <a:ext cx="1463040" cy="420624"/>
           </a:xfrm>
           <a:prstGeom prst="rect">
             <a:avLst/>
           </a:prstGeom>
           <a:solidFill>
+            <a:srgbClr val="F1F5F9"/>
+          </a:solidFill>
+          <a:ln w="12700">
+            <a:solidFill>
+              <a:srgbClr val="E5E7EB"/>
+            </a:solidFill>
+            <a:prstDash val="solid"/>
+          </a:ln>
+        </p:spPr>
+      </p:sp>
+      <p:sp>
+        <p:nvSpPr>
+          <p:cNvPr id="23" name="Shape 21"/>
+          <p:cNvSpPr/>
+          <p:nvPr/>
+        </p:nvSpPr>
+        <p:spPr>
+          <a:xfrm>
+            <a:off x="3291840" y="2212848"/>
+            <a:ext cx="1645920" cy="420624"/>
+          </a:xfrm>
+          <a:prstGeom prst="rect">
+            <a:avLst/>
+          </a:prstGeom>
+          <a:solidFill>
+            <a:srgbClr val="F1F5F9"/>
+          </a:solidFill>
+          <a:ln w="12700">
+            <a:solidFill>
+              <a:srgbClr val="E5E7EB"/>
+            </a:solidFill>
+            <a:prstDash val="solid"/>
+          </a:ln>
+        </p:spPr>
+      </p:sp>
+      <p:sp>
+        <p:nvSpPr>
+          <p:cNvPr id="24" name="Shape 22"/>
+          <p:cNvSpPr/>
+          <p:nvPr/>
+        </p:nvSpPr>
+        <p:spPr>
+          <a:xfrm>
+            <a:off x="5943600" y="2212848"/>
+            <a:ext cx="1463040" cy="420624"/>
+          </a:xfrm>
+          <a:prstGeom prst="rect">
+            <a:avLst/>
+          </a:prstGeom>
+          <a:solidFill>
             <a:srgbClr val="FCE7F3"/>
           </a:solidFill>
           <a:ln w="12700">
@@ -38538,13 +37282,13 @@
       </p:sp>
       <p:sp>
         <p:nvSpPr>
-          <p:cNvPr id="22" name="Text 20"/>
-          <p:cNvSpPr/>
-          <p:nvPr/>
-        </p:nvSpPr>
-        <p:spPr>
-          <a:xfrm>
-            <a:off x="5943600" y="1755648"/>
+          <p:cNvPr id="25" name="Text 23"/>
+          <p:cNvSpPr/>
+          <p:nvPr/>
+        </p:nvSpPr>
+        <p:spPr>
+          <a:xfrm>
+            <a:off x="5943600" y="2212848"/>
             <a:ext cx="1463040" cy="420624"/>
           </a:xfrm>
           <a:prstGeom prst="rect">
@@ -38577,20 +37321,20 @@
       </p:sp>
       <p:sp>
         <p:nvSpPr>
-          <p:cNvPr id="23" name="Shape 21"/>
-          <p:cNvSpPr/>
-          <p:nvPr/>
-        </p:nvSpPr>
-        <p:spPr>
-          <a:xfrm>
-            <a:off x="640080" y="2212848"/>
+          <p:cNvPr id="26" name="Shape 24"/>
+          <p:cNvSpPr/>
+          <p:nvPr/>
+        </p:nvSpPr>
+        <p:spPr>
+          <a:xfrm>
+            <a:off x="640080" y="2670048"/>
             <a:ext cx="1463040" cy="420624"/>
           </a:xfrm>
           <a:prstGeom prst="rect">
             <a:avLst/>
           </a:prstGeom>
           <a:solidFill>
-            <a:srgbClr val="DDD6FE"/>
+            <a:srgbClr val="F8FAFC"/>
           </a:solidFill>
           <a:ln w="12700">
             <a:solidFill>
@@ -38602,18 +37346,68 @@
       </p:sp>
       <p:sp>
         <p:nvSpPr>
-          <p:cNvPr id="24" name="Text 22"/>
-          <p:cNvSpPr/>
-          <p:nvPr/>
-        </p:nvSpPr>
-        <p:spPr>
-          <a:xfrm>
-            <a:off x="640080" y="2212848"/>
+          <p:cNvPr id="27" name="Shape 25"/>
+          <p:cNvSpPr/>
+          <p:nvPr/>
+        </p:nvSpPr>
+        <p:spPr>
+          <a:xfrm>
+            <a:off x="3291840" y="2670048"/>
+            <a:ext cx="1645920" cy="420624"/>
+          </a:xfrm>
+          <a:prstGeom prst="rect">
+            <a:avLst/>
+          </a:prstGeom>
+          <a:solidFill>
+            <a:srgbClr val="F8FAFC"/>
+          </a:solidFill>
+          <a:ln w="12700">
+            <a:solidFill>
+              <a:srgbClr val="E5E7EB"/>
+            </a:solidFill>
+            <a:prstDash val="solid"/>
+          </a:ln>
+        </p:spPr>
+      </p:sp>
+      <p:sp>
+        <p:nvSpPr>
+          <p:cNvPr id="28" name="Shape 26"/>
+          <p:cNvSpPr/>
+          <p:nvPr/>
+        </p:nvSpPr>
+        <p:spPr>
+          <a:xfrm>
+            <a:off x="5943600" y="2670048"/>
             <a:ext cx="1463040" cy="420624"/>
           </a:xfrm>
           <a:prstGeom prst="rect">
             <a:avLst/>
           </a:prstGeom>
+          <a:solidFill>
+            <a:srgbClr val="FCE7F3"/>
+          </a:solidFill>
+          <a:ln w="12700">
+            <a:solidFill>
+              <a:srgbClr val="E5E7EB"/>
+            </a:solidFill>
+            <a:prstDash val="solid"/>
+          </a:ln>
+        </p:spPr>
+      </p:sp>
+      <p:sp>
+        <p:nvSpPr>
+          <p:cNvPr id="29" name="Text 27"/>
+          <p:cNvSpPr/>
+          <p:nvPr/>
+        </p:nvSpPr>
+        <p:spPr>
+          <a:xfrm>
+            <a:off x="5943600" y="2670048"/>
+            <a:ext cx="1463040" cy="420624"/>
+          </a:xfrm>
+          <a:prstGeom prst="rect">
+            <a:avLst/>
+          </a:prstGeom>
           <a:noFill/>
           <a:ln/>
         </p:spPr>
@@ -38627,13 +37421,13 @@
             <a:r>
               <a:rPr lang="en-US" sz="1300" b="1" dirty="0">
                 <a:solidFill>
-                  <a:srgbClr val="4C1D95"/>
+                  <a:srgbClr val="9D174D"/>
                 </a:solidFill>
                 <a:latin typeface="Trebuchet MS" pitchFamily="34" charset="0"/>
                 <a:ea typeface="Trebuchet MS" pitchFamily="34" charset="-122"/>
                 <a:cs typeface="Trebuchet MS" pitchFamily="34" charset="-120"/>
               </a:rPr>
-              <a:t>un-</a:t>
+              <a:t>-er</a:t>
             </a:r>
             <a:endParaRPr lang="en-US" sz="1300" dirty="0"/>
           </a:p>
@@ -38641,13 +37435,38 @@
       </p:sp>
       <p:sp>
         <p:nvSpPr>
-          <p:cNvPr id="25" name="Shape 23"/>
-          <p:cNvSpPr/>
-          <p:nvPr/>
-        </p:nvSpPr>
-        <p:spPr>
-          <a:xfrm>
-            <a:off x="3291840" y="2212848"/>
+          <p:cNvPr id="30" name="Shape 28"/>
+          <p:cNvSpPr/>
+          <p:nvPr/>
+        </p:nvSpPr>
+        <p:spPr>
+          <a:xfrm>
+            <a:off x="640080" y="3127248"/>
+            <a:ext cx="1463040" cy="420624"/>
+          </a:xfrm>
+          <a:prstGeom prst="rect">
+            <a:avLst/>
+          </a:prstGeom>
+          <a:solidFill>
+            <a:srgbClr val="F1F5F9"/>
+          </a:solidFill>
+          <a:ln w="12700">
+            <a:solidFill>
+              <a:srgbClr val="E5E7EB"/>
+            </a:solidFill>
+            <a:prstDash val="solid"/>
+          </a:ln>
+        </p:spPr>
+      </p:sp>
+      <p:sp>
+        <p:nvSpPr>
+          <p:cNvPr id="31" name="Shape 29"/>
+          <p:cNvSpPr/>
+          <p:nvPr/>
+        </p:nvSpPr>
+        <p:spPr>
+          <a:xfrm>
+            <a:off x="3291840" y="3127248"/>
             <a:ext cx="1645920" cy="420624"/>
           </a:xfrm>
           <a:prstGeom prst="rect">
@@ -38666,13 +37485,13 @@
       </p:sp>
       <p:sp>
         <p:nvSpPr>
-          <p:cNvPr id="26" name="Shape 24"/>
-          <p:cNvSpPr/>
-          <p:nvPr/>
-        </p:nvSpPr>
-        <p:spPr>
-          <a:xfrm>
-            <a:off x="5943600" y="2212848"/>
+          <p:cNvPr id="32" name="Shape 30"/>
+          <p:cNvSpPr/>
+          <p:nvPr/>
+        </p:nvSpPr>
+        <p:spPr>
+          <a:xfrm>
+            <a:off x="5943600" y="3127248"/>
             <a:ext cx="1463040" cy="420624"/>
           </a:xfrm>
           <a:prstGeom prst="rect">
@@ -38691,13 +37510,13 @@
       </p:sp>
       <p:sp>
         <p:nvSpPr>
-          <p:cNvPr id="27" name="Text 25"/>
-          <p:cNvSpPr/>
-          <p:nvPr/>
-        </p:nvSpPr>
-        <p:spPr>
-          <a:xfrm>
-            <a:off x="5943600" y="2212848"/>
+          <p:cNvPr id="33" name="Text 31"/>
+          <p:cNvSpPr/>
+          <p:nvPr/>
+        </p:nvSpPr>
+        <p:spPr>
+          <a:xfrm>
+            <a:off x="5943600" y="3127248"/>
             <a:ext cx="1463040" cy="420624"/>
           </a:xfrm>
           <a:prstGeom prst="rect">
@@ -38730,20 +37549,20 @@
       </p:sp>
       <p:sp>
         <p:nvSpPr>
-          <p:cNvPr id="28" name="Shape 26"/>
-          <p:cNvSpPr/>
-          <p:nvPr/>
-        </p:nvSpPr>
-        <p:spPr>
-          <a:xfrm>
-            <a:off x="640080" y="2670048"/>
+          <p:cNvPr id="34" name="Shape 32"/>
+          <p:cNvSpPr/>
+          <p:nvPr/>
+        </p:nvSpPr>
+        <p:spPr>
+          <a:xfrm>
+            <a:off x="640080" y="3584448"/>
             <a:ext cx="1463040" cy="420624"/>
           </a:xfrm>
           <a:prstGeom prst="rect">
             <a:avLst/>
           </a:prstGeom>
           <a:solidFill>
-            <a:srgbClr val="DDD6FE"/>
+            <a:srgbClr val="F8FAFC"/>
           </a:solidFill>
           <a:ln w="12700">
             <a:solidFill>
@@ -38755,18 +37574,68 @@
       </p:sp>
       <p:sp>
         <p:nvSpPr>
-          <p:cNvPr id="29" name="Text 27"/>
-          <p:cNvSpPr/>
-          <p:nvPr/>
-        </p:nvSpPr>
-        <p:spPr>
-          <a:xfrm>
-            <a:off x="640080" y="2670048"/>
+          <p:cNvPr id="35" name="Shape 33"/>
+          <p:cNvSpPr/>
+          <p:nvPr/>
+        </p:nvSpPr>
+        <p:spPr>
+          <a:xfrm>
+            <a:off x="3291840" y="3584448"/>
+            <a:ext cx="1645920" cy="420624"/>
+          </a:xfrm>
+          <a:prstGeom prst="rect">
+            <a:avLst/>
+          </a:prstGeom>
+          <a:solidFill>
+            <a:srgbClr val="F8FAFC"/>
+          </a:solidFill>
+          <a:ln w="12700">
+            <a:solidFill>
+              <a:srgbClr val="E5E7EB"/>
+            </a:solidFill>
+            <a:prstDash val="solid"/>
+          </a:ln>
+        </p:spPr>
+      </p:sp>
+      <p:sp>
+        <p:nvSpPr>
+          <p:cNvPr id="36" name="Shape 34"/>
+          <p:cNvSpPr/>
+          <p:nvPr/>
+        </p:nvSpPr>
+        <p:spPr>
+          <a:xfrm>
+            <a:off x="5943600" y="3584448"/>
             <a:ext cx="1463040" cy="420624"/>
           </a:xfrm>
           <a:prstGeom prst="rect">
             <a:avLst/>
           </a:prstGeom>
+          <a:solidFill>
+            <a:srgbClr val="FCE7F3"/>
+          </a:solidFill>
+          <a:ln w="12700">
+            <a:solidFill>
+              <a:srgbClr val="E5E7EB"/>
+            </a:solidFill>
+            <a:prstDash val="solid"/>
+          </a:ln>
+        </p:spPr>
+      </p:sp>
+      <p:sp>
+        <p:nvSpPr>
+          <p:cNvPr id="37" name="Text 35"/>
+          <p:cNvSpPr/>
+          <p:nvPr/>
+        </p:nvSpPr>
+        <p:spPr>
+          <a:xfrm>
+            <a:off x="5943600" y="3584448"/>
+            <a:ext cx="1463040" cy="420624"/>
+          </a:xfrm>
+          <a:prstGeom prst="rect">
+            <a:avLst/>
+          </a:prstGeom>
           <a:noFill/>
           <a:ln/>
         </p:spPr>
@@ -38780,13 +37649,13 @@
             <a:r>
               <a:rPr lang="en-US" sz="1300" b="1" dirty="0">
                 <a:solidFill>
-                  <a:srgbClr val="4C1D95"/>
+                  <a:srgbClr val="9D174D"/>
                 </a:solidFill>
                 <a:latin typeface="Trebuchet MS" pitchFamily="34" charset="0"/>
                 <a:ea typeface="Trebuchet MS" pitchFamily="34" charset="-122"/>
                 <a:cs typeface="Trebuchet MS" pitchFamily="34" charset="-120"/>
               </a:rPr>
-              <a:t>re-</a:t>
+              <a:t>-s</a:t>
             </a:r>
             <a:endParaRPr lang="en-US" sz="1300" dirty="0"/>
           </a:p>
@@ -38794,402 +37663,7 @@
       </p:sp>
       <p:sp>
         <p:nvSpPr>
-          <p:cNvPr id="30" name="Shape 28"/>
-          <p:cNvSpPr/>
-          <p:nvPr/>
-        </p:nvSpPr>
-        <p:spPr>
-          <a:xfrm>
-            <a:off x="3291840" y="2670048"/>
-            <a:ext cx="1645920" cy="420624"/>
-          </a:xfrm>
-          <a:prstGeom prst="rect">
-            <a:avLst/>
-          </a:prstGeom>
-          <a:solidFill>
-            <a:srgbClr val="F8FAFC"/>
-          </a:solidFill>
-          <a:ln w="12700">
-            <a:solidFill>
-              <a:srgbClr val="E5E7EB"/>
-            </a:solidFill>
-            <a:prstDash val="solid"/>
-          </a:ln>
-        </p:spPr>
-      </p:sp>
-      <p:sp>
-        <p:nvSpPr>
-          <p:cNvPr id="31" name="Shape 29"/>
-          <p:cNvSpPr/>
-          <p:nvPr/>
-        </p:nvSpPr>
-        <p:spPr>
-          <a:xfrm>
-            <a:off x="5943600" y="2670048"/>
-            <a:ext cx="1463040" cy="420624"/>
-          </a:xfrm>
-          <a:prstGeom prst="rect">
-            <a:avLst/>
-          </a:prstGeom>
-          <a:solidFill>
-            <a:srgbClr val="FCE7F3"/>
-          </a:solidFill>
-          <a:ln w="12700">
-            <a:solidFill>
-              <a:srgbClr val="E5E7EB"/>
-            </a:solidFill>
-            <a:prstDash val="solid"/>
-          </a:ln>
-        </p:spPr>
-      </p:sp>
-      <p:sp>
-        <p:nvSpPr>
-          <p:cNvPr id="32" name="Text 30"/>
-          <p:cNvSpPr/>
-          <p:nvPr/>
-        </p:nvSpPr>
-        <p:spPr>
-          <a:xfrm>
-            <a:off x="5943600" y="2670048"/>
-            <a:ext cx="1463040" cy="420624"/>
-          </a:xfrm>
-          <a:prstGeom prst="rect">
-            <a:avLst/>
-          </a:prstGeom>
-          <a:noFill/>
-          <a:ln/>
-        </p:spPr>
-        <p:txBody>
-          <a:bodyPr wrap="square" lIns="0" tIns="0" rIns="0" bIns="0" rtlCol="0" anchor="ctr"/>
-          <a:lstStyle/>
-          <a:p>
-            <a:pPr algn="ctr" indent="0" marL="0">
-              <a:buNone/>
-            </a:pPr>
-            <a:r>
-              <a:rPr lang="en-US" sz="1300" b="1" dirty="0">
-                <a:solidFill>
-                  <a:srgbClr val="9D174D"/>
-                </a:solidFill>
-                <a:latin typeface="Trebuchet MS" pitchFamily="34" charset="0"/>
-                <a:ea typeface="Trebuchet MS" pitchFamily="34" charset="-122"/>
-                <a:cs typeface="Trebuchet MS" pitchFamily="34" charset="-120"/>
-              </a:rPr>
-              <a:t>-er</a:t>
-            </a:r>
-            <a:endParaRPr lang="en-US" sz="1300" dirty="0"/>
-          </a:p>
-        </p:txBody>
-      </p:sp>
-      <p:sp>
-        <p:nvSpPr>
-          <p:cNvPr id="33" name="Shape 31"/>
-          <p:cNvSpPr/>
-          <p:nvPr/>
-        </p:nvSpPr>
-        <p:spPr>
-          <a:xfrm>
-            <a:off x="640080" y="3127248"/>
-            <a:ext cx="1463040" cy="420624"/>
-          </a:xfrm>
-          <a:prstGeom prst="rect">
-            <a:avLst/>
-          </a:prstGeom>
-          <a:solidFill>
-            <a:srgbClr val="DDD6FE"/>
-          </a:solidFill>
-          <a:ln w="12700">
-            <a:solidFill>
-              <a:srgbClr val="E5E7EB"/>
-            </a:solidFill>
-            <a:prstDash val="solid"/>
-          </a:ln>
-        </p:spPr>
-      </p:sp>
-      <p:sp>
-        <p:nvSpPr>
-          <p:cNvPr id="34" name="Text 32"/>
-          <p:cNvSpPr/>
-          <p:nvPr/>
-        </p:nvSpPr>
-        <p:spPr>
-          <a:xfrm>
-            <a:off x="640080" y="3127248"/>
-            <a:ext cx="1463040" cy="420624"/>
-          </a:xfrm>
-          <a:prstGeom prst="rect">
-            <a:avLst/>
-          </a:prstGeom>
-          <a:noFill/>
-          <a:ln/>
-        </p:spPr>
-        <p:txBody>
-          <a:bodyPr wrap="square" lIns="0" tIns="0" rIns="0" bIns="0" rtlCol="0" anchor="ctr"/>
-          <a:lstStyle/>
-          <a:p>
-            <a:pPr algn="ctr" indent="0" marL="0">
-              <a:buNone/>
-            </a:pPr>
-            <a:r>
-              <a:rPr lang="en-US" sz="1300" b="1" dirty="0">
-                <a:solidFill>
-                  <a:srgbClr val="4C1D95"/>
-                </a:solidFill>
-                <a:latin typeface="Trebuchet MS" pitchFamily="34" charset="0"/>
-                <a:ea typeface="Trebuchet MS" pitchFamily="34" charset="-122"/>
-                <a:cs typeface="Trebuchet MS" pitchFamily="34" charset="-120"/>
-              </a:rPr>
-              <a:t>pre-</a:t>
-            </a:r>
-            <a:endParaRPr lang="en-US" sz="1300" dirty="0"/>
-          </a:p>
-        </p:txBody>
-      </p:sp>
-      <p:sp>
-        <p:nvSpPr>
-          <p:cNvPr id="35" name="Shape 33"/>
-          <p:cNvSpPr/>
-          <p:nvPr/>
-        </p:nvSpPr>
-        <p:spPr>
-          <a:xfrm>
-            <a:off x="3291840" y="3127248"/>
-            <a:ext cx="1645920" cy="420624"/>
-          </a:xfrm>
-          <a:prstGeom prst="rect">
-            <a:avLst/>
-          </a:prstGeom>
-          <a:solidFill>
-            <a:srgbClr val="F1F5F9"/>
-          </a:solidFill>
-          <a:ln w="12700">
-            <a:solidFill>
-              <a:srgbClr val="E5E7EB"/>
-            </a:solidFill>
-            <a:prstDash val="solid"/>
-          </a:ln>
-        </p:spPr>
-      </p:sp>
-      <p:sp>
-        <p:nvSpPr>
-          <p:cNvPr id="36" name="Shape 34"/>
-          <p:cNvSpPr/>
-          <p:nvPr/>
-        </p:nvSpPr>
-        <p:spPr>
-          <a:xfrm>
-            <a:off x="5943600" y="3127248"/>
-            <a:ext cx="1463040" cy="420624"/>
-          </a:xfrm>
-          <a:prstGeom prst="rect">
-            <a:avLst/>
-          </a:prstGeom>
-          <a:solidFill>
-            <a:srgbClr val="FCE7F3"/>
-          </a:solidFill>
-          <a:ln w="12700">
-            <a:solidFill>
-              <a:srgbClr val="E5E7EB"/>
-            </a:solidFill>
-            <a:prstDash val="solid"/>
-          </a:ln>
-        </p:spPr>
-      </p:sp>
-      <p:sp>
-        <p:nvSpPr>
-          <p:cNvPr id="37" name="Text 35"/>
-          <p:cNvSpPr/>
-          <p:nvPr/>
-        </p:nvSpPr>
-        <p:spPr>
-          <a:xfrm>
-            <a:off x="5943600" y="3127248"/>
-            <a:ext cx="1463040" cy="420624"/>
-          </a:xfrm>
-          <a:prstGeom prst="rect">
-            <a:avLst/>
-          </a:prstGeom>
-          <a:noFill/>
-          <a:ln/>
-        </p:spPr>
-        <p:txBody>
-          <a:bodyPr wrap="square" lIns="0" tIns="0" rIns="0" bIns="0" rtlCol="0" anchor="ctr"/>
-          <a:lstStyle/>
-          <a:p>
-            <a:pPr algn="ctr" indent="0" marL="0">
-              <a:buNone/>
-            </a:pPr>
-            <a:r>
-              <a:rPr lang="en-US" sz="1300" b="1" dirty="0">
-                <a:solidFill>
-                  <a:srgbClr val="9D174D"/>
-                </a:solidFill>
-                <a:latin typeface="Trebuchet MS" pitchFamily="34" charset="0"/>
-                <a:ea typeface="Trebuchet MS" pitchFamily="34" charset="-122"/>
-                <a:cs typeface="Trebuchet MS" pitchFamily="34" charset="-120"/>
-              </a:rPr>
-              <a:t>-able</a:t>
-            </a:r>
-            <a:endParaRPr lang="en-US" sz="1300" dirty="0"/>
-          </a:p>
-        </p:txBody>
-      </p:sp>
-      <p:sp>
-        <p:nvSpPr>
-          <p:cNvPr id="38" name="Shape 36"/>
-          <p:cNvSpPr/>
-          <p:nvPr/>
-        </p:nvSpPr>
-        <p:spPr>
-          <a:xfrm>
-            <a:off x="640080" y="3584448"/>
-            <a:ext cx="1463040" cy="420624"/>
-          </a:xfrm>
-          <a:prstGeom prst="rect">
-            <a:avLst/>
-          </a:prstGeom>
-          <a:solidFill>
-            <a:srgbClr val="DDD6FE"/>
-          </a:solidFill>
-          <a:ln w="12700">
-            <a:solidFill>
-              <a:srgbClr val="E5E7EB"/>
-            </a:solidFill>
-            <a:prstDash val="solid"/>
-          </a:ln>
-        </p:spPr>
-      </p:sp>
-      <p:sp>
-        <p:nvSpPr>
-          <p:cNvPr id="39" name="Text 37"/>
-          <p:cNvSpPr/>
-          <p:nvPr/>
-        </p:nvSpPr>
-        <p:spPr>
-          <a:xfrm>
-            <a:off x="640080" y="3584448"/>
-            <a:ext cx="1463040" cy="420624"/>
-          </a:xfrm>
-          <a:prstGeom prst="rect">
-            <a:avLst/>
-          </a:prstGeom>
-          <a:noFill/>
-          <a:ln/>
-        </p:spPr>
-        <p:txBody>
-          <a:bodyPr wrap="square" lIns="0" tIns="0" rIns="0" bIns="0" rtlCol="0" anchor="ctr"/>
-          <a:lstStyle/>
-          <a:p>
-            <a:pPr algn="ctr" indent="0" marL="0">
-              <a:buNone/>
-            </a:pPr>
-            <a:r>
-              <a:rPr lang="en-US" sz="1300" b="1" dirty="0">
-                <a:solidFill>
-                  <a:srgbClr val="4C1D95"/>
-                </a:solidFill>
-                <a:latin typeface="Trebuchet MS" pitchFamily="34" charset="0"/>
-                <a:ea typeface="Trebuchet MS" pitchFamily="34" charset="-122"/>
-                <a:cs typeface="Trebuchet MS" pitchFamily="34" charset="-120"/>
-              </a:rPr>
-              <a:t>mis-</a:t>
-            </a:r>
-            <a:endParaRPr lang="en-US" sz="1300" dirty="0"/>
-          </a:p>
-        </p:txBody>
-      </p:sp>
-      <p:sp>
-        <p:nvSpPr>
-          <p:cNvPr id="40" name="Shape 38"/>
-          <p:cNvSpPr/>
-          <p:nvPr/>
-        </p:nvSpPr>
-        <p:spPr>
-          <a:xfrm>
-            <a:off x="3291840" y="3584448"/>
-            <a:ext cx="1645920" cy="420624"/>
-          </a:xfrm>
-          <a:prstGeom prst="rect">
-            <a:avLst/>
-          </a:prstGeom>
-          <a:solidFill>
-            <a:srgbClr val="F8FAFC"/>
-          </a:solidFill>
-          <a:ln w="12700">
-            <a:solidFill>
-              <a:srgbClr val="E5E7EB"/>
-            </a:solidFill>
-            <a:prstDash val="solid"/>
-          </a:ln>
-        </p:spPr>
-      </p:sp>
-      <p:sp>
-        <p:nvSpPr>
-          <p:cNvPr id="41" name="Shape 39"/>
-          <p:cNvSpPr/>
-          <p:nvPr/>
-        </p:nvSpPr>
-        <p:spPr>
-          <a:xfrm>
-            <a:off x="5943600" y="3584448"/>
-            <a:ext cx="1463040" cy="420624"/>
-          </a:xfrm>
-          <a:prstGeom prst="rect">
-            <a:avLst/>
-          </a:prstGeom>
-          <a:solidFill>
-            <a:srgbClr val="FCE7F3"/>
-          </a:solidFill>
-          <a:ln w="12700">
-            <a:solidFill>
-              <a:srgbClr val="E5E7EB"/>
-            </a:solidFill>
-            <a:prstDash val="solid"/>
-          </a:ln>
-        </p:spPr>
-      </p:sp>
-      <p:sp>
-        <p:nvSpPr>
-          <p:cNvPr id="42" name="Text 40"/>
-          <p:cNvSpPr/>
-          <p:nvPr/>
-        </p:nvSpPr>
-        <p:spPr>
-          <a:xfrm>
-            <a:off x="5943600" y="3584448"/>
-            <a:ext cx="1463040" cy="420624"/>
-          </a:xfrm>
-          <a:prstGeom prst="rect">
-            <a:avLst/>
-          </a:prstGeom>
-          <a:noFill/>
-          <a:ln/>
-        </p:spPr>
-        <p:txBody>
-          <a:bodyPr wrap="square" lIns="0" tIns="0" rIns="0" bIns="0" rtlCol="0" anchor="ctr"/>
-          <a:lstStyle/>
-          <a:p>
-            <a:pPr algn="ctr" indent="0" marL="0">
-              <a:buNone/>
-            </a:pPr>
-            <a:r>
-              <a:rPr lang="en-US" sz="1300" b="1" dirty="0">
-                <a:solidFill>
-                  <a:srgbClr val="9D174D"/>
-                </a:solidFill>
-                <a:latin typeface="Trebuchet MS" pitchFamily="34" charset="0"/>
-                <a:ea typeface="Trebuchet MS" pitchFamily="34" charset="-122"/>
-                <a:cs typeface="Trebuchet MS" pitchFamily="34" charset="-120"/>
-              </a:rPr>
-              <a:t>-s</a:t>
-            </a:r>
-            <a:endParaRPr lang="en-US" sz="1300" dirty="0"/>
-          </a:p>
-        </p:txBody>
-      </p:sp>
-      <p:sp>
-        <p:nvSpPr>
-          <p:cNvPr id="43" name="Text 41"/>
+          <p:cNvPr id="38" name="Text 36"/>
           <p:cNvSpPr/>
           <p:nvPr/>
         </p:nvSpPr>
@@ -39228,14 +37702,14 @@
       </p:sp>
       <p:sp>
         <p:nvSpPr>
-          <p:cNvPr id="44" name="Shape 42"/>
+          <p:cNvPr id="39" name="Shape 37"/>
           <p:cNvSpPr/>
           <p:nvPr/>
         </p:nvSpPr>
         <p:spPr>
           <a:xfrm>
             <a:off x="1508760" y="4178808"/>
-            <a:ext cx="822960" cy="420624"/>
+            <a:ext cx="1536192" cy="420624"/>
           </a:xfrm>
           <a:prstGeom prst="rect">
             <a:avLst>
@@ -39243,11 +37717,11 @@
             </a:avLst>
           </a:prstGeom>
           <a:solidFill>
-            <a:srgbClr val="DDD6FE"/>
+            <a:srgbClr val="CCFBF1"/>
           </a:solidFill>
           <a:ln w="19050">
             <a:solidFill>
-              <a:srgbClr val="7C3AED"/>
+              <a:srgbClr val="0D9488"/>
             </a:solidFill>
             <a:prstDash val="solid"/>
           </a:ln>
@@ -39262,14 +37736,14 @@
       </p:sp>
       <p:sp>
         <p:nvSpPr>
-          <p:cNvPr id="45" name="Text 43"/>
+          <p:cNvPr id="40" name="Text 38"/>
           <p:cNvSpPr/>
           <p:nvPr/>
         </p:nvSpPr>
         <p:spPr>
           <a:xfrm>
             <a:off x="1508760" y="4178808"/>
-            <a:ext cx="822960" cy="420624"/>
+            <a:ext cx="1536192" cy="420624"/>
           </a:xfrm>
           <a:prstGeom prst="rect">
             <a:avLst/>
@@ -39287,13 +37761,13 @@
             <a:r>
               <a:rPr lang="en-US" sz="1300" b="1" dirty="0">
                 <a:solidFill>
-                  <a:srgbClr val="4C1D95"/>
+                  <a:srgbClr val="0F766E"/>
                 </a:solidFill>
                 <a:latin typeface="Trebuchet MS" pitchFamily="34" charset="0"/>
                 <a:ea typeface="Trebuchet MS" pitchFamily="34" charset="-122"/>
                 <a:cs typeface="Trebuchet MS" pitchFamily="34" charset="-120"/>
               </a:rPr>
-              <a:t>ir-</a:t>
+              <a:t>'repair'</a:t>
             </a:r>
             <a:endParaRPr lang="en-US" sz="1300" dirty="0"/>
           </a:p>
@@ -39301,13 +37775,13 @@
       </p:sp>
       <p:sp>
         <p:nvSpPr>
-          <p:cNvPr id="46" name="Text 44"/>
-          <p:cNvSpPr/>
-          <p:nvPr/>
-        </p:nvSpPr>
-        <p:spPr>
-          <a:xfrm>
-            <a:off x="2359152" y="4178808"/>
+          <p:cNvPr id="41" name="Text 39"/>
+          <p:cNvSpPr/>
+          <p:nvPr/>
+        </p:nvSpPr>
+        <p:spPr>
+          <a:xfrm>
+            <a:off x="3072384" y="4178808"/>
             <a:ext cx="320040" cy="420624"/>
           </a:xfrm>
           <a:prstGeom prst="rect">
@@ -39340,14 +37814,14 @@
       </p:sp>
       <p:sp>
         <p:nvSpPr>
-          <p:cNvPr id="47" name="Shape 45"/>
-          <p:cNvSpPr/>
-          <p:nvPr/>
-        </p:nvSpPr>
-        <p:spPr>
-          <a:xfrm>
-            <a:off x="2706624" y="4178808"/>
-            <a:ext cx="1536192" cy="420624"/>
+          <p:cNvPr id="42" name="Shape 40"/>
+          <p:cNvSpPr/>
+          <p:nvPr/>
+        </p:nvSpPr>
+        <p:spPr>
+          <a:xfrm>
+            <a:off x="3419856" y="4178808"/>
+            <a:ext cx="1097280" cy="420624"/>
           </a:xfrm>
           <a:prstGeom prst="rect">
             <a:avLst>
@@ -39355,11 +37829,11 @@
             </a:avLst>
           </a:prstGeom>
           <a:solidFill>
-            <a:srgbClr val="CCFBF1"/>
+            <a:srgbClr val="FCE7F3"/>
           </a:solidFill>
           <a:ln w="19050">
             <a:solidFill>
-              <a:srgbClr val="0D9488"/>
+              <a:srgbClr val="DB2777"/>
             </a:solidFill>
             <a:prstDash val="solid"/>
           </a:ln>
@@ -39374,14 +37848,14 @@
       </p:sp>
       <p:sp>
         <p:nvSpPr>
-          <p:cNvPr id="48" name="Text 46"/>
-          <p:cNvSpPr/>
-          <p:nvPr/>
-        </p:nvSpPr>
-        <p:spPr>
-          <a:xfrm>
-            <a:off x="2706624" y="4178808"/>
-            <a:ext cx="1536192" cy="420624"/>
+          <p:cNvPr id="43" name="Text 41"/>
+          <p:cNvSpPr/>
+          <p:nvPr/>
+        </p:nvSpPr>
+        <p:spPr>
+          <a:xfrm>
+            <a:off x="3419856" y="4178808"/>
+            <a:ext cx="1097280" cy="420624"/>
           </a:xfrm>
           <a:prstGeom prst="rect">
             <a:avLst/>
@@ -39399,13 +37873,13 @@
             <a:r>
               <a:rPr lang="en-US" sz="1300" b="1" dirty="0">
                 <a:solidFill>
-                  <a:srgbClr val="0F766E"/>
+                  <a:srgbClr val="9D174D"/>
                 </a:solidFill>
                 <a:latin typeface="Trebuchet MS" pitchFamily="34" charset="0"/>
                 <a:ea typeface="Trebuchet MS" pitchFamily="34" charset="-122"/>
                 <a:cs typeface="Trebuchet MS" pitchFamily="34" charset="-120"/>
               </a:rPr>
-              <a:t>'repair'</a:t>
+              <a:t>-able</a:t>
             </a:r>
             <a:endParaRPr lang="en-US" sz="1300" dirty="0"/>
           </a:p>
@@ -39413,14 +37887,14 @@
       </p:sp>
       <p:sp>
         <p:nvSpPr>
-          <p:cNvPr id="49" name="Text 47"/>
-          <p:cNvSpPr/>
-          <p:nvPr/>
-        </p:nvSpPr>
-        <p:spPr>
-          <a:xfrm>
-            <a:off x="4270248" y="4178808"/>
-            <a:ext cx="320040" cy="420624"/>
+          <p:cNvPr id="44" name="Text 42"/>
+          <p:cNvSpPr/>
+          <p:nvPr/>
+        </p:nvSpPr>
+        <p:spPr>
+          <a:xfrm>
+            <a:off x="4590288" y="4178808"/>
+            <a:ext cx="365760" cy="420624"/>
           </a:xfrm>
           <a:prstGeom prst="rect">
             <a:avLst/>
@@ -39436,30 +37910,30 @@
               <a:buNone/>
             </a:pPr>
             <a:r>
-              <a:rPr lang="en-US" sz="1400" dirty="0">
-                <a:solidFill>
-                  <a:srgbClr val="475569"/>
+              <a:rPr lang="en-US" sz="1800" b="1" dirty="0">
+                <a:solidFill>
+                  <a:srgbClr val="0D9488"/>
                 </a:solidFill>
                 <a:latin typeface="Trebuchet MS" pitchFamily="34" charset="0"/>
                 <a:ea typeface="Trebuchet MS" pitchFamily="34" charset="-122"/>
                 <a:cs typeface="Trebuchet MS" pitchFamily="34" charset="-120"/>
               </a:rPr>
-              <a:t>+</a:t>
-            </a:r>
-            <a:endParaRPr lang="en-US" sz="1400" dirty="0"/>
-          </a:p>
-        </p:txBody>
-      </p:sp>
-      <p:sp>
-        <p:nvSpPr>
-          <p:cNvPr id="50" name="Shape 48"/>
-          <p:cNvSpPr/>
-          <p:nvPr/>
-        </p:nvSpPr>
-        <p:spPr>
-          <a:xfrm>
-            <a:off x="4617720" y="4178808"/>
-            <a:ext cx="822960" cy="420624"/>
+              <a:t>=</a:t>
+            </a:r>
+            <a:endParaRPr lang="en-US" sz="1800" dirty="0"/>
+          </a:p>
+        </p:txBody>
+      </p:sp>
+      <p:sp>
+        <p:nvSpPr>
+          <p:cNvPr id="45" name="Shape 43"/>
+          <p:cNvSpPr/>
+          <p:nvPr/>
+        </p:nvSpPr>
+        <p:spPr>
+          <a:xfrm>
+            <a:off x="5001768" y="4178808"/>
+            <a:ext cx="2194560" cy="420624"/>
           </a:xfrm>
           <a:prstGeom prst="rect">
             <a:avLst>
@@ -39467,118 +37941,6 @@
             </a:avLst>
           </a:prstGeom>
           <a:solidFill>
-            <a:srgbClr val="FCE7F3"/>
-          </a:solidFill>
-          <a:ln w="19050">
-            <a:solidFill>
-              <a:srgbClr val="DB2777"/>
-            </a:solidFill>
-            <a:prstDash val="solid"/>
-          </a:ln>
-          <a:effectLst>
-            <a:outerShdw sx="100000" sy="100000" kx="0" ky="0" algn="bl" rotWithShape="0" blurRad="101600" dist="38100" dir="8100000">
-              <a:srgbClr val="000000">
-                <a:alpha val="12000"/>
-              </a:srgbClr>
-            </a:outerShdw>
-          </a:effectLst>
-        </p:spPr>
-      </p:sp>
-      <p:sp>
-        <p:nvSpPr>
-          <p:cNvPr id="51" name="Text 49"/>
-          <p:cNvSpPr/>
-          <p:nvPr/>
-        </p:nvSpPr>
-        <p:spPr>
-          <a:xfrm>
-            <a:off x="4617720" y="4178808"/>
-            <a:ext cx="822960" cy="420624"/>
-          </a:xfrm>
-          <a:prstGeom prst="rect">
-            <a:avLst/>
-          </a:prstGeom>
-          <a:noFill/>
-          <a:ln/>
-        </p:spPr>
-        <p:txBody>
-          <a:bodyPr wrap="square" lIns="0" tIns="0" rIns="0" bIns="0" rtlCol="0" anchor="ctr"/>
-          <a:lstStyle/>
-          <a:p>
-            <a:pPr algn="ctr" indent="0" marL="0">
-              <a:buNone/>
-            </a:pPr>
-            <a:r>
-              <a:rPr lang="en-US" sz="1300" b="1" dirty="0">
-                <a:solidFill>
-                  <a:srgbClr val="9D174D"/>
-                </a:solidFill>
-                <a:latin typeface="Trebuchet MS" pitchFamily="34" charset="0"/>
-                <a:ea typeface="Trebuchet MS" pitchFamily="34" charset="-122"/>
-                <a:cs typeface="Trebuchet MS" pitchFamily="34" charset="-120"/>
-              </a:rPr>
-              <a:t>-ed</a:t>
-            </a:r>
-            <a:endParaRPr lang="en-US" sz="1300" dirty="0"/>
-          </a:p>
-        </p:txBody>
-      </p:sp>
-      <p:sp>
-        <p:nvSpPr>
-          <p:cNvPr id="52" name="Text 50"/>
-          <p:cNvSpPr/>
-          <p:nvPr/>
-        </p:nvSpPr>
-        <p:spPr>
-          <a:xfrm>
-            <a:off x="5513832" y="4178808"/>
-            <a:ext cx="365760" cy="420624"/>
-          </a:xfrm>
-          <a:prstGeom prst="rect">
-            <a:avLst/>
-          </a:prstGeom>
-          <a:noFill/>
-          <a:ln/>
-        </p:spPr>
-        <p:txBody>
-          <a:bodyPr wrap="square" lIns="0" tIns="0" rIns="0" bIns="0" rtlCol="0" anchor="ctr"/>
-          <a:lstStyle/>
-          <a:p>
-            <a:pPr algn="ctr" indent="0" marL="0">
-              <a:buNone/>
-            </a:pPr>
-            <a:r>
-              <a:rPr lang="en-US" sz="1800" b="1" dirty="0">
-                <a:solidFill>
-                  <a:srgbClr val="0D9488"/>
-                </a:solidFill>
-                <a:latin typeface="Trebuchet MS" pitchFamily="34" charset="0"/>
-                <a:ea typeface="Trebuchet MS" pitchFamily="34" charset="-122"/>
-                <a:cs typeface="Trebuchet MS" pitchFamily="34" charset="-120"/>
-              </a:rPr>
-              <a:t>=</a:t>
-            </a:r>
-            <a:endParaRPr lang="en-US" sz="1800" dirty="0"/>
-          </a:p>
-        </p:txBody>
-      </p:sp>
-      <p:sp>
-        <p:nvSpPr>
-          <p:cNvPr id="53" name="Shape 51"/>
-          <p:cNvSpPr/>
-          <p:nvPr/>
-        </p:nvSpPr>
-        <p:spPr>
-          <a:xfrm>
-            <a:off x="5925312" y="4178808"/>
-            <a:ext cx="2194560" cy="420624"/>
-          </a:xfrm>
-          <a:prstGeom prst="rect">
-            <a:avLst>
-              <a:gd name="adj" fmla="val 17391"/>
-            </a:avLst>
-          </a:prstGeom>
-          <a:solidFill>
             <a:srgbClr val="0D9488"/>
           </a:solidFill>
           <a:ln w="12700">
@@ -39591,13 +37953,13 @@
       </p:sp>
       <p:sp>
         <p:nvSpPr>
-          <p:cNvPr id="54" name="Text 52"/>
-          <p:cNvSpPr/>
-          <p:nvPr/>
-        </p:nvSpPr>
-        <p:spPr>
-          <a:xfrm>
-            <a:off x="5925312" y="4178808"/>
+          <p:cNvPr id="46" name="Text 44"/>
+          <p:cNvSpPr/>
+          <p:nvPr/>
+        </p:nvSpPr>
+        <p:spPr>
+          <a:xfrm>
+            <a:off x="5001768" y="4178808"/>
             <a:ext cx="2194560" cy="420624"/>
           </a:xfrm>
           <a:prstGeom prst="rect">
@@ -39914,7 +38276,7 @@
                 <a:ea typeface="Calibri" pitchFamily="34" charset="-122"/>
                 <a:cs typeface="Calibri" pitchFamily="34" charset="-120"/>
               </a:rPr>
-              <a:t>Word Labs  •  wordlabs.app  •  Root: 'repair' = fix or restore something broken</a:t>
+              <a:t>Word Labs  •  wordlabs.app  •  Root: 'repair' = fix</a:t>
             </a:r>
             <a:endParaRPr lang="en-US" sz="800" dirty="0"/>
           </a:p>
@@ -40092,841 +38454,7 @@
                 <a:ea typeface="Calibri" pitchFamily="34" charset="-122"/>
                 <a:cs typeface="Calibri" pitchFamily="34" charset="-120"/>
               </a:rPr>
-              <a:t>More than one fix, or the act of fixing several things.</a:t>
-            </a:r>
-            <a:endParaRPr lang="en-US" sz="1200" dirty="0"/>
-          </a:p>
-        </p:txBody>
-      </p:sp>
-      <p:sp>
-        <p:nvSpPr>
-          <p:cNvPr id="15" name="Shape 13"/>
-          <p:cNvSpPr/>
-          <p:nvPr/>
-        </p:nvSpPr>
-        <p:spPr>
-          <a:xfrm>
-            <a:off x="365760" y="1719072"/>
-            <a:ext cx="2011680" cy="457200"/>
-          </a:xfrm>
-          <a:prstGeom prst="rect">
-            <a:avLst>
-              <a:gd name="adj" fmla="val 12000"/>
-            </a:avLst>
-          </a:prstGeom>
-          <a:solidFill>
-            <a:srgbClr val="EEF2FF"/>
-          </a:solidFill>
-          <a:ln w="12700">
-            <a:solidFill>
-              <a:srgbClr val="6366F1"/>
-            </a:solidFill>
-            <a:prstDash val="solid"/>
-          </a:ln>
-          <a:effectLst>
-            <a:outerShdw sx="100000" sy="100000" kx="0" ky="0" algn="bl" rotWithShape="0" blurRad="101600" dist="38100" dir="8100000">
-              <a:srgbClr val="000000">
-                <a:alpha val="12000"/>
-              </a:srgbClr>
-            </a:outerShdw>
-          </a:effectLst>
-        </p:spPr>
-      </p:sp>
-      <p:sp>
-        <p:nvSpPr>
-          <p:cNvPr id="16" name="Text 14"/>
-          <p:cNvSpPr/>
-          <p:nvPr/>
-        </p:nvSpPr>
-        <p:spPr>
-          <a:xfrm>
-            <a:off x="365760" y="1719072"/>
-            <a:ext cx="2011680" cy="457200"/>
-          </a:xfrm>
-          <a:prstGeom prst="rect">
-            <a:avLst/>
-          </a:prstGeom>
-          <a:noFill/>
-          <a:ln/>
-        </p:spPr>
-        <p:txBody>
-          <a:bodyPr wrap="square" lIns="0" tIns="0" rIns="0" bIns="0" rtlCol="0" anchor="ctr"/>
-          <a:lstStyle/>
-          <a:p>
-            <a:pPr algn="ctr" indent="0" marL="0">
-              <a:buNone/>
-            </a:pPr>
-            <a:r>
-              <a:rPr lang="en-US" sz="1200" b="1" dirty="0">
-                <a:solidFill>
-                  <a:srgbClr val="4338CA"/>
-                </a:solidFill>
-                <a:latin typeface="Trebuchet MS" pitchFamily="34" charset="0"/>
-                <a:ea typeface="Trebuchet MS" pitchFamily="34" charset="-122"/>
-                <a:cs typeface="Trebuchet MS" pitchFamily="34" charset="-120"/>
-              </a:rPr>
-              <a:t>repaired</a:t>
-            </a:r>
-            <a:endParaRPr lang="en-US" sz="1200" dirty="0"/>
-          </a:p>
-        </p:txBody>
-      </p:sp>
-      <p:sp>
-        <p:nvSpPr>
-          <p:cNvPr id="17" name="Shape 15"/>
-          <p:cNvSpPr/>
-          <p:nvPr/>
-        </p:nvSpPr>
-        <p:spPr>
-          <a:xfrm>
-            <a:off x="2514600" y="1719072"/>
-            <a:ext cx="6263640" cy="457200"/>
-          </a:xfrm>
-          <a:prstGeom prst="rect">
-            <a:avLst>
-              <a:gd name="adj" fmla="val 12000"/>
-            </a:avLst>
-          </a:prstGeom>
-          <a:solidFill>
-            <a:srgbClr val="F8FAFC"/>
-          </a:solidFill>
-          <a:ln w="12700">
-            <a:solidFill>
-              <a:srgbClr val="E2E8F0"/>
-            </a:solidFill>
-            <a:prstDash val="solid"/>
-          </a:ln>
-        </p:spPr>
-      </p:sp>
-      <p:sp>
-        <p:nvSpPr>
-          <p:cNvPr id="18" name="Text 16"/>
-          <p:cNvSpPr/>
-          <p:nvPr/>
-        </p:nvSpPr>
-        <p:spPr>
-          <a:xfrm>
-            <a:off x="2651760" y="1719072"/>
-            <a:ext cx="6035040" cy="457200"/>
-          </a:xfrm>
-          <a:prstGeom prst="rect">
-            <a:avLst/>
-          </a:prstGeom>
-          <a:noFill/>
-          <a:ln/>
-        </p:spPr>
-        <p:txBody>
-          <a:bodyPr wrap="square" rtlCol="0" anchor="ctr"/>
-          <a:lstStyle/>
-          <a:p>
-            <a:pPr algn="l" indent="0" marL="0">
-              <a:buNone/>
-            </a:pPr>
-            <a:r>
-              <a:rPr lang="en-US" sz="1200" dirty="0">
-                <a:solidFill>
-                  <a:srgbClr val="0F172A"/>
-                </a:solidFill>
-                <a:latin typeface="Calibri" pitchFamily="34" charset="0"/>
-                <a:ea typeface="Calibri" pitchFamily="34" charset="-122"/>
-                <a:cs typeface="Calibri" pitchFamily="34" charset="-120"/>
-              </a:rPr>
-              <a:t>A person whose job is to fix broken things.</a:t>
-            </a:r>
-            <a:endParaRPr lang="en-US" sz="1200" dirty="0"/>
-          </a:p>
-        </p:txBody>
-      </p:sp>
-      <p:sp>
-        <p:nvSpPr>
-          <p:cNvPr id="19" name="Shape 17"/>
-          <p:cNvSpPr/>
-          <p:nvPr/>
-        </p:nvSpPr>
-        <p:spPr>
-          <a:xfrm>
-            <a:off x="365760" y="2249424"/>
-            <a:ext cx="2011680" cy="457200"/>
-          </a:xfrm>
-          <a:prstGeom prst="rect">
-            <a:avLst>
-              <a:gd name="adj" fmla="val 12000"/>
-            </a:avLst>
-          </a:prstGeom>
-          <a:solidFill>
-            <a:srgbClr val="EEF2FF"/>
-          </a:solidFill>
-          <a:ln w="12700">
-            <a:solidFill>
-              <a:srgbClr val="6366F1"/>
-            </a:solidFill>
-            <a:prstDash val="solid"/>
-          </a:ln>
-          <a:effectLst>
-            <a:outerShdw sx="100000" sy="100000" kx="0" ky="0" algn="bl" rotWithShape="0" blurRad="101600" dist="38100" dir="8100000">
-              <a:srgbClr val="000000">
-                <a:alpha val="12000"/>
-              </a:srgbClr>
-            </a:outerShdw>
-          </a:effectLst>
-        </p:spPr>
-      </p:sp>
-      <p:sp>
-        <p:nvSpPr>
-          <p:cNvPr id="20" name="Text 18"/>
-          <p:cNvSpPr/>
-          <p:nvPr/>
-        </p:nvSpPr>
-        <p:spPr>
-          <a:xfrm>
-            <a:off x="365760" y="2249424"/>
-            <a:ext cx="2011680" cy="457200"/>
-          </a:xfrm>
-          <a:prstGeom prst="rect">
-            <a:avLst/>
-          </a:prstGeom>
-          <a:noFill/>
-          <a:ln/>
-        </p:spPr>
-        <p:txBody>
-          <a:bodyPr wrap="square" lIns="0" tIns="0" rIns="0" bIns="0" rtlCol="0" anchor="ctr"/>
-          <a:lstStyle/>
-          <a:p>
-            <a:pPr algn="ctr" indent="0" marL="0">
-              <a:buNone/>
-            </a:pPr>
-            <a:r>
-              <a:rPr lang="en-US" sz="1200" b="1" dirty="0">
-                <a:solidFill>
-                  <a:srgbClr val="4338CA"/>
-                </a:solidFill>
-                <a:latin typeface="Trebuchet MS" pitchFamily="34" charset="0"/>
-                <a:ea typeface="Trebuchet MS" pitchFamily="34" charset="-122"/>
-                <a:cs typeface="Trebuchet MS" pitchFamily="34" charset="-120"/>
-              </a:rPr>
-              <a:t>repairing</a:t>
-            </a:r>
-            <a:endParaRPr lang="en-US" sz="1200" dirty="0"/>
-          </a:p>
-        </p:txBody>
-      </p:sp>
-      <p:sp>
-        <p:nvSpPr>
-          <p:cNvPr id="21" name="Shape 19"/>
-          <p:cNvSpPr/>
-          <p:nvPr/>
-        </p:nvSpPr>
-        <p:spPr>
-          <a:xfrm>
-            <a:off x="2514600" y="2249424"/>
-            <a:ext cx="6263640" cy="457200"/>
-          </a:xfrm>
-          <a:prstGeom prst="rect">
-            <a:avLst>
-              <a:gd name="adj" fmla="val 12000"/>
-            </a:avLst>
-          </a:prstGeom>
-          <a:solidFill>
-            <a:srgbClr val="F8FAFC"/>
-          </a:solidFill>
-          <a:ln w="12700">
-            <a:solidFill>
-              <a:srgbClr val="E2E8F0"/>
-            </a:solidFill>
-            <a:prstDash val="solid"/>
-          </a:ln>
-        </p:spPr>
-      </p:sp>
-      <p:sp>
-        <p:nvSpPr>
-          <p:cNvPr id="22" name="Text 20"/>
-          <p:cNvSpPr/>
-          <p:nvPr/>
-        </p:nvSpPr>
-        <p:spPr>
-          <a:xfrm>
-            <a:off x="2651760" y="2249424"/>
-            <a:ext cx="6035040" cy="457200"/>
-          </a:xfrm>
-          <a:prstGeom prst="rect">
-            <a:avLst/>
-          </a:prstGeom>
-          <a:noFill/>
-          <a:ln/>
-        </p:spPr>
-        <p:txBody>
-          <a:bodyPr wrap="square" rtlCol="0" anchor="ctr"/>
-          <a:lstStyle/>
-          <a:p>
-            <a:pPr algn="l" indent="0" marL="0">
-              <a:buNone/>
-            </a:pPr>
-            <a:r>
-              <a:rPr lang="en-US" sz="1200" dirty="0">
-                <a:solidFill>
-                  <a:srgbClr val="0F172A"/>
-                </a:solidFill>
-                <a:latin typeface="Calibri" pitchFamily="34" charset="0"/>
-                <a:ea typeface="Calibri" pitchFamily="34" charset="-122"/>
-                <a:cs typeface="Calibri" pitchFamily="34" charset="-120"/>
-              </a:rPr>
-              <a:t>The act of fixing something right now.</a:t>
-            </a:r>
-            <a:endParaRPr lang="en-US" sz="1200" dirty="0"/>
-          </a:p>
-        </p:txBody>
-      </p:sp>
-      <p:sp>
-        <p:nvSpPr>
-          <p:cNvPr id="23" name="Shape 21"/>
-          <p:cNvSpPr/>
-          <p:nvPr/>
-        </p:nvSpPr>
-        <p:spPr>
-          <a:xfrm>
-            <a:off x="365760" y="2779776"/>
-            <a:ext cx="2011680" cy="457200"/>
-          </a:xfrm>
-          <a:prstGeom prst="rect">
-            <a:avLst>
-              <a:gd name="adj" fmla="val 12000"/>
-            </a:avLst>
-          </a:prstGeom>
-          <a:solidFill>
-            <a:srgbClr val="EEF2FF"/>
-          </a:solidFill>
-          <a:ln w="12700">
-            <a:solidFill>
-              <a:srgbClr val="6366F1"/>
-            </a:solidFill>
-            <a:prstDash val="solid"/>
-          </a:ln>
-          <a:effectLst>
-            <a:outerShdw sx="100000" sy="100000" kx="0" ky="0" algn="bl" rotWithShape="0" blurRad="101600" dist="38100" dir="8100000">
-              <a:srgbClr val="000000">
-                <a:alpha val="12000"/>
-              </a:srgbClr>
-            </a:outerShdw>
-          </a:effectLst>
-        </p:spPr>
-      </p:sp>
-      <p:sp>
-        <p:nvSpPr>
-          <p:cNvPr id="24" name="Text 22"/>
-          <p:cNvSpPr/>
-          <p:nvPr/>
-        </p:nvSpPr>
-        <p:spPr>
-          <a:xfrm>
-            <a:off x="365760" y="2779776"/>
-            <a:ext cx="2011680" cy="457200"/>
-          </a:xfrm>
-          <a:prstGeom prst="rect">
-            <a:avLst/>
-          </a:prstGeom>
-          <a:noFill/>
-          <a:ln/>
-        </p:spPr>
-        <p:txBody>
-          <a:bodyPr wrap="square" lIns="0" tIns="0" rIns="0" bIns="0" rtlCol="0" anchor="ctr"/>
-          <a:lstStyle/>
-          <a:p>
-            <a:pPr algn="ctr" indent="0" marL="0">
-              <a:buNone/>
-            </a:pPr>
-            <a:r>
-              <a:rPr lang="en-US" sz="1200" b="1" dirty="0">
-                <a:solidFill>
-                  <a:srgbClr val="4338CA"/>
-                </a:solidFill>
-                <a:latin typeface="Trebuchet MS" pitchFamily="34" charset="0"/>
-                <a:ea typeface="Trebuchet MS" pitchFamily="34" charset="-122"/>
-                <a:cs typeface="Trebuchet MS" pitchFamily="34" charset="-120"/>
-              </a:rPr>
-              <a:t>repairer</a:t>
-            </a:r>
-            <a:endParaRPr lang="en-US" sz="1200" dirty="0"/>
-          </a:p>
-        </p:txBody>
-      </p:sp>
-      <p:sp>
-        <p:nvSpPr>
-          <p:cNvPr id="25" name="Shape 23"/>
-          <p:cNvSpPr/>
-          <p:nvPr/>
-        </p:nvSpPr>
-        <p:spPr>
-          <a:xfrm>
-            <a:off x="2514600" y="2779776"/>
-            <a:ext cx="6263640" cy="457200"/>
-          </a:xfrm>
-          <a:prstGeom prst="rect">
-            <a:avLst>
-              <a:gd name="adj" fmla="val 12000"/>
-            </a:avLst>
-          </a:prstGeom>
-          <a:solidFill>
-            <a:srgbClr val="F8FAFC"/>
-          </a:solidFill>
-          <a:ln w="12700">
-            <a:solidFill>
-              <a:srgbClr val="E2E8F0"/>
-            </a:solidFill>
-            <a:prstDash val="solid"/>
-          </a:ln>
-        </p:spPr>
-      </p:sp>
-      <p:sp>
-        <p:nvSpPr>
-          <p:cNvPr id="26" name="Text 24"/>
-          <p:cNvSpPr/>
-          <p:nvPr/>
-        </p:nvSpPr>
-        <p:spPr>
-          <a:xfrm>
-            <a:off x="2651760" y="2779776"/>
-            <a:ext cx="6035040" cy="457200"/>
-          </a:xfrm>
-          <a:prstGeom prst="rect">
-            <a:avLst/>
-          </a:prstGeom>
-          <a:noFill/>
-          <a:ln/>
-        </p:spPr>
-        <p:txBody>
-          <a:bodyPr wrap="square" rtlCol="0" anchor="ctr"/>
-          <a:lstStyle/>
-          <a:p>
-            <a:pPr algn="l" indent="0" marL="0">
-              <a:buNone/>
-            </a:pPr>
-            <a:r>
-              <a:rPr lang="en-US" sz="1200" dirty="0">
-                <a:solidFill>
-                  <a:srgbClr val="0F172A"/>
-                </a:solidFill>
-                <a:latin typeface="Calibri" pitchFamily="34" charset="0"/>
-                <a:ea typeface="Calibri" pitchFamily="34" charset="-122"/>
-                <a:cs typeface="Calibri" pitchFamily="34" charset="-120"/>
-              </a:rPr>
-              <a:t>Something so badly damaged it cannot be fixed.</a:t>
-            </a:r>
-            <a:endParaRPr lang="en-US" sz="1200" dirty="0"/>
-          </a:p>
-        </p:txBody>
-      </p:sp>
-      <p:sp>
-        <p:nvSpPr>
-          <p:cNvPr id="27" name="Shape 25"/>
-          <p:cNvSpPr/>
-          <p:nvPr/>
-        </p:nvSpPr>
-        <p:spPr>
-          <a:xfrm>
-            <a:off x="365760" y="3310128"/>
-            <a:ext cx="2011680" cy="457200"/>
-          </a:xfrm>
-          <a:prstGeom prst="rect">
-            <a:avLst>
-              <a:gd name="adj" fmla="val 12000"/>
-            </a:avLst>
-          </a:prstGeom>
-          <a:solidFill>
-            <a:srgbClr val="EEF2FF"/>
-          </a:solidFill>
-          <a:ln w="12700">
-            <a:solidFill>
-              <a:srgbClr val="6366F1"/>
-            </a:solidFill>
-            <a:prstDash val="solid"/>
-          </a:ln>
-          <a:effectLst>
-            <a:outerShdw sx="100000" sy="100000" kx="0" ky="0" algn="bl" rotWithShape="0" blurRad="101600" dist="38100" dir="8100000">
-              <a:srgbClr val="000000">
-                <a:alpha val="12000"/>
-              </a:srgbClr>
-            </a:outerShdw>
-          </a:effectLst>
-        </p:spPr>
-      </p:sp>
-      <p:sp>
-        <p:nvSpPr>
-          <p:cNvPr id="28" name="Text 26"/>
-          <p:cNvSpPr/>
-          <p:nvPr/>
-        </p:nvSpPr>
-        <p:spPr>
-          <a:xfrm>
-            <a:off x="365760" y="3310128"/>
-            <a:ext cx="2011680" cy="457200"/>
-          </a:xfrm>
-          <a:prstGeom prst="rect">
-            <a:avLst/>
-          </a:prstGeom>
-          <a:noFill/>
-          <a:ln/>
-        </p:spPr>
-        <p:txBody>
-          <a:bodyPr wrap="square" lIns="0" tIns="0" rIns="0" bIns="0" rtlCol="0" anchor="ctr"/>
-          <a:lstStyle/>
-          <a:p>
-            <a:pPr algn="ctr" indent="0" marL="0">
-              <a:buNone/>
-            </a:pPr>
-            <a:r>
-              <a:rPr lang="en-US" sz="1200" b="1" dirty="0">
-                <a:solidFill>
-                  <a:srgbClr val="4338CA"/>
-                </a:solidFill>
-                <a:latin typeface="Trebuchet MS" pitchFamily="34" charset="0"/>
-                <a:ea typeface="Trebuchet MS" pitchFamily="34" charset="-122"/>
-                <a:cs typeface="Trebuchet MS" pitchFamily="34" charset="-120"/>
-              </a:rPr>
-              <a:t>repairs</a:t>
-            </a:r>
-            <a:endParaRPr lang="en-US" sz="1200" dirty="0"/>
-          </a:p>
-        </p:txBody>
-      </p:sp>
-      <p:sp>
-        <p:nvSpPr>
-          <p:cNvPr id="29" name="Shape 27"/>
-          <p:cNvSpPr/>
-          <p:nvPr/>
-        </p:nvSpPr>
-        <p:spPr>
-          <a:xfrm>
-            <a:off x="2514600" y="3310128"/>
-            <a:ext cx="6263640" cy="457200"/>
-          </a:xfrm>
-          <a:prstGeom prst="rect">
-            <a:avLst>
-              <a:gd name="adj" fmla="val 12000"/>
-            </a:avLst>
-          </a:prstGeom>
-          <a:solidFill>
-            <a:srgbClr val="F8FAFC"/>
-          </a:solidFill>
-          <a:ln w="12700">
-            <a:solidFill>
-              <a:srgbClr val="E2E8F0"/>
-            </a:solidFill>
-            <a:prstDash val="solid"/>
-          </a:ln>
-        </p:spPr>
-      </p:sp>
-      <p:sp>
-        <p:nvSpPr>
-          <p:cNvPr id="30" name="Text 28"/>
-          <p:cNvSpPr/>
-          <p:nvPr/>
-        </p:nvSpPr>
-        <p:spPr>
-          <a:xfrm>
-            <a:off x="2651760" y="3310128"/>
-            <a:ext cx="6035040" cy="457200"/>
-          </a:xfrm>
-          <a:prstGeom prst="rect">
-            <a:avLst/>
-          </a:prstGeom>
-          <a:noFill/>
-          <a:ln/>
-        </p:spPr>
-        <p:txBody>
-          <a:bodyPr wrap="square" rtlCol="0" anchor="ctr"/>
-          <a:lstStyle/>
-          <a:p>
-            <a:pPr algn="l" indent="0" marL="0">
-              <a:buNone/>
-            </a:pPr>
-            <a:r>
-              <a:rPr lang="en-US" sz="1200" dirty="0">
-                <a:solidFill>
-                  <a:srgbClr val="0F172A"/>
-                </a:solidFill>
-                <a:latin typeface="Calibri" pitchFamily="34" charset="0"/>
-                <a:ea typeface="Calibri" pitchFamily="34" charset="-122"/>
-                <a:cs typeface="Calibri" pitchFamily="34" charset="-120"/>
-              </a:rPr>
-              <a:t>To fix something that is broken or damaged.</a:t>
-            </a:r>
-            <a:endParaRPr lang="en-US" sz="1200" dirty="0"/>
-          </a:p>
-        </p:txBody>
-      </p:sp>
-      <p:sp>
-        <p:nvSpPr>
-          <p:cNvPr id="31" name="Shape 29"/>
-          <p:cNvSpPr/>
-          <p:nvPr/>
-        </p:nvSpPr>
-        <p:spPr>
-          <a:xfrm>
-            <a:off x="365760" y="3840480"/>
-            <a:ext cx="2011680" cy="457200"/>
-          </a:xfrm>
-          <a:prstGeom prst="rect">
-            <a:avLst>
-              <a:gd name="adj" fmla="val 12000"/>
-            </a:avLst>
-          </a:prstGeom>
-          <a:solidFill>
-            <a:srgbClr val="EEF2FF"/>
-          </a:solidFill>
-          <a:ln w="12700">
-            <a:solidFill>
-              <a:srgbClr val="6366F1"/>
-            </a:solidFill>
-            <a:prstDash val="solid"/>
-          </a:ln>
-          <a:effectLst>
-            <a:outerShdw sx="100000" sy="100000" kx="0" ky="0" algn="bl" rotWithShape="0" blurRad="101600" dist="38100" dir="8100000">
-              <a:srgbClr val="000000">
-                <a:alpha val="12000"/>
-              </a:srgbClr>
-            </a:outerShdw>
-          </a:effectLst>
-        </p:spPr>
-      </p:sp>
-      <p:sp>
-        <p:nvSpPr>
-          <p:cNvPr id="32" name="Text 30"/>
-          <p:cNvSpPr/>
-          <p:nvPr/>
-        </p:nvSpPr>
-        <p:spPr>
-          <a:xfrm>
-            <a:off x="365760" y="3840480"/>
-            <a:ext cx="2011680" cy="457200"/>
-          </a:xfrm>
-          <a:prstGeom prst="rect">
-            <a:avLst/>
-          </a:prstGeom>
-          <a:noFill/>
-          <a:ln/>
-        </p:spPr>
-        <p:txBody>
-          <a:bodyPr wrap="square" lIns="0" tIns="0" rIns="0" bIns="0" rtlCol="0" anchor="ctr"/>
-          <a:lstStyle/>
-          <a:p>
-            <a:pPr algn="ctr" indent="0" marL="0">
-              <a:buNone/>
-            </a:pPr>
-            <a:r>
-              <a:rPr lang="en-US" sz="1200" b="1" dirty="0">
-                <a:solidFill>
-                  <a:srgbClr val="4338CA"/>
-                </a:solidFill>
-                <a:latin typeface="Trebuchet MS" pitchFamily="34" charset="0"/>
-                <a:ea typeface="Trebuchet MS" pitchFamily="34" charset="-122"/>
-                <a:cs typeface="Trebuchet MS" pitchFamily="34" charset="-120"/>
-              </a:rPr>
-              <a:t>repairable</a:t>
-            </a:r>
-            <a:endParaRPr lang="en-US" sz="1200" dirty="0"/>
-          </a:p>
-        </p:txBody>
-      </p:sp>
-      <p:sp>
-        <p:nvSpPr>
-          <p:cNvPr id="33" name="Shape 31"/>
-          <p:cNvSpPr/>
-          <p:nvPr/>
-        </p:nvSpPr>
-        <p:spPr>
-          <a:xfrm>
-            <a:off x="2514600" y="3840480"/>
-            <a:ext cx="6263640" cy="457200"/>
-          </a:xfrm>
-          <a:prstGeom prst="rect">
-            <a:avLst>
-              <a:gd name="adj" fmla="val 12000"/>
-            </a:avLst>
-          </a:prstGeom>
-          <a:solidFill>
-            <a:srgbClr val="F8FAFC"/>
-          </a:solidFill>
-          <a:ln w="12700">
-            <a:solidFill>
-              <a:srgbClr val="E2E8F0"/>
-            </a:solidFill>
-            <a:prstDash val="solid"/>
-          </a:ln>
-        </p:spPr>
-      </p:sp>
-      <p:sp>
-        <p:nvSpPr>
-          <p:cNvPr id="34" name="Text 32"/>
-          <p:cNvSpPr/>
-          <p:nvPr/>
-        </p:nvSpPr>
-        <p:spPr>
-          <a:xfrm>
-            <a:off x="2651760" y="3840480"/>
-            <a:ext cx="6035040" cy="457200"/>
-          </a:xfrm>
-          <a:prstGeom prst="rect">
-            <a:avLst/>
-          </a:prstGeom>
-          <a:noFill/>
-          <a:ln/>
-        </p:spPr>
-        <p:txBody>
-          <a:bodyPr wrap="square" rtlCol="0" anchor="ctr"/>
-          <a:lstStyle/>
-          <a:p>
-            <a:pPr algn="l" indent="0" marL="0">
-              <a:buNone/>
-            </a:pPr>
-            <a:r>
-              <a:rPr lang="en-US" sz="1200" dirty="0">
-                <a:solidFill>
-                  <a:srgbClr val="0F172A"/>
-                </a:solidFill>
-                <a:latin typeface="Calibri" pitchFamily="34" charset="0"/>
-                <a:ea typeface="Calibri" pitchFamily="34" charset="-122"/>
-                <a:cs typeface="Calibri" pitchFamily="34" charset="-120"/>
-              </a:rPr>
-              <a:t>Something that is able to be fixed.</a:t>
-            </a:r>
-            <a:endParaRPr lang="en-US" sz="1200" dirty="0"/>
-          </a:p>
-        </p:txBody>
-      </p:sp>
-      <p:sp>
-        <p:nvSpPr>
-          <p:cNvPr id="35" name="Shape 33"/>
-          <p:cNvSpPr/>
-          <p:nvPr/>
-        </p:nvSpPr>
-        <p:spPr>
-          <a:xfrm>
-            <a:off x="365760" y="4370832"/>
-            <a:ext cx="2011680" cy="457200"/>
-          </a:xfrm>
-          <a:prstGeom prst="rect">
-            <a:avLst>
-              <a:gd name="adj" fmla="val 12000"/>
-            </a:avLst>
-          </a:prstGeom>
-          <a:solidFill>
-            <a:srgbClr val="EEF2FF"/>
-          </a:solidFill>
-          <a:ln w="12700">
-            <a:solidFill>
-              <a:srgbClr val="6366F1"/>
-            </a:solidFill>
-            <a:prstDash val="solid"/>
-          </a:ln>
-          <a:effectLst>
-            <a:outerShdw sx="100000" sy="100000" kx="0" ky="0" algn="bl" rotWithShape="0" blurRad="101600" dist="38100" dir="8100000">
-              <a:srgbClr val="000000">
-                <a:alpha val="12000"/>
-              </a:srgbClr>
-            </a:outerShdw>
-          </a:effectLst>
-        </p:spPr>
-      </p:sp>
-      <p:sp>
-        <p:nvSpPr>
-          <p:cNvPr id="36" name="Text 34"/>
-          <p:cNvSpPr/>
-          <p:nvPr/>
-        </p:nvSpPr>
-        <p:spPr>
-          <a:xfrm>
-            <a:off x="365760" y="4370832"/>
-            <a:ext cx="2011680" cy="457200"/>
-          </a:xfrm>
-          <a:prstGeom prst="rect">
-            <a:avLst/>
-          </a:prstGeom>
-          <a:noFill/>
-          <a:ln/>
-        </p:spPr>
-        <p:txBody>
-          <a:bodyPr wrap="square" lIns="0" tIns="0" rIns="0" bIns="0" rtlCol="0" anchor="ctr"/>
-          <a:lstStyle/>
-          <a:p>
-            <a:pPr algn="ctr" indent="0" marL="0">
-              <a:buNone/>
-            </a:pPr>
-            <a:r>
-              <a:rPr lang="en-US" sz="1200" b="1" dirty="0">
-                <a:solidFill>
-                  <a:srgbClr val="4338CA"/>
-                </a:solidFill>
-                <a:latin typeface="Trebuchet MS" pitchFamily="34" charset="0"/>
-                <a:ea typeface="Trebuchet MS" pitchFamily="34" charset="-122"/>
-                <a:cs typeface="Trebuchet MS" pitchFamily="34" charset="-120"/>
-              </a:rPr>
-              <a:t>irreparable</a:t>
-            </a:r>
-            <a:endParaRPr lang="en-US" sz="1200" dirty="0"/>
-          </a:p>
-        </p:txBody>
-      </p:sp>
-      <p:sp>
-        <p:nvSpPr>
-          <p:cNvPr id="37" name="Shape 35"/>
-          <p:cNvSpPr/>
-          <p:nvPr/>
-        </p:nvSpPr>
-        <p:spPr>
-          <a:xfrm>
-            <a:off x="2514600" y="4370832"/>
-            <a:ext cx="6263640" cy="457200"/>
-          </a:xfrm>
-          <a:prstGeom prst="rect">
-            <a:avLst>
-              <a:gd name="adj" fmla="val 12000"/>
-            </a:avLst>
-          </a:prstGeom>
-          <a:solidFill>
-            <a:srgbClr val="F8FAFC"/>
-          </a:solidFill>
-          <a:ln w="12700">
-            <a:solidFill>
-              <a:srgbClr val="E2E8F0"/>
-            </a:solidFill>
-            <a:prstDash val="solid"/>
-          </a:ln>
-        </p:spPr>
-      </p:sp>
-      <p:sp>
-        <p:nvSpPr>
-          <p:cNvPr id="38" name="Text 36"/>
-          <p:cNvSpPr/>
-          <p:nvPr/>
-        </p:nvSpPr>
-        <p:spPr>
-          <a:xfrm>
-            <a:off x="2651760" y="4370832"/>
-            <a:ext cx="6035040" cy="457200"/>
-          </a:xfrm>
-          <a:prstGeom prst="rect">
-            <a:avLst/>
-          </a:prstGeom>
-          <a:noFill/>
-          <a:ln/>
-        </p:spPr>
-        <p:txBody>
-          <a:bodyPr wrap="square" rtlCol="0" anchor="ctr"/>
-          <a:lstStyle/>
-          <a:p>
-            <a:pPr algn="l" indent="0" marL="0">
-              <a:buNone/>
-            </a:pPr>
-            <a:r>
-              <a:rPr lang="en-US" sz="1200" dirty="0">
-                <a:solidFill>
-                  <a:srgbClr val="0F172A"/>
-                </a:solidFill>
-                <a:latin typeface="Calibri" pitchFamily="34" charset="0"/>
-                <a:ea typeface="Calibri" pitchFamily="34" charset="-122"/>
-                <a:cs typeface="Calibri" pitchFamily="34" charset="-120"/>
-              </a:rPr>
-              <a:t>Something that has already been fixed.</a:t>
+              <a:t>to fix something that is broken or damaged</a:t>
             </a:r>
             <a:endParaRPr lang="en-US" sz="1200" dirty="0"/>
           </a:p>
@@ -41218,7 +38746,7 @@
                 <a:ea typeface="Calibri" pitchFamily="34" charset="-122"/>
                 <a:cs typeface="Calibri" pitchFamily="34" charset="-120"/>
               </a:rPr>
-              <a:t>Word Labs  •  wordlabs.app  •  Root: 'repair' = fix or restore something broken</a:t>
+              <a:t>Word Labs  •  wordlabs.app  •  Root: 'repair' = fix</a:t>
             </a:r>
             <a:endParaRPr lang="en-US" sz="800" dirty="0"/>
           </a:p>
@@ -41421,7 +38949,7 @@
                 <a:ea typeface="Calibri" pitchFamily="34" charset="-122"/>
                 <a:cs typeface="Calibri" pitchFamily="34" charset="-120"/>
               </a:rPr>
-              <a:t>The mechanic was repairing the old bicycle so the children could ride it again.</a:t>
+              <a:t>The mechanic will repair the car's broken engine.</a:t>
             </a:r>
             <a:endParaRPr lang="en-US" sz="1500" dirty="0"/>
           </a:p>
@@ -41585,7 +39113,7 @@
                 <a:ea typeface="Calibri" pitchFamily="34" charset="-122"/>
                 <a:cs typeface="Calibri" pitchFamily="34" charset="-120"/>
               </a:rPr>
-              <a:t>After the storm, the council organised repairs to the damaged park fence.</a:t>
+              <a:t>The roof repairs cost more money than expected.</a:t>
             </a:r>
             <a:endParaRPr lang="en-US" sz="1500" dirty="0"/>
           </a:p>
@@ -41749,7 +39277,7 @@
                 <a:ea typeface="Calibri" pitchFamily="34" charset="-122"/>
                 <a:cs typeface="Calibri" pitchFamily="34" charset="-120"/>
               </a:rPr>
-              <a:t>Luckily, the crack in the vase was repairable if we used the right glue.</a:t>
+              <a:t>The plumber repaired the leaking pipe under the sink.</a:t>
             </a:r>
             <a:endParaRPr lang="en-US" sz="1500" dirty="0"/>
           </a:p>
